--- a/docs/SCNU-Lens-발표.pptx
+++ b/docs/SCNU-Lens-발표.pptx
@@ -12,8 +12,6 @@
     <p:sldId id="260" r:id="rId12"/>
     <p:sldId id="261" r:id="rId13"/>
     <p:sldId id="262" r:id="rId14"/>
-    <p:sldId id="263" r:id="rId15"/>
-    <p:sldId id="264" r:id="rId16"/>
   </p:sldIdLst>
   <p:sldSz cx="12191695" cy="6858000" type="screen4x3"/>
   <p:notesSz cx="6858000" cy="9144000"/>
@@ -510,7 +508,7 @@
           <a:lstStyle/>
           <a:p>
             <a:r>
-              <a:t>안녕하세요, 순천대 AI 통합 알리미 SCNU Lens를 만든 이휴단입니다. 학교 공지를 하나로 모아서, 나에게 해당되는 것만 마감 전에 알려주는 모바일 웹앱입니다.</a:t>
+              <a:t>안녕하세요, SCNU Lens를 만든 이휴단입니다. 학교 곳곳에 흩어진 공지를 한곳에 모아서, 나에게 맞는 것만 마감 전에 알려 주는 앱입니다.</a:t>
             </a:r>
           </a:p>
         </p:txBody>
@@ -580,7 +578,7 @@
           <a:lstStyle/>
           <a:p>
             <a:r>
-              <a:t>순천대 공지는 학사, 장학, 그리고 학과 게시판까지 100곳 넘게 흩어져 있습니다. 같은 공지가 여러 번 올라오고, 정작 마감일과 신청 방법은 첨부파일 속에 있죠. 그래서 나에게 해당되는지, 언제까지인지 모르고 기회를 놓칩니다.</a:t>
+              <a:t>순천대 공지는 학사, 장학, 학과, 기관 게시판까지 109곳에 흩어져 있고, 공모전과 자격증 일정은 또 다른 사이트에 있습니다. 게다가 나에게 해당되는지, 언제까지인지는 긴 본문과 첨부파일 속에 있어서, 결국 마감이 지나서야 알게 됩니다.</a:t>
             </a:r>
           </a:p>
         </p:txBody>
@@ -650,7 +648,7 @@
           <a:lstStyle/>
           <a:p>
             <a:r>
-              <a:t>SCNU Lens는 네 단계로 동작합니다. 학교 게시판 109곳과 공공데이터 API를 매시간 모으고, 서버 안의 AI 모델로 분류하고 정리 카드를 만듭니다. 그리고 학과와 관심사로 골라 이유와 함께 보여주고, 마감 전에 알려줍니다.</a:t>
+              <a:t>처음 들어오면 학과와 관심사를 30초 만에 고릅니다. 학과는 '컴공'처럼 줄여 써도 찾아 줍니다. 그러면 나에게 맞는 공지를 이유와 함께 보여 주고, 누르면 대상·기간·신청방법이 한 장으로 정리돼 있습니다. 마감 7일, 3일, 1일 전에는 휴대폰으로 알려 줍니다.</a:t>
             </a:r>
           </a:p>
         </p:txBody>
@@ -720,7 +718,7 @@
           <a:lstStyle/>
           <a:p>
             <a:r>
-              <a:t>처음 접속하면 30초 설정이 뜹니다. 학과는 70개 목록에서만 고르게 해서 오타로 매칭이 깨지지 않게 했고, 학생들이 쓰는 '컴공' 같은 줄임말이나 초성으로도 찾을 수 있습니다.</a:t>
+              <a:t>AI가 공지 본문과 첨부파일을 읽고, 어떤 분야인지, 누가 대상인지, 언제 마감인지를 뽑아서 한 장의 카드로 정리합니다. 여러 게시판에 같은 공지가 올라오면 하나로 합칩니다. 유료 AI 서비스 없이 공개된 AI 모델을 서버 안에서 돌리기 때문에 비용은 0원입니다.</a:t>
             </a:r>
           </a:p>
         </p:txBody>
@@ -790,7 +788,7 @@
           <a:lstStyle/>
           <a:p>
             <a:r>
-              <a:t>나에게 탭입니다. 공지마다 왜 추천했는지 파란 문장으로 보여줍니다. 내 학과 게시판 공지가 가장 먼저 오고, 이미 끝난 결과 발표나 본문에 한 번 스친 단어로는 추천하지 않도록 다듬었습니다.</a:t>
+              <a:t>지금 이 순간에도 학교 게시판 109곳과 공공 API 3종을 매시간 확인하고 있습니다. 컴퓨터에서도 휴대폰에서도 같은 주소로 열리고, 설치 없이 홈 화면에 추가하면 앱처럼 쓸 수 있습니다.</a:t>
             </a:r>
           </a:p>
         </p:txBody>
@@ -860,7 +858,7 @@
           <a:lstStyle/>
           <a:p>
             <a:r>
-              <a:t>공지를 누르면 대상, 기간, 신청방법, 문의가 정리된 카드가 열리고, 언제 알림이 갈지도 미리 보여줍니다. 캘린더에서는 이번 달 마감일과 시험일을 한눈에 볼 수 있습니다.</a:t>
+              <a:t>지금은 누구나 쓸 수 있는 웹앱으로 운영 중입니다. 다음으로는 학생들의 의견을 받아, 예를 들어 지역 한정 공고를 표시하고 추천이 빗나간 공지를 모아 규칙을 고치려고 합니다. 학교 사이트를 바꿀 필요 없이 이미 있는 게시판을 읽기 때문에, 같은 게시판 시스템을 쓰는 곳이라면 쉽게 넓힐 수 있습니다.</a:t>
             </a:r>
           </a:p>
         </p:txBody>
@@ -930,147 +928,7 @@
           <a:lstStyle/>
           <a:p>
             <a:r>
-              <a:t>차별점은 네 가지입니다. 학과 게시판 109곳을 자동으로 찾아 모으고, 유료 AI 없이 서버에서 직접 모델을 돌려 비용이 0원입니다. 추천 이유를 설명하고, 실제로 써 보면서 신청기간과 운영기간을 구분하는 등 규칙을 다듬었습니다.</a:t>
-            </a:r>
-          </a:p>
-        </p:txBody>
-      </p:sp>
-      <p:sp>
-        <p:nvSpPr>
-          <p:cNvPr id="4" name="Slide Number Placeholder 3"/>
-          <p:cNvSpPr>
-            <a:spLocks noGrp="1"/>
-          </p:cNvSpPr>
-          <p:nvPr>
-            <p:ph type="sldNum" idx="5" sz="quarter"/>
-          </p:nvPr>
-        </p:nvSpPr>
-        <p:spPr/>
-      </p:sp>
-    </p:spTree>
-  </p:cSld>
-  <p:clrMapOvr>
-    <a:masterClrMapping/>
-  </p:clrMapOvr>
-</p:notes>
-</file>
-
-<file path=ppt/notesSlides/notesSlide8.xml><?xml version="1.0" encoding="utf-8"?>
-<p:notes xmlns:a="http://schemas.openxmlformats.org/drawingml/2006/main" xmlns:p="http://schemas.openxmlformats.org/presentationml/2006/main" xmlns:r="http://schemas.openxmlformats.org/officeDocument/2006/relationships">
-  <p:cSld>
-    <p:spTree>
-      <p:nvGrpSpPr>
-        <p:cNvPr id="1" name=""/>
-        <p:cNvGrpSpPr/>
-        <p:nvPr/>
-      </p:nvGrpSpPr>
-      <p:grpSpPr>
-        <a:xfrm>
-          <a:off x="0" y="0"/>
-          <a:ext cx="0" cy="0"/>
-          <a:chOff x="0" y="0"/>
-          <a:chExt cx="0" cy="0"/>
-        </a:xfrm>
-      </p:grpSpPr>
-      <p:sp>
-        <p:nvSpPr>
-          <p:cNvPr id="2" name="Slide Image Placeholder 1"/>
-          <p:cNvSpPr>
-            <a:spLocks noGrp="1"/>
-          </p:cNvSpPr>
-          <p:nvPr>
-            <p:ph type="sldImg" idx="2"/>
-          </p:nvPr>
-        </p:nvSpPr>
-        <p:spPr/>
-      </p:sp>
-      <p:sp>
-        <p:nvSpPr>
-          <p:cNvPr id="3" name="Notes Placeholder 2"/>
-          <p:cNvSpPr>
-            <a:spLocks noGrp="1"/>
-          </p:cNvSpPr>
-          <p:nvPr>
-            <p:ph type="body" idx="3" sz="quarter"/>
-          </p:nvPr>
-        </p:nvSpPr>
-        <p:spPr/>
-        <p:txBody>
-          <a:bodyPr/>
-          <a:lstStyle/>
-          <a:p>
-            <a:r>
-              <a:t>기술적으로는 오픈소스 MiniLM 모델과 FastAPI, Next.js로 만들었고, 화면은 Vercel, 수집과 알림은 Oracle Cloud에서 24시간 돌아가고 있습니다. 자동 테스트 126개가 통과한 상태입니다.</a:t>
-            </a:r>
-          </a:p>
-        </p:txBody>
-      </p:sp>
-      <p:sp>
-        <p:nvSpPr>
-          <p:cNvPr id="4" name="Slide Number Placeholder 3"/>
-          <p:cNvSpPr>
-            <a:spLocks noGrp="1"/>
-          </p:cNvSpPr>
-          <p:nvPr>
-            <p:ph type="sldNum" idx="5" sz="quarter"/>
-          </p:nvPr>
-        </p:nvSpPr>
-        <p:spPr/>
-      </p:sp>
-    </p:spTree>
-  </p:cSld>
-  <p:clrMapOvr>
-    <a:masterClrMapping/>
-  </p:clrMapOvr>
-</p:notes>
-</file>
-
-<file path=ppt/notesSlides/notesSlide9.xml><?xml version="1.0" encoding="utf-8"?>
-<p:notes xmlns:a="http://schemas.openxmlformats.org/drawingml/2006/main" xmlns:p="http://schemas.openxmlformats.org/presentationml/2006/main" xmlns:r="http://schemas.openxmlformats.org/officeDocument/2006/relationships">
-  <p:cSld>
-    <p:spTree>
-      <p:nvGrpSpPr>
-        <p:cNvPr id="1" name=""/>
-        <p:cNvGrpSpPr/>
-        <p:nvPr/>
-      </p:nvGrpSpPr>
-      <p:grpSpPr>
-        <a:xfrm>
-          <a:off x="0" y="0"/>
-          <a:ext cx="0" cy="0"/>
-          <a:chOff x="0" y="0"/>
-          <a:chExt cx="0" cy="0"/>
-        </a:xfrm>
-      </p:grpSpPr>
-      <p:sp>
-        <p:nvSpPr>
-          <p:cNvPr id="2" name="Slide Image Placeholder 1"/>
-          <p:cNvSpPr>
-            <a:spLocks noGrp="1"/>
-          </p:cNvSpPr>
-          <p:nvPr>
-            <p:ph type="sldImg" idx="2"/>
-          </p:nvPr>
-        </p:nvSpPr>
-        <p:spPr/>
-      </p:sp>
-      <p:sp>
-        <p:nvSpPr>
-          <p:cNvPr id="3" name="Notes Placeholder 2"/>
-          <p:cNvSpPr>
-            <a:spLocks noGrp="1"/>
-          </p:cNvSpPr>
-          <p:nvPr>
-            <p:ph type="body" idx="3" sz="quarter"/>
-          </p:nvPr>
-        </p:nvSpPr>
-        <p:spPr/>
-        <p:txBody>
-          <a:bodyPr/>
-          <a:lstStyle/>
-          <a:p>
-            <a:r>
-              <a:t>화면의 QR 코드나 scnuaram.vercel.app 으로 지금 바로 써 보실 수 있습니다. 감사합니다.</a:t>
+              <a:t>화면의 QR을 찍으시면 바로 써 보실 수 있습니다. 지금 시연해 보겠습니다. (초록 버튼을 누르면 사이트가 열립니다) 감사합니다.</a:t>
             </a:r>
           </a:p>
         </p:txBody>
@@ -4084,9 +3942,46 @@
         <p:nvPr/>
       </p:nvGrpSpPr>
       <p:grpSpPr/>
+      <p:sp>
+        <p:nvSpPr>
+          <p:cNvPr id="2" name="TextBox 1"/>
+          <p:cNvSpPr txBox="1"/>
+          <p:nvPr/>
+        </p:nvSpPr>
+        <p:spPr>
+          <a:xfrm>
+            <a:off x="731520" y="1417320"/>
+            <a:ext cx="6858000" cy="365760"/>
+          </a:xfrm>
+          <a:prstGeom prst="rect">
+            <a:avLst/>
+          </a:prstGeom>
+          <a:noFill/>
+        </p:spPr>
+        <p:txBody>
+          <a:bodyPr wrap="square" lIns="0" rIns="0" tIns="0" bIns="0" anchor="t">
+            <a:spAutoFit/>
+          </a:bodyPr>
+          <a:lstStyle/>
+          <a:p>
+            <a:pPr algn="l"/>
+            <a:r>
+              <a:rPr sz="1400" b="1">
+                <a:solidFill>
+                  <a:srgbClr val="A9CBF2"/>
+                </a:solidFill>
+                <a:latin typeface="Malgun Gothic"/>
+                <a:ea typeface="Malgun Gothic"/>
+                <a:cs typeface="Malgun Gothic"/>
+              </a:rPr>
+              <a:t>2026 SCNU OSS·AI 해커톤 · 기초 트랙</a:t>
+            </a:r>
+          </a:p>
+        </p:txBody>
+      </p:sp>
       <p:pic>
         <p:nvPicPr>
-          <p:cNvPr id="2" name="Picture 1" descr="icon-512.png"/>
+          <p:cNvPr id="3" name="Picture 2" descr="icon-512.png"/>
           <p:cNvPicPr>
             <a:picLocks noChangeAspect="1"/>
           </p:cNvPicPr>
@@ -4100,8 +3995,8 @@
         </p:blipFill>
         <p:spPr>
           <a:xfrm>
-            <a:off x="685800" y="1234440"/>
-            <a:ext cx="1051560" cy="1051560"/>
+            <a:off x="731520" y="2011680"/>
+            <a:ext cx="868680" cy="868680"/>
           </a:xfrm>
           <a:prstGeom prst="rect">
             <a:avLst/>
@@ -4110,14 +4005,14 @@
       </p:pic>
       <p:sp>
         <p:nvSpPr>
-          <p:cNvPr id="3" name="TextBox 2"/>
+          <p:cNvPr id="4" name="TextBox 3"/>
           <p:cNvSpPr txBox="1"/>
           <p:nvPr/>
         </p:nvSpPr>
         <p:spPr>
           <a:xfrm>
-            <a:off x="685800" y="2514600"/>
-            <a:ext cx="6583680" cy="914400"/>
+            <a:off x="1783080" y="1993392"/>
+            <a:ext cx="5943600" cy="914400"/>
           </a:xfrm>
           <a:prstGeom prst="rect">
             <a:avLst/>
@@ -4125,14 +4020,14 @@
           <a:noFill/>
         </p:spPr>
         <p:txBody>
-          <a:bodyPr wrap="square" lIns="0" rIns="0" tIns="0" bIns="0" anchor="t">
+          <a:bodyPr wrap="square" lIns="0" rIns="0" tIns="0" bIns="0" anchor="ctr">
             <a:spAutoFit/>
           </a:bodyPr>
           <a:lstStyle/>
           <a:p>
             <a:pPr algn="l"/>
             <a:r>
-              <a:rPr sz="6000" b="1">
+              <a:rPr sz="5400" b="1">
                 <a:solidFill>
                   <a:srgbClr val="FFFFFF"/>
                 </a:solidFill>
@@ -4147,14 +4042,14 @@
       </p:sp>
       <p:sp>
         <p:nvSpPr>
-          <p:cNvPr id="4" name="TextBox 3"/>
+          <p:cNvPr id="5" name="TextBox 4"/>
           <p:cNvSpPr txBox="1"/>
           <p:nvPr/>
         </p:nvSpPr>
         <p:spPr>
           <a:xfrm>
-            <a:off x="713232" y="3474720"/>
-            <a:ext cx="6583680" cy="548640"/>
+            <a:off x="749808" y="3246120"/>
+            <a:ext cx="6675120" cy="1188720"/>
           </a:xfrm>
           <a:prstGeom prst="rect">
             <a:avLst/>
@@ -4167,50 +4062,31 @@
           </a:bodyPr>
           <a:lstStyle/>
           <a:p>
-            <a:pPr algn="l"/>
-            <a:r>
-              <a:rPr sz="2600" b="1">
-                <a:solidFill>
-                  <a:srgbClr val="CFE4FB"/>
+            <a:pPr algn="l">
+              <a:spcAft>
+                <a:spcPts val="600"/>
+              </a:spcAft>
+            </a:pPr>
+            <a:r>
+              <a:rPr sz="2200" b="0">
+                <a:solidFill>
+                  <a:srgbClr val="FFFFFF"/>
                 </a:solidFill>
                 <a:latin typeface="Malgun Gothic"/>
                 <a:ea typeface="Malgun Gothic"/>
                 <a:cs typeface="Malgun Gothic"/>
               </a:rPr>
-              <a:t>순천대 AI 통합 알리미</a:t>
-            </a:r>
-          </a:p>
-        </p:txBody>
-      </p:sp>
-      <p:sp>
-        <p:nvSpPr>
-          <p:cNvPr id="5" name="TextBox 4"/>
-          <p:cNvSpPr txBox="1"/>
-          <p:nvPr/>
-        </p:nvSpPr>
-        <p:spPr>
-          <a:xfrm>
-            <a:off x="713232" y="4206240"/>
-            <a:ext cx="6400800" cy="1005840"/>
-          </a:xfrm>
-          <a:prstGeom prst="rect">
-            <a:avLst/>
-          </a:prstGeom>
-          <a:noFill/>
-        </p:spPr>
-        <p:txBody>
-          <a:bodyPr wrap="square" lIns="0" rIns="0" tIns="0" bIns="0" anchor="t">
-            <a:spAutoFit/>
-          </a:bodyPr>
-          <a:lstStyle/>
+              <a:t>흩어진 학교 공지를 한곳에 모아</a:t>
+            </a:r>
+          </a:p>
           <a:p>
             <a:pPr algn="l">
               <a:spcAft>
-                <a:spcPts val="400"/>
+                <a:spcPts val="600"/>
               </a:spcAft>
             </a:pPr>
             <a:r>
-              <a:rPr sz="1700" b="0">
+              <a:rPr sz="2200" b="0">
                 <a:solidFill>
                   <a:srgbClr val="FFFFFF"/>
                 </a:solidFill>
@@ -4218,73 +4094,44 @@
                 <a:ea typeface="Malgun Gothic"/>
                 <a:cs typeface="Malgun Gothic"/>
               </a:rPr>
-              <a:t>흩어진 학교 공지 100여 곳과 공모전·자격증 일정을 모아</a:t>
-            </a:r>
-          </a:p>
-          <a:p>
-            <a:pPr algn="l">
-              <a:spcAft>
-                <a:spcPts val="400"/>
-              </a:spcAft>
-            </a:pPr>
-            <a:r>
-              <a:rPr sz="1700" b="0">
-                <a:solidFill>
-                  <a:srgbClr val="FFFFFF"/>
+              <a:t>나에게 맞는 것만, 마감 전에 알려 주는 앱</a:t>
+            </a:r>
+          </a:p>
+        </p:txBody>
+      </p:sp>
+      <p:sp>
+        <p:nvSpPr>
+          <p:cNvPr id="6" name="TextBox 5"/>
+          <p:cNvSpPr txBox="1"/>
+          <p:nvPr/>
+        </p:nvSpPr>
+        <p:spPr>
+          <a:xfrm>
+            <a:off x="749808" y="5669280"/>
+            <a:ext cx="6675120" cy="365760"/>
+          </a:xfrm>
+          <a:prstGeom prst="rect">
+            <a:avLst/>
+          </a:prstGeom>
+          <a:noFill/>
+        </p:spPr>
+        <p:txBody>
+          <a:bodyPr wrap="square" lIns="0" rIns="0" tIns="0" bIns="0" anchor="t">
+            <a:spAutoFit/>
+          </a:bodyPr>
+          <a:lstStyle/>
+          <a:p>
+            <a:pPr algn="l"/>
+            <a:r>
+              <a:rPr sz="1300" b="0">
+                <a:solidFill>
+                  <a:srgbClr val="A9CBF2"/>
                 </a:solidFill>
                 <a:latin typeface="Malgun Gothic"/>
                 <a:ea typeface="Malgun Gothic"/>
                 <a:cs typeface="Malgun Gothic"/>
               </a:rPr>
-              <a:t>나에게 해당되는 것만, 마감 전에 알려드려요</a:t>
-            </a:r>
-          </a:p>
-        </p:txBody>
-      </p:sp>
-      <p:sp>
-        <p:nvSpPr>
-          <p:cNvPr id="6" name="TextBox 5"/>
-          <p:cNvSpPr txBox="1"/>
-          <p:nvPr/>
-        </p:nvSpPr>
-        <p:spPr>
-          <a:xfrm>
-            <a:off x="713232" y="5806440"/>
-            <a:ext cx="6400800" cy="365760"/>
-          </a:xfrm>
-          <a:prstGeom prst="rect">
-            <a:avLst/>
-          </a:prstGeom>
-          <a:noFill/>
-        </p:spPr>
-        <p:txBody>
-          <a:bodyPr wrap="square" lIns="0" rIns="0" tIns="0" bIns="0" anchor="t">
-            <a:spAutoFit/>
-          </a:bodyPr>
-          <a:lstStyle/>
-          <a:p>
-            <a:pPr algn="l"/>
-            <a:r>
-              <a:rPr sz="1300" b="1">
-                <a:solidFill>
-                  <a:srgbClr val="FFFFFF"/>
-                </a:solidFill>
-                <a:latin typeface="Malgun Gothic"/>
-                <a:ea typeface="Malgun Gothic"/>
-                <a:cs typeface="Malgun Gothic"/>
-              </a:rPr>
-              <a:t>scnuaram.vercel.app</a:t>
-            </a:r>
-            <a:r>
-              <a:rPr sz="1300" b="0">
-                <a:solidFill>
-                  <a:srgbClr val="CFE4FB"/>
-                </a:solidFill>
-                <a:latin typeface="Malgun Gothic"/>
-                <a:ea typeface="Malgun Gothic"/>
-                <a:cs typeface="Malgun Gothic"/>
-              </a:rPr>
-              <a:t>   ·   2026 SCNU OSS·AI 해커톤 · 기초 트랙 · 이휴단</a:t>
+              <a:t>이휴단  ·  scnuaram.vercel.app</a:t>
             </a:r>
           </a:p>
         </p:txBody>
@@ -4297,12 +4144,12 @@
         </p:nvSpPr>
         <p:spPr>
           <a:xfrm>
-            <a:off x="8467344" y="557784"/>
-            <a:ext cx="2742029" cy="5742431"/>
+            <a:off x="8522208" y="612648"/>
+            <a:ext cx="2681488" cy="5632704"/>
           </a:xfrm>
           <a:prstGeom prst="roundRect">
             <a:avLst>
-              <a:gd name="adj" fmla="val 9000"/>
+              <a:gd name="adj" fmla="val 8000"/>
             </a:avLst>
           </a:prstGeom>
           <a:solidFill>
@@ -4350,8 +4197,8 @@
         </p:blipFill>
         <p:spPr>
           <a:xfrm>
-            <a:off x="8549640" y="640080"/>
-            <a:ext cx="2577437" cy="5577840"/>
+            <a:off x="8595360" y="685800"/>
+            <a:ext cx="2535184" cy="5486400"/>
           </a:xfrm>
           <a:prstGeom prst="rect">
             <a:avLst/>
@@ -4372,7 +4219,7 @@
     <p:bg>
       <p:bgPr>
         <a:solidFill>
-          <a:srgbClr val="FFFFFF"/>
+          <a:srgbClr val="F6F8FB"/>
         </a:solidFill>
         <a:effectLst/>
       </p:bgPr>
@@ -4392,8 +4239,8 @@
         </p:nvSpPr>
         <p:spPr>
           <a:xfrm>
-            <a:off x="548640" y="411480"/>
-            <a:ext cx="11064240" cy="640080"/>
+            <a:off x="594360" y="457200"/>
+            <a:ext cx="10972800" cy="731520"/>
           </a:xfrm>
           <a:prstGeom prst="rect">
             <a:avLst/>
@@ -4408,53 +4255,64 @@
           <a:p>
             <a:pPr algn="l"/>
             <a:r>
-              <a:rPr sz="3200" b="1">
-                <a:solidFill>
-                  <a:srgbClr val="1F1D1A"/>
+              <a:rPr sz="3000" b="1">
+                <a:solidFill>
+                  <a:srgbClr val="1F232B"/>
                 </a:solidFill>
                 <a:latin typeface="Malgun Gothic"/>
                 <a:ea typeface="Malgun Gothic"/>
                 <a:cs typeface="Malgun Gothic"/>
               </a:rPr>
-              <a:t>공지는 많은데, 내 것은 안 보입니다</a:t>
-            </a:r>
-          </a:p>
-        </p:txBody>
-      </p:sp>
-      <p:sp>
-        <p:nvSpPr>
-          <p:cNvPr id="3" name="TextBox 2"/>
-          <p:cNvSpPr txBox="1"/>
-          <p:nvPr/>
-        </p:nvSpPr>
-        <p:spPr>
-          <a:xfrm>
-            <a:off x="548640" y="1024128"/>
-            <a:ext cx="11064240" cy="411480"/>
-          </a:xfrm>
-          <a:prstGeom prst="rect">
-            <a:avLst/>
-          </a:prstGeom>
-          <a:noFill/>
-        </p:spPr>
-        <p:txBody>
-          <a:bodyPr wrap="square" lIns="0" rIns="0" tIns="0" bIns="0" anchor="t">
-            <a:spAutoFit/>
-          </a:bodyPr>
-          <a:lstStyle/>
-          <a:p>
-            <a:pPr algn="l"/>
-            <a:r>
-              <a:rPr sz="1600" b="0">
-                <a:solidFill>
-                  <a:srgbClr val="6B6862"/>
-                </a:solidFill>
-                <a:latin typeface="Malgun Gothic"/>
-                <a:ea typeface="Malgun Gothic"/>
-                <a:cs typeface="Malgun Gothic"/>
-              </a:rPr>
-              <a:t>순천대 학생이 공지를 확인하는 지금의 방법</a:t>
-            </a:r>
+              <a:t>학교 공지는 한곳에 모여 있지 않습니다</a:t>
+            </a:r>
+          </a:p>
+        </p:txBody>
+      </p:sp>
+      <p:sp>
+        <p:nvSpPr>
+          <p:cNvPr id="3" name="Rounded Rectangle 2"/>
+          <p:cNvSpPr/>
+          <p:nvPr/>
+        </p:nvSpPr>
+        <p:spPr>
+          <a:xfrm>
+            <a:off x="594360" y="1463040"/>
+            <a:ext cx="5120640" cy="4206240"/>
+          </a:xfrm>
+          <a:prstGeom prst="roundRect">
+            <a:avLst>
+              <a:gd name="adj" fmla="val 5000"/>
+            </a:avLst>
+          </a:prstGeom>
+          <a:solidFill>
+            <a:srgbClr val="FFFFFF"/>
+          </a:solidFill>
+          <a:ln w="12700">
+            <a:solidFill>
+              <a:srgbClr val="DDE3EA"/>
+            </a:solidFill>
+          </a:ln>
+          <a:effectLst/>
+        </p:spPr>
+        <p:style>
+          <a:lnRef idx="1">
+            <a:schemeClr val="accent1"/>
+          </a:lnRef>
+          <a:fillRef idx="3">
+            <a:schemeClr val="accent1"/>
+          </a:fillRef>
+          <a:effectRef idx="2">
+            <a:schemeClr val="accent1"/>
+          </a:effectRef>
+          <a:fontRef idx="minor">
+            <a:schemeClr val="lt1"/>
+          </a:fontRef>
+        </p:style>
+        <p:txBody>
+          <a:bodyPr rtlCol="0" anchor="ctr"/>
+          <a:lstStyle/>
+          <a:p>
+            <a:pPr algn="ctr"/>
           </a:p>
         </p:txBody>
       </p:sp>
@@ -4466,12 +4324,12 @@
         </p:nvSpPr>
         <p:spPr>
           <a:xfrm>
-            <a:off x="548640" y="1828800"/>
-            <a:ext cx="3474720" cy="3566160"/>
+            <a:off x="868680" y="1783080"/>
+            <a:ext cx="987552" cy="384048"/>
           </a:xfrm>
           <a:prstGeom prst="roundRect">
             <a:avLst>
-              <a:gd name="adj" fmla="val 6000"/>
+              <a:gd name="adj" fmla="val 50000"/>
             </a:avLst>
           </a:prstGeom>
           <a:solidFill>
@@ -4512,8 +4370,8 @@
         </p:nvSpPr>
         <p:spPr>
           <a:xfrm>
-            <a:off x="868680" y="2148840"/>
-            <a:ext cx="2926080" cy="914400"/>
+            <a:off x="868680" y="1783080"/>
+            <a:ext cx="987552" cy="384048"/>
           </a:xfrm>
           <a:prstGeom prst="rect">
             <a:avLst/>
@@ -4521,14 +4379,14 @@
           <a:noFill/>
         </p:spPr>
         <p:txBody>
-          <a:bodyPr wrap="square" lIns="0" rIns="0" tIns="0" bIns="0" anchor="t">
+          <a:bodyPr wrap="square" lIns="0" rIns="0" tIns="0" bIns="0" anchor="ctr">
             <a:spAutoFit/>
           </a:bodyPr>
           <a:lstStyle/>
           <a:p>
-            <a:pPr algn="l"/>
-            <a:r>
-              <a:rPr sz="4400" b="1">
+            <a:pPr algn="ctr"/>
+            <a:r>
+              <a:rPr sz="1200" b="1">
                 <a:solidFill>
                   <a:srgbClr val="0058B2"/>
                 </a:solidFill>
@@ -4536,99 +4394,25 @@
                 <a:ea typeface="Malgun Gothic"/>
                 <a:cs typeface="Malgun Gothic"/>
               </a:rPr>
-              <a:t>100+</a:t>
-            </a:r>
-          </a:p>
-        </p:txBody>
-      </p:sp>
-      <p:sp>
-        <p:nvSpPr>
-          <p:cNvPr id="6" name="TextBox 5"/>
-          <p:cNvSpPr txBox="1"/>
-          <p:nvPr/>
-        </p:nvSpPr>
-        <p:spPr>
-          <a:xfrm>
-            <a:off x="868680" y="3246120"/>
-            <a:ext cx="2926080" cy="457200"/>
-          </a:xfrm>
-          <a:prstGeom prst="rect">
-            <a:avLst/>
-          </a:prstGeom>
-          <a:noFill/>
-        </p:spPr>
-        <p:txBody>
-          <a:bodyPr wrap="square" lIns="0" rIns="0" tIns="0" bIns="0" anchor="t">
-            <a:spAutoFit/>
-          </a:bodyPr>
-          <a:lstStyle/>
-          <a:p>
-            <a:pPr algn="l"/>
-            <a:r>
-              <a:rPr sz="2000" b="1">
-                <a:solidFill>
-                  <a:srgbClr val="1F1D1A"/>
-                </a:solidFill>
-                <a:latin typeface="Malgun Gothic"/>
-                <a:ea typeface="Malgun Gothic"/>
-                <a:cs typeface="Malgun Gothic"/>
-              </a:rPr>
-              <a:t>게시판이 흩어져 있다</a:t>
-            </a:r>
-          </a:p>
-        </p:txBody>
-      </p:sp>
-      <p:sp>
-        <p:nvSpPr>
-          <p:cNvPr id="7" name="TextBox 6"/>
-          <p:cNvSpPr txBox="1"/>
-          <p:nvPr/>
-        </p:nvSpPr>
-        <p:spPr>
-          <a:xfrm>
-            <a:off x="868680" y="3840480"/>
-            <a:ext cx="2880360" cy="2011680"/>
-          </a:xfrm>
-          <a:prstGeom prst="rect">
-            <a:avLst/>
-          </a:prstGeom>
-          <a:noFill/>
-        </p:spPr>
-        <p:txBody>
-          <a:bodyPr wrap="square" lIns="0" rIns="0" tIns="0" bIns="0" anchor="t">
-            <a:spAutoFit/>
-          </a:bodyPr>
-          <a:lstStyle/>
-          <a:p>
-            <a:pPr algn="l"/>
-            <a:r>
-              <a:rPr sz="1400" b="0">
-                <a:solidFill>
-                  <a:srgbClr val="6B6862"/>
-                </a:solidFill>
-                <a:latin typeface="Malgun Gothic"/>
-                <a:ea typeface="Malgun Gothic"/>
-                <a:cs typeface="Malgun Gothic"/>
-              </a:rPr>
-              <a:t>학사·장학 본부 게시판, 학과·부속기관 게시판 100곳 넘게, 공모전·자격증은 또 다른 사이트</a:t>
-            </a:r>
-          </a:p>
-        </p:txBody>
-      </p:sp>
-      <p:sp>
-        <p:nvSpPr>
-          <p:cNvPr id="8" name="Rounded Rectangle 7"/>
+              <a:t>학사공지</a:t>
+            </a:r>
+          </a:p>
+        </p:txBody>
+      </p:sp>
+      <p:sp>
+        <p:nvSpPr>
+          <p:cNvPr id="6" name="Rounded Rectangle 5"/>
           <p:cNvSpPr/>
           <p:nvPr/>
         </p:nvSpPr>
         <p:spPr>
           <a:xfrm>
-            <a:off x="4297679" y="1828800"/>
-            <a:ext cx="3474720" cy="3566160"/>
+            <a:off x="2788920" y="1874519"/>
+            <a:ext cx="987552" cy="384048"/>
           </a:xfrm>
           <a:prstGeom prst="roundRect">
             <a:avLst>
-              <a:gd name="adj" fmla="val 6000"/>
+              <a:gd name="adj" fmla="val 50000"/>
             </a:avLst>
           </a:prstGeom>
           <a:solidFill>
@@ -4663,14 +4447,14 @@
       </p:sp>
       <p:sp>
         <p:nvSpPr>
-          <p:cNvPr id="9" name="TextBox 8"/>
+          <p:cNvPr id="7" name="TextBox 6"/>
           <p:cNvSpPr txBox="1"/>
           <p:nvPr/>
         </p:nvSpPr>
         <p:spPr>
           <a:xfrm>
-            <a:off x="4617719" y="2148840"/>
-            <a:ext cx="2926080" cy="914400"/>
+            <a:off x="2788920" y="1874519"/>
+            <a:ext cx="987552" cy="384048"/>
           </a:xfrm>
           <a:prstGeom prst="rect">
             <a:avLst/>
@@ -4678,14 +4462,14 @@
           <a:noFill/>
         </p:spPr>
         <p:txBody>
-          <a:bodyPr wrap="square" lIns="0" rIns="0" tIns="0" bIns="0" anchor="t">
+          <a:bodyPr wrap="square" lIns="0" rIns="0" tIns="0" bIns="0" anchor="ctr">
             <a:spAutoFit/>
           </a:bodyPr>
           <a:lstStyle/>
           <a:p>
-            <a:pPr algn="l"/>
-            <a:r>
-              <a:rPr sz="4400" b="1">
+            <a:pPr algn="ctr"/>
+            <a:r>
+              <a:rPr sz="1200" b="1">
                 <a:solidFill>
                   <a:srgbClr val="0058B2"/>
                 </a:solidFill>
@@ -4693,99 +4477,25 @@
                 <a:ea typeface="Malgun Gothic"/>
                 <a:cs typeface="Malgun Gothic"/>
               </a:rPr>
-              <a:t>중복·첨부</a:t>
-            </a:r>
-          </a:p>
-        </p:txBody>
-      </p:sp>
-      <p:sp>
-        <p:nvSpPr>
-          <p:cNvPr id="10" name="TextBox 9"/>
-          <p:cNvSpPr txBox="1"/>
-          <p:nvPr/>
-        </p:nvSpPr>
-        <p:spPr>
-          <a:xfrm>
-            <a:off x="4617719" y="3246120"/>
-            <a:ext cx="2926080" cy="457200"/>
-          </a:xfrm>
-          <a:prstGeom prst="rect">
-            <a:avLst/>
-          </a:prstGeom>
-          <a:noFill/>
-        </p:spPr>
-        <p:txBody>
-          <a:bodyPr wrap="square" lIns="0" rIns="0" tIns="0" bIns="0" anchor="t">
-            <a:spAutoFit/>
-          </a:bodyPr>
-          <a:lstStyle/>
-          <a:p>
-            <a:pPr algn="l"/>
-            <a:r>
-              <a:rPr sz="2000" b="1">
-                <a:solidFill>
-                  <a:srgbClr val="1F1D1A"/>
-                </a:solidFill>
-                <a:latin typeface="Malgun Gothic"/>
-                <a:ea typeface="Malgun Gothic"/>
-                <a:cs typeface="Malgun Gothic"/>
-              </a:rPr>
-              <a:t>정보가 묻혀 있다</a:t>
-            </a:r>
-          </a:p>
-        </p:txBody>
-      </p:sp>
-      <p:sp>
-        <p:nvSpPr>
-          <p:cNvPr id="11" name="TextBox 10"/>
-          <p:cNvSpPr txBox="1"/>
-          <p:nvPr/>
-        </p:nvSpPr>
-        <p:spPr>
-          <a:xfrm>
-            <a:off x="4617719" y="3840480"/>
-            <a:ext cx="2880360" cy="2011680"/>
-          </a:xfrm>
-          <a:prstGeom prst="rect">
-            <a:avLst/>
-          </a:prstGeom>
-          <a:noFill/>
-        </p:spPr>
-        <p:txBody>
-          <a:bodyPr wrap="square" lIns="0" rIns="0" tIns="0" bIns="0" anchor="t">
-            <a:spAutoFit/>
-          </a:bodyPr>
-          <a:lstStyle/>
-          <a:p>
-            <a:pPr algn="l"/>
-            <a:r>
-              <a:rPr sz="1400" b="0">
-                <a:solidFill>
-                  <a:srgbClr val="6B6862"/>
-                </a:solidFill>
-                <a:latin typeface="Malgun Gothic"/>
-                <a:ea typeface="Malgun Gothic"/>
-                <a:cs typeface="Malgun Gothic"/>
-              </a:rPr>
-              <a:t>같은 공지가 여러 게시판에 중복. 마감일·신청 방법은 본문과 HWP·PDF 첨부 속에</a:t>
-            </a:r>
-          </a:p>
-        </p:txBody>
-      </p:sp>
-      <p:sp>
-        <p:nvSpPr>
-          <p:cNvPr id="12" name="Rounded Rectangle 11"/>
+              <a:t>장학공지</a:t>
+            </a:r>
+          </a:p>
+        </p:txBody>
+      </p:sp>
+      <p:sp>
+        <p:nvSpPr>
+          <p:cNvPr id="8" name="Rounded Rectangle 7"/>
           <p:cNvSpPr/>
           <p:nvPr/>
         </p:nvSpPr>
         <p:spPr>
           <a:xfrm>
-            <a:off x="8046719" y="1828800"/>
-            <a:ext cx="3474720" cy="3566160"/>
+            <a:off x="3749039" y="2514600"/>
+            <a:ext cx="1335024" cy="384048"/>
           </a:xfrm>
           <a:prstGeom prst="roundRect">
             <a:avLst>
-              <a:gd name="adj" fmla="val 6000"/>
+              <a:gd name="adj" fmla="val 50000"/>
             </a:avLst>
           </a:prstGeom>
           <a:solidFill>
@@ -4820,14 +4530,14 @@
       </p:sp>
       <p:sp>
         <p:nvSpPr>
-          <p:cNvPr id="13" name="TextBox 12"/>
+          <p:cNvPr id="9" name="TextBox 8"/>
           <p:cNvSpPr txBox="1"/>
           <p:nvPr/>
         </p:nvSpPr>
         <p:spPr>
           <a:xfrm>
-            <a:off x="8366759" y="2148840"/>
-            <a:ext cx="2926080" cy="914400"/>
+            <a:off x="3749039" y="2514600"/>
+            <a:ext cx="1335024" cy="384048"/>
           </a:xfrm>
           <a:prstGeom prst="rect">
             <a:avLst/>
@@ -4835,36 +4545,82 @@
           <a:noFill/>
         </p:spPr>
         <p:txBody>
-          <a:bodyPr wrap="square" lIns="0" rIns="0" tIns="0" bIns="0" anchor="t">
+          <a:bodyPr wrap="square" lIns="0" rIns="0" tIns="0" bIns="0" anchor="ctr">
             <a:spAutoFit/>
           </a:bodyPr>
           <a:lstStyle/>
           <a:p>
-            <a:pPr algn="l"/>
-            <a:r>
-              <a:rPr sz="4800" b="1">
-                <a:solidFill>
-                  <a:srgbClr val="C84B31"/>
+            <a:pPr algn="ctr"/>
+            <a:r>
+              <a:rPr sz="1200" b="1">
+                <a:solidFill>
+                  <a:srgbClr val="0058B2"/>
                 </a:solidFill>
                 <a:latin typeface="Malgun Gothic"/>
                 <a:ea typeface="Malgun Gothic"/>
                 <a:cs typeface="Malgun Gothic"/>
               </a:rPr>
-              <a:t>마감</a:t>
-            </a:r>
-          </a:p>
-        </p:txBody>
-      </p:sp>
-      <p:sp>
-        <p:nvSpPr>
-          <p:cNvPr id="14" name="TextBox 13"/>
+              <a:t>취업지원센터</a:t>
+            </a:r>
+          </a:p>
+        </p:txBody>
+      </p:sp>
+      <p:sp>
+        <p:nvSpPr>
+          <p:cNvPr id="10" name="Rounded Rectangle 9"/>
+          <p:cNvSpPr/>
+          <p:nvPr/>
+        </p:nvSpPr>
+        <p:spPr>
+          <a:xfrm>
+            <a:off x="1005840" y="2560320"/>
+            <a:ext cx="1335024" cy="384048"/>
+          </a:xfrm>
+          <a:prstGeom prst="roundRect">
+            <a:avLst>
+              <a:gd name="adj" fmla="val 50000"/>
+            </a:avLst>
+          </a:prstGeom>
+          <a:solidFill>
+            <a:srgbClr val="EEF4FB"/>
+          </a:solidFill>
+          <a:ln>
+            <a:noFill/>
+          </a:ln>
+          <a:effectLst/>
+        </p:spPr>
+        <p:style>
+          <a:lnRef idx="1">
+            <a:schemeClr val="accent1"/>
+          </a:lnRef>
+          <a:fillRef idx="3">
+            <a:schemeClr val="accent1"/>
+          </a:fillRef>
+          <a:effectRef idx="2">
+            <a:schemeClr val="accent1"/>
+          </a:effectRef>
+          <a:fontRef idx="minor">
+            <a:schemeClr val="lt1"/>
+          </a:fontRef>
+        </p:style>
+        <p:txBody>
+          <a:bodyPr rtlCol="0" anchor="ctr"/>
+          <a:lstStyle/>
+          <a:p>
+            <a:pPr algn="ctr"/>
+          </a:p>
+        </p:txBody>
+      </p:sp>
+      <p:sp>
+        <p:nvSpPr>
+          <p:cNvPr id="11" name="TextBox 10"/>
           <p:cNvSpPr txBox="1"/>
           <p:nvPr/>
         </p:nvSpPr>
         <p:spPr>
           <a:xfrm>
-            <a:off x="8366759" y="3246120"/>
-            <a:ext cx="2926080" cy="457200"/>
+            <a:off x="1005840" y="2560320"/>
+            <a:ext cx="1335024" cy="384048"/>
           </a:xfrm>
           <a:prstGeom prst="rect">
             <a:avLst/>
@@ -4872,36 +4628,82 @@
           <a:noFill/>
         </p:spPr>
         <p:txBody>
-          <a:bodyPr wrap="square" lIns="0" rIns="0" tIns="0" bIns="0" anchor="t">
+          <a:bodyPr wrap="square" lIns="0" rIns="0" tIns="0" bIns="0" anchor="ctr">
             <a:spAutoFit/>
           </a:bodyPr>
           <a:lstStyle/>
           <a:p>
-            <a:pPr algn="l"/>
-            <a:r>
-              <a:rPr sz="2000" b="1">
-                <a:solidFill>
-                  <a:srgbClr val="1F1D1A"/>
+            <a:pPr algn="ctr"/>
+            <a:r>
+              <a:rPr sz="1200" b="1">
+                <a:solidFill>
+                  <a:srgbClr val="0058B2"/>
                 </a:solidFill>
                 <a:latin typeface="Malgun Gothic"/>
                 <a:ea typeface="Malgun Gothic"/>
                 <a:cs typeface="Malgun Gothic"/>
               </a:rPr>
-              <a:t>그래서 놓친다</a:t>
-            </a:r>
-          </a:p>
-        </p:txBody>
-      </p:sp>
-      <p:sp>
-        <p:nvSpPr>
-          <p:cNvPr id="15" name="TextBox 14"/>
+              <a:t>컴퓨터공학과</a:t>
+            </a:r>
+          </a:p>
+        </p:txBody>
+      </p:sp>
+      <p:sp>
+        <p:nvSpPr>
+          <p:cNvPr id="12" name="Rounded Rectangle 11"/>
+          <p:cNvSpPr/>
+          <p:nvPr/>
+        </p:nvSpPr>
+        <p:spPr>
+          <a:xfrm>
+            <a:off x="2606040" y="3200400"/>
+            <a:ext cx="987552" cy="384048"/>
+          </a:xfrm>
+          <a:prstGeom prst="roundRect">
+            <a:avLst>
+              <a:gd name="adj" fmla="val 50000"/>
+            </a:avLst>
+          </a:prstGeom>
+          <a:solidFill>
+            <a:srgbClr val="EEF4FB"/>
+          </a:solidFill>
+          <a:ln>
+            <a:noFill/>
+          </a:ln>
+          <a:effectLst/>
+        </p:spPr>
+        <p:style>
+          <a:lnRef idx="1">
+            <a:schemeClr val="accent1"/>
+          </a:lnRef>
+          <a:fillRef idx="3">
+            <a:schemeClr val="accent1"/>
+          </a:fillRef>
+          <a:effectRef idx="2">
+            <a:schemeClr val="accent1"/>
+          </a:effectRef>
+          <a:fontRef idx="minor">
+            <a:schemeClr val="lt1"/>
+          </a:fontRef>
+        </p:style>
+        <p:txBody>
+          <a:bodyPr rtlCol="0" anchor="ctr"/>
+          <a:lstStyle/>
+          <a:p>
+            <a:pPr algn="ctr"/>
+          </a:p>
+        </p:txBody>
+      </p:sp>
+      <p:sp>
+        <p:nvSpPr>
+          <p:cNvPr id="13" name="TextBox 12"/>
           <p:cNvSpPr txBox="1"/>
           <p:nvPr/>
         </p:nvSpPr>
         <p:spPr>
           <a:xfrm>
-            <a:off x="8366759" y="3840480"/>
-            <a:ext cx="2880360" cy="2011680"/>
+            <a:off x="2606040" y="3200400"/>
+            <a:ext cx="987552" cy="384048"/>
           </a:xfrm>
           <a:prstGeom prst="rect">
             <a:avLst/>
@@ -4909,22 +4711,1212 @@
           <a:noFill/>
         </p:spPr>
         <p:txBody>
-          <a:bodyPr wrap="square" lIns="0" rIns="0" tIns="0" bIns="0" anchor="t">
+          <a:bodyPr wrap="square" lIns="0" rIns="0" tIns="0" bIns="0" anchor="ctr">
             <a:spAutoFit/>
           </a:bodyPr>
           <a:lstStyle/>
           <a:p>
-            <a:pPr algn="l"/>
-            <a:r>
-              <a:rPr sz="1400" b="0">
-                <a:solidFill>
-                  <a:srgbClr val="6B6862"/>
+            <a:pPr algn="ctr"/>
+            <a:r>
+              <a:rPr sz="1200" b="1">
+                <a:solidFill>
+                  <a:srgbClr val="0058B2"/>
                 </a:solidFill>
                 <a:latin typeface="Malgun Gothic"/>
                 <a:ea typeface="Malgun Gothic"/>
                 <a:cs typeface="Malgun Gothic"/>
               </a:rPr>
-              <a:t>"이게 나에게 해당되나?" "언제까지지?"를 바로 알 수 없어 장학·취업·공모전 기회를 지나친다</a:t>
+              <a:t>간호학과</a:t>
+            </a:r>
+          </a:p>
+        </p:txBody>
+      </p:sp>
+      <p:sp>
+        <p:nvSpPr>
+          <p:cNvPr id="14" name="Rounded Rectangle 13"/>
+          <p:cNvSpPr/>
+          <p:nvPr/>
+        </p:nvSpPr>
+        <p:spPr>
+          <a:xfrm>
+            <a:off x="822960" y="3429000"/>
+            <a:ext cx="1161288" cy="384048"/>
+          </a:xfrm>
+          <a:prstGeom prst="roundRect">
+            <a:avLst>
+              <a:gd name="adj" fmla="val 50000"/>
+            </a:avLst>
+          </a:prstGeom>
+          <a:solidFill>
+            <a:srgbClr val="EEF4FB"/>
+          </a:solidFill>
+          <a:ln>
+            <a:noFill/>
+          </a:ln>
+          <a:effectLst/>
+        </p:spPr>
+        <p:style>
+          <a:lnRef idx="1">
+            <a:schemeClr val="accent1"/>
+          </a:lnRef>
+          <a:fillRef idx="3">
+            <a:schemeClr val="accent1"/>
+          </a:fillRef>
+          <a:effectRef idx="2">
+            <a:schemeClr val="accent1"/>
+          </a:effectRef>
+          <a:fontRef idx="minor">
+            <a:schemeClr val="lt1"/>
+          </a:fontRef>
+        </p:style>
+        <p:txBody>
+          <a:bodyPr rtlCol="0" anchor="ctr"/>
+          <a:lstStyle/>
+          <a:p>
+            <a:pPr algn="ctr"/>
+          </a:p>
+        </p:txBody>
+      </p:sp>
+      <p:sp>
+        <p:nvSpPr>
+          <p:cNvPr id="15" name="TextBox 14"/>
+          <p:cNvSpPr txBox="1"/>
+          <p:nvPr/>
+        </p:nvSpPr>
+        <p:spPr>
+          <a:xfrm>
+            <a:off x="822960" y="3429000"/>
+            <a:ext cx="1161288" cy="384048"/>
+          </a:xfrm>
+          <a:prstGeom prst="rect">
+            <a:avLst/>
+          </a:prstGeom>
+          <a:noFill/>
+        </p:spPr>
+        <p:txBody>
+          <a:bodyPr wrap="square" lIns="0" rIns="0" tIns="0" bIns="0" anchor="ctr">
+            <a:spAutoFit/>
+          </a:bodyPr>
+          <a:lstStyle/>
+          <a:p>
+            <a:pPr algn="ctr"/>
+            <a:r>
+              <a:rPr sz="1200" b="1">
+                <a:solidFill>
+                  <a:srgbClr val="0058B2"/>
+                </a:solidFill>
+                <a:latin typeface="Malgun Gothic"/>
+                <a:ea typeface="Malgun Gothic"/>
+                <a:cs typeface="Malgun Gothic"/>
+              </a:rPr>
+              <a:t>식품공학과</a:t>
+            </a:r>
+          </a:p>
+        </p:txBody>
+      </p:sp>
+      <p:sp>
+        <p:nvSpPr>
+          <p:cNvPr id="16" name="Rounded Rectangle 15"/>
+          <p:cNvSpPr/>
+          <p:nvPr/>
+        </p:nvSpPr>
+        <p:spPr>
+          <a:xfrm>
+            <a:off x="3246120" y="3886200"/>
+            <a:ext cx="1682496" cy="384048"/>
+          </a:xfrm>
+          <a:prstGeom prst="roundRect">
+            <a:avLst>
+              <a:gd name="adj" fmla="val 50000"/>
+            </a:avLst>
+          </a:prstGeom>
+          <a:solidFill>
+            <a:srgbClr val="EEF4FB"/>
+          </a:solidFill>
+          <a:ln>
+            <a:noFill/>
+          </a:ln>
+          <a:effectLst/>
+        </p:spPr>
+        <p:style>
+          <a:lnRef idx="1">
+            <a:schemeClr val="accent1"/>
+          </a:lnRef>
+          <a:fillRef idx="3">
+            <a:schemeClr val="accent1"/>
+          </a:fillRef>
+          <a:effectRef idx="2">
+            <a:schemeClr val="accent1"/>
+          </a:effectRef>
+          <a:fontRef idx="minor">
+            <a:schemeClr val="lt1"/>
+          </a:fontRef>
+        </p:style>
+        <p:txBody>
+          <a:bodyPr rtlCol="0" anchor="ctr"/>
+          <a:lstStyle/>
+          <a:p>
+            <a:pPr algn="ctr"/>
+          </a:p>
+        </p:txBody>
+      </p:sp>
+      <p:sp>
+        <p:nvSpPr>
+          <p:cNvPr id="17" name="TextBox 16"/>
+          <p:cNvSpPr txBox="1"/>
+          <p:nvPr/>
+        </p:nvSpPr>
+        <p:spPr>
+          <a:xfrm>
+            <a:off x="3246120" y="3886200"/>
+            <a:ext cx="1682496" cy="384048"/>
+          </a:xfrm>
+          <a:prstGeom prst="rect">
+            <a:avLst/>
+          </a:prstGeom>
+          <a:noFill/>
+        </p:spPr>
+        <p:txBody>
+          <a:bodyPr wrap="square" lIns="0" rIns="0" tIns="0" bIns="0" anchor="ctr">
+            <a:spAutoFit/>
+          </a:bodyPr>
+          <a:lstStyle/>
+          <a:p>
+            <a:pPr algn="ctr"/>
+            <a:r>
+              <a:rPr sz="1200" b="1">
+                <a:solidFill>
+                  <a:srgbClr val="0058B2"/>
+                </a:solidFill>
+                <a:latin typeface="Malgun Gothic"/>
+                <a:ea typeface="Malgun Gothic"/>
+                <a:cs typeface="Malgun Gothic"/>
+              </a:rPr>
+              <a:t>큐넷 시험 일정</a:t>
+            </a:r>
+          </a:p>
+        </p:txBody>
+      </p:sp>
+      <p:sp>
+        <p:nvSpPr>
+          <p:cNvPr id="18" name="Rounded Rectangle 17"/>
+          <p:cNvSpPr/>
+          <p:nvPr/>
+        </p:nvSpPr>
+        <p:spPr>
+          <a:xfrm>
+            <a:off x="960120" y="4297680"/>
+            <a:ext cx="1682496" cy="384048"/>
+          </a:xfrm>
+          <a:prstGeom prst="roundRect">
+            <a:avLst>
+              <a:gd name="adj" fmla="val 50000"/>
+            </a:avLst>
+          </a:prstGeom>
+          <a:solidFill>
+            <a:srgbClr val="EEF4FB"/>
+          </a:solidFill>
+          <a:ln>
+            <a:noFill/>
+          </a:ln>
+          <a:effectLst/>
+        </p:spPr>
+        <p:style>
+          <a:lnRef idx="1">
+            <a:schemeClr val="accent1"/>
+          </a:lnRef>
+          <a:fillRef idx="3">
+            <a:schemeClr val="accent1"/>
+          </a:fillRef>
+          <a:effectRef idx="2">
+            <a:schemeClr val="accent1"/>
+          </a:effectRef>
+          <a:fontRef idx="minor">
+            <a:schemeClr val="lt1"/>
+          </a:fontRef>
+        </p:style>
+        <p:txBody>
+          <a:bodyPr rtlCol="0" anchor="ctr"/>
+          <a:lstStyle/>
+          <a:p>
+            <a:pPr algn="ctr"/>
+          </a:p>
+        </p:txBody>
+      </p:sp>
+      <p:sp>
+        <p:nvSpPr>
+          <p:cNvPr id="19" name="TextBox 18"/>
+          <p:cNvSpPr txBox="1"/>
+          <p:nvPr/>
+        </p:nvSpPr>
+        <p:spPr>
+          <a:xfrm>
+            <a:off x="960120" y="4297680"/>
+            <a:ext cx="1682496" cy="384048"/>
+          </a:xfrm>
+          <a:prstGeom prst="rect">
+            <a:avLst/>
+          </a:prstGeom>
+          <a:noFill/>
+        </p:spPr>
+        <p:txBody>
+          <a:bodyPr wrap="square" lIns="0" rIns="0" tIns="0" bIns="0" anchor="ctr">
+            <a:spAutoFit/>
+          </a:bodyPr>
+          <a:lstStyle/>
+          <a:p>
+            <a:pPr algn="ctr"/>
+            <a:r>
+              <a:rPr sz="1200" b="1">
+                <a:solidFill>
+                  <a:srgbClr val="0058B2"/>
+                </a:solidFill>
+                <a:latin typeface="Malgun Gothic"/>
+                <a:ea typeface="Malgun Gothic"/>
+                <a:cs typeface="Malgun Gothic"/>
+              </a:rPr>
+              <a:t>창업 지원 사업</a:t>
+            </a:r>
+          </a:p>
+        </p:txBody>
+      </p:sp>
+      <p:sp>
+        <p:nvSpPr>
+          <p:cNvPr id="20" name="Rounded Rectangle 19"/>
+          <p:cNvSpPr/>
+          <p:nvPr/>
+        </p:nvSpPr>
+        <p:spPr>
+          <a:xfrm>
+            <a:off x="2926080" y="4617720"/>
+            <a:ext cx="987552" cy="384048"/>
+          </a:xfrm>
+          <a:prstGeom prst="roundRect">
+            <a:avLst>
+              <a:gd name="adj" fmla="val 50000"/>
+            </a:avLst>
+          </a:prstGeom>
+          <a:solidFill>
+            <a:srgbClr val="EEF4FB"/>
+          </a:solidFill>
+          <a:ln>
+            <a:noFill/>
+          </a:ln>
+          <a:effectLst/>
+        </p:spPr>
+        <p:style>
+          <a:lnRef idx="1">
+            <a:schemeClr val="accent1"/>
+          </a:lnRef>
+          <a:fillRef idx="3">
+            <a:schemeClr val="accent1"/>
+          </a:fillRef>
+          <a:effectRef idx="2">
+            <a:schemeClr val="accent1"/>
+          </a:effectRef>
+          <a:fontRef idx="minor">
+            <a:schemeClr val="lt1"/>
+          </a:fontRef>
+        </p:style>
+        <p:txBody>
+          <a:bodyPr rtlCol="0" anchor="ctr"/>
+          <a:lstStyle/>
+          <a:p>
+            <a:pPr algn="ctr"/>
+          </a:p>
+        </p:txBody>
+      </p:sp>
+      <p:sp>
+        <p:nvSpPr>
+          <p:cNvPr id="21" name="TextBox 20"/>
+          <p:cNvSpPr txBox="1"/>
+          <p:nvPr/>
+        </p:nvSpPr>
+        <p:spPr>
+          <a:xfrm>
+            <a:off x="2926080" y="4617720"/>
+            <a:ext cx="987552" cy="384048"/>
+          </a:xfrm>
+          <a:prstGeom prst="rect">
+            <a:avLst/>
+          </a:prstGeom>
+          <a:noFill/>
+        </p:spPr>
+        <p:txBody>
+          <a:bodyPr wrap="square" lIns="0" rIns="0" tIns="0" bIns="0" anchor="ctr">
+            <a:spAutoFit/>
+          </a:bodyPr>
+          <a:lstStyle/>
+          <a:p>
+            <a:pPr algn="ctr"/>
+            <a:r>
+              <a:rPr sz="1200" b="1">
+                <a:solidFill>
+                  <a:srgbClr val="0058B2"/>
+                </a:solidFill>
+                <a:latin typeface="Malgun Gothic"/>
+                <a:ea typeface="Malgun Gothic"/>
+                <a:cs typeface="Malgun Gothic"/>
+              </a:rPr>
+              <a:t>국제교류</a:t>
+            </a:r>
+          </a:p>
+        </p:txBody>
+      </p:sp>
+      <p:sp>
+        <p:nvSpPr>
+          <p:cNvPr id="22" name="Rounded Rectangle 21"/>
+          <p:cNvSpPr/>
+          <p:nvPr/>
+        </p:nvSpPr>
+        <p:spPr>
+          <a:xfrm>
+            <a:off x="868680" y="5074920"/>
+            <a:ext cx="1508760" cy="384048"/>
+          </a:xfrm>
+          <a:prstGeom prst="roundRect">
+            <a:avLst>
+              <a:gd name="adj" fmla="val 50000"/>
+            </a:avLst>
+          </a:prstGeom>
+          <a:solidFill>
+            <a:srgbClr val="EEF4FB"/>
+          </a:solidFill>
+          <a:ln>
+            <a:noFill/>
+          </a:ln>
+          <a:effectLst/>
+        </p:spPr>
+        <p:style>
+          <a:lnRef idx="1">
+            <a:schemeClr val="accent1"/>
+          </a:lnRef>
+          <a:fillRef idx="3">
+            <a:schemeClr val="accent1"/>
+          </a:fillRef>
+          <a:effectRef idx="2">
+            <a:schemeClr val="accent1"/>
+          </a:effectRef>
+          <a:fontRef idx="minor">
+            <a:schemeClr val="lt1"/>
+          </a:fontRef>
+        </p:style>
+        <p:txBody>
+          <a:bodyPr rtlCol="0" anchor="ctr"/>
+          <a:lstStyle/>
+          <a:p>
+            <a:pPr algn="ctr"/>
+          </a:p>
+        </p:txBody>
+      </p:sp>
+      <p:sp>
+        <p:nvSpPr>
+          <p:cNvPr id="23" name="TextBox 22"/>
+          <p:cNvSpPr txBox="1"/>
+          <p:nvPr/>
+        </p:nvSpPr>
+        <p:spPr>
+          <a:xfrm>
+            <a:off x="868680" y="5074920"/>
+            <a:ext cx="1508760" cy="384048"/>
+          </a:xfrm>
+          <a:prstGeom prst="rect">
+            <a:avLst/>
+          </a:prstGeom>
+          <a:noFill/>
+        </p:spPr>
+        <p:txBody>
+          <a:bodyPr wrap="square" lIns="0" rIns="0" tIns="0" bIns="0" anchor="ctr">
+            <a:spAutoFit/>
+          </a:bodyPr>
+          <a:lstStyle/>
+          <a:p>
+            <a:pPr algn="ctr"/>
+            <a:r>
+              <a:rPr sz="1200" b="1">
+                <a:solidFill>
+                  <a:srgbClr val="0058B2"/>
+                </a:solidFill>
+                <a:latin typeface="Malgun Gothic"/>
+                <a:ea typeface="Malgun Gothic"/>
+                <a:cs typeface="Malgun Gothic"/>
+              </a:rPr>
+              <a:t>데이터자격검정</a:t>
+            </a:r>
+          </a:p>
+        </p:txBody>
+      </p:sp>
+      <p:sp>
+        <p:nvSpPr>
+          <p:cNvPr id="24" name="Rounded Rectangle 23"/>
+          <p:cNvSpPr/>
+          <p:nvPr/>
+        </p:nvSpPr>
+        <p:spPr>
+          <a:xfrm>
+            <a:off x="3566160" y="5074920"/>
+            <a:ext cx="1161288" cy="384048"/>
+          </a:xfrm>
+          <a:prstGeom prst="roundRect">
+            <a:avLst>
+              <a:gd name="adj" fmla="val 50000"/>
+            </a:avLst>
+          </a:prstGeom>
+          <a:solidFill>
+            <a:srgbClr val="EEF4FB"/>
+          </a:solidFill>
+          <a:ln>
+            <a:noFill/>
+          </a:ln>
+          <a:effectLst/>
+        </p:spPr>
+        <p:style>
+          <a:lnRef idx="1">
+            <a:schemeClr val="accent1"/>
+          </a:lnRef>
+          <a:fillRef idx="3">
+            <a:schemeClr val="accent1"/>
+          </a:fillRef>
+          <a:effectRef idx="2">
+            <a:schemeClr val="accent1"/>
+          </a:effectRef>
+          <a:fontRef idx="minor">
+            <a:schemeClr val="lt1"/>
+          </a:fontRef>
+        </p:style>
+        <p:txBody>
+          <a:bodyPr rtlCol="0" anchor="ctr"/>
+          <a:lstStyle/>
+          <a:p>
+            <a:pPr algn="ctr"/>
+          </a:p>
+        </p:txBody>
+      </p:sp>
+      <p:sp>
+        <p:nvSpPr>
+          <p:cNvPr id="25" name="TextBox 24"/>
+          <p:cNvSpPr txBox="1"/>
+          <p:nvPr/>
+        </p:nvSpPr>
+        <p:spPr>
+          <a:xfrm>
+            <a:off x="3566160" y="5074920"/>
+            <a:ext cx="1161288" cy="384048"/>
+          </a:xfrm>
+          <a:prstGeom prst="rect">
+            <a:avLst/>
+          </a:prstGeom>
+          <a:noFill/>
+        </p:spPr>
+        <p:txBody>
+          <a:bodyPr wrap="square" lIns="0" rIns="0" tIns="0" bIns="0" anchor="ctr">
+            <a:spAutoFit/>
+          </a:bodyPr>
+          <a:lstStyle/>
+          <a:p>
+            <a:pPr algn="ctr"/>
+            <a:r>
+              <a:rPr sz="1200" b="1">
+                <a:solidFill>
+                  <a:srgbClr val="0058B2"/>
+                </a:solidFill>
+                <a:latin typeface="Malgun Gothic"/>
+                <a:ea typeface="Malgun Gothic"/>
+                <a:cs typeface="Malgun Gothic"/>
+              </a:rPr>
+              <a:t>학생생활관</a:t>
+            </a:r>
+          </a:p>
+        </p:txBody>
+      </p:sp>
+      <p:sp>
+        <p:nvSpPr>
+          <p:cNvPr id="26" name="TextBox 25"/>
+          <p:cNvSpPr txBox="1"/>
+          <p:nvPr/>
+        </p:nvSpPr>
+        <p:spPr>
+          <a:xfrm>
+            <a:off x="594360" y="5806440"/>
+            <a:ext cx="5120640" cy="365760"/>
+          </a:xfrm>
+          <a:prstGeom prst="rect">
+            <a:avLst/>
+          </a:prstGeom>
+          <a:noFill/>
+        </p:spPr>
+        <p:txBody>
+          <a:bodyPr wrap="square" lIns="0" rIns="0" tIns="0" bIns="0" anchor="t">
+            <a:spAutoFit/>
+          </a:bodyPr>
+          <a:lstStyle/>
+          <a:p>
+            <a:pPr algn="ctr"/>
+            <a:r>
+              <a:rPr sz="1500" b="1">
+                <a:solidFill>
+                  <a:srgbClr val="0058B2"/>
+                </a:solidFill>
+                <a:latin typeface="Malgun Gothic"/>
+                <a:ea typeface="Malgun Gothic"/>
+                <a:cs typeface="Malgun Gothic"/>
+              </a:rPr>
+              <a:t>109곳</a:t>
+            </a:r>
+            <a:r>
+              <a:rPr sz="1500" b="0">
+                <a:solidFill>
+                  <a:srgbClr val="1F232B"/>
+                </a:solidFill>
+                <a:latin typeface="Malgun Gothic"/>
+                <a:ea typeface="Malgun Gothic"/>
+                <a:cs typeface="Malgun Gothic"/>
+              </a:rPr>
+              <a:t> 학교 게시판  +  공모전·자격증 사이트</a:t>
+            </a:r>
+          </a:p>
+        </p:txBody>
+      </p:sp>
+      <p:sp>
+        <p:nvSpPr>
+          <p:cNvPr id="27" name="Rounded Rectangle 26"/>
+          <p:cNvSpPr/>
+          <p:nvPr/>
+        </p:nvSpPr>
+        <p:spPr>
+          <a:xfrm>
+            <a:off x="6172200" y="1463040"/>
+            <a:ext cx="5440680" cy="1234440"/>
+          </a:xfrm>
+          <a:prstGeom prst="roundRect">
+            <a:avLst>
+              <a:gd name="adj" fmla="val 8000"/>
+            </a:avLst>
+          </a:prstGeom>
+          <a:solidFill>
+            <a:srgbClr val="FFFFFF"/>
+          </a:solidFill>
+          <a:ln w="12700">
+            <a:solidFill>
+              <a:srgbClr val="DDE3EA"/>
+            </a:solidFill>
+          </a:ln>
+          <a:effectLst/>
+        </p:spPr>
+        <p:style>
+          <a:lnRef idx="1">
+            <a:schemeClr val="accent1"/>
+          </a:lnRef>
+          <a:fillRef idx="3">
+            <a:schemeClr val="accent1"/>
+          </a:fillRef>
+          <a:effectRef idx="2">
+            <a:schemeClr val="accent1"/>
+          </a:effectRef>
+          <a:fontRef idx="minor">
+            <a:schemeClr val="lt1"/>
+          </a:fontRef>
+        </p:style>
+        <p:txBody>
+          <a:bodyPr rtlCol="0" anchor="ctr"/>
+          <a:lstStyle/>
+          <a:p>
+            <a:pPr algn="ctr"/>
+          </a:p>
+        </p:txBody>
+      </p:sp>
+      <p:sp>
+        <p:nvSpPr>
+          <p:cNvPr id="28" name="Oval 27"/>
+          <p:cNvSpPr/>
+          <p:nvPr/>
+        </p:nvSpPr>
+        <p:spPr>
+          <a:xfrm>
+            <a:off x="6446520" y="1828800"/>
+            <a:ext cx="502920" cy="502920"/>
+          </a:xfrm>
+          <a:prstGeom prst="ellipse">
+            <a:avLst/>
+          </a:prstGeom>
+          <a:solidFill>
+            <a:srgbClr val="0058B2"/>
+          </a:solidFill>
+          <a:ln>
+            <a:noFill/>
+          </a:ln>
+          <a:effectLst/>
+        </p:spPr>
+        <p:style>
+          <a:lnRef idx="1">
+            <a:schemeClr val="accent1"/>
+          </a:lnRef>
+          <a:fillRef idx="3">
+            <a:schemeClr val="accent1"/>
+          </a:fillRef>
+          <a:effectRef idx="2">
+            <a:schemeClr val="accent1"/>
+          </a:effectRef>
+          <a:fontRef idx="minor">
+            <a:schemeClr val="lt1"/>
+          </a:fontRef>
+        </p:style>
+        <p:txBody>
+          <a:bodyPr rtlCol="0" anchor="ctr"/>
+          <a:lstStyle/>
+          <a:p>
+            <a:pPr algn="ctr"/>
+          </a:p>
+        </p:txBody>
+      </p:sp>
+      <p:sp>
+        <p:nvSpPr>
+          <p:cNvPr id="29" name="TextBox 28"/>
+          <p:cNvSpPr txBox="1"/>
+          <p:nvPr/>
+        </p:nvSpPr>
+        <p:spPr>
+          <a:xfrm>
+            <a:off x="6446520" y="1828800"/>
+            <a:ext cx="502920" cy="502920"/>
+          </a:xfrm>
+          <a:prstGeom prst="rect">
+            <a:avLst/>
+          </a:prstGeom>
+          <a:noFill/>
+        </p:spPr>
+        <p:txBody>
+          <a:bodyPr wrap="square" lIns="0" rIns="0" tIns="0" bIns="0" anchor="ctr">
+            <a:spAutoFit/>
+          </a:bodyPr>
+          <a:lstStyle/>
+          <a:p>
+            <a:pPr algn="ctr"/>
+            <a:r>
+              <a:rPr sz="1500" b="1">
+                <a:solidFill>
+                  <a:srgbClr val="FFFFFF"/>
+                </a:solidFill>
+                <a:latin typeface="Malgun Gothic"/>
+                <a:ea typeface="Malgun Gothic"/>
+                <a:cs typeface="Malgun Gothic"/>
+              </a:rPr>
+              <a:t>1</a:t>
+            </a:r>
+          </a:p>
+        </p:txBody>
+      </p:sp>
+      <p:sp>
+        <p:nvSpPr>
+          <p:cNvPr id="30" name="TextBox 29"/>
+          <p:cNvSpPr txBox="1"/>
+          <p:nvPr/>
+        </p:nvSpPr>
+        <p:spPr>
+          <a:xfrm>
+            <a:off x="7178040" y="1691640"/>
+            <a:ext cx="4297680" cy="411480"/>
+          </a:xfrm>
+          <a:prstGeom prst="rect">
+            <a:avLst/>
+          </a:prstGeom>
+          <a:noFill/>
+        </p:spPr>
+        <p:txBody>
+          <a:bodyPr wrap="square" lIns="0" rIns="0" tIns="0" bIns="0" anchor="t">
+            <a:spAutoFit/>
+          </a:bodyPr>
+          <a:lstStyle/>
+          <a:p>
+            <a:pPr algn="l"/>
+            <a:r>
+              <a:rPr sz="1900" b="1">
+                <a:solidFill>
+                  <a:srgbClr val="1F232B"/>
+                </a:solidFill>
+                <a:latin typeface="Malgun Gothic"/>
+                <a:ea typeface="Malgun Gothic"/>
+                <a:cs typeface="Malgun Gothic"/>
+              </a:rPr>
+              <a:t>어디서 봐야 할지 모름</a:t>
+            </a:r>
+          </a:p>
+        </p:txBody>
+      </p:sp>
+      <p:sp>
+        <p:nvSpPr>
+          <p:cNvPr id="31" name="TextBox 30"/>
+          <p:cNvSpPr txBox="1"/>
+          <p:nvPr/>
+        </p:nvSpPr>
+        <p:spPr>
+          <a:xfrm>
+            <a:off x="7178040" y="2121408"/>
+            <a:ext cx="4297680" cy="548640"/>
+          </a:xfrm>
+          <a:prstGeom prst="rect">
+            <a:avLst/>
+          </a:prstGeom>
+          <a:noFill/>
+        </p:spPr>
+        <p:txBody>
+          <a:bodyPr wrap="square" lIns="0" rIns="0" tIns="0" bIns="0" anchor="t">
+            <a:spAutoFit/>
+          </a:bodyPr>
+          <a:lstStyle/>
+          <a:p>
+            <a:pPr algn="l"/>
+            <a:r>
+              <a:rPr sz="1300" b="0">
+                <a:solidFill>
+                  <a:srgbClr val="666E7A"/>
+                </a:solidFill>
+                <a:latin typeface="Malgun Gothic"/>
+                <a:ea typeface="Malgun Gothic"/>
+                <a:cs typeface="Malgun Gothic"/>
+              </a:rPr>
+              <a:t>본부·학과·기관 게시판을 하나씩 들어가 봐야 함</a:t>
+            </a:r>
+          </a:p>
+        </p:txBody>
+      </p:sp>
+      <p:sp>
+        <p:nvSpPr>
+          <p:cNvPr id="32" name="Rounded Rectangle 31"/>
+          <p:cNvSpPr/>
+          <p:nvPr/>
+        </p:nvSpPr>
+        <p:spPr>
+          <a:xfrm>
+            <a:off x="6172200" y="2926080"/>
+            <a:ext cx="5440680" cy="1234440"/>
+          </a:xfrm>
+          <a:prstGeom prst="roundRect">
+            <a:avLst>
+              <a:gd name="adj" fmla="val 8000"/>
+            </a:avLst>
+          </a:prstGeom>
+          <a:solidFill>
+            <a:srgbClr val="FFFFFF"/>
+          </a:solidFill>
+          <a:ln w="12700">
+            <a:solidFill>
+              <a:srgbClr val="DDE3EA"/>
+            </a:solidFill>
+          </a:ln>
+          <a:effectLst/>
+        </p:spPr>
+        <p:style>
+          <a:lnRef idx="1">
+            <a:schemeClr val="accent1"/>
+          </a:lnRef>
+          <a:fillRef idx="3">
+            <a:schemeClr val="accent1"/>
+          </a:fillRef>
+          <a:effectRef idx="2">
+            <a:schemeClr val="accent1"/>
+          </a:effectRef>
+          <a:fontRef idx="minor">
+            <a:schemeClr val="lt1"/>
+          </a:fontRef>
+        </p:style>
+        <p:txBody>
+          <a:bodyPr rtlCol="0" anchor="ctr"/>
+          <a:lstStyle/>
+          <a:p>
+            <a:pPr algn="ctr"/>
+          </a:p>
+        </p:txBody>
+      </p:sp>
+      <p:sp>
+        <p:nvSpPr>
+          <p:cNvPr id="33" name="Oval 32"/>
+          <p:cNvSpPr/>
+          <p:nvPr/>
+        </p:nvSpPr>
+        <p:spPr>
+          <a:xfrm>
+            <a:off x="6446520" y="3291840"/>
+            <a:ext cx="502920" cy="502920"/>
+          </a:xfrm>
+          <a:prstGeom prst="ellipse">
+            <a:avLst/>
+          </a:prstGeom>
+          <a:solidFill>
+            <a:srgbClr val="0058B2"/>
+          </a:solidFill>
+          <a:ln>
+            <a:noFill/>
+          </a:ln>
+          <a:effectLst/>
+        </p:spPr>
+        <p:style>
+          <a:lnRef idx="1">
+            <a:schemeClr val="accent1"/>
+          </a:lnRef>
+          <a:fillRef idx="3">
+            <a:schemeClr val="accent1"/>
+          </a:fillRef>
+          <a:effectRef idx="2">
+            <a:schemeClr val="accent1"/>
+          </a:effectRef>
+          <a:fontRef idx="minor">
+            <a:schemeClr val="lt1"/>
+          </a:fontRef>
+        </p:style>
+        <p:txBody>
+          <a:bodyPr rtlCol="0" anchor="ctr"/>
+          <a:lstStyle/>
+          <a:p>
+            <a:pPr algn="ctr"/>
+          </a:p>
+        </p:txBody>
+      </p:sp>
+      <p:sp>
+        <p:nvSpPr>
+          <p:cNvPr id="34" name="TextBox 33"/>
+          <p:cNvSpPr txBox="1"/>
+          <p:nvPr/>
+        </p:nvSpPr>
+        <p:spPr>
+          <a:xfrm>
+            <a:off x="6446520" y="3291840"/>
+            <a:ext cx="502920" cy="502920"/>
+          </a:xfrm>
+          <a:prstGeom prst="rect">
+            <a:avLst/>
+          </a:prstGeom>
+          <a:noFill/>
+        </p:spPr>
+        <p:txBody>
+          <a:bodyPr wrap="square" lIns="0" rIns="0" tIns="0" bIns="0" anchor="ctr">
+            <a:spAutoFit/>
+          </a:bodyPr>
+          <a:lstStyle/>
+          <a:p>
+            <a:pPr algn="ctr"/>
+            <a:r>
+              <a:rPr sz="1500" b="1">
+                <a:solidFill>
+                  <a:srgbClr val="FFFFFF"/>
+                </a:solidFill>
+                <a:latin typeface="Malgun Gothic"/>
+                <a:ea typeface="Malgun Gothic"/>
+                <a:cs typeface="Malgun Gothic"/>
+              </a:rPr>
+              <a:t>2</a:t>
+            </a:r>
+          </a:p>
+        </p:txBody>
+      </p:sp>
+      <p:sp>
+        <p:nvSpPr>
+          <p:cNvPr id="35" name="TextBox 34"/>
+          <p:cNvSpPr txBox="1"/>
+          <p:nvPr/>
+        </p:nvSpPr>
+        <p:spPr>
+          <a:xfrm>
+            <a:off x="7178040" y="3154680"/>
+            <a:ext cx="4297680" cy="411480"/>
+          </a:xfrm>
+          <a:prstGeom prst="rect">
+            <a:avLst/>
+          </a:prstGeom>
+          <a:noFill/>
+        </p:spPr>
+        <p:txBody>
+          <a:bodyPr wrap="square" lIns="0" rIns="0" tIns="0" bIns="0" anchor="t">
+            <a:spAutoFit/>
+          </a:bodyPr>
+          <a:lstStyle/>
+          <a:p>
+            <a:pPr algn="l"/>
+            <a:r>
+              <a:rPr sz="1900" b="1">
+                <a:solidFill>
+                  <a:srgbClr val="1F232B"/>
+                </a:solidFill>
+                <a:latin typeface="Malgun Gothic"/>
+                <a:ea typeface="Malgun Gothic"/>
+                <a:cs typeface="Malgun Gothic"/>
+              </a:rPr>
+              <a:t>나에게 해당되는지 모름</a:t>
+            </a:r>
+          </a:p>
+        </p:txBody>
+      </p:sp>
+      <p:sp>
+        <p:nvSpPr>
+          <p:cNvPr id="36" name="TextBox 35"/>
+          <p:cNvSpPr txBox="1"/>
+          <p:nvPr/>
+        </p:nvSpPr>
+        <p:spPr>
+          <a:xfrm>
+            <a:off x="7178040" y="3584448"/>
+            <a:ext cx="4297680" cy="548640"/>
+          </a:xfrm>
+          <a:prstGeom prst="rect">
+            <a:avLst/>
+          </a:prstGeom>
+          <a:noFill/>
+        </p:spPr>
+        <p:txBody>
+          <a:bodyPr wrap="square" lIns="0" rIns="0" tIns="0" bIns="0" anchor="t">
+            <a:spAutoFit/>
+          </a:bodyPr>
+          <a:lstStyle/>
+          <a:p>
+            <a:pPr algn="l"/>
+            <a:r>
+              <a:rPr sz="1300" b="0">
+                <a:solidFill>
+                  <a:srgbClr val="666E7A"/>
+                </a:solidFill>
+                <a:latin typeface="Malgun Gothic"/>
+                <a:ea typeface="Malgun Gothic"/>
+                <a:cs typeface="Malgun Gothic"/>
+              </a:rPr>
+              <a:t>대상·마감일은 긴 본문과 HWP·PDF 첨부 속에</a:t>
+            </a:r>
+          </a:p>
+        </p:txBody>
+      </p:sp>
+      <p:sp>
+        <p:nvSpPr>
+          <p:cNvPr id="37" name="Rounded Rectangle 36"/>
+          <p:cNvSpPr/>
+          <p:nvPr/>
+        </p:nvSpPr>
+        <p:spPr>
+          <a:xfrm>
+            <a:off x="6172200" y="4389120"/>
+            <a:ext cx="5440680" cy="1234440"/>
+          </a:xfrm>
+          <a:prstGeom prst="roundRect">
+            <a:avLst>
+              <a:gd name="adj" fmla="val 8000"/>
+            </a:avLst>
+          </a:prstGeom>
+          <a:solidFill>
+            <a:srgbClr val="FDECEA"/>
+          </a:solidFill>
+          <a:ln>
+            <a:noFill/>
+          </a:ln>
+          <a:effectLst/>
+        </p:spPr>
+        <p:style>
+          <a:lnRef idx="1">
+            <a:schemeClr val="accent1"/>
+          </a:lnRef>
+          <a:fillRef idx="3">
+            <a:schemeClr val="accent1"/>
+          </a:fillRef>
+          <a:effectRef idx="2">
+            <a:schemeClr val="accent1"/>
+          </a:effectRef>
+          <a:fontRef idx="minor">
+            <a:schemeClr val="lt1"/>
+          </a:fontRef>
+        </p:style>
+        <p:txBody>
+          <a:bodyPr rtlCol="0" anchor="ctr"/>
+          <a:lstStyle/>
+          <a:p>
+            <a:pPr algn="ctr"/>
+          </a:p>
+        </p:txBody>
+      </p:sp>
+      <p:sp>
+        <p:nvSpPr>
+          <p:cNvPr id="38" name="Oval 37"/>
+          <p:cNvSpPr/>
+          <p:nvPr/>
+        </p:nvSpPr>
+        <p:spPr>
+          <a:xfrm>
+            <a:off x="6446520" y="4754880"/>
+            <a:ext cx="502920" cy="502920"/>
+          </a:xfrm>
+          <a:prstGeom prst="ellipse">
+            <a:avLst/>
+          </a:prstGeom>
+          <a:solidFill>
+            <a:srgbClr val="D1433A"/>
+          </a:solidFill>
+          <a:ln>
+            <a:noFill/>
+          </a:ln>
+          <a:effectLst/>
+        </p:spPr>
+        <p:style>
+          <a:lnRef idx="1">
+            <a:schemeClr val="accent1"/>
+          </a:lnRef>
+          <a:fillRef idx="3">
+            <a:schemeClr val="accent1"/>
+          </a:fillRef>
+          <a:effectRef idx="2">
+            <a:schemeClr val="accent1"/>
+          </a:effectRef>
+          <a:fontRef idx="minor">
+            <a:schemeClr val="lt1"/>
+          </a:fontRef>
+        </p:style>
+        <p:txBody>
+          <a:bodyPr rtlCol="0" anchor="ctr"/>
+          <a:lstStyle/>
+          <a:p>
+            <a:pPr algn="ctr"/>
+          </a:p>
+        </p:txBody>
+      </p:sp>
+      <p:sp>
+        <p:nvSpPr>
+          <p:cNvPr id="39" name="TextBox 38"/>
+          <p:cNvSpPr txBox="1"/>
+          <p:nvPr/>
+        </p:nvSpPr>
+        <p:spPr>
+          <a:xfrm>
+            <a:off x="6446520" y="4754880"/>
+            <a:ext cx="502920" cy="502920"/>
+          </a:xfrm>
+          <a:prstGeom prst="rect">
+            <a:avLst/>
+          </a:prstGeom>
+          <a:noFill/>
+        </p:spPr>
+        <p:txBody>
+          <a:bodyPr wrap="square" lIns="0" rIns="0" tIns="0" bIns="0" anchor="ctr">
+            <a:spAutoFit/>
+          </a:bodyPr>
+          <a:lstStyle/>
+          <a:p>
+            <a:pPr algn="ctr"/>
+            <a:r>
+              <a:rPr sz="1500" b="1">
+                <a:solidFill>
+                  <a:srgbClr val="FFFFFF"/>
+                </a:solidFill>
+                <a:latin typeface="Malgun Gothic"/>
+                <a:ea typeface="Malgun Gothic"/>
+                <a:cs typeface="Malgun Gothic"/>
+              </a:rPr>
+              <a:t>3</a:t>
+            </a:r>
+          </a:p>
+        </p:txBody>
+      </p:sp>
+      <p:sp>
+        <p:nvSpPr>
+          <p:cNvPr id="40" name="TextBox 39"/>
+          <p:cNvSpPr txBox="1"/>
+          <p:nvPr/>
+        </p:nvSpPr>
+        <p:spPr>
+          <a:xfrm>
+            <a:off x="7178040" y="4617720"/>
+            <a:ext cx="4297680" cy="411480"/>
+          </a:xfrm>
+          <a:prstGeom prst="rect">
+            <a:avLst/>
+          </a:prstGeom>
+          <a:noFill/>
+        </p:spPr>
+        <p:txBody>
+          <a:bodyPr wrap="square" lIns="0" rIns="0" tIns="0" bIns="0" anchor="t">
+            <a:spAutoFit/>
+          </a:bodyPr>
+          <a:lstStyle/>
+          <a:p>
+            <a:pPr algn="l"/>
+            <a:r>
+              <a:rPr sz="1900" b="1">
+                <a:solidFill>
+                  <a:srgbClr val="1F232B"/>
+                </a:solidFill>
+                <a:latin typeface="Malgun Gothic"/>
+                <a:ea typeface="Malgun Gothic"/>
+                <a:cs typeface="Malgun Gothic"/>
+              </a:rPr>
+              <a:t>마감이 지나서야 앎</a:t>
+            </a:r>
+          </a:p>
+        </p:txBody>
+      </p:sp>
+      <p:sp>
+        <p:nvSpPr>
+          <p:cNvPr id="41" name="TextBox 40"/>
+          <p:cNvSpPr txBox="1"/>
+          <p:nvPr/>
+        </p:nvSpPr>
+        <p:spPr>
+          <a:xfrm>
+            <a:off x="7178040" y="5047488"/>
+            <a:ext cx="4297680" cy="548640"/>
+          </a:xfrm>
+          <a:prstGeom prst="rect">
+            <a:avLst/>
+          </a:prstGeom>
+          <a:noFill/>
+        </p:spPr>
+        <p:txBody>
+          <a:bodyPr wrap="square" lIns="0" rIns="0" tIns="0" bIns="0" anchor="t">
+            <a:spAutoFit/>
+          </a:bodyPr>
+          <a:lstStyle/>
+          <a:p>
+            <a:pPr algn="l"/>
+            <a:r>
+              <a:rPr sz="1300" b="0">
+                <a:solidFill>
+                  <a:srgbClr val="666E7A"/>
+                </a:solidFill>
+                <a:latin typeface="Malgun Gothic"/>
+                <a:ea typeface="Malgun Gothic"/>
+                <a:cs typeface="Malgun Gothic"/>
+              </a:rPr>
+              <a:t>장학금·공모전·채용 기회를 놓침</a:t>
+            </a:r>
+          </a:p>
+        </p:txBody>
+      </p:sp>
+      <p:sp>
+        <p:nvSpPr>
+          <p:cNvPr id="42" name="TextBox 41"/>
+          <p:cNvSpPr txBox="1"/>
+          <p:nvPr/>
+        </p:nvSpPr>
+        <p:spPr>
+          <a:xfrm>
+            <a:off x="11247120" y="6400800"/>
+            <a:ext cx="457200" cy="274320"/>
+          </a:xfrm>
+          <a:prstGeom prst="rect">
+            <a:avLst/>
+          </a:prstGeom>
+          <a:noFill/>
+        </p:spPr>
+        <p:txBody>
+          <a:bodyPr wrap="square" lIns="0" rIns="0" tIns="0" bIns="0" anchor="t">
+            <a:spAutoFit/>
+          </a:bodyPr>
+          <a:lstStyle/>
+          <a:p>
+            <a:pPr algn="r"/>
+            <a:r>
+              <a:rPr sz="1000" b="0">
+                <a:solidFill>
+                  <a:srgbClr val="666E7A"/>
+                </a:solidFill>
+                <a:latin typeface="Malgun Gothic"/>
+                <a:ea typeface="Malgun Gothic"/>
+                <a:cs typeface="Malgun Gothic"/>
+              </a:rPr>
+              <a:t>2</a:t>
             </a:r>
           </a:p>
         </p:txBody>
@@ -4943,7 +5935,7 @@
     <p:bg>
       <p:bgPr>
         <a:solidFill>
-          <a:srgbClr val="FFFFFF"/>
+          <a:srgbClr val="F6F8FB"/>
         </a:solidFill>
         <a:effectLst/>
       </p:bgPr>
@@ -4963,8 +5955,8 @@
         </p:nvSpPr>
         <p:spPr>
           <a:xfrm>
-            <a:off x="548640" y="411480"/>
-            <a:ext cx="11064240" cy="640080"/>
+            <a:off x="594360" y="457200"/>
+            <a:ext cx="10972800" cy="731520"/>
           </a:xfrm>
           <a:prstGeom prst="rect">
             <a:avLst/>
@@ -4979,79 +5971,41 @@
           <a:p>
             <a:pPr algn="l"/>
             <a:r>
-              <a:rPr sz="3200" b="1">
-                <a:solidFill>
-                  <a:srgbClr val="1F1D1A"/>
+              <a:rPr sz="3000" b="1">
+                <a:solidFill>
+                  <a:srgbClr val="1F232B"/>
                 </a:solidFill>
                 <a:latin typeface="Malgun Gothic"/>
                 <a:ea typeface="Malgun Gothic"/>
                 <a:cs typeface="Malgun Gothic"/>
               </a:rPr>
-              <a:t>모으고, 정리하고, 골라서, 알려줍니다</a:t>
-            </a:r>
-          </a:p>
-        </p:txBody>
-      </p:sp>
-      <p:sp>
-        <p:nvSpPr>
-          <p:cNvPr id="3" name="TextBox 2"/>
-          <p:cNvSpPr txBox="1"/>
-          <p:nvPr/>
-        </p:nvSpPr>
-        <p:spPr>
-          <a:xfrm>
-            <a:off x="548640" y="1024128"/>
-            <a:ext cx="11064240" cy="411480"/>
-          </a:xfrm>
-          <a:prstGeom prst="rect">
-            <a:avLst/>
-          </a:prstGeom>
-          <a:noFill/>
-        </p:spPr>
-        <p:txBody>
-          <a:bodyPr wrap="square" lIns="0" rIns="0" tIns="0" bIns="0" anchor="t">
-            <a:spAutoFit/>
-          </a:bodyPr>
-          <a:lstStyle/>
-          <a:p>
-            <a:pPr algn="l"/>
-            <a:r>
-              <a:rPr sz="1600" b="0">
-                <a:solidFill>
-                  <a:srgbClr val="6B6862"/>
-                </a:solidFill>
-                <a:latin typeface="Malgun Gothic"/>
-                <a:ea typeface="Malgun Gothic"/>
-                <a:cs typeface="Malgun Gothic"/>
-              </a:rPr>
-              <a:t>사람이 할 일은 처음 30초 설정뿐</a:t>
-            </a:r>
-          </a:p>
-        </p:txBody>
-      </p:sp>
-      <p:sp>
-        <p:nvSpPr>
-          <p:cNvPr id="4" name="Rounded Rectangle 3"/>
+              <a:t>그래서, 나에게 맞는 공지만 골라 주는 앱을 만들었습니다</a:t>
+            </a:r>
+          </a:p>
+        </p:txBody>
+      </p:sp>
+      <p:sp>
+        <p:nvSpPr>
+          <p:cNvPr id="3" name="Rounded Rectangle 2"/>
           <p:cNvSpPr/>
           <p:nvPr/>
         </p:nvSpPr>
         <p:spPr>
           <a:xfrm>
-            <a:off x="548640" y="1920240"/>
-            <a:ext cx="2560320" cy="3931920"/>
+            <a:off x="1069848" y="1527048"/>
+            <a:ext cx="1899806" cy="3941064"/>
           </a:xfrm>
           <a:prstGeom prst="roundRect">
             <a:avLst>
-              <a:gd name="adj" fmla="val 6000"/>
+              <a:gd name="adj" fmla="val 8000"/>
             </a:avLst>
           </a:prstGeom>
           <a:solidFill>
-            <a:srgbClr val="EEF4FB"/>
+            <a:srgbClr val="111114"/>
           </a:solidFill>
           <a:ln>
             <a:noFill/>
           </a:ln>
-          <a:effectLst/>
         </p:spPr>
         <p:style>
           <a:lnRef idx="1">
@@ -5075,6 +6029,30 @@
           </a:p>
         </p:txBody>
       </p:sp>
+      <p:pic>
+        <p:nvPicPr>
+          <p:cNvPr id="4" name="Picture 3" descr="1-onboarding.png"/>
+          <p:cNvPicPr>
+            <a:picLocks noChangeAspect="1"/>
+          </p:cNvPicPr>
+          <p:nvPr/>
+        </p:nvPicPr>
+        <p:blipFill>
+          <a:blip r:embed="rId2"/>
+          <a:stretch>
+            <a:fillRect/>
+          </a:stretch>
+        </p:blipFill>
+        <p:spPr>
+          <a:xfrm>
+            <a:off x="1143000" y="1600200"/>
+            <a:ext cx="1753502" cy="3794760"/>
+          </a:xfrm>
+          <a:prstGeom prst="rect">
+            <a:avLst/>
+          </a:prstGeom>
+        </p:spPr>
+      </p:pic>
       <p:sp>
         <p:nvSpPr>
           <p:cNvPr id="5" name="Oval 4"/>
@@ -5083,8 +6061,8 @@
         </p:nvSpPr>
         <p:spPr>
           <a:xfrm>
-            <a:off x="822959" y="2240280"/>
-            <a:ext cx="640080" cy="640080"/>
+            <a:off x="822959" y="1371600"/>
+            <a:ext cx="457200" cy="457200"/>
           </a:xfrm>
           <a:prstGeom prst="ellipse">
             <a:avLst/>
@@ -5127,8 +6105,8 @@
         </p:nvSpPr>
         <p:spPr>
           <a:xfrm>
-            <a:off x="822959" y="2240280"/>
-            <a:ext cx="640080" cy="640080"/>
+            <a:off x="822959" y="1371600"/>
+            <a:ext cx="457200" cy="457200"/>
           </a:xfrm>
           <a:prstGeom prst="rect">
             <a:avLst/>
@@ -5143,7 +6121,7 @@
           <a:p>
             <a:pPr algn="ctr"/>
             <a:r>
-              <a:rPr sz="2200" b="1">
+              <a:rPr sz="1500" b="1">
                 <a:solidFill>
                   <a:srgbClr val="FFFFFF"/>
                 </a:solidFill>
@@ -5164,8 +6142,8 @@
         </p:nvSpPr>
         <p:spPr>
           <a:xfrm>
-            <a:off x="822959" y="3108960"/>
-            <a:ext cx="2103120" cy="457200"/>
+            <a:off x="594359" y="5577840"/>
+            <a:ext cx="2850782" cy="411480"/>
           </a:xfrm>
           <a:prstGeom prst="rect">
             <a:avLst/>
@@ -5178,17 +6156,17 @@
           </a:bodyPr>
           <a:lstStyle/>
           <a:p>
-            <a:pPr algn="l"/>
-            <a:r>
-              <a:rPr sz="2200" b="1">
-                <a:solidFill>
-                  <a:srgbClr val="1F1D1A"/>
+            <a:pPr algn="ctr"/>
+            <a:r>
+              <a:rPr sz="1800" b="1">
+                <a:solidFill>
+                  <a:srgbClr val="1F232B"/>
                 </a:solidFill>
                 <a:latin typeface="Malgun Gothic"/>
                 <a:ea typeface="Malgun Gothic"/>
                 <a:cs typeface="Malgun Gothic"/>
               </a:rPr>
-              <a:t>수집</a:t>
+              <a:t>30초 설정</a:t>
             </a:r>
           </a:p>
         </p:txBody>
@@ -5201,8 +6179,8 @@
         </p:nvSpPr>
         <p:spPr>
           <a:xfrm>
-            <a:off x="822959" y="3611880"/>
-            <a:ext cx="2103120" cy="365760"/>
+            <a:off x="594359" y="5989320"/>
+            <a:ext cx="2850782" cy="365760"/>
           </a:xfrm>
           <a:prstGeom prst="rect">
             <a:avLst/>
@@ -5215,75 +6193,37 @@
           </a:bodyPr>
           <a:lstStyle/>
           <a:p>
-            <a:pPr algn="l"/>
-            <a:r>
-              <a:rPr sz="1300" b="1">
-                <a:solidFill>
-                  <a:srgbClr val="0058B2"/>
+            <a:pPr algn="ctr"/>
+            <a:r>
+              <a:rPr sz="1200" b="0">
+                <a:solidFill>
+                  <a:srgbClr val="666E7A"/>
                 </a:solidFill>
                 <a:latin typeface="Malgun Gothic"/>
                 <a:ea typeface="Malgun Gothic"/>
                 <a:cs typeface="Malgun Gothic"/>
               </a:rPr>
-              <a:t>매시간 자동</a:t>
-            </a:r>
-          </a:p>
-        </p:txBody>
-      </p:sp>
-      <p:sp>
-        <p:nvSpPr>
-          <p:cNvPr id="9" name="TextBox 8"/>
-          <p:cNvSpPr txBox="1"/>
-          <p:nvPr/>
-        </p:nvSpPr>
-        <p:spPr>
-          <a:xfrm>
-            <a:off x="822959" y="4114800"/>
-            <a:ext cx="2148840" cy="1645920"/>
-          </a:xfrm>
-          <a:prstGeom prst="rect">
-            <a:avLst/>
-          </a:prstGeom>
-          <a:noFill/>
-        </p:spPr>
-        <p:txBody>
-          <a:bodyPr wrap="square" lIns="0" rIns="0" tIns="0" bIns="0" anchor="t">
-            <a:spAutoFit/>
-          </a:bodyPr>
-          <a:lstStyle/>
-          <a:p>
-            <a:pPr algn="l"/>
-            <a:r>
-              <a:rPr sz="1300" b="0">
-                <a:solidFill>
-                  <a:srgbClr val="6B6862"/>
-                </a:solidFill>
-                <a:latin typeface="Malgun Gothic"/>
-                <a:ea typeface="Malgun Gothic"/>
-                <a:cs typeface="Malgun Gothic"/>
-              </a:rPr>
-              <a:t>학교 게시판 109곳
-+ 큐넷·데이터자격검정·K-Startup API</a:t>
-            </a:r>
-          </a:p>
-        </p:txBody>
-      </p:sp>
-      <p:sp>
-        <p:nvSpPr>
-          <p:cNvPr id="10" name="Right Arrow 9"/>
+              <a:t>학과는 '컴공'처럼 줄여 써도 OK</a:t>
+            </a:r>
+          </a:p>
+        </p:txBody>
+      </p:sp>
+      <p:sp>
+        <p:nvSpPr>
+          <p:cNvPr id="9" name="Right Arrow 8"/>
           <p:cNvSpPr/>
           <p:nvPr/>
         </p:nvSpPr>
         <p:spPr>
           <a:xfrm>
-            <a:off x="3136392" y="3703320"/>
-            <a:ext cx="256032" cy="320040"/>
+            <a:off x="3189110" y="3337560"/>
+            <a:ext cx="329184" cy="365760"/>
           </a:xfrm>
           <a:prstGeom prst="rightArrow">
             <a:avLst/>
           </a:prstGeom>
           <a:solidFill>
-            <a:srgbClr val="CFE4FB"/>
+            <a:srgbClr val="B8C1CC"/>
           </a:solidFill>
           <a:ln>
             <a:noFill/>
@@ -5314,27 +6254,26 @@
       </p:sp>
       <p:sp>
         <p:nvSpPr>
-          <p:cNvPr id="11" name="Rounded Rectangle 10"/>
+          <p:cNvPr id="10" name="Rounded Rectangle 9"/>
           <p:cNvSpPr/>
           <p:nvPr/>
         </p:nvSpPr>
         <p:spPr>
           <a:xfrm>
-            <a:off x="3429000" y="1920240"/>
-            <a:ext cx="2560320" cy="3931920"/>
+            <a:off x="3904487" y="1527048"/>
+            <a:ext cx="1899806" cy="3941064"/>
           </a:xfrm>
           <a:prstGeom prst="roundRect">
             <a:avLst>
-              <a:gd name="adj" fmla="val 6000"/>
+              <a:gd name="adj" fmla="val 8000"/>
             </a:avLst>
           </a:prstGeom>
           <a:solidFill>
-            <a:srgbClr val="EEF4FB"/>
+            <a:srgbClr val="111114"/>
           </a:solidFill>
           <a:ln>
             <a:noFill/>
           </a:ln>
-          <a:effectLst/>
         </p:spPr>
         <p:style>
           <a:lnRef idx="1">
@@ -5358,6 +6297,30 @@
           </a:p>
         </p:txBody>
       </p:sp>
+      <p:pic>
+        <p:nvPicPr>
+          <p:cNvPr id="11" name="Picture 10" descr="2-for-me.png"/>
+          <p:cNvPicPr>
+            <a:picLocks noChangeAspect="1"/>
+          </p:cNvPicPr>
+          <p:nvPr/>
+        </p:nvPicPr>
+        <p:blipFill>
+          <a:blip r:embed="rId3"/>
+          <a:stretch>
+            <a:fillRect/>
+          </a:stretch>
+        </p:blipFill>
+        <p:spPr>
+          <a:xfrm>
+            <a:off x="3977639" y="1600200"/>
+            <a:ext cx="1753502" cy="3794760"/>
+          </a:xfrm>
+          <a:prstGeom prst="rect">
+            <a:avLst/>
+          </a:prstGeom>
+        </p:spPr>
+      </p:pic>
       <p:sp>
         <p:nvSpPr>
           <p:cNvPr id="12" name="Oval 11"/>
@@ -5366,8 +6329,8 @@
         </p:nvSpPr>
         <p:spPr>
           <a:xfrm>
-            <a:off x="3703320" y="2240280"/>
-            <a:ext cx="640080" cy="640080"/>
+            <a:off x="3657600" y="1371600"/>
+            <a:ext cx="457200" cy="457200"/>
           </a:xfrm>
           <a:prstGeom prst="ellipse">
             <a:avLst/>
@@ -5410,8 +6373,8 @@
         </p:nvSpPr>
         <p:spPr>
           <a:xfrm>
-            <a:off x="3703320" y="2240280"/>
-            <a:ext cx="640080" cy="640080"/>
+            <a:off x="3657600" y="1371600"/>
+            <a:ext cx="457200" cy="457200"/>
           </a:xfrm>
           <a:prstGeom prst="rect">
             <a:avLst/>
@@ -5426,7 +6389,7 @@
           <a:p>
             <a:pPr algn="ctr"/>
             <a:r>
-              <a:rPr sz="2200" b="1">
+              <a:rPr sz="1500" b="1">
                 <a:solidFill>
                   <a:srgbClr val="FFFFFF"/>
                 </a:solidFill>
@@ -5447,8 +6410,8 @@
         </p:nvSpPr>
         <p:spPr>
           <a:xfrm>
-            <a:off x="3703320" y="3108960"/>
-            <a:ext cx="2103120" cy="457200"/>
+            <a:off x="3429000" y="5577840"/>
+            <a:ext cx="2850782" cy="411480"/>
           </a:xfrm>
           <a:prstGeom prst="rect">
             <a:avLst/>
@@ -5461,17 +6424,17 @@
           </a:bodyPr>
           <a:lstStyle/>
           <a:p>
-            <a:pPr algn="l"/>
-            <a:r>
-              <a:rPr sz="2200" b="1">
-                <a:solidFill>
-                  <a:srgbClr val="1F1D1A"/>
+            <a:pPr algn="ctr"/>
+            <a:r>
+              <a:rPr sz="1800" b="1">
+                <a:solidFill>
+                  <a:srgbClr val="1F232B"/>
                 </a:solidFill>
                 <a:latin typeface="Malgun Gothic"/>
                 <a:ea typeface="Malgun Gothic"/>
                 <a:cs typeface="Malgun Gothic"/>
               </a:rPr>
-              <a:t>AI 정리</a:t>
+              <a:t>나에게 맞는 공지</a:t>
             </a:r>
           </a:p>
         </p:txBody>
@@ -5484,8 +6447,8 @@
         </p:nvSpPr>
         <p:spPr>
           <a:xfrm>
-            <a:off x="3703320" y="3611880"/>
-            <a:ext cx="2103120" cy="365760"/>
+            <a:off x="3429000" y="5989320"/>
+            <a:ext cx="2850782" cy="365760"/>
           </a:xfrm>
           <a:prstGeom prst="rect">
             <a:avLst/>
@@ -5498,75 +6461,37 @@
           </a:bodyPr>
           <a:lstStyle/>
           <a:p>
-            <a:pPr algn="l"/>
-            <a:r>
-              <a:rPr sz="1300" b="1">
-                <a:solidFill>
-                  <a:srgbClr val="0058B2"/>
+            <a:pPr algn="ctr"/>
+            <a:r>
+              <a:rPr sz="1200" b="0">
+                <a:solidFill>
+                  <a:srgbClr val="666E7A"/>
                 </a:solidFill>
                 <a:latin typeface="Malgun Gothic"/>
                 <a:ea typeface="Malgun Gothic"/>
                 <a:cs typeface="Malgun Gothic"/>
               </a:rPr>
-              <a:t>서버 안 AI 모델</a:t>
-            </a:r>
-          </a:p>
-        </p:txBody>
-      </p:sp>
-      <p:sp>
-        <p:nvSpPr>
-          <p:cNvPr id="16" name="TextBox 15"/>
-          <p:cNvSpPr txBox="1"/>
-          <p:nvPr/>
-        </p:nvSpPr>
-        <p:spPr>
-          <a:xfrm>
-            <a:off x="3703320" y="4114800"/>
-            <a:ext cx="2148840" cy="1645920"/>
-          </a:xfrm>
-          <a:prstGeom prst="rect">
-            <a:avLst/>
-          </a:prstGeom>
-          <a:noFill/>
-        </p:spPr>
-        <p:txBody>
-          <a:bodyPr wrap="square" lIns="0" rIns="0" tIns="0" bIns="0" anchor="t">
-            <a:spAutoFit/>
-          </a:bodyPr>
-          <a:lstStyle/>
-          <a:p>
-            <a:pPr algn="l"/>
-            <a:r>
-              <a:rPr sz="1300" b="0">
-                <a:solidFill>
-                  <a:srgbClr val="6B6862"/>
-                </a:solidFill>
-                <a:latin typeface="Malgun Gothic"/>
-                <a:ea typeface="Malgun Gothic"/>
-                <a:cs typeface="Malgun Gothic"/>
-              </a:rPr>
-              <a:t>분야 분류, 대상·기간·신청방법·문의를
-정리 카드로, 중복 공지는 하나로</a:t>
-            </a:r>
-          </a:p>
-        </p:txBody>
-      </p:sp>
-      <p:sp>
-        <p:nvSpPr>
-          <p:cNvPr id="17" name="Right Arrow 16"/>
+              <a:t>왜 추천했는지 이유까지</a:t>
+            </a:r>
+          </a:p>
+        </p:txBody>
+      </p:sp>
+      <p:sp>
+        <p:nvSpPr>
+          <p:cNvPr id="16" name="Right Arrow 15"/>
           <p:cNvSpPr/>
           <p:nvPr/>
         </p:nvSpPr>
         <p:spPr>
           <a:xfrm>
-            <a:off x="6016752" y="3703320"/>
-            <a:ext cx="256032" cy="320040"/>
+            <a:off x="6023750" y="3337560"/>
+            <a:ext cx="329184" cy="365760"/>
           </a:xfrm>
           <a:prstGeom prst="rightArrow">
             <a:avLst/>
           </a:prstGeom>
           <a:solidFill>
-            <a:srgbClr val="CFE4FB"/>
+            <a:srgbClr val="B8C1CC"/>
           </a:solidFill>
           <a:ln>
             <a:noFill/>
@@ -5597,27 +6522,26 @@
       </p:sp>
       <p:sp>
         <p:nvSpPr>
-          <p:cNvPr id="18" name="Rounded Rectangle 17"/>
+          <p:cNvPr id="17" name="Rounded Rectangle 16"/>
           <p:cNvSpPr/>
           <p:nvPr/>
         </p:nvSpPr>
         <p:spPr>
           <a:xfrm>
-            <a:off x="6309359" y="1920240"/>
-            <a:ext cx="2560320" cy="3931920"/>
+            <a:off x="6739128" y="1527048"/>
+            <a:ext cx="1899806" cy="3941064"/>
           </a:xfrm>
           <a:prstGeom prst="roundRect">
             <a:avLst>
-              <a:gd name="adj" fmla="val 6000"/>
+              <a:gd name="adj" fmla="val 8000"/>
             </a:avLst>
           </a:prstGeom>
           <a:solidFill>
-            <a:srgbClr val="EEF4FB"/>
+            <a:srgbClr val="111114"/>
           </a:solidFill>
           <a:ln>
             <a:noFill/>
           </a:ln>
-          <a:effectLst/>
         </p:spPr>
         <p:style>
           <a:lnRef idx="1">
@@ -5641,6 +6565,30 @@
           </a:p>
         </p:txBody>
       </p:sp>
+      <p:pic>
+        <p:nvPicPr>
+          <p:cNvPr id="18" name="Picture 17" descr="3-detail.png"/>
+          <p:cNvPicPr>
+            <a:picLocks noChangeAspect="1"/>
+          </p:cNvPicPr>
+          <p:nvPr/>
+        </p:nvPicPr>
+        <p:blipFill>
+          <a:blip r:embed="rId4"/>
+          <a:stretch>
+            <a:fillRect/>
+          </a:stretch>
+        </p:blipFill>
+        <p:spPr>
+          <a:xfrm>
+            <a:off x="6812280" y="1600200"/>
+            <a:ext cx="1753502" cy="3794760"/>
+          </a:xfrm>
+          <a:prstGeom prst="rect">
+            <a:avLst/>
+          </a:prstGeom>
+        </p:spPr>
+      </p:pic>
       <p:sp>
         <p:nvSpPr>
           <p:cNvPr id="19" name="Oval 18"/>
@@ -5649,8 +6597,8 @@
         </p:nvSpPr>
         <p:spPr>
           <a:xfrm>
-            <a:off x="6583679" y="2240280"/>
-            <a:ext cx="640080" cy="640080"/>
+            <a:off x="6492240" y="1371600"/>
+            <a:ext cx="457200" cy="457200"/>
           </a:xfrm>
           <a:prstGeom prst="ellipse">
             <a:avLst/>
@@ -5693,8 +6641,8 @@
         </p:nvSpPr>
         <p:spPr>
           <a:xfrm>
-            <a:off x="6583679" y="2240280"/>
-            <a:ext cx="640080" cy="640080"/>
+            <a:off x="6492240" y="1371600"/>
+            <a:ext cx="457200" cy="457200"/>
           </a:xfrm>
           <a:prstGeom prst="rect">
             <a:avLst/>
@@ -5709,7 +6657,7 @@
           <a:p>
             <a:pPr algn="ctr"/>
             <a:r>
-              <a:rPr sz="2200" b="1">
+              <a:rPr sz="1500" b="1">
                 <a:solidFill>
                   <a:srgbClr val="FFFFFF"/>
                 </a:solidFill>
@@ -5730,8 +6678,8 @@
         </p:nvSpPr>
         <p:spPr>
           <a:xfrm>
-            <a:off x="6583679" y="3108960"/>
-            <a:ext cx="2103120" cy="457200"/>
+            <a:off x="6263640" y="5577840"/>
+            <a:ext cx="2850782" cy="411480"/>
           </a:xfrm>
           <a:prstGeom prst="rect">
             <a:avLst/>
@@ -5744,17 +6692,17 @@
           </a:bodyPr>
           <a:lstStyle/>
           <a:p>
-            <a:pPr algn="l"/>
-            <a:r>
-              <a:rPr sz="2200" b="1">
-                <a:solidFill>
-                  <a:srgbClr val="1F1D1A"/>
+            <a:pPr algn="ctr"/>
+            <a:r>
+              <a:rPr sz="1800" b="1">
+                <a:solidFill>
+                  <a:srgbClr val="1F232B"/>
                 </a:solidFill>
                 <a:latin typeface="Malgun Gothic"/>
                 <a:ea typeface="Malgun Gothic"/>
                 <a:cs typeface="Malgun Gothic"/>
               </a:rPr>
-              <a:t>나에게</a:t>
+              <a:t>한 장으로 정리</a:t>
             </a:r>
           </a:p>
         </p:txBody>
@@ -5767,8 +6715,8 @@
         </p:nvSpPr>
         <p:spPr>
           <a:xfrm>
-            <a:off x="6583679" y="3611880"/>
-            <a:ext cx="2103120" cy="365760"/>
+            <a:off x="6263640" y="5989320"/>
+            <a:ext cx="2850782" cy="365760"/>
           </a:xfrm>
           <a:prstGeom prst="rect">
             <a:avLst/>
@@ -5781,75 +6729,37 @@
           </a:bodyPr>
           <a:lstStyle/>
           <a:p>
-            <a:pPr algn="l"/>
-            <a:r>
-              <a:rPr sz="1300" b="1">
-                <a:solidFill>
-                  <a:srgbClr val="0058B2"/>
+            <a:pPr algn="ctr"/>
+            <a:r>
+              <a:rPr sz="1200" b="0">
+                <a:solidFill>
+                  <a:srgbClr val="666E7A"/>
                 </a:solidFill>
                 <a:latin typeface="Malgun Gothic"/>
                 <a:ea typeface="Malgun Gothic"/>
                 <a:cs typeface="Malgun Gothic"/>
               </a:rPr>
-              <a:t>추천 + 이유</a:t>
-            </a:r>
-          </a:p>
-        </p:txBody>
-      </p:sp>
-      <p:sp>
-        <p:nvSpPr>
-          <p:cNvPr id="23" name="TextBox 22"/>
-          <p:cNvSpPr txBox="1"/>
-          <p:nvPr/>
-        </p:nvSpPr>
-        <p:spPr>
-          <a:xfrm>
-            <a:off x="6583679" y="4114800"/>
-            <a:ext cx="2148840" cy="1645920"/>
-          </a:xfrm>
-          <a:prstGeom prst="rect">
-            <a:avLst/>
-          </a:prstGeom>
-          <a:noFill/>
-        </p:spPr>
-        <p:txBody>
-          <a:bodyPr wrap="square" lIns="0" rIns="0" tIns="0" bIns="0" anchor="t">
-            <a:spAutoFit/>
-          </a:bodyPr>
-          <a:lstStyle/>
-          <a:p>
-            <a:pPr algn="l"/>
-            <a:r>
-              <a:rPr sz="1300" b="0">
-                <a:solidFill>
-                  <a:srgbClr val="6B6862"/>
-                </a:solidFill>
-                <a:latin typeface="Malgun Gothic"/>
-                <a:ea typeface="Malgun Gothic"/>
-                <a:cs typeface="Malgun Gothic"/>
-              </a:rPr>
-              <a:t>학과·관심사로 점수를 매기고
-"왜 나에게 해당되는지" 문장으로</a:t>
-            </a:r>
-          </a:p>
-        </p:txBody>
-      </p:sp>
-      <p:sp>
-        <p:nvSpPr>
-          <p:cNvPr id="24" name="Right Arrow 23"/>
+              <a:t>대상·기간·신청방법·문의</a:t>
+            </a:r>
+          </a:p>
+        </p:txBody>
+      </p:sp>
+      <p:sp>
+        <p:nvSpPr>
+          <p:cNvPr id="23" name="Right Arrow 22"/>
           <p:cNvSpPr/>
           <p:nvPr/>
         </p:nvSpPr>
         <p:spPr>
           <a:xfrm>
-            <a:off x="8897112" y="3703320"/>
-            <a:ext cx="256032" cy="320040"/>
+            <a:off x="8858390" y="3337560"/>
+            <a:ext cx="329184" cy="365760"/>
           </a:xfrm>
           <a:prstGeom prst="rightArrow">
             <a:avLst/>
           </a:prstGeom>
           <a:solidFill>
-            <a:srgbClr val="CFE4FB"/>
+            <a:srgbClr val="B8C1CC"/>
           </a:solidFill>
           <a:ln>
             <a:noFill/>
@@ -5880,27 +6790,26 @@
       </p:sp>
       <p:sp>
         <p:nvSpPr>
-          <p:cNvPr id="25" name="Rounded Rectangle 24"/>
+          <p:cNvPr id="24" name="Rounded Rectangle 23"/>
           <p:cNvSpPr/>
           <p:nvPr/>
         </p:nvSpPr>
         <p:spPr>
           <a:xfrm>
-            <a:off x="9189719" y="1920240"/>
-            <a:ext cx="2560320" cy="3931920"/>
+            <a:off x="9573768" y="1527048"/>
+            <a:ext cx="1899806" cy="3941064"/>
           </a:xfrm>
           <a:prstGeom prst="roundRect">
             <a:avLst>
-              <a:gd name="adj" fmla="val 6000"/>
+              <a:gd name="adj" fmla="val 8000"/>
             </a:avLst>
           </a:prstGeom>
           <a:solidFill>
-            <a:srgbClr val="EEF4FB"/>
+            <a:srgbClr val="111114"/>
           </a:solidFill>
           <a:ln>
             <a:noFill/>
           </a:ln>
-          <a:effectLst/>
         </p:spPr>
         <p:style>
           <a:lnRef idx="1">
@@ -5924,6 +6833,30 @@
           </a:p>
         </p:txBody>
       </p:sp>
+      <p:pic>
+        <p:nvPicPr>
+          <p:cNvPr id="25" name="Picture 24" descr="4-calendar.png"/>
+          <p:cNvPicPr>
+            <a:picLocks noChangeAspect="1"/>
+          </p:cNvPicPr>
+          <p:nvPr/>
+        </p:nvPicPr>
+        <p:blipFill>
+          <a:blip r:embed="rId5"/>
+          <a:stretch>
+            <a:fillRect/>
+          </a:stretch>
+        </p:blipFill>
+        <p:spPr>
+          <a:xfrm>
+            <a:off x="9646920" y="1600200"/>
+            <a:ext cx="1753502" cy="3794760"/>
+          </a:xfrm>
+          <a:prstGeom prst="rect">
+            <a:avLst/>
+          </a:prstGeom>
+        </p:spPr>
+      </p:pic>
       <p:sp>
         <p:nvSpPr>
           <p:cNvPr id="26" name="Oval 25"/>
@@ -5932,8 +6865,8 @@
         </p:nvSpPr>
         <p:spPr>
           <a:xfrm>
-            <a:off x="9464040" y="2240280"/>
-            <a:ext cx="640080" cy="640080"/>
+            <a:off x="9326880" y="1371600"/>
+            <a:ext cx="457200" cy="457200"/>
           </a:xfrm>
           <a:prstGeom prst="ellipse">
             <a:avLst/>
@@ -5976,8 +6909,8 @@
         </p:nvSpPr>
         <p:spPr>
           <a:xfrm>
-            <a:off x="9464040" y="2240280"/>
-            <a:ext cx="640080" cy="640080"/>
+            <a:off x="9326880" y="1371600"/>
+            <a:ext cx="457200" cy="457200"/>
           </a:xfrm>
           <a:prstGeom prst="rect">
             <a:avLst/>
@@ -5992,7 +6925,7 @@
           <a:p>
             <a:pPr algn="ctr"/>
             <a:r>
-              <a:rPr sz="2200" b="1">
+              <a:rPr sz="1500" b="1">
                 <a:solidFill>
                   <a:srgbClr val="FFFFFF"/>
                 </a:solidFill>
@@ -6013,8 +6946,8 @@
         </p:nvSpPr>
         <p:spPr>
           <a:xfrm>
-            <a:off x="9464040" y="3108960"/>
-            <a:ext cx="2103120" cy="457200"/>
+            <a:off x="9098280" y="5577840"/>
+            <a:ext cx="2850782" cy="411480"/>
           </a:xfrm>
           <a:prstGeom prst="rect">
             <a:avLst/>
@@ -6027,17 +6960,17 @@
           </a:bodyPr>
           <a:lstStyle/>
           <a:p>
-            <a:pPr algn="l"/>
-            <a:r>
-              <a:rPr sz="2200" b="1">
-                <a:solidFill>
-                  <a:srgbClr val="1F1D1A"/>
+            <a:pPr algn="ctr"/>
+            <a:r>
+              <a:rPr sz="1800" b="1">
+                <a:solidFill>
+                  <a:srgbClr val="1F232B"/>
                 </a:solidFill>
                 <a:latin typeface="Malgun Gothic"/>
                 <a:ea typeface="Malgun Gothic"/>
                 <a:cs typeface="Malgun Gothic"/>
               </a:rPr>
-              <a:t>알림</a:t>
+              <a:t>마감 전에 알림</a:t>
             </a:r>
           </a:p>
         </p:txBody>
@@ -6050,8 +6983,8 @@
         </p:nvSpPr>
         <p:spPr>
           <a:xfrm>
-            <a:off x="9464040" y="3611880"/>
-            <a:ext cx="2103120" cy="365760"/>
+            <a:off x="9098280" y="5989320"/>
+            <a:ext cx="2850782" cy="365760"/>
           </a:xfrm>
           <a:prstGeom prst="rect">
             <a:avLst/>
@@ -6064,17 +6997,17 @@
           </a:bodyPr>
           <a:lstStyle/>
           <a:p>
-            <a:pPr algn="l"/>
-            <a:r>
-              <a:rPr sz="1300" b="1">
-                <a:solidFill>
-                  <a:srgbClr val="0058B2"/>
+            <a:pPr algn="ctr"/>
+            <a:r>
+              <a:rPr sz="1200" b="0">
+                <a:solidFill>
+                  <a:srgbClr val="666E7A"/>
                 </a:solidFill>
                 <a:latin typeface="Malgun Gothic"/>
                 <a:ea typeface="Malgun Gothic"/>
                 <a:cs typeface="Malgun Gothic"/>
               </a:rPr>
-              <a:t>마감 전</a:t>
+              <a:t>7·3·1일 전 휴대폰으로</a:t>
             </a:r>
           </a:p>
         </p:txBody>
@@ -6087,8 +7020,8 @@
         </p:nvSpPr>
         <p:spPr>
           <a:xfrm>
-            <a:off x="9464040" y="4114800"/>
-            <a:ext cx="2148840" cy="1645920"/>
+            <a:off x="11247120" y="6400800"/>
+            <a:ext cx="457200" cy="274320"/>
           </a:xfrm>
           <a:prstGeom prst="rect">
             <a:avLst/>
@@ -6101,18 +7034,17 @@
           </a:bodyPr>
           <a:lstStyle/>
           <a:p>
-            <a:pPr algn="l"/>
-            <a:r>
-              <a:rPr sz="1300" b="0">
-                <a:solidFill>
-                  <a:srgbClr val="6B6862"/>
+            <a:pPr algn="r"/>
+            <a:r>
+              <a:rPr sz="1000" b="0">
+                <a:solidFill>
+                  <a:srgbClr val="666E7A"/>
                 </a:solidFill>
                 <a:latin typeface="Malgun Gothic"/>
                 <a:ea typeface="Malgun Gothic"/>
                 <a:cs typeface="Malgun Gothic"/>
               </a:rPr>
-              <a:t>마감 7·3·1일 전, 접수 시각에
-웹 푸시와 알림함으로</a:t>
+              <a:t>3</a:t>
             </a:r>
           </a:p>
         </p:txBody>
@@ -6131,7 +7063,7 @@
     <p:bg>
       <p:bgPr>
         <a:solidFill>
-          <a:srgbClr val="FFFFFF"/>
+          <a:srgbClr val="F6F8FB"/>
         </a:solidFill>
         <a:effectLst/>
       </p:bgPr>
@@ -6151,8 +7083,8 @@
         </p:nvSpPr>
         <p:spPr>
           <a:xfrm>
-            <a:off x="548640" y="411480"/>
-            <a:ext cx="11064240" cy="640080"/>
+            <a:off x="594360" y="457200"/>
+            <a:ext cx="10972800" cy="731520"/>
           </a:xfrm>
           <a:prstGeom prst="rect">
             <a:avLst/>
@@ -6167,78 +7099,40 @@
           <a:p>
             <a:pPr algn="l"/>
             <a:r>
-              <a:rPr sz="3200" b="1">
-                <a:solidFill>
-                  <a:srgbClr val="1F1D1A"/>
+              <a:rPr sz="3000" b="1">
+                <a:solidFill>
+                  <a:srgbClr val="1F232B"/>
                 </a:solidFill>
                 <a:latin typeface="Malgun Gothic"/>
                 <a:ea typeface="Malgun Gothic"/>
                 <a:cs typeface="Malgun Gothic"/>
               </a:rPr>
-              <a:t>① 30초 설정 — 학과는 고르기만</a:t>
-            </a:r>
-          </a:p>
-        </p:txBody>
-      </p:sp>
-      <p:sp>
-        <p:nvSpPr>
-          <p:cNvPr id="3" name="TextBox 2"/>
-          <p:cNvSpPr txBox="1"/>
-          <p:nvPr/>
-        </p:nvSpPr>
-        <p:spPr>
-          <a:xfrm>
-            <a:off x="548640" y="1024128"/>
-            <a:ext cx="11064240" cy="411480"/>
-          </a:xfrm>
-          <a:prstGeom prst="rect">
-            <a:avLst/>
-          </a:prstGeom>
-          <a:noFill/>
-        </p:spPr>
-        <p:txBody>
-          <a:bodyPr wrap="square" lIns="0" rIns="0" tIns="0" bIns="0" anchor="t">
-            <a:spAutoFit/>
-          </a:bodyPr>
-          <a:lstStyle/>
-          <a:p>
-            <a:pPr algn="l"/>
-            <a:r>
-              <a:rPr sz="1600" b="0">
-                <a:solidFill>
-                  <a:srgbClr val="6B6862"/>
-                </a:solidFill>
-                <a:latin typeface="Malgun Gothic"/>
-                <a:ea typeface="Malgun Gothic"/>
-                <a:cs typeface="Malgun Gothic"/>
-              </a:rPr>
-              <a:t>웹과 휴대폰에서 똑같이 동작합니다</a:t>
-            </a:r>
-          </a:p>
-        </p:txBody>
-      </p:sp>
-      <p:sp>
-        <p:nvSpPr>
-          <p:cNvPr id="4" name="Rounded Rectangle 3"/>
+              <a:t>AI는 이렇게 긴 공지를 정리합니다</a:t>
+            </a:r>
+          </a:p>
+        </p:txBody>
+      </p:sp>
+      <p:sp>
+        <p:nvSpPr>
+          <p:cNvPr id="3" name="Oval 2"/>
           <p:cNvSpPr/>
           <p:nvPr/>
         </p:nvSpPr>
         <p:spPr>
           <a:xfrm>
-            <a:off x="539496" y="1728216"/>
-            <a:ext cx="6144768" cy="4155948"/>
-          </a:xfrm>
-          <a:prstGeom prst="roundRect">
-            <a:avLst>
-              <a:gd name="adj" fmla="val 3000"/>
-            </a:avLst>
+            <a:off x="594360" y="1417320"/>
+            <a:ext cx="411480" cy="411480"/>
+          </a:xfrm>
+          <a:prstGeom prst="ellipse">
+            <a:avLst/>
           </a:prstGeom>
           <a:solidFill>
-            <a:srgbClr val="262A33"/>
+            <a:srgbClr val="0058B2"/>
           </a:solidFill>
           <a:ln>
             <a:noFill/>
           </a:ln>
+          <a:effectLst/>
         </p:spPr>
         <p:style>
           <a:lnRef idx="1">
@@ -6264,20 +7158,144 @@
       </p:sp>
       <p:sp>
         <p:nvSpPr>
-          <p:cNvPr id="5" name="Oval 4"/>
+          <p:cNvPr id="4" name="TextBox 3"/>
+          <p:cNvSpPr txBox="1"/>
+          <p:nvPr/>
+        </p:nvSpPr>
+        <p:spPr>
+          <a:xfrm>
+            <a:off x="594360" y="1417320"/>
+            <a:ext cx="411480" cy="411480"/>
+          </a:xfrm>
+          <a:prstGeom prst="rect">
+            <a:avLst/>
+          </a:prstGeom>
+          <a:noFill/>
+        </p:spPr>
+        <p:txBody>
+          <a:bodyPr wrap="square" lIns="0" rIns="0" tIns="0" bIns="0" anchor="ctr">
+            <a:spAutoFit/>
+          </a:bodyPr>
+          <a:lstStyle/>
+          <a:p>
+            <a:pPr algn="ctr"/>
+            <a:r>
+              <a:rPr sz="1400" b="1">
+                <a:solidFill>
+                  <a:srgbClr val="FFFFFF"/>
+                </a:solidFill>
+                <a:latin typeface="Malgun Gothic"/>
+                <a:ea typeface="Malgun Gothic"/>
+                <a:cs typeface="Malgun Gothic"/>
+              </a:rPr>
+              <a:t>1</a:t>
+            </a:r>
+          </a:p>
+        </p:txBody>
+      </p:sp>
+      <p:sp>
+        <p:nvSpPr>
+          <p:cNvPr id="5" name="TextBox 4"/>
+          <p:cNvSpPr txBox="1"/>
+          <p:nvPr/>
+        </p:nvSpPr>
+        <p:spPr>
+          <a:xfrm>
+            <a:off x="1097280" y="1444752"/>
+            <a:ext cx="2926080" cy="365760"/>
+          </a:xfrm>
+          <a:prstGeom prst="rect">
+            <a:avLst/>
+          </a:prstGeom>
+          <a:noFill/>
+        </p:spPr>
+        <p:txBody>
+          <a:bodyPr wrap="square" lIns="0" rIns="0" tIns="0" bIns="0" anchor="t">
+            <a:spAutoFit/>
+          </a:bodyPr>
+          <a:lstStyle/>
+          <a:p>
+            <a:pPr algn="l"/>
+            <a:r>
+              <a:rPr sz="1600" b="1">
+                <a:solidFill>
+                  <a:srgbClr val="1F232B"/>
+                </a:solidFill>
+                <a:latin typeface="Malgun Gothic"/>
+                <a:ea typeface="Malgun Gothic"/>
+                <a:cs typeface="Malgun Gothic"/>
+              </a:rPr>
+              <a:t>학교 공지 원문</a:t>
+            </a:r>
+          </a:p>
+        </p:txBody>
+      </p:sp>
+      <p:sp>
+        <p:nvSpPr>
+          <p:cNvPr id="6" name="Rounded Rectangle 5"/>
           <p:cNvSpPr/>
           <p:nvPr/>
         </p:nvSpPr>
         <p:spPr>
           <a:xfrm>
-            <a:off x="704088" y="1865376"/>
-            <a:ext cx="100584" cy="100584"/>
-          </a:xfrm>
-          <a:prstGeom prst="ellipse">
-            <a:avLst/>
+            <a:off x="594360" y="2011680"/>
+            <a:ext cx="3246120" cy="3017520"/>
+          </a:xfrm>
+          <a:prstGeom prst="roundRect">
+            <a:avLst>
+              <a:gd name="adj" fmla="val 5000"/>
+            </a:avLst>
           </a:prstGeom>
           <a:solidFill>
-            <a:srgbClr val="FF5F57"/>
+            <a:srgbClr val="FFFFFF"/>
+          </a:solidFill>
+          <a:ln w="12700">
+            <a:solidFill>
+              <a:srgbClr val="DDE3EA"/>
+            </a:solidFill>
+          </a:ln>
+          <a:effectLst/>
+        </p:spPr>
+        <p:style>
+          <a:lnRef idx="1">
+            <a:schemeClr val="accent1"/>
+          </a:lnRef>
+          <a:fillRef idx="3">
+            <a:schemeClr val="accent1"/>
+          </a:fillRef>
+          <a:effectRef idx="2">
+            <a:schemeClr val="accent1"/>
+          </a:effectRef>
+          <a:fontRef idx="minor">
+            <a:schemeClr val="lt1"/>
+          </a:fontRef>
+        </p:style>
+        <p:txBody>
+          <a:bodyPr rtlCol="0" anchor="ctr"/>
+          <a:lstStyle/>
+          <a:p>
+            <a:pPr algn="ctr"/>
+          </a:p>
+        </p:txBody>
+      </p:sp>
+      <p:sp>
+        <p:nvSpPr>
+          <p:cNvPr id="7" name="Rounded Rectangle 6"/>
+          <p:cNvSpPr/>
+          <p:nvPr/>
+        </p:nvSpPr>
+        <p:spPr>
+          <a:xfrm>
+            <a:off x="822960" y="2240280"/>
+            <a:ext cx="2743200" cy="91440"/>
+          </a:xfrm>
+          <a:prstGeom prst="roundRect">
+            <a:avLst>
+              <a:gd name="adj" fmla="val 50000"/>
+            </a:avLst>
+          </a:prstGeom>
+          <a:solidFill>
+            <a:srgbClr val="DDE3EA"/>
           </a:solidFill>
           <a:ln>
             <a:noFill/>
@@ -6308,20 +7326,22 @@
       </p:sp>
       <p:sp>
         <p:nvSpPr>
-          <p:cNvPr id="6" name="Oval 5"/>
+          <p:cNvPr id="8" name="Rounded Rectangle 7"/>
           <p:cNvSpPr/>
           <p:nvPr/>
         </p:nvSpPr>
         <p:spPr>
           <a:xfrm>
-            <a:off x="868680" y="1865376"/>
-            <a:ext cx="100584" cy="100584"/>
-          </a:xfrm>
-          <a:prstGeom prst="ellipse">
-            <a:avLst/>
+            <a:off x="822960" y="2468880"/>
+            <a:ext cx="2468880" cy="91440"/>
+          </a:xfrm>
+          <a:prstGeom prst="roundRect">
+            <a:avLst>
+              <a:gd name="adj" fmla="val 50000"/>
+            </a:avLst>
           </a:prstGeom>
           <a:solidFill>
-            <a:srgbClr val="FEBC2E"/>
+            <a:srgbClr val="DDE3EA"/>
           </a:solidFill>
           <a:ln>
             <a:noFill/>
@@ -6352,20 +7372,22 @@
       </p:sp>
       <p:sp>
         <p:nvSpPr>
-          <p:cNvPr id="7" name="Oval 6"/>
+          <p:cNvPr id="9" name="Rounded Rectangle 8"/>
           <p:cNvSpPr/>
           <p:nvPr/>
         </p:nvSpPr>
         <p:spPr>
           <a:xfrm>
-            <a:off x="1033271" y="1865376"/>
-            <a:ext cx="100584" cy="100584"/>
-          </a:xfrm>
-          <a:prstGeom prst="ellipse">
-            <a:avLst/>
+            <a:off x="822960" y="2697480"/>
+            <a:ext cx="2834640" cy="91440"/>
+          </a:xfrm>
+          <a:prstGeom prst="roundRect">
+            <a:avLst>
+              <a:gd name="adj" fmla="val 50000"/>
+            </a:avLst>
           </a:prstGeom>
           <a:solidFill>
-            <a:srgbClr val="28C840"/>
+            <a:srgbClr val="DDE3EA"/>
           </a:solidFill>
           <a:ln>
             <a:noFill/>
@@ -6396,14 +7418,14 @@
       </p:sp>
       <p:sp>
         <p:nvSpPr>
-          <p:cNvPr id="8" name="Rounded Rectangle 7"/>
+          <p:cNvPr id="10" name="Rounded Rectangle 9"/>
           <p:cNvSpPr/>
           <p:nvPr/>
         </p:nvSpPr>
         <p:spPr>
           <a:xfrm>
-            <a:off x="1280160" y="1828800"/>
-            <a:ext cx="5120640" cy="182880"/>
+            <a:off x="822960" y="2926080"/>
+            <a:ext cx="2011680" cy="91440"/>
           </a:xfrm>
           <a:prstGeom prst="roundRect">
             <a:avLst>
@@ -6411,7 +7433,7 @@
             </a:avLst>
           </a:prstGeom>
           <a:solidFill>
-            <a:srgbClr val="3A3F4A"/>
+            <a:srgbClr val="DDE3EA"/>
           </a:solidFill>
           <a:ln>
             <a:noFill/>
@@ -6442,14 +7464,290 @@
       </p:sp>
       <p:sp>
         <p:nvSpPr>
-          <p:cNvPr id="9" name="TextBox 8"/>
+          <p:cNvPr id="11" name="Rounded Rectangle 10"/>
+          <p:cNvSpPr/>
+          <p:nvPr/>
+        </p:nvSpPr>
+        <p:spPr>
+          <a:xfrm>
+            <a:off x="822960" y="3154680"/>
+            <a:ext cx="2651760" cy="91440"/>
+          </a:xfrm>
+          <a:prstGeom prst="roundRect">
+            <a:avLst>
+              <a:gd name="adj" fmla="val 50000"/>
+            </a:avLst>
+          </a:prstGeom>
+          <a:solidFill>
+            <a:srgbClr val="DDE3EA"/>
+          </a:solidFill>
+          <a:ln>
+            <a:noFill/>
+          </a:ln>
+          <a:effectLst/>
+        </p:spPr>
+        <p:style>
+          <a:lnRef idx="1">
+            <a:schemeClr val="accent1"/>
+          </a:lnRef>
+          <a:fillRef idx="3">
+            <a:schemeClr val="accent1"/>
+          </a:fillRef>
+          <a:effectRef idx="2">
+            <a:schemeClr val="accent1"/>
+          </a:effectRef>
+          <a:fontRef idx="minor">
+            <a:schemeClr val="lt1"/>
+          </a:fontRef>
+        </p:style>
+        <p:txBody>
+          <a:bodyPr rtlCol="0" anchor="ctr"/>
+          <a:lstStyle/>
+          <a:p>
+            <a:pPr algn="ctr"/>
+          </a:p>
+        </p:txBody>
+      </p:sp>
+      <p:sp>
+        <p:nvSpPr>
+          <p:cNvPr id="12" name="Rounded Rectangle 11"/>
+          <p:cNvSpPr/>
+          <p:nvPr/>
+        </p:nvSpPr>
+        <p:spPr>
+          <a:xfrm>
+            <a:off x="822960" y="3383280"/>
+            <a:ext cx="2743200" cy="91440"/>
+          </a:xfrm>
+          <a:prstGeom prst="roundRect">
+            <a:avLst>
+              <a:gd name="adj" fmla="val 50000"/>
+            </a:avLst>
+          </a:prstGeom>
+          <a:solidFill>
+            <a:srgbClr val="DDE3EA"/>
+          </a:solidFill>
+          <a:ln>
+            <a:noFill/>
+          </a:ln>
+          <a:effectLst/>
+        </p:spPr>
+        <p:style>
+          <a:lnRef idx="1">
+            <a:schemeClr val="accent1"/>
+          </a:lnRef>
+          <a:fillRef idx="3">
+            <a:schemeClr val="accent1"/>
+          </a:fillRef>
+          <a:effectRef idx="2">
+            <a:schemeClr val="accent1"/>
+          </a:effectRef>
+          <a:fontRef idx="minor">
+            <a:schemeClr val="lt1"/>
+          </a:fontRef>
+        </p:style>
+        <p:txBody>
+          <a:bodyPr rtlCol="0" anchor="ctr"/>
+          <a:lstStyle/>
+          <a:p>
+            <a:pPr algn="ctr"/>
+          </a:p>
+        </p:txBody>
+      </p:sp>
+      <p:sp>
+        <p:nvSpPr>
+          <p:cNvPr id="13" name="Rounded Rectangle 12"/>
+          <p:cNvSpPr/>
+          <p:nvPr/>
+        </p:nvSpPr>
+        <p:spPr>
+          <a:xfrm>
+            <a:off x="822960" y="3611880"/>
+            <a:ext cx="1737360" cy="91440"/>
+          </a:xfrm>
+          <a:prstGeom prst="roundRect">
+            <a:avLst>
+              <a:gd name="adj" fmla="val 50000"/>
+            </a:avLst>
+          </a:prstGeom>
+          <a:solidFill>
+            <a:srgbClr val="DDE3EA"/>
+          </a:solidFill>
+          <a:ln>
+            <a:noFill/>
+          </a:ln>
+          <a:effectLst/>
+        </p:spPr>
+        <p:style>
+          <a:lnRef idx="1">
+            <a:schemeClr val="accent1"/>
+          </a:lnRef>
+          <a:fillRef idx="3">
+            <a:schemeClr val="accent1"/>
+          </a:fillRef>
+          <a:effectRef idx="2">
+            <a:schemeClr val="accent1"/>
+          </a:effectRef>
+          <a:fontRef idx="minor">
+            <a:schemeClr val="lt1"/>
+          </a:fontRef>
+        </p:style>
+        <p:txBody>
+          <a:bodyPr rtlCol="0" anchor="ctr"/>
+          <a:lstStyle/>
+          <a:p>
+            <a:pPr algn="ctr"/>
+          </a:p>
+        </p:txBody>
+      </p:sp>
+      <p:sp>
+        <p:nvSpPr>
+          <p:cNvPr id="14" name="Rounded Rectangle 13"/>
+          <p:cNvSpPr/>
+          <p:nvPr/>
+        </p:nvSpPr>
+        <p:spPr>
+          <a:xfrm>
+            <a:off x="822960" y="3840480"/>
+            <a:ext cx="2560320" cy="91440"/>
+          </a:xfrm>
+          <a:prstGeom prst="roundRect">
+            <a:avLst>
+              <a:gd name="adj" fmla="val 50000"/>
+            </a:avLst>
+          </a:prstGeom>
+          <a:solidFill>
+            <a:srgbClr val="DDE3EA"/>
+          </a:solidFill>
+          <a:ln>
+            <a:noFill/>
+          </a:ln>
+          <a:effectLst/>
+        </p:spPr>
+        <p:style>
+          <a:lnRef idx="1">
+            <a:schemeClr val="accent1"/>
+          </a:lnRef>
+          <a:fillRef idx="3">
+            <a:schemeClr val="accent1"/>
+          </a:fillRef>
+          <a:effectRef idx="2">
+            <a:schemeClr val="accent1"/>
+          </a:effectRef>
+          <a:fontRef idx="minor">
+            <a:schemeClr val="lt1"/>
+          </a:fontRef>
+        </p:style>
+        <p:txBody>
+          <a:bodyPr rtlCol="0" anchor="ctr"/>
+          <a:lstStyle/>
+          <a:p>
+            <a:pPr algn="ctr"/>
+          </a:p>
+        </p:txBody>
+      </p:sp>
+      <p:sp>
+        <p:nvSpPr>
+          <p:cNvPr id="15" name="Rounded Rectangle 14"/>
+          <p:cNvSpPr/>
+          <p:nvPr/>
+        </p:nvSpPr>
+        <p:spPr>
+          <a:xfrm>
+            <a:off x="822960" y="4069080"/>
+            <a:ext cx="2286000" cy="91440"/>
+          </a:xfrm>
+          <a:prstGeom prst="roundRect">
+            <a:avLst>
+              <a:gd name="adj" fmla="val 50000"/>
+            </a:avLst>
+          </a:prstGeom>
+          <a:solidFill>
+            <a:srgbClr val="DDE3EA"/>
+          </a:solidFill>
+          <a:ln>
+            <a:noFill/>
+          </a:ln>
+          <a:effectLst/>
+        </p:spPr>
+        <p:style>
+          <a:lnRef idx="1">
+            <a:schemeClr val="accent1"/>
+          </a:lnRef>
+          <a:fillRef idx="3">
+            <a:schemeClr val="accent1"/>
+          </a:fillRef>
+          <a:effectRef idx="2">
+            <a:schemeClr val="accent1"/>
+          </a:effectRef>
+          <a:fontRef idx="minor">
+            <a:schemeClr val="lt1"/>
+          </a:fontRef>
+        </p:style>
+        <p:txBody>
+          <a:bodyPr rtlCol="0" anchor="ctr"/>
+          <a:lstStyle/>
+          <a:p>
+            <a:pPr algn="ctr"/>
+          </a:p>
+        </p:txBody>
+      </p:sp>
+      <p:sp>
+        <p:nvSpPr>
+          <p:cNvPr id="16" name="Rounded Rectangle 15"/>
+          <p:cNvSpPr/>
+          <p:nvPr/>
+        </p:nvSpPr>
+        <p:spPr>
+          <a:xfrm>
+            <a:off x="822960" y="4434840"/>
+            <a:ext cx="1188720" cy="365760"/>
+          </a:xfrm>
+          <a:prstGeom prst="roundRect">
+            <a:avLst>
+              <a:gd name="adj" fmla="val 50000"/>
+            </a:avLst>
+          </a:prstGeom>
+          <a:solidFill>
+            <a:srgbClr val="EEF4FB"/>
+          </a:solidFill>
+          <a:ln>
+            <a:noFill/>
+          </a:ln>
+          <a:effectLst/>
+        </p:spPr>
+        <p:style>
+          <a:lnRef idx="1">
+            <a:schemeClr val="accent1"/>
+          </a:lnRef>
+          <a:fillRef idx="3">
+            <a:schemeClr val="accent1"/>
+          </a:fillRef>
+          <a:effectRef idx="2">
+            <a:schemeClr val="accent1"/>
+          </a:effectRef>
+          <a:fontRef idx="minor">
+            <a:schemeClr val="lt1"/>
+          </a:fontRef>
+        </p:style>
+        <p:txBody>
+          <a:bodyPr rtlCol="0" anchor="ctr"/>
+          <a:lstStyle/>
+          <a:p>
+            <a:pPr algn="ctr"/>
+          </a:p>
+        </p:txBody>
+      </p:sp>
+      <p:sp>
+        <p:nvSpPr>
+          <p:cNvPr id="17" name="TextBox 16"/>
           <p:cNvSpPr txBox="1"/>
           <p:nvPr/>
         </p:nvSpPr>
         <p:spPr>
           <a:xfrm>
-            <a:off x="1417320" y="1828800"/>
-            <a:ext cx="4846320" cy="182880"/>
+            <a:off x="822960" y="4434840"/>
+            <a:ext cx="1188720" cy="365760"/>
           </a:xfrm>
           <a:prstGeom prst="rect">
             <a:avLst/>
@@ -6462,24 +7760,965 @@
           </a:bodyPr>
           <a:lstStyle/>
           <a:p>
-            <a:pPr algn="l"/>
-            <a:r>
-              <a:rPr sz="900" b="0">
-                <a:solidFill>
-                  <a:srgbClr val="C9CED6"/>
+            <a:pPr algn="ctr"/>
+            <a:r>
+              <a:rPr sz="1100" b="1">
+                <a:solidFill>
+                  <a:srgbClr val="0058B2"/>
                 </a:solidFill>
                 <a:latin typeface="Malgun Gothic"/>
                 <a:ea typeface="Malgun Gothic"/>
                 <a:cs typeface="Malgun Gothic"/>
               </a:rPr>
-              <a:t>scnuaram.vercel.app</a:t>
-            </a:r>
+              <a:t>첨부.hwp</a:t>
+            </a:r>
+          </a:p>
+        </p:txBody>
+      </p:sp>
+      <p:sp>
+        <p:nvSpPr>
+          <p:cNvPr id="18" name="Rounded Rectangle 17"/>
+          <p:cNvSpPr/>
+          <p:nvPr/>
+        </p:nvSpPr>
+        <p:spPr>
+          <a:xfrm>
+            <a:off x="2148840" y="4434840"/>
+            <a:ext cx="1188720" cy="365760"/>
+          </a:xfrm>
+          <a:prstGeom prst="roundRect">
+            <a:avLst>
+              <a:gd name="adj" fmla="val 50000"/>
+            </a:avLst>
+          </a:prstGeom>
+          <a:solidFill>
+            <a:srgbClr val="EEF4FB"/>
+          </a:solidFill>
+          <a:ln>
+            <a:noFill/>
+          </a:ln>
+          <a:effectLst/>
+        </p:spPr>
+        <p:style>
+          <a:lnRef idx="1">
+            <a:schemeClr val="accent1"/>
+          </a:lnRef>
+          <a:fillRef idx="3">
+            <a:schemeClr val="accent1"/>
+          </a:fillRef>
+          <a:effectRef idx="2">
+            <a:schemeClr val="accent1"/>
+          </a:effectRef>
+          <a:fontRef idx="minor">
+            <a:schemeClr val="lt1"/>
+          </a:fontRef>
+        </p:style>
+        <p:txBody>
+          <a:bodyPr rtlCol="0" anchor="ctr"/>
+          <a:lstStyle/>
+          <a:p>
+            <a:pPr algn="ctr"/>
+          </a:p>
+        </p:txBody>
+      </p:sp>
+      <p:sp>
+        <p:nvSpPr>
+          <p:cNvPr id="19" name="TextBox 18"/>
+          <p:cNvSpPr txBox="1"/>
+          <p:nvPr/>
+        </p:nvSpPr>
+        <p:spPr>
+          <a:xfrm>
+            <a:off x="2148840" y="4434840"/>
+            <a:ext cx="1188720" cy="365760"/>
+          </a:xfrm>
+          <a:prstGeom prst="rect">
+            <a:avLst/>
+          </a:prstGeom>
+          <a:noFill/>
+        </p:spPr>
+        <p:txBody>
+          <a:bodyPr wrap="square" lIns="0" rIns="0" tIns="0" bIns="0" anchor="ctr">
+            <a:spAutoFit/>
+          </a:bodyPr>
+          <a:lstStyle/>
+          <a:p>
+            <a:pPr algn="ctr"/>
+            <a:r>
+              <a:rPr sz="1100" b="1">
+                <a:solidFill>
+                  <a:srgbClr val="0058B2"/>
+                </a:solidFill>
+                <a:latin typeface="Malgun Gothic"/>
+                <a:ea typeface="Malgun Gothic"/>
+                <a:cs typeface="Malgun Gothic"/>
+              </a:rPr>
+              <a:t>안내.pdf</a:t>
+            </a:r>
+          </a:p>
+        </p:txBody>
+      </p:sp>
+      <p:sp>
+        <p:nvSpPr>
+          <p:cNvPr id="20" name="Right Arrow 19"/>
+          <p:cNvSpPr/>
+          <p:nvPr/>
+        </p:nvSpPr>
+        <p:spPr>
+          <a:xfrm>
+            <a:off x="3977639" y="3291840"/>
+            <a:ext cx="329184" cy="365760"/>
+          </a:xfrm>
+          <a:prstGeom prst="rightArrow">
+            <a:avLst/>
+          </a:prstGeom>
+          <a:solidFill>
+            <a:srgbClr val="B8C1CC"/>
+          </a:solidFill>
+          <a:ln>
+            <a:noFill/>
+          </a:ln>
+          <a:effectLst/>
+        </p:spPr>
+        <p:style>
+          <a:lnRef idx="1">
+            <a:schemeClr val="accent1"/>
+          </a:lnRef>
+          <a:fillRef idx="3">
+            <a:schemeClr val="accent1"/>
+          </a:fillRef>
+          <a:effectRef idx="2">
+            <a:schemeClr val="accent1"/>
+          </a:effectRef>
+          <a:fontRef idx="minor">
+            <a:schemeClr val="lt1"/>
+          </a:fontRef>
+        </p:style>
+        <p:txBody>
+          <a:bodyPr rtlCol="0" anchor="ctr"/>
+          <a:lstStyle/>
+          <a:p>
+            <a:pPr algn="ctr"/>
+          </a:p>
+        </p:txBody>
+      </p:sp>
+      <p:sp>
+        <p:nvSpPr>
+          <p:cNvPr id="21" name="Oval 20"/>
+          <p:cNvSpPr/>
+          <p:nvPr/>
+        </p:nvSpPr>
+        <p:spPr>
+          <a:xfrm>
+            <a:off x="4480560" y="1417320"/>
+            <a:ext cx="411480" cy="411480"/>
+          </a:xfrm>
+          <a:prstGeom prst="ellipse">
+            <a:avLst/>
+          </a:prstGeom>
+          <a:solidFill>
+            <a:srgbClr val="0058B2"/>
+          </a:solidFill>
+          <a:ln>
+            <a:noFill/>
+          </a:ln>
+          <a:effectLst/>
+        </p:spPr>
+        <p:style>
+          <a:lnRef idx="1">
+            <a:schemeClr val="accent1"/>
+          </a:lnRef>
+          <a:fillRef idx="3">
+            <a:schemeClr val="accent1"/>
+          </a:fillRef>
+          <a:effectRef idx="2">
+            <a:schemeClr val="accent1"/>
+          </a:effectRef>
+          <a:fontRef idx="minor">
+            <a:schemeClr val="lt1"/>
+          </a:fontRef>
+        </p:style>
+        <p:txBody>
+          <a:bodyPr rtlCol="0" anchor="ctr"/>
+          <a:lstStyle/>
+          <a:p>
+            <a:pPr algn="ctr"/>
+          </a:p>
+        </p:txBody>
+      </p:sp>
+      <p:sp>
+        <p:nvSpPr>
+          <p:cNvPr id="22" name="TextBox 21"/>
+          <p:cNvSpPr txBox="1"/>
+          <p:nvPr/>
+        </p:nvSpPr>
+        <p:spPr>
+          <a:xfrm>
+            <a:off x="4480560" y="1417320"/>
+            <a:ext cx="411480" cy="411480"/>
+          </a:xfrm>
+          <a:prstGeom prst="rect">
+            <a:avLst/>
+          </a:prstGeom>
+          <a:noFill/>
+        </p:spPr>
+        <p:txBody>
+          <a:bodyPr wrap="square" lIns="0" rIns="0" tIns="0" bIns="0" anchor="ctr">
+            <a:spAutoFit/>
+          </a:bodyPr>
+          <a:lstStyle/>
+          <a:p>
+            <a:pPr algn="ctr"/>
+            <a:r>
+              <a:rPr sz="1400" b="1">
+                <a:solidFill>
+                  <a:srgbClr val="FFFFFF"/>
+                </a:solidFill>
+                <a:latin typeface="Malgun Gothic"/>
+                <a:ea typeface="Malgun Gothic"/>
+                <a:cs typeface="Malgun Gothic"/>
+              </a:rPr>
+              <a:t>2</a:t>
+            </a:r>
+          </a:p>
+        </p:txBody>
+      </p:sp>
+      <p:sp>
+        <p:nvSpPr>
+          <p:cNvPr id="23" name="TextBox 22"/>
+          <p:cNvSpPr txBox="1"/>
+          <p:nvPr/>
+        </p:nvSpPr>
+        <p:spPr>
+          <a:xfrm>
+            <a:off x="4983480" y="1444752"/>
+            <a:ext cx="2743200" cy="365760"/>
+          </a:xfrm>
+          <a:prstGeom prst="rect">
+            <a:avLst/>
+          </a:prstGeom>
+          <a:noFill/>
+        </p:spPr>
+        <p:txBody>
+          <a:bodyPr wrap="square" lIns="0" rIns="0" tIns="0" bIns="0" anchor="t">
+            <a:spAutoFit/>
+          </a:bodyPr>
+          <a:lstStyle/>
+          <a:p>
+            <a:pPr algn="l"/>
+            <a:r>
+              <a:rPr sz="1600" b="1">
+                <a:solidFill>
+                  <a:srgbClr val="1F232B"/>
+                </a:solidFill>
+                <a:latin typeface="Malgun Gothic"/>
+                <a:ea typeface="Malgun Gothic"/>
+                <a:cs typeface="Malgun Gothic"/>
+              </a:rPr>
+              <a:t>AI가 읽고 판단</a:t>
+            </a:r>
+          </a:p>
+        </p:txBody>
+      </p:sp>
+      <p:sp>
+        <p:nvSpPr>
+          <p:cNvPr id="24" name="Rounded Rectangle 23"/>
+          <p:cNvSpPr/>
+          <p:nvPr/>
+        </p:nvSpPr>
+        <p:spPr>
+          <a:xfrm>
+            <a:off x="4480560" y="2011680"/>
+            <a:ext cx="3063240" cy="621792"/>
+          </a:xfrm>
+          <a:prstGeom prst="roundRect">
+            <a:avLst>
+              <a:gd name="adj" fmla="val 12000"/>
+            </a:avLst>
+          </a:prstGeom>
+          <a:solidFill>
+            <a:srgbClr val="FFFFFF"/>
+          </a:solidFill>
+          <a:ln w="12700">
+            <a:solidFill>
+              <a:srgbClr val="DDE3EA"/>
+            </a:solidFill>
+          </a:ln>
+          <a:effectLst/>
+        </p:spPr>
+        <p:style>
+          <a:lnRef idx="1">
+            <a:schemeClr val="accent1"/>
+          </a:lnRef>
+          <a:fillRef idx="3">
+            <a:schemeClr val="accent1"/>
+          </a:fillRef>
+          <a:effectRef idx="2">
+            <a:schemeClr val="accent1"/>
+          </a:effectRef>
+          <a:fontRef idx="minor">
+            <a:schemeClr val="lt1"/>
+          </a:fontRef>
+        </p:style>
+        <p:txBody>
+          <a:bodyPr rtlCol="0" anchor="ctr"/>
+          <a:lstStyle/>
+          <a:p>
+            <a:pPr algn="ctr"/>
+          </a:p>
+        </p:txBody>
+      </p:sp>
+      <p:sp>
+        <p:nvSpPr>
+          <p:cNvPr id="25" name="TextBox 24"/>
+          <p:cNvSpPr txBox="1"/>
+          <p:nvPr/>
+        </p:nvSpPr>
+        <p:spPr>
+          <a:xfrm>
+            <a:off x="4663440" y="2011680"/>
+            <a:ext cx="640080" cy="621792"/>
+          </a:xfrm>
+          <a:prstGeom prst="rect">
+            <a:avLst/>
+          </a:prstGeom>
+          <a:noFill/>
+        </p:spPr>
+        <p:txBody>
+          <a:bodyPr wrap="square" lIns="0" rIns="0" tIns="0" bIns="0" anchor="ctr">
+            <a:spAutoFit/>
+          </a:bodyPr>
+          <a:lstStyle/>
+          <a:p>
+            <a:pPr algn="l"/>
+            <a:r>
+              <a:rPr sz="1200" b="1">
+                <a:solidFill>
+                  <a:srgbClr val="0058B2"/>
+                </a:solidFill>
+                <a:latin typeface="Malgun Gothic"/>
+                <a:ea typeface="Malgun Gothic"/>
+                <a:cs typeface="Malgun Gothic"/>
+              </a:rPr>
+              <a:t>분야</a:t>
+            </a:r>
+          </a:p>
+        </p:txBody>
+      </p:sp>
+      <p:sp>
+        <p:nvSpPr>
+          <p:cNvPr id="26" name="TextBox 25"/>
+          <p:cNvSpPr txBox="1"/>
+          <p:nvPr/>
+        </p:nvSpPr>
+        <p:spPr>
+          <a:xfrm>
+            <a:off x="5303520" y="2011680"/>
+            <a:ext cx="2194560" cy="621792"/>
+          </a:xfrm>
+          <a:prstGeom prst="rect">
+            <a:avLst/>
+          </a:prstGeom>
+          <a:noFill/>
+        </p:spPr>
+        <p:txBody>
+          <a:bodyPr wrap="square" lIns="0" rIns="0" tIns="0" bIns="0" anchor="ctr">
+            <a:spAutoFit/>
+          </a:bodyPr>
+          <a:lstStyle/>
+          <a:p>
+            <a:pPr algn="l"/>
+            <a:r>
+              <a:rPr sz="1200" b="0">
+                <a:solidFill>
+                  <a:srgbClr val="1F232B"/>
+                </a:solidFill>
+                <a:latin typeface="Malgun Gothic"/>
+                <a:ea typeface="Malgun Gothic"/>
+                <a:cs typeface="Malgun Gothic"/>
+              </a:rPr>
+              <a:t>장학 · 취업 · 공모전 · 자격증 …</a:t>
+            </a:r>
+          </a:p>
+        </p:txBody>
+      </p:sp>
+      <p:sp>
+        <p:nvSpPr>
+          <p:cNvPr id="27" name="Rounded Rectangle 26"/>
+          <p:cNvSpPr/>
+          <p:nvPr/>
+        </p:nvSpPr>
+        <p:spPr>
+          <a:xfrm>
+            <a:off x="4480560" y="2779776"/>
+            <a:ext cx="3063240" cy="621792"/>
+          </a:xfrm>
+          <a:prstGeom prst="roundRect">
+            <a:avLst>
+              <a:gd name="adj" fmla="val 12000"/>
+            </a:avLst>
+          </a:prstGeom>
+          <a:solidFill>
+            <a:srgbClr val="FFFFFF"/>
+          </a:solidFill>
+          <a:ln w="12700">
+            <a:solidFill>
+              <a:srgbClr val="DDE3EA"/>
+            </a:solidFill>
+          </a:ln>
+          <a:effectLst/>
+        </p:spPr>
+        <p:style>
+          <a:lnRef idx="1">
+            <a:schemeClr val="accent1"/>
+          </a:lnRef>
+          <a:fillRef idx="3">
+            <a:schemeClr val="accent1"/>
+          </a:fillRef>
+          <a:effectRef idx="2">
+            <a:schemeClr val="accent1"/>
+          </a:effectRef>
+          <a:fontRef idx="minor">
+            <a:schemeClr val="lt1"/>
+          </a:fontRef>
+        </p:style>
+        <p:txBody>
+          <a:bodyPr rtlCol="0" anchor="ctr"/>
+          <a:lstStyle/>
+          <a:p>
+            <a:pPr algn="ctr"/>
+          </a:p>
+        </p:txBody>
+      </p:sp>
+      <p:sp>
+        <p:nvSpPr>
+          <p:cNvPr id="28" name="TextBox 27"/>
+          <p:cNvSpPr txBox="1"/>
+          <p:nvPr/>
+        </p:nvSpPr>
+        <p:spPr>
+          <a:xfrm>
+            <a:off x="4663440" y="2779776"/>
+            <a:ext cx="640080" cy="621792"/>
+          </a:xfrm>
+          <a:prstGeom prst="rect">
+            <a:avLst/>
+          </a:prstGeom>
+          <a:noFill/>
+        </p:spPr>
+        <p:txBody>
+          <a:bodyPr wrap="square" lIns="0" rIns="0" tIns="0" bIns="0" anchor="ctr">
+            <a:spAutoFit/>
+          </a:bodyPr>
+          <a:lstStyle/>
+          <a:p>
+            <a:pPr algn="l"/>
+            <a:r>
+              <a:rPr sz="1200" b="1">
+                <a:solidFill>
+                  <a:srgbClr val="0058B2"/>
+                </a:solidFill>
+                <a:latin typeface="Malgun Gothic"/>
+                <a:ea typeface="Malgun Gothic"/>
+                <a:cs typeface="Malgun Gothic"/>
+              </a:rPr>
+              <a:t>대상</a:t>
+            </a:r>
+          </a:p>
+        </p:txBody>
+      </p:sp>
+      <p:sp>
+        <p:nvSpPr>
+          <p:cNvPr id="29" name="TextBox 28"/>
+          <p:cNvSpPr txBox="1"/>
+          <p:nvPr/>
+        </p:nvSpPr>
+        <p:spPr>
+          <a:xfrm>
+            <a:off x="5303520" y="2779776"/>
+            <a:ext cx="2194560" cy="621792"/>
+          </a:xfrm>
+          <a:prstGeom prst="rect">
+            <a:avLst/>
+          </a:prstGeom>
+          <a:noFill/>
+        </p:spPr>
+        <p:txBody>
+          <a:bodyPr wrap="square" lIns="0" rIns="0" tIns="0" bIns="0" anchor="ctr">
+            <a:spAutoFit/>
+          </a:bodyPr>
+          <a:lstStyle/>
+          <a:p>
+            <a:pPr algn="l"/>
+            <a:r>
+              <a:rPr sz="1200" b="0">
+                <a:solidFill>
+                  <a:srgbClr val="1F232B"/>
+                </a:solidFill>
+                <a:latin typeface="Malgun Gothic"/>
+                <a:ea typeface="Malgun Gothic"/>
+                <a:cs typeface="Malgun Gothic"/>
+              </a:rPr>
+              <a:t>대학원생, 재학생, 신입생</a:t>
+            </a:r>
+          </a:p>
+        </p:txBody>
+      </p:sp>
+      <p:sp>
+        <p:nvSpPr>
+          <p:cNvPr id="30" name="Rounded Rectangle 29"/>
+          <p:cNvSpPr/>
+          <p:nvPr/>
+        </p:nvSpPr>
+        <p:spPr>
+          <a:xfrm>
+            <a:off x="4480560" y="3547872"/>
+            <a:ext cx="3063240" cy="621792"/>
+          </a:xfrm>
+          <a:prstGeom prst="roundRect">
+            <a:avLst>
+              <a:gd name="adj" fmla="val 12000"/>
+            </a:avLst>
+          </a:prstGeom>
+          <a:solidFill>
+            <a:srgbClr val="FFFFFF"/>
+          </a:solidFill>
+          <a:ln w="12700">
+            <a:solidFill>
+              <a:srgbClr val="DDE3EA"/>
+            </a:solidFill>
+          </a:ln>
+          <a:effectLst/>
+        </p:spPr>
+        <p:style>
+          <a:lnRef idx="1">
+            <a:schemeClr val="accent1"/>
+          </a:lnRef>
+          <a:fillRef idx="3">
+            <a:schemeClr val="accent1"/>
+          </a:fillRef>
+          <a:effectRef idx="2">
+            <a:schemeClr val="accent1"/>
+          </a:effectRef>
+          <a:fontRef idx="minor">
+            <a:schemeClr val="lt1"/>
+          </a:fontRef>
+        </p:style>
+        <p:txBody>
+          <a:bodyPr rtlCol="0" anchor="ctr"/>
+          <a:lstStyle/>
+          <a:p>
+            <a:pPr algn="ctr"/>
+          </a:p>
+        </p:txBody>
+      </p:sp>
+      <p:sp>
+        <p:nvSpPr>
+          <p:cNvPr id="31" name="TextBox 30"/>
+          <p:cNvSpPr txBox="1"/>
+          <p:nvPr/>
+        </p:nvSpPr>
+        <p:spPr>
+          <a:xfrm>
+            <a:off x="4663440" y="3547872"/>
+            <a:ext cx="640080" cy="621792"/>
+          </a:xfrm>
+          <a:prstGeom prst="rect">
+            <a:avLst/>
+          </a:prstGeom>
+          <a:noFill/>
+        </p:spPr>
+        <p:txBody>
+          <a:bodyPr wrap="square" lIns="0" rIns="0" tIns="0" bIns="0" anchor="ctr">
+            <a:spAutoFit/>
+          </a:bodyPr>
+          <a:lstStyle/>
+          <a:p>
+            <a:pPr algn="l"/>
+            <a:r>
+              <a:rPr sz="1200" b="1">
+                <a:solidFill>
+                  <a:srgbClr val="0058B2"/>
+                </a:solidFill>
+                <a:latin typeface="Malgun Gothic"/>
+                <a:ea typeface="Malgun Gothic"/>
+                <a:cs typeface="Malgun Gothic"/>
+              </a:rPr>
+              <a:t>마감</a:t>
+            </a:r>
+          </a:p>
+        </p:txBody>
+      </p:sp>
+      <p:sp>
+        <p:nvSpPr>
+          <p:cNvPr id="32" name="TextBox 31"/>
+          <p:cNvSpPr txBox="1"/>
+          <p:nvPr/>
+        </p:nvSpPr>
+        <p:spPr>
+          <a:xfrm>
+            <a:off x="5303520" y="3547872"/>
+            <a:ext cx="2194560" cy="621792"/>
+          </a:xfrm>
+          <a:prstGeom prst="rect">
+            <a:avLst/>
+          </a:prstGeom>
+          <a:noFill/>
+        </p:spPr>
+        <p:txBody>
+          <a:bodyPr wrap="square" lIns="0" rIns="0" tIns="0" bIns="0" anchor="ctr">
+            <a:spAutoFit/>
+          </a:bodyPr>
+          <a:lstStyle/>
+          <a:p>
+            <a:pPr algn="l"/>
+            <a:r>
+              <a:rPr sz="1200" b="0">
+                <a:solidFill>
+                  <a:srgbClr val="1F232B"/>
+                </a:solidFill>
+                <a:latin typeface="Malgun Gothic"/>
+                <a:ea typeface="Malgun Gothic"/>
+                <a:cs typeface="Malgun Gothic"/>
+              </a:rPr>
+              <a:t>10. 23.(금)  →  D-26</a:t>
+            </a:r>
+          </a:p>
+        </p:txBody>
+      </p:sp>
+      <p:sp>
+        <p:nvSpPr>
+          <p:cNvPr id="33" name="Rounded Rectangle 32"/>
+          <p:cNvSpPr/>
+          <p:nvPr/>
+        </p:nvSpPr>
+        <p:spPr>
+          <a:xfrm>
+            <a:off x="4480560" y="4315968"/>
+            <a:ext cx="3063240" cy="621792"/>
+          </a:xfrm>
+          <a:prstGeom prst="roundRect">
+            <a:avLst>
+              <a:gd name="adj" fmla="val 12000"/>
+            </a:avLst>
+          </a:prstGeom>
+          <a:solidFill>
+            <a:srgbClr val="FFFFFF"/>
+          </a:solidFill>
+          <a:ln w="12700">
+            <a:solidFill>
+              <a:srgbClr val="DDE3EA"/>
+            </a:solidFill>
+          </a:ln>
+          <a:effectLst/>
+        </p:spPr>
+        <p:style>
+          <a:lnRef idx="1">
+            <a:schemeClr val="accent1"/>
+          </a:lnRef>
+          <a:fillRef idx="3">
+            <a:schemeClr val="accent1"/>
+          </a:fillRef>
+          <a:effectRef idx="2">
+            <a:schemeClr val="accent1"/>
+          </a:effectRef>
+          <a:fontRef idx="minor">
+            <a:schemeClr val="lt1"/>
+          </a:fontRef>
+        </p:style>
+        <p:txBody>
+          <a:bodyPr rtlCol="0" anchor="ctr"/>
+          <a:lstStyle/>
+          <a:p>
+            <a:pPr algn="ctr"/>
+          </a:p>
+        </p:txBody>
+      </p:sp>
+      <p:sp>
+        <p:nvSpPr>
+          <p:cNvPr id="34" name="TextBox 33"/>
+          <p:cNvSpPr txBox="1"/>
+          <p:nvPr/>
+        </p:nvSpPr>
+        <p:spPr>
+          <a:xfrm>
+            <a:off x="4663440" y="4315968"/>
+            <a:ext cx="640080" cy="621792"/>
+          </a:xfrm>
+          <a:prstGeom prst="rect">
+            <a:avLst/>
+          </a:prstGeom>
+          <a:noFill/>
+        </p:spPr>
+        <p:txBody>
+          <a:bodyPr wrap="square" lIns="0" rIns="0" tIns="0" bIns="0" anchor="ctr">
+            <a:spAutoFit/>
+          </a:bodyPr>
+          <a:lstStyle/>
+          <a:p>
+            <a:pPr algn="l"/>
+            <a:r>
+              <a:rPr sz="1200" b="1">
+                <a:solidFill>
+                  <a:srgbClr val="0058B2"/>
+                </a:solidFill>
+                <a:latin typeface="Malgun Gothic"/>
+                <a:ea typeface="Malgun Gothic"/>
+                <a:cs typeface="Malgun Gothic"/>
+              </a:rPr>
+              <a:t>중복</a:t>
+            </a:r>
+          </a:p>
+        </p:txBody>
+      </p:sp>
+      <p:sp>
+        <p:nvSpPr>
+          <p:cNvPr id="35" name="TextBox 34"/>
+          <p:cNvSpPr txBox="1"/>
+          <p:nvPr/>
+        </p:nvSpPr>
+        <p:spPr>
+          <a:xfrm>
+            <a:off x="5303520" y="4315968"/>
+            <a:ext cx="2194560" cy="621792"/>
+          </a:xfrm>
+          <a:prstGeom prst="rect">
+            <a:avLst/>
+          </a:prstGeom>
+          <a:noFill/>
+        </p:spPr>
+        <p:txBody>
+          <a:bodyPr wrap="square" lIns="0" rIns="0" tIns="0" bIns="0" anchor="ctr">
+            <a:spAutoFit/>
+          </a:bodyPr>
+          <a:lstStyle/>
+          <a:p>
+            <a:pPr algn="l"/>
+            <a:r>
+              <a:rPr sz="1200" b="0">
+                <a:solidFill>
+                  <a:srgbClr val="1F232B"/>
+                </a:solidFill>
+                <a:latin typeface="Malgun Gothic"/>
+                <a:ea typeface="Malgun Gothic"/>
+                <a:cs typeface="Malgun Gothic"/>
+              </a:rPr>
+              <a:t>같은 공지는 하나로</a:t>
+            </a:r>
+          </a:p>
+        </p:txBody>
+      </p:sp>
+      <p:sp>
+        <p:nvSpPr>
+          <p:cNvPr id="36" name="Right Arrow 35"/>
+          <p:cNvSpPr/>
+          <p:nvPr/>
+        </p:nvSpPr>
+        <p:spPr>
+          <a:xfrm>
+            <a:off x="7680960" y="3291840"/>
+            <a:ext cx="329184" cy="365760"/>
+          </a:xfrm>
+          <a:prstGeom prst="rightArrow">
+            <a:avLst/>
+          </a:prstGeom>
+          <a:solidFill>
+            <a:srgbClr val="B8C1CC"/>
+          </a:solidFill>
+          <a:ln>
+            <a:noFill/>
+          </a:ln>
+          <a:effectLst/>
+        </p:spPr>
+        <p:style>
+          <a:lnRef idx="1">
+            <a:schemeClr val="accent1"/>
+          </a:lnRef>
+          <a:fillRef idx="3">
+            <a:schemeClr val="accent1"/>
+          </a:fillRef>
+          <a:effectRef idx="2">
+            <a:schemeClr val="accent1"/>
+          </a:effectRef>
+          <a:fontRef idx="minor">
+            <a:schemeClr val="lt1"/>
+          </a:fontRef>
+        </p:style>
+        <p:txBody>
+          <a:bodyPr rtlCol="0" anchor="ctr"/>
+          <a:lstStyle/>
+          <a:p>
+            <a:pPr algn="ctr"/>
+          </a:p>
+        </p:txBody>
+      </p:sp>
+      <p:sp>
+        <p:nvSpPr>
+          <p:cNvPr id="37" name="Oval 36"/>
+          <p:cNvSpPr/>
+          <p:nvPr/>
+        </p:nvSpPr>
+        <p:spPr>
+          <a:xfrm>
+            <a:off x="8183879" y="1417320"/>
+            <a:ext cx="411480" cy="411480"/>
+          </a:xfrm>
+          <a:prstGeom prst="ellipse">
+            <a:avLst/>
+          </a:prstGeom>
+          <a:solidFill>
+            <a:srgbClr val="0058B2"/>
+          </a:solidFill>
+          <a:ln>
+            <a:noFill/>
+          </a:ln>
+          <a:effectLst/>
+        </p:spPr>
+        <p:style>
+          <a:lnRef idx="1">
+            <a:schemeClr val="accent1"/>
+          </a:lnRef>
+          <a:fillRef idx="3">
+            <a:schemeClr val="accent1"/>
+          </a:fillRef>
+          <a:effectRef idx="2">
+            <a:schemeClr val="accent1"/>
+          </a:effectRef>
+          <a:fontRef idx="minor">
+            <a:schemeClr val="lt1"/>
+          </a:fontRef>
+        </p:style>
+        <p:txBody>
+          <a:bodyPr rtlCol="0" anchor="ctr"/>
+          <a:lstStyle/>
+          <a:p>
+            <a:pPr algn="ctr"/>
+          </a:p>
+        </p:txBody>
+      </p:sp>
+      <p:sp>
+        <p:nvSpPr>
+          <p:cNvPr id="38" name="TextBox 37"/>
+          <p:cNvSpPr txBox="1"/>
+          <p:nvPr/>
+        </p:nvSpPr>
+        <p:spPr>
+          <a:xfrm>
+            <a:off x="8183879" y="1417320"/>
+            <a:ext cx="411480" cy="411480"/>
+          </a:xfrm>
+          <a:prstGeom prst="rect">
+            <a:avLst/>
+          </a:prstGeom>
+          <a:noFill/>
+        </p:spPr>
+        <p:txBody>
+          <a:bodyPr wrap="square" lIns="0" rIns="0" tIns="0" bIns="0" anchor="ctr">
+            <a:spAutoFit/>
+          </a:bodyPr>
+          <a:lstStyle/>
+          <a:p>
+            <a:pPr algn="ctr"/>
+            <a:r>
+              <a:rPr sz="1400" b="1">
+                <a:solidFill>
+                  <a:srgbClr val="FFFFFF"/>
+                </a:solidFill>
+                <a:latin typeface="Malgun Gothic"/>
+                <a:ea typeface="Malgun Gothic"/>
+                <a:cs typeface="Malgun Gothic"/>
+              </a:rPr>
+              <a:t>3</a:t>
+            </a:r>
+          </a:p>
+        </p:txBody>
+      </p:sp>
+      <p:sp>
+        <p:nvSpPr>
+          <p:cNvPr id="39" name="TextBox 38"/>
+          <p:cNvSpPr txBox="1"/>
+          <p:nvPr/>
+        </p:nvSpPr>
+        <p:spPr>
+          <a:xfrm>
+            <a:off x="8686800" y="1444752"/>
+            <a:ext cx="2926080" cy="365760"/>
+          </a:xfrm>
+          <a:prstGeom prst="rect">
+            <a:avLst/>
+          </a:prstGeom>
+          <a:noFill/>
+        </p:spPr>
+        <p:txBody>
+          <a:bodyPr wrap="square" lIns="0" rIns="0" tIns="0" bIns="0" anchor="t">
+            <a:spAutoFit/>
+          </a:bodyPr>
+          <a:lstStyle/>
+          <a:p>
+            <a:pPr algn="l"/>
+            <a:r>
+              <a:rPr sz="1600" b="1">
+                <a:solidFill>
+                  <a:srgbClr val="1F232B"/>
+                </a:solidFill>
+                <a:latin typeface="Malgun Gothic"/>
+                <a:ea typeface="Malgun Gothic"/>
+                <a:cs typeface="Malgun Gothic"/>
+              </a:rPr>
+              <a:t>한 장으로 정리</a:t>
+            </a:r>
+          </a:p>
+        </p:txBody>
+      </p:sp>
+      <p:sp>
+        <p:nvSpPr>
+          <p:cNvPr id="40" name="Rounded Rectangle 39"/>
+          <p:cNvSpPr/>
+          <p:nvPr/>
+        </p:nvSpPr>
+        <p:spPr>
+          <a:xfrm>
+            <a:off x="8138159" y="1965960"/>
+            <a:ext cx="3520440" cy="4432742"/>
+          </a:xfrm>
+          <a:prstGeom prst="roundRect">
+            <a:avLst>
+              <a:gd name="adj" fmla="val 3000"/>
+            </a:avLst>
+          </a:prstGeom>
+          <a:solidFill>
+            <a:srgbClr val="DDE3EA"/>
+          </a:solidFill>
+          <a:ln>
+            <a:noFill/>
+          </a:ln>
+          <a:effectLst/>
+        </p:spPr>
+        <p:style>
+          <a:lnRef idx="1">
+            <a:schemeClr val="accent1"/>
+          </a:lnRef>
+          <a:fillRef idx="3">
+            <a:schemeClr val="accent1"/>
+          </a:fillRef>
+          <a:effectRef idx="2">
+            <a:schemeClr val="accent1"/>
+          </a:effectRef>
+          <a:fontRef idx="minor">
+            <a:schemeClr val="lt1"/>
+          </a:fontRef>
+        </p:style>
+        <p:txBody>
+          <a:bodyPr rtlCol="0" anchor="ctr"/>
+          <a:lstStyle/>
+          <a:p>
+            <a:pPr algn="ctr"/>
           </a:p>
         </p:txBody>
       </p:sp>
       <p:pic>
         <p:nvPicPr>
-          <p:cNvPr id="10" name="Picture 9" descr="1-onboarding.png"/>
+          <p:cNvPr id="41" name="Picture 40" descr="detail-card.png"/>
           <p:cNvPicPr>
             <a:picLocks noChangeAspect="1"/>
           </p:cNvPicPr>
@@ -6493,8 +8732,8 @@
         </p:blipFill>
         <p:spPr>
           <a:xfrm>
-            <a:off x="594360" y="2057400"/>
-            <a:ext cx="6035040" cy="3771900"/>
+            <a:off x="8183879" y="2011680"/>
+            <a:ext cx="3429000" cy="4341302"/>
           </a:xfrm>
           <a:prstGeom prst="rect">
             <a:avLst/>
@@ -6503,26 +8742,29 @@
       </p:pic>
       <p:sp>
         <p:nvSpPr>
-          <p:cNvPr id="11" name="Rounded Rectangle 10"/>
+          <p:cNvPr id="42" name="Rounded Rectangle 41"/>
           <p:cNvSpPr/>
           <p:nvPr/>
         </p:nvSpPr>
         <p:spPr>
           <a:xfrm>
-            <a:off x="7004304" y="1609344"/>
-            <a:ext cx="2361752" cy="4919472"/>
+            <a:off x="594360" y="5349240"/>
+            <a:ext cx="6949440" cy="914400"/>
           </a:xfrm>
           <a:prstGeom prst="roundRect">
             <a:avLst>
-              <a:gd name="adj" fmla="val 9000"/>
+              <a:gd name="adj" fmla="val 12000"/>
             </a:avLst>
           </a:prstGeom>
           <a:solidFill>
-            <a:srgbClr val="111114"/>
+            <a:srgbClr val="FFFFFF"/>
           </a:solidFill>
-          <a:ln>
-            <a:noFill/>
+          <a:ln w="12700">
+            <a:solidFill>
+              <a:srgbClr val="DDE3EA"/>
+            </a:solidFill>
           </a:ln>
+          <a:effectLst/>
         </p:spPr>
         <p:style>
           <a:lnRef idx="1">
@@ -6546,84 +8788,16 @@
           </a:p>
         </p:txBody>
       </p:sp>
-      <p:pic>
-        <p:nvPicPr>
-          <p:cNvPr id="12" name="Picture 11" descr="1-onboarding.png"/>
-          <p:cNvPicPr>
-            <a:picLocks noChangeAspect="1"/>
-          </p:cNvPicPr>
-          <p:nvPr/>
-        </p:nvPicPr>
-        <p:blipFill>
-          <a:blip r:embed="rId3"/>
-          <a:stretch>
-            <a:fillRect/>
-          </a:stretch>
-        </p:blipFill>
-        <p:spPr>
-          <a:xfrm>
-            <a:off x="7086600" y="1691640"/>
-            <a:ext cx="2197160" cy="4754880"/>
-          </a:xfrm>
-          <a:prstGeom prst="rect">
-            <a:avLst/>
-          </a:prstGeom>
-        </p:spPr>
-      </p:pic>
-      <p:sp>
-        <p:nvSpPr>
-          <p:cNvPr id="13" name="Oval 12"/>
-          <p:cNvSpPr/>
-          <p:nvPr/>
-        </p:nvSpPr>
-        <p:spPr>
-          <a:xfrm>
-            <a:off x="9555480" y="1874519"/>
-            <a:ext cx="384048" cy="384048"/>
-          </a:xfrm>
-          <a:prstGeom prst="ellipse">
-            <a:avLst/>
-          </a:prstGeom>
-          <a:solidFill>
-            <a:srgbClr val="0058B2"/>
-          </a:solidFill>
-          <a:ln>
-            <a:noFill/>
-          </a:ln>
-          <a:effectLst/>
-        </p:spPr>
-        <p:style>
-          <a:lnRef idx="1">
-            <a:schemeClr val="accent1"/>
-          </a:lnRef>
-          <a:fillRef idx="3">
-            <a:schemeClr val="accent1"/>
-          </a:fillRef>
-          <a:effectRef idx="2">
-            <a:schemeClr val="accent1"/>
-          </a:effectRef>
-          <a:fontRef idx="minor">
-            <a:schemeClr val="lt1"/>
-          </a:fontRef>
-        </p:style>
-        <p:txBody>
-          <a:bodyPr rtlCol="0" anchor="ctr"/>
-          <a:lstStyle/>
-          <a:p>
-            <a:pPr algn="ctr"/>
-          </a:p>
-        </p:txBody>
-      </p:sp>
-      <p:sp>
-        <p:nvSpPr>
-          <p:cNvPr id="14" name="TextBox 13"/>
+      <p:sp>
+        <p:nvSpPr>
+          <p:cNvPr id="43" name="TextBox 42"/>
           <p:cNvSpPr txBox="1"/>
           <p:nvPr/>
         </p:nvSpPr>
         <p:spPr>
           <a:xfrm>
-            <a:off x="9555480" y="1874519"/>
-            <a:ext cx="384048" cy="384048"/>
+            <a:off x="868680" y="5349240"/>
+            <a:ext cx="1371600" cy="914400"/>
           </a:xfrm>
           <a:prstGeom prst="rect">
             <a:avLst/>
@@ -6636,31 +8810,31 @@
           </a:bodyPr>
           <a:lstStyle/>
           <a:p>
-            <a:pPr algn="ctr"/>
-            <a:r>
-              <a:rPr sz="1500" b="1">
-                <a:solidFill>
-                  <a:srgbClr val="FFFFFF"/>
+            <a:pPr algn="l"/>
+            <a:r>
+              <a:rPr sz="3600" b="1">
+                <a:solidFill>
+                  <a:srgbClr val="0058B2"/>
                 </a:solidFill>
                 <a:latin typeface="Malgun Gothic"/>
                 <a:ea typeface="Malgun Gothic"/>
                 <a:cs typeface="Malgun Gothic"/>
               </a:rPr>
-              <a:t>1</a:t>
-            </a:r>
-          </a:p>
-        </p:txBody>
-      </p:sp>
-      <p:sp>
-        <p:nvSpPr>
-          <p:cNvPr id="15" name="TextBox 14"/>
+              <a:t>0원</a:t>
+            </a:r>
+          </a:p>
+        </p:txBody>
+      </p:sp>
+      <p:sp>
+        <p:nvSpPr>
+          <p:cNvPr id="44" name="TextBox 43"/>
           <p:cNvSpPr txBox="1"/>
           <p:nvPr/>
         </p:nvSpPr>
         <p:spPr>
           <a:xfrm>
-            <a:off x="10058400" y="1856231"/>
-            <a:ext cx="1783080" cy="411480"/>
+            <a:off x="2286000" y="5440680"/>
+            <a:ext cx="5120640" cy="731520"/>
           </a:xfrm>
           <a:prstGeom prst="rect">
             <a:avLst/>
@@ -6668,118 +8842,58 @@
           <a:noFill/>
         </p:spPr>
         <p:txBody>
-          <a:bodyPr wrap="square" lIns="0" rIns="0" tIns="0" bIns="0" anchor="t">
+          <a:bodyPr wrap="square" lIns="0" rIns="0" tIns="0" bIns="0" anchor="ctr">
             <a:spAutoFit/>
           </a:bodyPr>
           <a:lstStyle/>
           <a:p>
-            <a:pPr algn="l"/>
-            <a:r>
-              <a:rPr sz="1500" b="1">
-                <a:solidFill>
-                  <a:srgbClr val="1F1D1A"/>
+            <a:pPr algn="l">
+              <a:spcAft>
+                <a:spcPts val="200"/>
+              </a:spcAft>
+            </a:pPr>
+            <a:r>
+              <a:rPr sz="1300" b="1">
+                <a:solidFill>
+                  <a:srgbClr val="1F232B"/>
                 </a:solidFill>
                 <a:latin typeface="Malgun Gothic"/>
                 <a:ea typeface="Malgun Gothic"/>
                 <a:cs typeface="Malgun Gothic"/>
               </a:rPr>
-              <a:t>줄임말·초성 검색</a:t>
-            </a:r>
-          </a:p>
-        </p:txBody>
-      </p:sp>
-      <p:sp>
-        <p:nvSpPr>
-          <p:cNvPr id="16" name="TextBox 15"/>
-          <p:cNvSpPr txBox="1"/>
-          <p:nvPr/>
-        </p:nvSpPr>
-        <p:spPr>
-          <a:xfrm>
-            <a:off x="10058400" y="2258568"/>
-            <a:ext cx="1783080" cy="914400"/>
-          </a:xfrm>
-          <a:prstGeom prst="rect">
-            <a:avLst/>
-          </a:prstGeom>
-          <a:noFill/>
-        </p:spPr>
-        <p:txBody>
-          <a:bodyPr wrap="square" lIns="0" rIns="0" tIns="0" bIns="0" anchor="t">
-            <a:spAutoFit/>
-          </a:bodyPr>
-          <a:lstStyle/>
-          <a:p>
-            <a:pPr algn="l"/>
-            <a:r>
-              <a:rPr sz="1200" b="0">
-                <a:solidFill>
-                  <a:srgbClr val="6B6862"/>
+              <a:t>유료 AI 서비스 없이</a:t>
+            </a:r>
+          </a:p>
+          <a:p>
+            <a:pPr algn="l">
+              <a:spcAft>
+                <a:spcPts val="200"/>
+              </a:spcAft>
+            </a:pPr>
+            <a:r>
+              <a:rPr sz="1300" b="0">
+                <a:solidFill>
+                  <a:srgbClr val="1F232B"/>
                 </a:solidFill>
                 <a:latin typeface="Malgun Gothic"/>
                 <a:ea typeface="Malgun Gothic"/>
                 <a:cs typeface="Malgun Gothic"/>
               </a:rPr>
-              <a:t>'컴공' → 컴퓨터공학전공
-'ㄱㅎ' → 간호학과</a:t>
-            </a:r>
-          </a:p>
-        </p:txBody>
-      </p:sp>
-      <p:sp>
-        <p:nvSpPr>
-          <p:cNvPr id="17" name="Oval 16"/>
-          <p:cNvSpPr/>
-          <p:nvPr/>
-        </p:nvSpPr>
-        <p:spPr>
-          <a:xfrm>
-            <a:off x="9555480" y="3291839"/>
-            <a:ext cx="384048" cy="384048"/>
-          </a:xfrm>
-          <a:prstGeom prst="ellipse">
-            <a:avLst/>
-          </a:prstGeom>
-          <a:solidFill>
-            <a:srgbClr val="0058B2"/>
-          </a:solidFill>
-          <a:ln>
-            <a:noFill/>
-          </a:ln>
-          <a:effectLst/>
-        </p:spPr>
-        <p:style>
-          <a:lnRef idx="1">
-            <a:schemeClr val="accent1"/>
-          </a:lnRef>
-          <a:fillRef idx="3">
-            <a:schemeClr val="accent1"/>
-          </a:fillRef>
-          <a:effectRef idx="2">
-            <a:schemeClr val="accent1"/>
-          </a:effectRef>
-          <a:fontRef idx="minor">
-            <a:schemeClr val="lt1"/>
-          </a:fontRef>
-        </p:style>
-        <p:txBody>
-          <a:bodyPr rtlCol="0" anchor="ctr"/>
-          <a:lstStyle/>
-          <a:p>
-            <a:pPr algn="ctr"/>
-          </a:p>
-        </p:txBody>
-      </p:sp>
-      <p:sp>
-        <p:nvSpPr>
-          <p:cNvPr id="18" name="TextBox 17"/>
+              <a:t>공개 AI 모델을 우리 서버 안에서 돌려요</a:t>
+            </a:r>
+          </a:p>
+        </p:txBody>
+      </p:sp>
+      <p:sp>
+        <p:nvSpPr>
+          <p:cNvPr id="45" name="TextBox 44"/>
           <p:cNvSpPr txBox="1"/>
           <p:nvPr/>
         </p:nvSpPr>
         <p:spPr>
           <a:xfrm>
-            <a:off x="9555480" y="3291839"/>
-            <a:ext cx="384048" cy="384048"/>
+            <a:off x="11247120" y="6400800"/>
+            <a:ext cx="457200" cy="274320"/>
           </a:xfrm>
           <a:prstGeom prst="rect">
             <a:avLst/>
@@ -6787,253 +8901,22 @@
           <a:noFill/>
         </p:spPr>
         <p:txBody>
-          <a:bodyPr wrap="square" lIns="0" rIns="0" tIns="0" bIns="0" anchor="ctr">
+          <a:bodyPr wrap="square" lIns="0" rIns="0" tIns="0" bIns="0" anchor="t">
             <a:spAutoFit/>
           </a:bodyPr>
           <a:lstStyle/>
           <a:p>
-            <a:pPr algn="ctr"/>
-            <a:r>
-              <a:rPr sz="1500" b="1">
-                <a:solidFill>
-                  <a:srgbClr val="FFFFFF"/>
+            <a:pPr algn="r"/>
+            <a:r>
+              <a:rPr sz="1000" b="0">
+                <a:solidFill>
+                  <a:srgbClr val="666E7A"/>
                 </a:solidFill>
                 <a:latin typeface="Malgun Gothic"/>
                 <a:ea typeface="Malgun Gothic"/>
                 <a:cs typeface="Malgun Gothic"/>
               </a:rPr>
-              <a:t>2</a:t>
-            </a:r>
-          </a:p>
-        </p:txBody>
-      </p:sp>
-      <p:sp>
-        <p:nvSpPr>
-          <p:cNvPr id="19" name="TextBox 18"/>
-          <p:cNvSpPr txBox="1"/>
-          <p:nvPr/>
-        </p:nvSpPr>
-        <p:spPr>
-          <a:xfrm>
-            <a:off x="10058400" y="3273551"/>
-            <a:ext cx="1783080" cy="411480"/>
-          </a:xfrm>
-          <a:prstGeom prst="rect">
-            <a:avLst/>
-          </a:prstGeom>
-          <a:noFill/>
-        </p:spPr>
-        <p:txBody>
-          <a:bodyPr wrap="square" lIns="0" rIns="0" tIns="0" bIns="0" anchor="t">
-            <a:spAutoFit/>
-          </a:bodyPr>
-          <a:lstStyle/>
-          <a:p>
-            <a:pPr algn="l"/>
-            <a:r>
-              <a:rPr sz="1500" b="1">
-                <a:solidFill>
-                  <a:srgbClr val="1F1D1A"/>
-                </a:solidFill>
-                <a:latin typeface="Malgun Gothic"/>
-                <a:ea typeface="Malgun Gothic"/>
-                <a:cs typeface="Malgun Gothic"/>
-              </a:rPr>
-              <a:t>목록에서만 선택</a:t>
-            </a:r>
-          </a:p>
-        </p:txBody>
-      </p:sp>
-      <p:sp>
-        <p:nvSpPr>
-          <p:cNvPr id="20" name="TextBox 19"/>
-          <p:cNvSpPr txBox="1"/>
-          <p:nvPr/>
-        </p:nvSpPr>
-        <p:spPr>
-          <a:xfrm>
-            <a:off x="10058400" y="3675887"/>
-            <a:ext cx="1783080" cy="914400"/>
-          </a:xfrm>
-          <a:prstGeom prst="rect">
-            <a:avLst/>
-          </a:prstGeom>
-          <a:noFill/>
-        </p:spPr>
-        <p:txBody>
-          <a:bodyPr wrap="square" lIns="0" rIns="0" tIns="0" bIns="0" anchor="t">
-            <a:spAutoFit/>
-          </a:bodyPr>
-          <a:lstStyle/>
-          <a:p>
-            <a:pPr algn="l"/>
-            <a:r>
-              <a:rPr sz="1200" b="0">
-                <a:solidFill>
-                  <a:srgbClr val="6B6862"/>
-                </a:solidFill>
-                <a:latin typeface="Malgun Gothic"/>
-                <a:ea typeface="Malgun Gothic"/>
-                <a:cs typeface="Malgun Gothic"/>
-              </a:rPr>
-              <a:t>오타로 학과 매칭이
-깨지지 않게</a:t>
-            </a:r>
-          </a:p>
-        </p:txBody>
-      </p:sp>
-      <p:sp>
-        <p:nvSpPr>
-          <p:cNvPr id="21" name="Oval 20"/>
-          <p:cNvSpPr/>
-          <p:nvPr/>
-        </p:nvSpPr>
-        <p:spPr>
-          <a:xfrm>
-            <a:off x="9555480" y="4709160"/>
-            <a:ext cx="384048" cy="384048"/>
-          </a:xfrm>
-          <a:prstGeom prst="ellipse">
-            <a:avLst/>
-          </a:prstGeom>
-          <a:solidFill>
-            <a:srgbClr val="0058B2"/>
-          </a:solidFill>
-          <a:ln>
-            <a:noFill/>
-          </a:ln>
-          <a:effectLst/>
-        </p:spPr>
-        <p:style>
-          <a:lnRef idx="1">
-            <a:schemeClr val="accent1"/>
-          </a:lnRef>
-          <a:fillRef idx="3">
-            <a:schemeClr val="accent1"/>
-          </a:fillRef>
-          <a:effectRef idx="2">
-            <a:schemeClr val="accent1"/>
-          </a:effectRef>
-          <a:fontRef idx="minor">
-            <a:schemeClr val="lt1"/>
-          </a:fontRef>
-        </p:style>
-        <p:txBody>
-          <a:bodyPr rtlCol="0" anchor="ctr"/>
-          <a:lstStyle/>
-          <a:p>
-            <a:pPr algn="ctr"/>
-          </a:p>
-        </p:txBody>
-      </p:sp>
-      <p:sp>
-        <p:nvSpPr>
-          <p:cNvPr id="22" name="TextBox 21"/>
-          <p:cNvSpPr txBox="1"/>
-          <p:nvPr/>
-        </p:nvSpPr>
-        <p:spPr>
-          <a:xfrm>
-            <a:off x="9555480" y="4709160"/>
-            <a:ext cx="384048" cy="384048"/>
-          </a:xfrm>
-          <a:prstGeom prst="rect">
-            <a:avLst/>
-          </a:prstGeom>
-          <a:noFill/>
-        </p:spPr>
-        <p:txBody>
-          <a:bodyPr wrap="square" lIns="0" rIns="0" tIns="0" bIns="0" anchor="ctr">
-            <a:spAutoFit/>
-          </a:bodyPr>
-          <a:lstStyle/>
-          <a:p>
-            <a:pPr algn="ctr"/>
-            <a:r>
-              <a:rPr sz="1500" b="1">
-                <a:solidFill>
-                  <a:srgbClr val="FFFFFF"/>
-                </a:solidFill>
-                <a:latin typeface="Malgun Gothic"/>
-                <a:ea typeface="Malgun Gothic"/>
-                <a:cs typeface="Malgun Gothic"/>
-              </a:rPr>
-              <a:t>3</a:t>
-            </a:r>
-          </a:p>
-        </p:txBody>
-      </p:sp>
-      <p:sp>
-        <p:nvSpPr>
-          <p:cNvPr id="23" name="TextBox 22"/>
-          <p:cNvSpPr txBox="1"/>
-          <p:nvPr/>
-        </p:nvSpPr>
-        <p:spPr>
-          <a:xfrm>
-            <a:off x="10058400" y="4690872"/>
-            <a:ext cx="1783080" cy="411480"/>
-          </a:xfrm>
-          <a:prstGeom prst="rect">
-            <a:avLst/>
-          </a:prstGeom>
-          <a:noFill/>
-        </p:spPr>
-        <p:txBody>
-          <a:bodyPr wrap="square" lIns="0" rIns="0" tIns="0" bIns="0" anchor="t">
-            <a:spAutoFit/>
-          </a:bodyPr>
-          <a:lstStyle/>
-          <a:p>
-            <a:pPr algn="l"/>
-            <a:r>
-              <a:rPr sz="1500" b="1">
-                <a:solidFill>
-                  <a:srgbClr val="1F1D1A"/>
-                </a:solidFill>
-                <a:latin typeface="Malgun Gothic"/>
-                <a:ea typeface="Malgun Gothic"/>
-                <a:cs typeface="Malgun Gothic"/>
-              </a:rPr>
-              <a:t>알림도 한 번에</a:t>
-            </a:r>
-          </a:p>
-        </p:txBody>
-      </p:sp>
-      <p:sp>
-        <p:nvSpPr>
-          <p:cNvPr id="24" name="TextBox 23"/>
-          <p:cNvSpPr txBox="1"/>
-          <p:nvPr/>
-        </p:nvSpPr>
-        <p:spPr>
-          <a:xfrm>
-            <a:off x="10058400" y="5093208"/>
-            <a:ext cx="1783080" cy="914400"/>
-          </a:xfrm>
-          <a:prstGeom prst="rect">
-            <a:avLst/>
-          </a:prstGeom>
-          <a:noFill/>
-        </p:spPr>
-        <p:txBody>
-          <a:bodyPr wrap="square" lIns="0" rIns="0" tIns="0" bIns="0" anchor="t">
-            <a:spAutoFit/>
-          </a:bodyPr>
-          <a:lstStyle/>
-          <a:p>
-            <a:pPr algn="l"/>
-            <a:r>
-              <a:rPr sz="1200" b="0">
-                <a:solidFill>
-                  <a:srgbClr val="6B6862"/>
-                </a:solidFill>
-                <a:latin typeface="Malgun Gothic"/>
-                <a:ea typeface="Malgun Gothic"/>
-                <a:cs typeface="Malgun Gothic"/>
-              </a:rPr>
-              <a:t>휴대폰 알림을 켜면
-마감 전에 알려줌</a:t>
+              <a:t>4</a:t>
             </a:r>
           </a:p>
         </p:txBody>
@@ -7052,7 +8935,7 @@
     <p:bg>
       <p:bgPr>
         <a:solidFill>
-          <a:srgbClr val="FFFFFF"/>
+          <a:srgbClr val="F6F8FB"/>
         </a:solidFill>
         <a:effectLst/>
       </p:bgPr>
@@ -7072,8 +8955,8 @@
         </p:nvSpPr>
         <p:spPr>
           <a:xfrm>
-            <a:off x="548640" y="411480"/>
-            <a:ext cx="11064240" cy="640080"/>
+            <a:off x="594360" y="457200"/>
+            <a:ext cx="10972800" cy="731520"/>
           </a:xfrm>
           <a:prstGeom prst="rect">
             <a:avLst/>
@@ -7088,66 +8971,29 @@
           <a:p>
             <a:pPr algn="l"/>
             <a:r>
-              <a:rPr sz="3200" b="1">
-                <a:solidFill>
-                  <a:srgbClr val="1F1D1A"/>
+              <a:rPr sz="3000" b="1">
+                <a:solidFill>
+                  <a:srgbClr val="1F232B"/>
                 </a:solidFill>
                 <a:latin typeface="Malgun Gothic"/>
                 <a:ea typeface="Malgun Gothic"/>
                 <a:cs typeface="Malgun Gothic"/>
               </a:rPr>
-              <a:t>② 나에게 — 왜 추천했는지 알려줍니다</a:t>
-            </a:r>
-          </a:p>
-        </p:txBody>
-      </p:sp>
-      <p:sp>
-        <p:nvSpPr>
-          <p:cNvPr id="3" name="TextBox 2"/>
-          <p:cNvSpPr txBox="1"/>
-          <p:nvPr/>
-        </p:nvSpPr>
-        <p:spPr>
-          <a:xfrm>
-            <a:off x="548640" y="1024128"/>
-            <a:ext cx="11064240" cy="411480"/>
-          </a:xfrm>
-          <a:prstGeom prst="rect">
-            <a:avLst/>
-          </a:prstGeom>
-          <a:noFill/>
-        </p:spPr>
-        <p:txBody>
-          <a:bodyPr wrap="square" lIns="0" rIns="0" tIns="0" bIns="0" anchor="t">
-            <a:spAutoFit/>
-          </a:bodyPr>
-          <a:lstStyle/>
-          <a:p>
-            <a:pPr algn="l"/>
-            <a:r>
-              <a:rPr sz="1600" b="0">
-                <a:solidFill>
-                  <a:srgbClr val="6B6862"/>
-                </a:solidFill>
-                <a:latin typeface="Malgun Gothic"/>
-                <a:ea typeface="Malgun Gothic"/>
-                <a:cs typeface="Malgun Gothic"/>
-              </a:rPr>
-              <a:t>식품공학전공 · 관심사 '장학금, 취업'으로 설정한 화면</a:t>
-            </a:r>
-          </a:p>
-        </p:txBody>
-      </p:sp>
-      <p:sp>
-        <p:nvSpPr>
-          <p:cNvPr id="4" name="Rounded Rectangle 3"/>
+              <a:t>지금 실제로 매시간 돌아가고 있습니다</a:t>
+            </a:r>
+          </a:p>
+        </p:txBody>
+      </p:sp>
+      <p:sp>
+        <p:nvSpPr>
+          <p:cNvPr id="3" name="Rounded Rectangle 2"/>
           <p:cNvSpPr/>
           <p:nvPr/>
         </p:nvSpPr>
         <p:spPr>
           <a:xfrm>
-            <a:off x="539496" y="1728216"/>
-            <a:ext cx="6144768" cy="4155948"/>
+            <a:off x="676656" y="1453895"/>
+            <a:ext cx="6053328" cy="4346448"/>
           </a:xfrm>
           <a:prstGeom prst="roundRect">
             <a:avLst>
@@ -7185,13 +9031,13 @@
       </p:sp>
       <p:sp>
         <p:nvSpPr>
-          <p:cNvPr id="5" name="Oval 4"/>
+          <p:cNvPr id="4" name="Oval 3"/>
           <p:cNvSpPr/>
           <p:nvPr/>
         </p:nvSpPr>
         <p:spPr>
           <a:xfrm>
-            <a:off x="704088" y="1865376"/>
+            <a:off x="841248" y="1591056"/>
             <a:ext cx="100584" cy="100584"/>
           </a:xfrm>
           <a:prstGeom prst="ellipse">
@@ -7229,13 +9075,13 @@
       </p:sp>
       <p:sp>
         <p:nvSpPr>
-          <p:cNvPr id="6" name="Oval 5"/>
+          <p:cNvPr id="5" name="Oval 4"/>
           <p:cNvSpPr/>
           <p:nvPr/>
         </p:nvSpPr>
         <p:spPr>
           <a:xfrm>
-            <a:off x="868680" y="1865376"/>
+            <a:off x="1005840" y="1591056"/>
             <a:ext cx="100584" cy="100584"/>
           </a:xfrm>
           <a:prstGeom prst="ellipse">
@@ -7273,13 +9119,13 @@
       </p:sp>
       <p:sp>
         <p:nvSpPr>
-          <p:cNvPr id="7" name="Oval 6"/>
+          <p:cNvPr id="6" name="Oval 5"/>
           <p:cNvSpPr/>
           <p:nvPr/>
         </p:nvSpPr>
         <p:spPr>
           <a:xfrm>
-            <a:off x="1033271" y="1865376"/>
+            <a:off x="1170432" y="1591056"/>
             <a:ext cx="100584" cy="100584"/>
           </a:xfrm>
           <a:prstGeom prst="ellipse">
@@ -7317,14 +9163,14 @@
       </p:sp>
       <p:sp>
         <p:nvSpPr>
-          <p:cNvPr id="8" name="Rounded Rectangle 7"/>
+          <p:cNvPr id="7" name="Rounded Rectangle 6"/>
           <p:cNvSpPr/>
           <p:nvPr/>
         </p:nvSpPr>
         <p:spPr>
           <a:xfrm>
-            <a:off x="1280160" y="1828800"/>
-            <a:ext cx="5120640" cy="182880"/>
+            <a:off x="1417320" y="1554480"/>
+            <a:ext cx="5029200" cy="182880"/>
           </a:xfrm>
           <a:prstGeom prst="roundRect">
             <a:avLst>
@@ -7363,14 +9209,14 @@
       </p:sp>
       <p:sp>
         <p:nvSpPr>
-          <p:cNvPr id="9" name="TextBox 8"/>
+          <p:cNvPr id="8" name="TextBox 7"/>
           <p:cNvSpPr txBox="1"/>
           <p:nvPr/>
         </p:nvSpPr>
         <p:spPr>
           <a:xfrm>
-            <a:off x="1417320" y="1828800"/>
-            <a:ext cx="4846320" cy="182880"/>
+            <a:off x="1554480" y="1554480"/>
+            <a:ext cx="4754880" cy="182880"/>
           </a:xfrm>
           <a:prstGeom prst="rect">
             <a:avLst/>
@@ -7400,7 +9246,7 @@
       </p:sp>
       <p:pic>
         <p:nvPicPr>
-          <p:cNvPr id="10" name="Picture 9" descr="2-for-me.png"/>
+          <p:cNvPr id="9" name="Picture 8" descr="desktop-for-me.png"/>
           <p:cNvPicPr>
             <a:picLocks noChangeAspect="1"/>
           </p:cNvPicPr>
@@ -7414,8 +9260,8 @@
         </p:blipFill>
         <p:spPr>
           <a:xfrm>
-            <a:off x="594360" y="2057400"/>
-            <a:ext cx="6035040" cy="3771900"/>
+            <a:off x="731520" y="1783080"/>
+            <a:ext cx="5943600" cy="3962399"/>
           </a:xfrm>
           <a:prstGeom prst="rect">
             <a:avLst/>
@@ -7424,26 +9270,29 @@
       </p:pic>
       <p:sp>
         <p:nvSpPr>
-          <p:cNvPr id="11" name="Rounded Rectangle 10"/>
+          <p:cNvPr id="10" name="Rounded Rectangle 9"/>
           <p:cNvSpPr/>
           <p:nvPr/>
         </p:nvSpPr>
         <p:spPr>
           <a:xfrm>
-            <a:off x="7004304" y="1609344"/>
-            <a:ext cx="2361752" cy="4919472"/>
+            <a:off x="7498079" y="1508760"/>
+            <a:ext cx="1920240" cy="1920240"/>
           </a:xfrm>
           <a:prstGeom prst="roundRect">
             <a:avLst>
-              <a:gd name="adj" fmla="val 9000"/>
+              <a:gd name="adj" fmla="val 8000"/>
             </a:avLst>
           </a:prstGeom>
           <a:solidFill>
-            <a:srgbClr val="111114"/>
+            <a:srgbClr val="FFFFFF"/>
           </a:solidFill>
-          <a:ln>
-            <a:noFill/>
+          <a:ln w="12700">
+            <a:solidFill>
+              <a:srgbClr val="DDE3EA"/>
+            </a:solidFill>
           </a:ln>
+          <a:effectLst/>
         </p:spPr>
         <p:style>
           <a:lnRef idx="1">
@@ -7467,49 +9316,104 @@
           </a:p>
         </p:txBody>
       </p:sp>
-      <p:pic>
-        <p:nvPicPr>
-          <p:cNvPr id="12" name="Picture 11" descr="2-for-me.png"/>
-          <p:cNvPicPr>
-            <a:picLocks noChangeAspect="1"/>
-          </p:cNvPicPr>
-          <p:nvPr/>
-        </p:nvPicPr>
-        <p:blipFill>
-          <a:blip r:embed="rId3"/>
-          <a:stretch>
-            <a:fillRect/>
-          </a:stretch>
-        </p:blipFill>
-        <p:spPr>
-          <a:xfrm>
-            <a:off x="7086600" y="1691640"/>
-            <a:ext cx="2197160" cy="4754880"/>
+      <p:sp>
+        <p:nvSpPr>
+          <p:cNvPr id="11" name="TextBox 10"/>
+          <p:cNvSpPr txBox="1"/>
+          <p:nvPr/>
+        </p:nvSpPr>
+        <p:spPr>
+          <a:xfrm>
+            <a:off x="7498079" y="1783080"/>
+            <a:ext cx="1920240" cy="731520"/>
           </a:xfrm>
           <a:prstGeom prst="rect">
             <a:avLst/>
           </a:prstGeom>
-        </p:spPr>
-      </p:pic>
-      <p:sp>
-        <p:nvSpPr>
-          <p:cNvPr id="13" name="Oval 12"/>
+          <a:noFill/>
+        </p:spPr>
+        <p:txBody>
+          <a:bodyPr wrap="square" lIns="0" rIns="0" tIns="0" bIns="0" anchor="t">
+            <a:spAutoFit/>
+          </a:bodyPr>
+          <a:lstStyle/>
+          <a:p>
+            <a:pPr algn="ctr"/>
+            <a:r>
+              <a:rPr sz="3200" b="1">
+                <a:solidFill>
+                  <a:srgbClr val="0058B2"/>
+                </a:solidFill>
+                <a:latin typeface="Malgun Gothic"/>
+                <a:ea typeface="Malgun Gothic"/>
+                <a:cs typeface="Malgun Gothic"/>
+              </a:rPr>
+              <a:t>109곳</a:t>
+            </a:r>
+          </a:p>
+        </p:txBody>
+      </p:sp>
+      <p:sp>
+        <p:nvSpPr>
+          <p:cNvPr id="12" name="TextBox 11"/>
+          <p:cNvSpPr txBox="1"/>
+          <p:nvPr/>
+        </p:nvSpPr>
+        <p:spPr>
+          <a:xfrm>
+            <a:off x="7589519" y="2560320"/>
+            <a:ext cx="1737360" cy="731520"/>
+          </a:xfrm>
+          <a:prstGeom prst="rect">
+            <a:avLst/>
+          </a:prstGeom>
+          <a:noFill/>
+        </p:spPr>
+        <p:txBody>
+          <a:bodyPr wrap="square" lIns="0" rIns="0" tIns="0" bIns="0" anchor="t">
+            <a:spAutoFit/>
+          </a:bodyPr>
+          <a:lstStyle/>
+          <a:p>
+            <a:pPr algn="ctr"/>
+            <a:r>
+              <a:rPr sz="1200" b="0">
+                <a:solidFill>
+                  <a:srgbClr val="666E7A"/>
+                </a:solidFill>
+                <a:latin typeface="Malgun Gothic"/>
+                <a:ea typeface="Malgun Gothic"/>
+                <a:cs typeface="Malgun Gothic"/>
+              </a:rPr>
+              <a:t>학교 게시판을
+매시간 확인</a:t>
+            </a:r>
+          </a:p>
+        </p:txBody>
+      </p:sp>
+      <p:sp>
+        <p:nvSpPr>
+          <p:cNvPr id="13" name="Rounded Rectangle 12"/>
           <p:cNvSpPr/>
           <p:nvPr/>
         </p:nvSpPr>
         <p:spPr>
           <a:xfrm>
-            <a:off x="9555480" y="1874519"/>
-            <a:ext cx="384048" cy="384048"/>
-          </a:xfrm>
-          <a:prstGeom prst="ellipse">
-            <a:avLst/>
+            <a:off x="9601200" y="1508760"/>
+            <a:ext cx="1920240" cy="1920240"/>
+          </a:xfrm>
+          <a:prstGeom prst="roundRect">
+            <a:avLst>
+              <a:gd name="adj" fmla="val 8000"/>
+            </a:avLst>
           </a:prstGeom>
           <a:solidFill>
-            <a:srgbClr val="0058B2"/>
+            <a:srgbClr val="FFFFFF"/>
           </a:solidFill>
-          <a:ln>
-            <a:noFill/>
+          <a:ln w="12700">
+            <a:solidFill>
+              <a:srgbClr val="DDE3EA"/>
+            </a:solidFill>
           </a:ln>
           <a:effectLst/>
         </p:spPr>
@@ -7543,8 +9447,8 @@
         </p:nvSpPr>
         <p:spPr>
           <a:xfrm>
-            <a:off x="9555480" y="1874519"/>
-            <a:ext cx="384048" cy="384048"/>
+            <a:off x="9601200" y="1783080"/>
+            <a:ext cx="1920240" cy="731520"/>
           </a:xfrm>
           <a:prstGeom prst="rect">
             <a:avLst/>
@@ -7552,22 +9456,22 @@
           <a:noFill/>
         </p:spPr>
         <p:txBody>
-          <a:bodyPr wrap="square" lIns="0" rIns="0" tIns="0" bIns="0" anchor="ctr">
+          <a:bodyPr wrap="square" lIns="0" rIns="0" tIns="0" bIns="0" anchor="t">
             <a:spAutoFit/>
           </a:bodyPr>
           <a:lstStyle/>
           <a:p>
             <a:pPr algn="ctr"/>
             <a:r>
-              <a:rPr sz="1500" b="1">
-                <a:solidFill>
-                  <a:srgbClr val="FFFFFF"/>
+              <a:rPr sz="3200" b="1">
+                <a:solidFill>
+                  <a:srgbClr val="0058B2"/>
                 </a:solidFill>
                 <a:latin typeface="Malgun Gothic"/>
                 <a:ea typeface="Malgun Gothic"/>
                 <a:cs typeface="Malgun Gothic"/>
               </a:rPr>
-              <a:t>1</a:t>
+              <a:t>3종</a:t>
             </a:r>
           </a:p>
         </p:txBody>
@@ -7580,8 +9484,8 @@
         </p:nvSpPr>
         <p:spPr>
           <a:xfrm>
-            <a:off x="10058400" y="1856231"/>
-            <a:ext cx="1783080" cy="411480"/>
+            <a:off x="9692640" y="2560320"/>
+            <a:ext cx="1737360" cy="731520"/>
           </a:xfrm>
           <a:prstGeom prst="rect">
             <a:avLst/>
@@ -7594,78 +9498,45 @@
           </a:bodyPr>
           <a:lstStyle/>
           <a:p>
-            <a:pPr algn="l"/>
-            <a:r>
-              <a:rPr sz="1500" b="1">
-                <a:solidFill>
-                  <a:srgbClr val="1F1D1A"/>
+            <a:pPr algn="ctr"/>
+            <a:r>
+              <a:rPr sz="1200" b="0">
+                <a:solidFill>
+                  <a:srgbClr val="666E7A"/>
                 </a:solidFill>
                 <a:latin typeface="Malgun Gothic"/>
                 <a:ea typeface="Malgun Gothic"/>
                 <a:cs typeface="Malgun Gothic"/>
               </a:rPr>
-              <a:t>추천 이유 표시</a:t>
-            </a:r>
-          </a:p>
-        </p:txBody>
-      </p:sp>
-      <p:sp>
-        <p:nvSpPr>
-          <p:cNvPr id="16" name="TextBox 15"/>
-          <p:cNvSpPr txBox="1"/>
-          <p:nvPr/>
-        </p:nvSpPr>
-        <p:spPr>
-          <a:xfrm>
-            <a:off x="10058400" y="2258568"/>
-            <a:ext cx="1783080" cy="914400"/>
-          </a:xfrm>
-          <a:prstGeom prst="rect">
-            <a:avLst/>
-          </a:prstGeom>
-          <a:noFill/>
-        </p:spPr>
-        <p:txBody>
-          <a:bodyPr wrap="square" lIns="0" rIns="0" tIns="0" bIns="0" anchor="t">
-            <a:spAutoFit/>
-          </a:bodyPr>
-          <a:lstStyle/>
-          <a:p>
-            <a:pPr algn="l"/>
-            <a:r>
-              <a:rPr sz="1200" b="0">
-                <a:solidFill>
-                  <a:srgbClr val="6B6862"/>
-                </a:solidFill>
-                <a:latin typeface="Malgun Gothic"/>
-                <a:ea typeface="Malgun Gothic"/>
-                <a:cs typeface="Malgun Gothic"/>
-              </a:rPr>
-              <a:t>"관심 키워드 '장학금, 취업'과
-관련된 공지예요"</a:t>
-            </a:r>
-          </a:p>
-        </p:txBody>
-      </p:sp>
-      <p:sp>
-        <p:nvSpPr>
-          <p:cNvPr id="17" name="Oval 16"/>
+              <a:t>큐넷·데이터자격·
+K-Startup 공공 API</a:t>
+            </a:r>
+          </a:p>
+        </p:txBody>
+      </p:sp>
+      <p:sp>
+        <p:nvSpPr>
+          <p:cNvPr id="16" name="Rounded Rectangle 15"/>
           <p:cNvSpPr/>
           <p:nvPr/>
         </p:nvSpPr>
         <p:spPr>
           <a:xfrm>
-            <a:off x="9555480" y="3291839"/>
-            <a:ext cx="384048" cy="384048"/>
-          </a:xfrm>
-          <a:prstGeom prst="ellipse">
-            <a:avLst/>
+            <a:off x="7498079" y="3657600"/>
+            <a:ext cx="1920240" cy="1920240"/>
+          </a:xfrm>
+          <a:prstGeom prst="roundRect">
+            <a:avLst>
+              <a:gd name="adj" fmla="val 8000"/>
+            </a:avLst>
           </a:prstGeom>
           <a:solidFill>
-            <a:srgbClr val="0058B2"/>
+            <a:srgbClr val="FFFFFF"/>
           </a:solidFill>
-          <a:ln>
-            <a:noFill/>
+          <a:ln w="12700">
+            <a:solidFill>
+              <a:srgbClr val="DDE3EA"/>
+            </a:solidFill>
           </a:ln>
           <a:effectLst/>
         </p:spPr>
@@ -7693,14 +9564,14 @@
       </p:sp>
       <p:sp>
         <p:nvSpPr>
-          <p:cNvPr id="18" name="TextBox 17"/>
+          <p:cNvPr id="17" name="TextBox 16"/>
           <p:cNvSpPr txBox="1"/>
           <p:nvPr/>
         </p:nvSpPr>
         <p:spPr>
           <a:xfrm>
-            <a:off x="9555480" y="3291839"/>
-            <a:ext cx="384048" cy="384048"/>
+            <a:off x="7498079" y="3931920"/>
+            <a:ext cx="1920240" cy="731520"/>
           </a:xfrm>
           <a:prstGeom prst="rect">
             <a:avLst/>
@@ -7708,36 +9579,36 @@
           <a:noFill/>
         </p:spPr>
         <p:txBody>
-          <a:bodyPr wrap="square" lIns="0" rIns="0" tIns="0" bIns="0" anchor="ctr">
+          <a:bodyPr wrap="square" lIns="0" rIns="0" tIns="0" bIns="0" anchor="t">
             <a:spAutoFit/>
           </a:bodyPr>
           <a:lstStyle/>
           <a:p>
             <a:pPr algn="ctr"/>
             <a:r>
-              <a:rPr sz="1500" b="1">
-                <a:solidFill>
-                  <a:srgbClr val="FFFFFF"/>
+              <a:rPr sz="3200" b="1">
+                <a:solidFill>
+                  <a:srgbClr val="0058B2"/>
                 </a:solidFill>
                 <a:latin typeface="Malgun Gothic"/>
                 <a:ea typeface="Malgun Gothic"/>
                 <a:cs typeface="Malgun Gothic"/>
               </a:rPr>
-              <a:t>2</a:t>
-            </a:r>
-          </a:p>
-        </p:txBody>
-      </p:sp>
-      <p:sp>
-        <p:nvSpPr>
-          <p:cNvPr id="19" name="TextBox 18"/>
+              <a:t>70개</a:t>
+            </a:r>
+          </a:p>
+        </p:txBody>
+      </p:sp>
+      <p:sp>
+        <p:nvSpPr>
+          <p:cNvPr id="18" name="TextBox 17"/>
           <p:cNvSpPr txBox="1"/>
           <p:nvPr/>
         </p:nvSpPr>
         <p:spPr>
           <a:xfrm>
-            <a:off x="10058400" y="3273551"/>
-            <a:ext cx="1783080" cy="411480"/>
+            <a:off x="7589519" y="4709160"/>
+            <a:ext cx="1737360" cy="731520"/>
           </a:xfrm>
           <a:prstGeom prst="rect">
             <a:avLst/>
@@ -7750,78 +9621,45 @@
           </a:bodyPr>
           <a:lstStyle/>
           <a:p>
-            <a:pPr algn="l"/>
-            <a:r>
-              <a:rPr sz="1500" b="1">
-                <a:solidFill>
-                  <a:srgbClr val="1F1D1A"/>
+            <a:pPr algn="ctr"/>
+            <a:r>
+              <a:rPr sz="1200" b="0">
+                <a:solidFill>
+                  <a:srgbClr val="666E7A"/>
                 </a:solidFill>
                 <a:latin typeface="Malgun Gothic"/>
                 <a:ea typeface="Malgun Gothic"/>
                 <a:cs typeface="Malgun Gothic"/>
               </a:rPr>
-              <a:t>내 학과 게시판 우선</a:t>
-            </a:r>
-          </a:p>
-        </p:txBody>
-      </p:sp>
-      <p:sp>
-        <p:nvSpPr>
-          <p:cNvPr id="20" name="TextBox 19"/>
-          <p:cNvSpPr txBox="1"/>
-          <p:nvPr/>
-        </p:nvSpPr>
-        <p:spPr>
-          <a:xfrm>
-            <a:off x="10058400" y="3675887"/>
-            <a:ext cx="1783080" cy="914400"/>
-          </a:xfrm>
-          <a:prstGeom prst="rect">
-            <a:avLst/>
-          </a:prstGeom>
-          <a:noFill/>
-        </p:spPr>
-        <p:txBody>
-          <a:bodyPr wrap="square" lIns="0" rIns="0" tIns="0" bIns="0" anchor="t">
-            <a:spAutoFit/>
-          </a:bodyPr>
-          <a:lstStyle/>
-          <a:p>
-            <a:pPr algn="l"/>
-            <a:r>
-              <a:rPr sz="1200" b="0">
-                <a:solidFill>
-                  <a:srgbClr val="6B6862"/>
-                </a:solidFill>
-                <a:latin typeface="Malgun Gothic"/>
-                <a:ea typeface="Malgun Gothic"/>
-                <a:cs typeface="Malgun Gothic"/>
-              </a:rPr>
-              <a:t>109곳 중 내 과 소식을
-가장 먼저</a:t>
-            </a:r>
-          </a:p>
-        </p:txBody>
-      </p:sp>
-      <p:sp>
-        <p:nvSpPr>
-          <p:cNvPr id="21" name="Oval 20"/>
+              <a:t>학과 목록에서
+골라서 추천</a:t>
+            </a:r>
+          </a:p>
+        </p:txBody>
+      </p:sp>
+      <p:sp>
+        <p:nvSpPr>
+          <p:cNvPr id="19" name="Rounded Rectangle 18"/>
           <p:cNvSpPr/>
           <p:nvPr/>
         </p:nvSpPr>
         <p:spPr>
           <a:xfrm>
-            <a:off x="9555480" y="4709160"/>
-            <a:ext cx="384048" cy="384048"/>
-          </a:xfrm>
-          <a:prstGeom prst="ellipse">
-            <a:avLst/>
+            <a:off x="9601200" y="3657600"/>
+            <a:ext cx="1920240" cy="1920240"/>
+          </a:xfrm>
+          <a:prstGeom prst="roundRect">
+            <a:avLst>
+              <a:gd name="adj" fmla="val 8000"/>
+            </a:avLst>
           </a:prstGeom>
           <a:solidFill>
-            <a:srgbClr val="0058B2"/>
+            <a:srgbClr val="FFFFFF"/>
           </a:solidFill>
-          <a:ln>
-            <a:noFill/>
+          <a:ln w="12700">
+            <a:solidFill>
+              <a:srgbClr val="DDE3EA"/>
+            </a:solidFill>
           </a:ln>
           <a:effectLst/>
         </p:spPr>
@@ -7849,14 +9687,14 @@
       </p:sp>
       <p:sp>
         <p:nvSpPr>
-          <p:cNvPr id="22" name="TextBox 21"/>
+          <p:cNvPr id="20" name="TextBox 19"/>
           <p:cNvSpPr txBox="1"/>
           <p:nvPr/>
         </p:nvSpPr>
         <p:spPr>
           <a:xfrm>
-            <a:off x="9555480" y="4709160"/>
-            <a:ext cx="384048" cy="384048"/>
+            <a:off x="9601200" y="3931920"/>
+            <a:ext cx="1920240" cy="731520"/>
           </a:xfrm>
           <a:prstGeom prst="rect">
             <a:avLst/>
@@ -7864,36 +9702,36 @@
           <a:noFill/>
         </p:spPr>
         <p:txBody>
-          <a:bodyPr wrap="square" lIns="0" rIns="0" tIns="0" bIns="0" anchor="ctr">
+          <a:bodyPr wrap="square" lIns="0" rIns="0" tIns="0" bIns="0" anchor="t">
             <a:spAutoFit/>
           </a:bodyPr>
           <a:lstStyle/>
           <a:p>
             <a:pPr algn="ctr"/>
             <a:r>
-              <a:rPr sz="1500" b="1">
-                <a:solidFill>
-                  <a:srgbClr val="FFFFFF"/>
+              <a:rPr sz="3200" b="1">
+                <a:solidFill>
+                  <a:srgbClr val="0058B2"/>
                 </a:solidFill>
                 <a:latin typeface="Malgun Gothic"/>
                 <a:ea typeface="Malgun Gothic"/>
                 <a:cs typeface="Malgun Gothic"/>
               </a:rPr>
-              <a:t>3</a:t>
-            </a:r>
-          </a:p>
-        </p:txBody>
-      </p:sp>
-      <p:sp>
-        <p:nvSpPr>
-          <p:cNvPr id="23" name="TextBox 22"/>
+              <a:t>0원</a:t>
+            </a:r>
+          </a:p>
+        </p:txBody>
+      </p:sp>
+      <p:sp>
+        <p:nvSpPr>
+          <p:cNvPr id="21" name="TextBox 20"/>
           <p:cNvSpPr txBox="1"/>
           <p:nvPr/>
         </p:nvSpPr>
         <p:spPr>
           <a:xfrm>
-            <a:off x="10058400" y="4690872"/>
-            <a:ext cx="1783080" cy="411480"/>
+            <a:off x="9692640" y="4709160"/>
+            <a:ext cx="1737360" cy="731520"/>
           </a:xfrm>
           <a:prstGeom prst="rect">
             <a:avLst/>
@@ -7906,31 +9744,32 @@
           </a:bodyPr>
           <a:lstStyle/>
           <a:p>
-            <a:pPr algn="l"/>
-            <a:r>
-              <a:rPr sz="1500" b="1">
-                <a:solidFill>
-                  <a:srgbClr val="1F1D1A"/>
+            <a:pPr algn="ctr"/>
+            <a:r>
+              <a:rPr sz="1200" b="0">
+                <a:solidFill>
+                  <a:srgbClr val="666E7A"/>
                 </a:solidFill>
                 <a:latin typeface="Malgun Gothic"/>
                 <a:ea typeface="Malgun Gothic"/>
                 <a:cs typeface="Malgun Gothic"/>
               </a:rPr>
-              <a:t>헛추천은 거른다</a:t>
-            </a:r>
-          </a:p>
-        </p:txBody>
-      </p:sp>
-      <p:sp>
-        <p:nvSpPr>
-          <p:cNvPr id="24" name="TextBox 23"/>
+              <a:t>서버·AI
+운영 비용</a:t>
+            </a:r>
+          </a:p>
+        </p:txBody>
+      </p:sp>
+      <p:sp>
+        <p:nvSpPr>
+          <p:cNvPr id="22" name="TextBox 21"/>
           <p:cNvSpPr txBox="1"/>
           <p:nvPr/>
         </p:nvSpPr>
         <p:spPr>
           <a:xfrm>
-            <a:off x="10058400" y="5093208"/>
-            <a:ext cx="1783080" cy="914400"/>
+            <a:off x="640080" y="6035040"/>
+            <a:ext cx="10972800" cy="365760"/>
           </a:xfrm>
           <a:prstGeom prst="rect">
             <a:avLst/>
@@ -7943,18 +9782,54 @@
           </a:bodyPr>
           <a:lstStyle/>
           <a:p>
-            <a:pPr algn="l"/>
-            <a:r>
-              <a:rPr sz="1200" b="0">
-                <a:solidFill>
-                  <a:srgbClr val="6B6862"/>
+            <a:pPr algn="ctr"/>
+            <a:r>
+              <a:rPr sz="1400" b="1">
+                <a:solidFill>
+                  <a:srgbClr val="1F232B"/>
                 </a:solidFill>
                 <a:latin typeface="Malgun Gothic"/>
                 <a:ea typeface="Malgun Gothic"/>
                 <a:cs typeface="Malgun Gothic"/>
               </a:rPr>
-              <a:t>결과·수상자 발표, 본문에
-한 번 스친 단어는 제외</a:t>
+              <a:t>휴대폰에서도, 컴퓨터에서도 같은 주소로 열립니다. 설치 없이 '홈 화면에 추가'하면 앱처럼 씁니다.</a:t>
+            </a:r>
+          </a:p>
+        </p:txBody>
+      </p:sp>
+      <p:sp>
+        <p:nvSpPr>
+          <p:cNvPr id="23" name="TextBox 22"/>
+          <p:cNvSpPr txBox="1"/>
+          <p:nvPr/>
+        </p:nvSpPr>
+        <p:spPr>
+          <a:xfrm>
+            <a:off x="11247120" y="6400800"/>
+            <a:ext cx="457200" cy="274320"/>
+          </a:xfrm>
+          <a:prstGeom prst="rect">
+            <a:avLst/>
+          </a:prstGeom>
+          <a:noFill/>
+        </p:spPr>
+        <p:txBody>
+          <a:bodyPr wrap="square" lIns="0" rIns="0" tIns="0" bIns="0" anchor="t">
+            <a:spAutoFit/>
+          </a:bodyPr>
+          <a:lstStyle/>
+          <a:p>
+            <a:pPr algn="r"/>
+            <a:r>
+              <a:rPr sz="1000" b="0">
+                <a:solidFill>
+                  <a:srgbClr val="666E7A"/>
+                </a:solidFill>
+                <a:latin typeface="Malgun Gothic"/>
+                <a:ea typeface="Malgun Gothic"/>
+                <a:cs typeface="Malgun Gothic"/>
+              </a:rPr>
+              <a:t>5</a:t>
             </a:r>
           </a:p>
         </p:txBody>
@@ -7973,7 +9848,7 @@
     <p:bg>
       <p:bgPr>
         <a:solidFill>
-          <a:srgbClr val="FFFFFF"/>
+          <a:srgbClr val="F6F8FB"/>
         </a:solidFill>
         <a:effectLst/>
       </p:bgPr>
@@ -7993,8 +9868,8 @@
         </p:nvSpPr>
         <p:spPr>
           <a:xfrm>
-            <a:off x="548640" y="411480"/>
-            <a:ext cx="11064240" cy="640080"/>
+            <a:off x="594360" y="457200"/>
+            <a:ext cx="10972800" cy="731520"/>
           </a:xfrm>
           <a:prstGeom prst="rect">
             <a:avLst/>
@@ -8009,78 +9884,44 @@
           <a:p>
             <a:pPr algn="l"/>
             <a:r>
-              <a:rPr sz="3200" b="1">
-                <a:solidFill>
-                  <a:srgbClr val="1F1D1A"/>
+              <a:rPr sz="3000" b="1">
+                <a:solidFill>
+                  <a:srgbClr val="1F232B"/>
                 </a:solidFill>
                 <a:latin typeface="Malgun Gothic"/>
                 <a:ea typeface="Malgun Gothic"/>
                 <a:cs typeface="Malgun Gothic"/>
               </a:rPr>
-              <a:t>③ 정리 카드와 캘린더</a:t>
-            </a:r>
-          </a:p>
-        </p:txBody>
-      </p:sp>
-      <p:sp>
-        <p:nvSpPr>
-          <p:cNvPr id="3" name="TextBox 2"/>
-          <p:cNvSpPr txBox="1"/>
-          <p:nvPr/>
-        </p:nvSpPr>
-        <p:spPr>
-          <a:xfrm>
-            <a:off x="548640" y="1024128"/>
-            <a:ext cx="11064240" cy="411480"/>
-          </a:xfrm>
-          <a:prstGeom prst="rect">
-            <a:avLst/>
-          </a:prstGeom>
-          <a:noFill/>
-        </p:spPr>
-        <p:txBody>
-          <a:bodyPr wrap="square" lIns="0" rIns="0" tIns="0" bIns="0" anchor="t">
-            <a:spAutoFit/>
-          </a:bodyPr>
-          <a:lstStyle/>
-          <a:p>
-            <a:pPr algn="l"/>
-            <a:r>
-              <a:rPr sz="1600" b="0">
-                <a:solidFill>
-                  <a:srgbClr val="6B6862"/>
-                </a:solidFill>
-                <a:latin typeface="Malgun Gothic"/>
-                <a:ea typeface="Malgun Gothic"/>
-                <a:cs typeface="Malgun Gothic"/>
-              </a:rPr>
-              <a:t>본문·첨부파일에서 필요한 칸만 뽑아 보여줍니다</a:t>
-            </a:r>
-          </a:p>
-        </p:txBody>
-      </p:sp>
-      <p:sp>
-        <p:nvSpPr>
-          <p:cNvPr id="4" name="Rounded Rectangle 3"/>
+              <a:t>학생들이 쓸수록 더 정확해집니다</a:t>
+            </a:r>
+          </a:p>
+        </p:txBody>
+      </p:sp>
+      <p:sp>
+        <p:nvSpPr>
+          <p:cNvPr id="3" name="Rounded Rectangle 2"/>
           <p:cNvSpPr/>
           <p:nvPr/>
         </p:nvSpPr>
         <p:spPr>
           <a:xfrm>
-            <a:off x="539496" y="1728216"/>
-            <a:ext cx="6144768" cy="4155948"/>
+            <a:off x="594360" y="2011680"/>
+            <a:ext cx="3474720" cy="2651760"/>
           </a:xfrm>
           <a:prstGeom prst="roundRect">
             <a:avLst>
-              <a:gd name="adj" fmla="val 3000"/>
+              <a:gd name="adj" fmla="val 6000"/>
             </a:avLst>
           </a:prstGeom>
           <a:solidFill>
-            <a:srgbClr val="262A33"/>
+            <a:srgbClr val="FFFFFF"/>
           </a:solidFill>
-          <a:ln>
-            <a:noFill/>
+          <a:ln w="12700">
+            <a:solidFill>
+              <a:srgbClr val="DDE3EA"/>
+            </a:solidFill>
           </a:ln>
+          <a:effectLst/>
         </p:spPr>
         <p:style>
           <a:lnRef idx="1">
@@ -8106,20 +9947,136 @@
       </p:sp>
       <p:sp>
         <p:nvSpPr>
-          <p:cNvPr id="5" name="Oval 4"/>
+          <p:cNvPr id="4" name="TextBox 3"/>
+          <p:cNvSpPr txBox="1"/>
+          <p:nvPr/>
+        </p:nvSpPr>
+        <p:spPr>
+          <a:xfrm>
+            <a:off x="914400" y="2286000"/>
+            <a:ext cx="2834640" cy="365760"/>
+          </a:xfrm>
+          <a:prstGeom prst="rect">
+            <a:avLst/>
+          </a:prstGeom>
+          <a:noFill/>
+        </p:spPr>
+        <p:txBody>
+          <a:bodyPr wrap="square" lIns="0" rIns="0" tIns="0" bIns="0" anchor="t">
+            <a:spAutoFit/>
+          </a:bodyPr>
+          <a:lstStyle/>
+          <a:p>
+            <a:pPr algn="l"/>
+            <a:r>
+              <a:rPr sz="1400" b="1">
+                <a:solidFill>
+                  <a:srgbClr val="1F232B"/>
+                </a:solidFill>
+                <a:latin typeface="Malgun Gothic"/>
+                <a:ea typeface="Malgun Gothic"/>
+                <a:cs typeface="Malgun Gothic"/>
+              </a:rPr>
+              <a:t>지금</a:t>
+            </a:r>
+          </a:p>
+        </p:txBody>
+      </p:sp>
+      <p:sp>
+        <p:nvSpPr>
+          <p:cNvPr id="5" name="TextBox 4"/>
+          <p:cNvSpPr txBox="1"/>
+          <p:nvPr/>
+        </p:nvSpPr>
+        <p:spPr>
+          <a:xfrm>
+            <a:off x="914400" y="2743200"/>
+            <a:ext cx="2926080" cy="548640"/>
+          </a:xfrm>
+          <a:prstGeom prst="rect">
+            <a:avLst/>
+          </a:prstGeom>
+          <a:noFill/>
+        </p:spPr>
+        <p:txBody>
+          <a:bodyPr wrap="square" lIns="0" rIns="0" tIns="0" bIns="0" anchor="t">
+            <a:spAutoFit/>
+          </a:bodyPr>
+          <a:lstStyle/>
+          <a:p>
+            <a:pPr algn="l"/>
+            <a:r>
+              <a:rPr sz="2000" b="1">
+                <a:solidFill>
+                  <a:srgbClr val="1F232B"/>
+                </a:solidFill>
+                <a:latin typeface="Malgun Gothic"/>
+                <a:ea typeface="Malgun Gothic"/>
+                <a:cs typeface="Malgun Gothic"/>
+              </a:rPr>
+              <a:t>누구나 쓸 수 있는 웹앱</a:t>
+            </a:r>
+          </a:p>
+        </p:txBody>
+      </p:sp>
+      <p:sp>
+        <p:nvSpPr>
+          <p:cNvPr id="6" name="TextBox 5"/>
+          <p:cNvSpPr txBox="1"/>
+          <p:nvPr/>
+        </p:nvSpPr>
+        <p:spPr>
+          <a:xfrm>
+            <a:off x="914400" y="3474720"/>
+            <a:ext cx="2926080" cy="1645920"/>
+          </a:xfrm>
+          <a:prstGeom prst="rect">
+            <a:avLst/>
+          </a:prstGeom>
+          <a:noFill/>
+        </p:spPr>
+        <p:txBody>
+          <a:bodyPr wrap="square" lIns="0" rIns="0" tIns="0" bIns="0" anchor="t">
+            <a:spAutoFit/>
+          </a:bodyPr>
+          <a:lstStyle/>
+          <a:p>
+            <a:pPr algn="l">
+              <a:spcAft>
+                <a:spcPts val="200"/>
+              </a:spcAft>
+            </a:pPr>
+            <a:r>
+              <a:rPr sz="1400" b="0">
+                <a:solidFill>
+                  <a:srgbClr val="666E7A"/>
+                </a:solidFill>
+                <a:latin typeface="Malgun Gothic"/>
+                <a:ea typeface="Malgun Gothic"/>
+                <a:cs typeface="Malgun Gothic"/>
+              </a:rPr>
+              <a:t>매시간 수집, 추천, 마감 알림까지
+실제 주소에서 운영 중입니다.</a:t>
+            </a:r>
+          </a:p>
+        </p:txBody>
+      </p:sp>
+      <p:sp>
+        <p:nvSpPr>
+          <p:cNvPr id="7" name="Right Arrow 6"/>
           <p:cNvSpPr/>
           <p:nvPr/>
         </p:nvSpPr>
         <p:spPr>
           <a:xfrm>
-            <a:off x="704088" y="1865376"/>
-            <a:ext cx="100584" cy="100584"/>
-          </a:xfrm>
-          <a:prstGeom prst="ellipse">
+            <a:off x="4096512" y="3154680"/>
+            <a:ext cx="292608" cy="365760"/>
+          </a:xfrm>
+          <a:prstGeom prst="rightArrow">
             <a:avLst/>
           </a:prstGeom>
           <a:solidFill>
-            <a:srgbClr val="FF5F57"/>
+            <a:srgbClr val="B8C1CC"/>
           </a:solidFill>
           <a:ln>
             <a:noFill/>
@@ -8150,20 +10107,22 @@
       </p:sp>
       <p:sp>
         <p:nvSpPr>
-          <p:cNvPr id="6" name="Oval 5"/>
+          <p:cNvPr id="8" name="Rounded Rectangle 7"/>
           <p:cNvSpPr/>
           <p:nvPr/>
         </p:nvSpPr>
         <p:spPr>
           <a:xfrm>
-            <a:off x="868680" y="1865376"/>
-            <a:ext cx="100584" cy="100584"/>
-          </a:xfrm>
-          <a:prstGeom prst="ellipse">
-            <a:avLst/>
+            <a:off x="4434840" y="2011680"/>
+            <a:ext cx="3474720" cy="2651760"/>
+          </a:xfrm>
+          <a:prstGeom prst="roundRect">
+            <a:avLst>
+              <a:gd name="adj" fmla="val 6000"/>
+            </a:avLst>
           </a:prstGeom>
           <a:solidFill>
-            <a:srgbClr val="FEBC2E"/>
+            <a:srgbClr val="EEF4FB"/>
           </a:solidFill>
           <a:ln>
             <a:noFill/>
@@ -8194,20 +10153,136 @@
       </p:sp>
       <p:sp>
         <p:nvSpPr>
-          <p:cNvPr id="7" name="Oval 6"/>
+          <p:cNvPr id="9" name="TextBox 8"/>
+          <p:cNvSpPr txBox="1"/>
+          <p:nvPr/>
+        </p:nvSpPr>
+        <p:spPr>
+          <a:xfrm>
+            <a:off x="4754880" y="2286000"/>
+            <a:ext cx="2834640" cy="365760"/>
+          </a:xfrm>
+          <a:prstGeom prst="rect">
+            <a:avLst/>
+          </a:prstGeom>
+          <a:noFill/>
+        </p:spPr>
+        <p:txBody>
+          <a:bodyPr wrap="square" lIns="0" rIns="0" tIns="0" bIns="0" anchor="t">
+            <a:spAutoFit/>
+          </a:bodyPr>
+          <a:lstStyle/>
+          <a:p>
+            <a:pPr algn="l"/>
+            <a:r>
+              <a:rPr sz="1400" b="1">
+                <a:solidFill>
+                  <a:srgbClr val="0058B2"/>
+                </a:solidFill>
+                <a:latin typeface="Malgun Gothic"/>
+                <a:ea typeface="Malgun Gothic"/>
+                <a:cs typeface="Malgun Gothic"/>
+              </a:rPr>
+              <a:t>다음</a:t>
+            </a:r>
+          </a:p>
+        </p:txBody>
+      </p:sp>
+      <p:sp>
+        <p:nvSpPr>
+          <p:cNvPr id="10" name="TextBox 9"/>
+          <p:cNvSpPr txBox="1"/>
+          <p:nvPr/>
+        </p:nvSpPr>
+        <p:spPr>
+          <a:xfrm>
+            <a:off x="4754880" y="2743200"/>
+            <a:ext cx="2926080" cy="548640"/>
+          </a:xfrm>
+          <a:prstGeom prst="rect">
+            <a:avLst/>
+          </a:prstGeom>
+          <a:noFill/>
+        </p:spPr>
+        <p:txBody>
+          <a:bodyPr wrap="square" lIns="0" rIns="0" tIns="0" bIns="0" anchor="t">
+            <a:spAutoFit/>
+          </a:bodyPr>
+          <a:lstStyle/>
+          <a:p>
+            <a:pPr algn="l"/>
+            <a:r>
+              <a:rPr sz="2000" b="1">
+                <a:solidFill>
+                  <a:srgbClr val="1F232B"/>
+                </a:solidFill>
+                <a:latin typeface="Malgun Gothic"/>
+                <a:ea typeface="Malgun Gothic"/>
+                <a:cs typeface="Malgun Gothic"/>
+              </a:rPr>
+              <a:t>학생 의견으로 다듬기</a:t>
+            </a:r>
+          </a:p>
+        </p:txBody>
+      </p:sp>
+      <p:sp>
+        <p:nvSpPr>
+          <p:cNvPr id="11" name="TextBox 10"/>
+          <p:cNvSpPr txBox="1"/>
+          <p:nvPr/>
+        </p:nvSpPr>
+        <p:spPr>
+          <a:xfrm>
+            <a:off x="4754880" y="3474720"/>
+            <a:ext cx="2926080" cy="1645920"/>
+          </a:xfrm>
+          <a:prstGeom prst="rect">
+            <a:avLst/>
+          </a:prstGeom>
+          <a:noFill/>
+        </p:spPr>
+        <p:txBody>
+          <a:bodyPr wrap="square" lIns="0" rIns="0" tIns="0" bIns="0" anchor="t">
+            <a:spAutoFit/>
+          </a:bodyPr>
+          <a:lstStyle/>
+          <a:p>
+            <a:pPr algn="l">
+              <a:spcAft>
+                <a:spcPts val="200"/>
+              </a:spcAft>
+            </a:pPr>
+            <a:r>
+              <a:rPr sz="1400" b="0">
+                <a:solidFill>
+                  <a:srgbClr val="666E7A"/>
+                </a:solidFill>
+                <a:latin typeface="Malgun Gothic"/>
+                <a:ea typeface="Malgun Gothic"/>
+                <a:cs typeface="Malgun Gothic"/>
+              </a:rPr>
+              <a:t>지역 한정 공고 표시, 추천이 빗나간
+공지를 모아 규칙을 고칩니다.</a:t>
+            </a:r>
+          </a:p>
+        </p:txBody>
+      </p:sp>
+      <p:sp>
+        <p:nvSpPr>
+          <p:cNvPr id="12" name="Right Arrow 11"/>
           <p:cNvSpPr/>
           <p:nvPr/>
         </p:nvSpPr>
         <p:spPr>
           <a:xfrm>
-            <a:off x="1033271" y="1865376"/>
-            <a:ext cx="100584" cy="100584"/>
-          </a:xfrm>
-          <a:prstGeom prst="ellipse">
+            <a:off x="7936992" y="3154680"/>
+            <a:ext cx="292608" cy="365760"/>
+          </a:xfrm>
+          <a:prstGeom prst="rightArrow">
             <a:avLst/>
           </a:prstGeom>
           <a:solidFill>
-            <a:srgbClr val="28C840"/>
+            <a:srgbClr val="B8C1CC"/>
           </a:solidFill>
           <a:ln>
             <a:noFill/>
@@ -8238,22 +10313,22 @@
       </p:sp>
       <p:sp>
         <p:nvSpPr>
-          <p:cNvPr id="8" name="Rounded Rectangle 7"/>
+          <p:cNvPr id="13" name="Rounded Rectangle 12"/>
           <p:cNvSpPr/>
           <p:nvPr/>
         </p:nvSpPr>
         <p:spPr>
           <a:xfrm>
-            <a:off x="1280160" y="1828800"/>
-            <a:ext cx="5120640" cy="182880"/>
+            <a:off x="8275320" y="2011680"/>
+            <a:ext cx="3474720" cy="2651760"/>
           </a:xfrm>
           <a:prstGeom prst="roundRect">
             <a:avLst>
-              <a:gd name="adj" fmla="val 50000"/>
+              <a:gd name="adj" fmla="val 6000"/>
             </a:avLst>
           </a:prstGeom>
           <a:solidFill>
-            <a:srgbClr val="3A3F4A"/>
+            <a:srgbClr val="E6F6EE"/>
           </a:solidFill>
           <a:ln>
             <a:noFill/>
@@ -8284,14 +10359,14 @@
       </p:sp>
       <p:sp>
         <p:nvSpPr>
-          <p:cNvPr id="9" name="TextBox 8"/>
+          <p:cNvPr id="14" name="TextBox 13"/>
           <p:cNvSpPr txBox="1"/>
           <p:nvPr/>
         </p:nvSpPr>
         <p:spPr>
           <a:xfrm>
-            <a:off x="1417320" y="1828800"/>
-            <a:ext cx="4846320" cy="182880"/>
+            <a:off x="8595360" y="2286000"/>
+            <a:ext cx="2834640" cy="365760"/>
           </a:xfrm>
           <a:prstGeom prst="rect">
             <a:avLst/>
@@ -8299,210 +10374,73 @@
           <a:noFill/>
         </p:spPr>
         <p:txBody>
-          <a:bodyPr wrap="square" lIns="0" rIns="0" tIns="0" bIns="0" anchor="ctr">
+          <a:bodyPr wrap="square" lIns="0" rIns="0" tIns="0" bIns="0" anchor="t">
             <a:spAutoFit/>
           </a:bodyPr>
           <a:lstStyle/>
           <a:p>
             <a:pPr algn="l"/>
             <a:r>
-              <a:rPr sz="900" b="0">
-                <a:solidFill>
-                  <a:srgbClr val="C9CED6"/>
+              <a:rPr sz="1400" b="1">
+                <a:solidFill>
+                  <a:srgbClr val="1E9E6A"/>
                 </a:solidFill>
                 <a:latin typeface="Malgun Gothic"/>
                 <a:ea typeface="Malgun Gothic"/>
                 <a:cs typeface="Malgun Gothic"/>
               </a:rPr>
-              <a:t>scnuaram.vercel.app</a:t>
-            </a:r>
-          </a:p>
-        </p:txBody>
-      </p:sp>
-      <p:pic>
-        <p:nvPicPr>
-          <p:cNvPr id="10" name="Picture 9" descr="4-calendar.png"/>
-          <p:cNvPicPr>
-            <a:picLocks noChangeAspect="1"/>
-          </p:cNvPicPr>
-          <p:nvPr/>
-        </p:nvPicPr>
-        <p:blipFill>
-          <a:blip r:embed="rId2"/>
-          <a:stretch>
-            <a:fillRect/>
-          </a:stretch>
-        </p:blipFill>
-        <p:spPr>
-          <a:xfrm>
-            <a:off x="594360" y="2057400"/>
-            <a:ext cx="6035040" cy="3771900"/>
+              <a:t>나중에</a:t>
+            </a:r>
+          </a:p>
+        </p:txBody>
+      </p:sp>
+      <p:sp>
+        <p:nvSpPr>
+          <p:cNvPr id="15" name="TextBox 14"/>
+          <p:cNvSpPr txBox="1"/>
+          <p:nvPr/>
+        </p:nvSpPr>
+        <p:spPr>
+          <a:xfrm>
+            <a:off x="8595360" y="2743200"/>
+            <a:ext cx="2926080" cy="548640"/>
           </a:xfrm>
           <a:prstGeom prst="rect">
             <a:avLst/>
           </a:prstGeom>
-        </p:spPr>
-      </p:pic>
-      <p:sp>
-        <p:nvSpPr>
-          <p:cNvPr id="11" name="Rounded Rectangle 10"/>
-          <p:cNvSpPr/>
-          <p:nvPr/>
-        </p:nvSpPr>
-        <p:spPr>
-          <a:xfrm>
-            <a:off x="7004304" y="1609344"/>
-            <a:ext cx="2361752" cy="4919472"/>
-          </a:xfrm>
-          <a:prstGeom prst="roundRect">
-            <a:avLst>
-              <a:gd name="adj" fmla="val 9000"/>
-            </a:avLst>
-          </a:prstGeom>
-          <a:solidFill>
-            <a:srgbClr val="111114"/>
-          </a:solidFill>
-          <a:ln>
-            <a:noFill/>
-          </a:ln>
-        </p:spPr>
-        <p:style>
-          <a:lnRef idx="1">
-            <a:schemeClr val="accent1"/>
-          </a:lnRef>
-          <a:fillRef idx="3">
-            <a:schemeClr val="accent1"/>
-          </a:fillRef>
-          <a:effectRef idx="2">
-            <a:schemeClr val="accent1"/>
-          </a:effectRef>
-          <a:fontRef idx="minor">
-            <a:schemeClr val="lt1"/>
-          </a:fontRef>
-        </p:style>
-        <p:txBody>
-          <a:bodyPr rtlCol="0" anchor="ctr"/>
-          <a:lstStyle/>
-          <a:p>
-            <a:pPr algn="ctr"/>
-          </a:p>
-        </p:txBody>
-      </p:sp>
-      <p:pic>
-        <p:nvPicPr>
-          <p:cNvPr id="12" name="Picture 11" descr="3-detail.png"/>
-          <p:cNvPicPr>
-            <a:picLocks noChangeAspect="1"/>
-          </p:cNvPicPr>
-          <p:nvPr/>
-        </p:nvPicPr>
-        <p:blipFill>
-          <a:blip r:embed="rId3"/>
-          <a:stretch>
-            <a:fillRect/>
-          </a:stretch>
-        </p:blipFill>
-        <p:spPr>
-          <a:xfrm>
-            <a:off x="7086600" y="1691640"/>
-            <a:ext cx="2197160" cy="4754880"/>
-          </a:xfrm>
-          <a:prstGeom prst="rect">
-            <a:avLst/>
-          </a:prstGeom>
-        </p:spPr>
-      </p:pic>
-      <p:sp>
-        <p:nvSpPr>
-          <p:cNvPr id="13" name="Oval 12"/>
-          <p:cNvSpPr/>
-          <p:nvPr/>
-        </p:nvSpPr>
-        <p:spPr>
-          <a:xfrm>
-            <a:off x="9555480" y="1874519"/>
-            <a:ext cx="384048" cy="384048"/>
-          </a:xfrm>
-          <a:prstGeom prst="ellipse">
-            <a:avLst/>
-          </a:prstGeom>
-          <a:solidFill>
-            <a:srgbClr val="0058B2"/>
-          </a:solidFill>
-          <a:ln>
-            <a:noFill/>
-          </a:ln>
-          <a:effectLst/>
-        </p:spPr>
-        <p:style>
-          <a:lnRef idx="1">
-            <a:schemeClr val="accent1"/>
-          </a:lnRef>
-          <a:fillRef idx="3">
-            <a:schemeClr val="accent1"/>
-          </a:fillRef>
-          <a:effectRef idx="2">
-            <a:schemeClr val="accent1"/>
-          </a:effectRef>
-          <a:fontRef idx="minor">
-            <a:schemeClr val="lt1"/>
-          </a:fontRef>
-        </p:style>
-        <p:txBody>
-          <a:bodyPr rtlCol="0" anchor="ctr"/>
-          <a:lstStyle/>
-          <a:p>
-            <a:pPr algn="ctr"/>
-          </a:p>
-        </p:txBody>
-      </p:sp>
-      <p:sp>
-        <p:nvSpPr>
-          <p:cNvPr id="14" name="TextBox 13"/>
-          <p:cNvSpPr txBox="1"/>
-          <p:nvPr/>
-        </p:nvSpPr>
-        <p:spPr>
-          <a:xfrm>
-            <a:off x="9555480" y="1874519"/>
-            <a:ext cx="384048" cy="384048"/>
-          </a:xfrm>
-          <a:prstGeom prst="rect">
-            <a:avLst/>
-          </a:prstGeom>
           <a:noFill/>
         </p:spPr>
         <p:txBody>
-          <a:bodyPr wrap="square" lIns="0" rIns="0" tIns="0" bIns="0" anchor="ctr">
+          <a:bodyPr wrap="square" lIns="0" rIns="0" tIns="0" bIns="0" anchor="t">
             <a:spAutoFit/>
           </a:bodyPr>
           <a:lstStyle/>
           <a:p>
-            <a:pPr algn="ctr"/>
-            <a:r>
-              <a:rPr sz="1500" b="1">
-                <a:solidFill>
-                  <a:srgbClr val="FFFFFF"/>
+            <a:pPr algn="l"/>
+            <a:r>
+              <a:rPr sz="2000" b="1">
+                <a:solidFill>
+                  <a:srgbClr val="1F232B"/>
                 </a:solidFill>
                 <a:latin typeface="Malgun Gothic"/>
                 <a:ea typeface="Malgun Gothic"/>
                 <a:cs typeface="Malgun Gothic"/>
               </a:rPr>
-              <a:t>1</a:t>
-            </a:r>
-          </a:p>
-        </p:txBody>
-      </p:sp>
-      <p:sp>
-        <p:nvSpPr>
-          <p:cNvPr id="15" name="TextBox 14"/>
+              <a:t>다른 학과·다른 학교로</a:t>
+            </a:r>
+          </a:p>
+        </p:txBody>
+      </p:sp>
+      <p:sp>
+        <p:nvSpPr>
+          <p:cNvPr id="16" name="TextBox 15"/>
           <p:cNvSpPr txBox="1"/>
           <p:nvPr/>
         </p:nvSpPr>
         <p:spPr>
           <a:xfrm>
-            <a:off x="10058400" y="1856231"/>
-            <a:ext cx="1783080" cy="411480"/>
+            <a:off x="8595360" y="3474720"/>
+            <a:ext cx="2926080" cy="1645920"/>
           </a:xfrm>
           <a:prstGeom prst="rect">
             <a:avLst/>
@@ -8515,31 +10453,36 @@
           </a:bodyPr>
           <a:lstStyle/>
           <a:p>
-            <a:pPr algn="l"/>
-            <a:r>
-              <a:rPr sz="1500" b="1">
-                <a:solidFill>
-                  <a:srgbClr val="1F1D1A"/>
+            <a:pPr algn="l">
+              <a:spcAft>
+                <a:spcPts val="200"/>
+              </a:spcAft>
+            </a:pPr>
+            <a:r>
+              <a:rPr sz="1400" b="0">
+                <a:solidFill>
+                  <a:srgbClr val="666E7A"/>
                 </a:solidFill>
                 <a:latin typeface="Malgun Gothic"/>
                 <a:ea typeface="Malgun Gothic"/>
                 <a:cs typeface="Malgun Gothic"/>
               </a:rPr>
-              <a:t>정리 카드</a:t>
-            </a:r>
-          </a:p>
-        </p:txBody>
-      </p:sp>
-      <p:sp>
-        <p:nvSpPr>
-          <p:cNvPr id="16" name="TextBox 15"/>
+              <a:t>같은 게시판 시스템을 쓰는 곳이면
+주소만 추가해 넓힐 수 있습니다.</a:t>
+            </a:r>
+          </a:p>
+        </p:txBody>
+      </p:sp>
+      <p:sp>
+        <p:nvSpPr>
+          <p:cNvPr id="17" name="TextBox 16"/>
           <p:cNvSpPr txBox="1"/>
           <p:nvPr/>
         </p:nvSpPr>
         <p:spPr>
           <a:xfrm>
-            <a:off x="10058400" y="2258568"/>
-            <a:ext cx="1783080" cy="914400"/>
+            <a:off x="594360" y="5257800"/>
+            <a:ext cx="10972800" cy="457200"/>
           </a:xfrm>
           <a:prstGeom prst="rect">
             <a:avLst/>
@@ -8552,63 +10495,18 @@
           </a:bodyPr>
           <a:lstStyle/>
           <a:p>
-            <a:pPr algn="l"/>
-            <a:r>
-              <a:rPr sz="1200" b="0">
-                <a:solidFill>
-                  <a:srgbClr val="6B6862"/>
+            <a:pPr algn="ctr"/>
+            <a:r>
+              <a:rPr sz="1800" b="1">
+                <a:solidFill>
+                  <a:srgbClr val="1F232B"/>
                 </a:solidFill>
                 <a:latin typeface="Malgun Gothic"/>
                 <a:ea typeface="Malgun Gothic"/>
                 <a:cs typeface="Malgun Gothic"/>
               </a:rPr>
-              <a:t>대상·기간·신청방법·문의를
-표로, 링크는 바로 누르기</a:t>
-            </a:r>
-          </a:p>
-        </p:txBody>
-      </p:sp>
-      <p:sp>
-        <p:nvSpPr>
-          <p:cNvPr id="17" name="Oval 16"/>
-          <p:cNvSpPr/>
-          <p:nvPr/>
-        </p:nvSpPr>
-        <p:spPr>
-          <a:xfrm>
-            <a:off x="9555480" y="3291839"/>
-            <a:ext cx="384048" cy="384048"/>
-          </a:xfrm>
-          <a:prstGeom prst="ellipse">
-            <a:avLst/>
-          </a:prstGeom>
-          <a:solidFill>
-            <a:srgbClr val="0058B2"/>
-          </a:solidFill>
-          <a:ln>
-            <a:noFill/>
-          </a:ln>
-          <a:effectLst/>
-        </p:spPr>
-        <p:style>
-          <a:lnRef idx="1">
-            <a:schemeClr val="accent1"/>
-          </a:lnRef>
-          <a:fillRef idx="3">
-            <a:schemeClr val="accent1"/>
-          </a:fillRef>
-          <a:effectRef idx="2">
-            <a:schemeClr val="accent1"/>
-          </a:effectRef>
-          <a:fontRef idx="minor">
-            <a:schemeClr val="lt1"/>
-          </a:fontRef>
-        </p:style>
-        <p:txBody>
-          <a:bodyPr rtlCol="0" anchor="ctr"/>
-          <a:lstStyle/>
-          <a:p>
-            <a:pPr algn="ctr"/>
+              <a:t>학교 사이트를 바꿀 필요 없이, 이미 있는 게시판을 그대로 읽습니다.</a:t>
+            </a:r>
           </a:p>
         </p:txBody>
       </p:sp>
@@ -8620,8 +10518,8 @@
         </p:nvSpPr>
         <p:spPr>
           <a:xfrm>
-            <a:off x="9555480" y="3291839"/>
-            <a:ext cx="384048" cy="384048"/>
+            <a:off x="11247120" y="6400800"/>
+            <a:ext cx="457200" cy="274320"/>
           </a:xfrm>
           <a:prstGeom prst="rect">
             <a:avLst/>
@@ -8629,253 +10527,22 @@
           <a:noFill/>
         </p:spPr>
         <p:txBody>
-          <a:bodyPr wrap="square" lIns="0" rIns="0" tIns="0" bIns="0" anchor="ctr">
+          <a:bodyPr wrap="square" lIns="0" rIns="0" tIns="0" bIns="0" anchor="t">
             <a:spAutoFit/>
           </a:bodyPr>
           <a:lstStyle/>
           <a:p>
-            <a:pPr algn="ctr"/>
-            <a:r>
-              <a:rPr sz="1500" b="1">
-                <a:solidFill>
-                  <a:srgbClr val="FFFFFF"/>
+            <a:pPr algn="r"/>
+            <a:r>
+              <a:rPr sz="1000" b="0">
+                <a:solidFill>
+                  <a:srgbClr val="666E7A"/>
                 </a:solidFill>
                 <a:latin typeface="Malgun Gothic"/>
                 <a:ea typeface="Malgun Gothic"/>
                 <a:cs typeface="Malgun Gothic"/>
               </a:rPr>
-              <a:t>2</a:t>
-            </a:r>
-          </a:p>
-        </p:txBody>
-      </p:sp>
-      <p:sp>
-        <p:nvSpPr>
-          <p:cNvPr id="19" name="TextBox 18"/>
-          <p:cNvSpPr txBox="1"/>
-          <p:nvPr/>
-        </p:nvSpPr>
-        <p:spPr>
-          <a:xfrm>
-            <a:off x="10058400" y="3273551"/>
-            <a:ext cx="1783080" cy="411480"/>
-          </a:xfrm>
-          <a:prstGeom prst="rect">
-            <a:avLst/>
-          </a:prstGeom>
-          <a:noFill/>
-        </p:spPr>
-        <p:txBody>
-          <a:bodyPr wrap="square" lIns="0" rIns="0" tIns="0" bIns="0" anchor="t">
-            <a:spAutoFit/>
-          </a:bodyPr>
-          <a:lstStyle/>
-          <a:p>
-            <a:pPr algn="l"/>
-            <a:r>
-              <a:rPr sz="1500" b="1">
-                <a:solidFill>
-                  <a:srgbClr val="1F1D1A"/>
-                </a:solidFill>
-                <a:latin typeface="Malgun Gothic"/>
-                <a:ea typeface="Malgun Gothic"/>
-                <a:cs typeface="Malgun Gothic"/>
-              </a:rPr>
-              <a:t>마감 알림 예정</a:t>
-            </a:r>
-          </a:p>
-        </p:txBody>
-      </p:sp>
-      <p:sp>
-        <p:nvSpPr>
-          <p:cNvPr id="20" name="TextBox 19"/>
-          <p:cNvSpPr txBox="1"/>
-          <p:nvPr/>
-        </p:nvSpPr>
-        <p:spPr>
-          <a:xfrm>
-            <a:off x="10058400" y="3675887"/>
-            <a:ext cx="1783080" cy="914400"/>
-          </a:xfrm>
-          <a:prstGeom prst="rect">
-            <a:avLst/>
-          </a:prstGeom>
-          <a:noFill/>
-        </p:spPr>
-        <p:txBody>
-          <a:bodyPr wrap="square" lIns="0" rIns="0" tIns="0" bIns="0" anchor="t">
-            <a:spAutoFit/>
-          </a:bodyPr>
-          <a:lstStyle/>
-          <a:p>
-            <a:pPr algn="l"/>
-            <a:r>
-              <a:rPr sz="1200" b="0">
-                <a:solidFill>
-                  <a:srgbClr val="6B6862"/>
-                </a:solidFill>
-                <a:latin typeface="Malgun Gothic"/>
-                <a:ea typeface="Malgun Gothic"/>
-                <a:cs typeface="Malgun Gothic"/>
-              </a:rPr>
-              <a:t>7·3·1일 전 알림 시각을
-미리 보여줌</a:t>
-            </a:r>
-          </a:p>
-        </p:txBody>
-      </p:sp>
-      <p:sp>
-        <p:nvSpPr>
-          <p:cNvPr id="21" name="Oval 20"/>
-          <p:cNvSpPr/>
-          <p:nvPr/>
-        </p:nvSpPr>
-        <p:spPr>
-          <a:xfrm>
-            <a:off x="9555480" y="4709160"/>
-            <a:ext cx="384048" cy="384048"/>
-          </a:xfrm>
-          <a:prstGeom prst="ellipse">
-            <a:avLst/>
-          </a:prstGeom>
-          <a:solidFill>
-            <a:srgbClr val="0058B2"/>
-          </a:solidFill>
-          <a:ln>
-            <a:noFill/>
-          </a:ln>
-          <a:effectLst/>
-        </p:spPr>
-        <p:style>
-          <a:lnRef idx="1">
-            <a:schemeClr val="accent1"/>
-          </a:lnRef>
-          <a:fillRef idx="3">
-            <a:schemeClr val="accent1"/>
-          </a:fillRef>
-          <a:effectRef idx="2">
-            <a:schemeClr val="accent1"/>
-          </a:effectRef>
-          <a:fontRef idx="minor">
-            <a:schemeClr val="lt1"/>
-          </a:fontRef>
-        </p:style>
-        <p:txBody>
-          <a:bodyPr rtlCol="0" anchor="ctr"/>
-          <a:lstStyle/>
-          <a:p>
-            <a:pPr algn="ctr"/>
-          </a:p>
-        </p:txBody>
-      </p:sp>
-      <p:sp>
-        <p:nvSpPr>
-          <p:cNvPr id="22" name="TextBox 21"/>
-          <p:cNvSpPr txBox="1"/>
-          <p:nvPr/>
-        </p:nvSpPr>
-        <p:spPr>
-          <a:xfrm>
-            <a:off x="9555480" y="4709160"/>
-            <a:ext cx="384048" cy="384048"/>
-          </a:xfrm>
-          <a:prstGeom prst="rect">
-            <a:avLst/>
-          </a:prstGeom>
-          <a:noFill/>
-        </p:spPr>
-        <p:txBody>
-          <a:bodyPr wrap="square" lIns="0" rIns="0" tIns="0" bIns="0" anchor="ctr">
-            <a:spAutoFit/>
-          </a:bodyPr>
-          <a:lstStyle/>
-          <a:p>
-            <a:pPr algn="ctr"/>
-            <a:r>
-              <a:rPr sz="1500" b="1">
-                <a:solidFill>
-                  <a:srgbClr val="FFFFFF"/>
-                </a:solidFill>
-                <a:latin typeface="Malgun Gothic"/>
-                <a:ea typeface="Malgun Gothic"/>
-                <a:cs typeface="Malgun Gothic"/>
-              </a:rPr>
-              <a:t>3</a:t>
-            </a:r>
-          </a:p>
-        </p:txBody>
-      </p:sp>
-      <p:sp>
-        <p:nvSpPr>
-          <p:cNvPr id="23" name="TextBox 22"/>
-          <p:cNvSpPr txBox="1"/>
-          <p:nvPr/>
-        </p:nvSpPr>
-        <p:spPr>
-          <a:xfrm>
-            <a:off x="10058400" y="4690872"/>
-            <a:ext cx="1783080" cy="411480"/>
-          </a:xfrm>
-          <a:prstGeom prst="rect">
-            <a:avLst/>
-          </a:prstGeom>
-          <a:noFill/>
-        </p:spPr>
-        <p:txBody>
-          <a:bodyPr wrap="square" lIns="0" rIns="0" tIns="0" bIns="0" anchor="t">
-            <a:spAutoFit/>
-          </a:bodyPr>
-          <a:lstStyle/>
-          <a:p>
-            <a:pPr algn="l"/>
-            <a:r>
-              <a:rPr sz="1500" b="1">
-                <a:solidFill>
-                  <a:srgbClr val="1F1D1A"/>
-                </a:solidFill>
-                <a:latin typeface="Malgun Gothic"/>
-                <a:ea typeface="Malgun Gothic"/>
-                <a:cs typeface="Malgun Gothic"/>
-              </a:rPr>
-              <a:t>캘린더</a:t>
-            </a:r>
-          </a:p>
-        </p:txBody>
-      </p:sp>
-      <p:sp>
-        <p:nvSpPr>
-          <p:cNvPr id="24" name="TextBox 23"/>
-          <p:cNvSpPr txBox="1"/>
-          <p:nvPr/>
-        </p:nvSpPr>
-        <p:spPr>
-          <a:xfrm>
-            <a:off x="10058400" y="5093208"/>
-            <a:ext cx="1783080" cy="914400"/>
-          </a:xfrm>
-          <a:prstGeom prst="rect">
-            <a:avLst/>
-          </a:prstGeom>
-          <a:noFill/>
-        </p:spPr>
-        <p:txBody>
-          <a:bodyPr wrap="square" lIns="0" rIns="0" tIns="0" bIns="0" anchor="t">
-            <a:spAutoFit/>
-          </a:bodyPr>
-          <a:lstStyle/>
-          <a:p>
-            <a:pPr algn="l"/>
-            <a:r>
-              <a:rPr sz="1200" b="0">
-                <a:solidFill>
-                  <a:srgbClr val="6B6862"/>
-                </a:solidFill>
-                <a:latin typeface="Malgun Gothic"/>
-                <a:ea typeface="Malgun Gothic"/>
-                <a:cs typeface="Malgun Gothic"/>
-              </a:rPr>
-              <a:t>마감일·시험일·발표일
-D-3 마감 / 오늘 마감</a:t>
+              <a:t>6</a:t>
             </a:r>
           </a:p>
         </p:txBody>
@@ -8889,1621 +10556,6 @@
 </file>
 
 <file path=ppt/slides/slide7.xml><?xml version="1.0" encoding="utf-8"?>
-<p:sld xmlns:a="http://schemas.openxmlformats.org/drawingml/2006/main" xmlns:p="http://schemas.openxmlformats.org/presentationml/2006/main" xmlns:r="http://schemas.openxmlformats.org/officeDocument/2006/relationships">
-  <p:cSld>
-    <p:bg>
-      <p:bgPr>
-        <a:solidFill>
-          <a:srgbClr val="FFFFFF"/>
-        </a:solidFill>
-        <a:effectLst/>
-      </p:bgPr>
-    </p:bg>
-    <p:spTree>
-      <p:nvGrpSpPr>
-        <p:cNvPr id="1" name=""/>
-        <p:cNvGrpSpPr/>
-        <p:nvPr/>
-      </p:nvGrpSpPr>
-      <p:grpSpPr/>
-      <p:sp>
-        <p:nvSpPr>
-          <p:cNvPr id="2" name="TextBox 1"/>
-          <p:cNvSpPr txBox="1"/>
-          <p:nvPr/>
-        </p:nvSpPr>
-        <p:spPr>
-          <a:xfrm>
-            <a:off x="548640" y="411480"/>
-            <a:ext cx="11064240" cy="640080"/>
-          </a:xfrm>
-          <a:prstGeom prst="rect">
-            <a:avLst/>
-          </a:prstGeom>
-          <a:noFill/>
-        </p:spPr>
-        <p:txBody>
-          <a:bodyPr wrap="square" lIns="0" rIns="0" tIns="0" bIns="0" anchor="t">
-            <a:spAutoFit/>
-          </a:bodyPr>
-          <a:lstStyle/>
-          <a:p>
-            <a:pPr algn="l"/>
-            <a:r>
-              <a:rPr sz="3200" b="1">
-                <a:solidFill>
-                  <a:srgbClr val="1F1D1A"/>
-                </a:solidFill>
-                <a:latin typeface="Malgun Gothic"/>
-                <a:ea typeface="Malgun Gothic"/>
-                <a:cs typeface="Malgun Gothic"/>
-              </a:rPr>
-              <a:t>다른 알리미와 다른 점</a:t>
-            </a:r>
-          </a:p>
-        </p:txBody>
-      </p:sp>
-      <p:sp>
-        <p:nvSpPr>
-          <p:cNvPr id="3" name="Rounded Rectangle 2"/>
-          <p:cNvSpPr/>
-          <p:nvPr/>
-        </p:nvSpPr>
-        <p:spPr>
-          <a:xfrm>
-            <a:off x="548640" y="1554480"/>
-            <a:ext cx="5349240" cy="2194560"/>
-          </a:xfrm>
-          <a:prstGeom prst="roundRect">
-            <a:avLst>
-              <a:gd name="adj" fmla="val 6000"/>
-            </a:avLst>
-          </a:prstGeom>
-          <a:solidFill>
-            <a:srgbClr val="EEF4FB"/>
-          </a:solidFill>
-          <a:ln>
-            <a:noFill/>
-          </a:ln>
-          <a:effectLst/>
-        </p:spPr>
-        <p:style>
-          <a:lnRef idx="1">
-            <a:schemeClr val="accent1"/>
-          </a:lnRef>
-          <a:fillRef idx="3">
-            <a:schemeClr val="accent1"/>
-          </a:fillRef>
-          <a:effectRef idx="2">
-            <a:schemeClr val="accent1"/>
-          </a:effectRef>
-          <a:fontRef idx="minor">
-            <a:schemeClr val="lt1"/>
-          </a:fontRef>
-        </p:style>
-        <p:txBody>
-          <a:bodyPr rtlCol="0" anchor="ctr"/>
-          <a:lstStyle/>
-          <a:p>
-            <a:pPr algn="ctr"/>
-          </a:p>
-        </p:txBody>
-      </p:sp>
-      <p:sp>
-        <p:nvSpPr>
-          <p:cNvPr id="4" name="Oval 3"/>
-          <p:cNvSpPr/>
-          <p:nvPr/>
-        </p:nvSpPr>
-        <p:spPr>
-          <a:xfrm>
-            <a:off x="868680" y="1920240"/>
-            <a:ext cx="548640" cy="548640"/>
-          </a:xfrm>
-          <a:prstGeom prst="ellipse">
-            <a:avLst/>
-          </a:prstGeom>
-          <a:solidFill>
-            <a:srgbClr val="0058B2"/>
-          </a:solidFill>
-          <a:ln>
-            <a:noFill/>
-          </a:ln>
-          <a:effectLst/>
-        </p:spPr>
-        <p:style>
-          <a:lnRef idx="1">
-            <a:schemeClr val="accent1"/>
-          </a:lnRef>
-          <a:fillRef idx="3">
-            <a:schemeClr val="accent1"/>
-          </a:fillRef>
-          <a:effectRef idx="2">
-            <a:schemeClr val="accent1"/>
-          </a:effectRef>
-          <a:fontRef idx="minor">
-            <a:schemeClr val="lt1"/>
-          </a:fontRef>
-        </p:style>
-        <p:txBody>
-          <a:bodyPr rtlCol="0" anchor="ctr"/>
-          <a:lstStyle/>
-          <a:p>
-            <a:pPr algn="ctr"/>
-          </a:p>
-        </p:txBody>
-      </p:sp>
-      <p:sp>
-        <p:nvSpPr>
-          <p:cNvPr id="5" name="TextBox 4"/>
-          <p:cNvSpPr txBox="1"/>
-          <p:nvPr/>
-        </p:nvSpPr>
-        <p:spPr>
-          <a:xfrm>
-            <a:off x="868680" y="1920240"/>
-            <a:ext cx="548640" cy="548640"/>
-          </a:xfrm>
-          <a:prstGeom prst="rect">
-            <a:avLst/>
-          </a:prstGeom>
-          <a:noFill/>
-        </p:spPr>
-        <p:txBody>
-          <a:bodyPr wrap="square" lIns="0" rIns="0" tIns="0" bIns="0" anchor="ctr">
-            <a:spAutoFit/>
-          </a:bodyPr>
-          <a:lstStyle/>
-          <a:p>
-            <a:pPr algn="ctr"/>
-            <a:r>
-              <a:rPr sz="2000" b="1">
-                <a:solidFill>
-                  <a:srgbClr val="FFFFFF"/>
-                </a:solidFill>
-                <a:latin typeface="Malgun Gothic"/>
-                <a:ea typeface="Malgun Gothic"/>
-                <a:cs typeface="Malgun Gothic"/>
-              </a:rPr>
-              <a:t>1</a:t>
-            </a:r>
-          </a:p>
-        </p:txBody>
-      </p:sp>
-      <p:sp>
-        <p:nvSpPr>
-          <p:cNvPr id="6" name="TextBox 5"/>
-          <p:cNvSpPr txBox="1"/>
-          <p:nvPr/>
-        </p:nvSpPr>
-        <p:spPr>
-          <a:xfrm>
-            <a:off x="1645919" y="1938528"/>
-            <a:ext cx="4023360" cy="548640"/>
-          </a:xfrm>
-          <a:prstGeom prst="rect">
-            <a:avLst/>
-          </a:prstGeom>
-          <a:noFill/>
-        </p:spPr>
-        <p:txBody>
-          <a:bodyPr wrap="square" lIns="0" rIns="0" tIns="0" bIns="0" anchor="t">
-            <a:spAutoFit/>
-          </a:bodyPr>
-          <a:lstStyle/>
-          <a:p>
-            <a:pPr algn="l"/>
-            <a:r>
-              <a:rPr sz="1900" b="1">
-                <a:solidFill>
-                  <a:srgbClr val="1F1D1A"/>
-                </a:solidFill>
-                <a:latin typeface="Malgun Gothic"/>
-                <a:ea typeface="Malgun Gothic"/>
-                <a:cs typeface="Malgun Gothic"/>
-              </a:rPr>
-              <a:t>학과 게시판 109곳 자동 탐색</a:t>
-            </a:r>
-          </a:p>
-        </p:txBody>
-      </p:sp>
-      <p:sp>
-        <p:nvSpPr>
-          <p:cNvPr id="7" name="TextBox 6"/>
-          <p:cNvSpPr txBox="1"/>
-          <p:nvPr/>
-        </p:nvSpPr>
-        <p:spPr>
-          <a:xfrm>
-            <a:off x="1645919" y="2560320"/>
-            <a:ext cx="3977639" cy="1097280"/>
-          </a:xfrm>
-          <a:prstGeom prst="rect">
-            <a:avLst/>
-          </a:prstGeom>
-          <a:noFill/>
-        </p:spPr>
-        <p:txBody>
-          <a:bodyPr wrap="square" lIns="0" rIns="0" tIns="0" bIns="0" anchor="t">
-            <a:spAutoFit/>
-          </a:bodyPr>
-          <a:lstStyle/>
-          <a:p>
-            <a:pPr algn="l"/>
-            <a:r>
-              <a:rPr sz="1400" b="0">
-                <a:solidFill>
-                  <a:srgbClr val="6B6862"/>
-                </a:solidFill>
-                <a:latin typeface="Malgun Gothic"/>
-                <a:ea typeface="Malgun Gothic"/>
-                <a:cs typeface="Malgun Gothic"/>
-              </a:rPr>
-              <a:t>학교 사이트가 같은 게시판 엔진을 쓴다는 점을 이용해 게시판 주소를 스스로 찾아 한 번에 수집</a:t>
-            </a:r>
-          </a:p>
-        </p:txBody>
-      </p:sp>
-      <p:sp>
-        <p:nvSpPr>
-          <p:cNvPr id="8" name="Rounded Rectangle 7"/>
-          <p:cNvSpPr/>
-          <p:nvPr/>
-        </p:nvSpPr>
-        <p:spPr>
-          <a:xfrm>
-            <a:off x="6172200" y="1554480"/>
-            <a:ext cx="5349240" cy="2194560"/>
-          </a:xfrm>
-          <a:prstGeom prst="roundRect">
-            <a:avLst>
-              <a:gd name="adj" fmla="val 6000"/>
-            </a:avLst>
-          </a:prstGeom>
-          <a:solidFill>
-            <a:srgbClr val="EEF4FB"/>
-          </a:solidFill>
-          <a:ln>
-            <a:noFill/>
-          </a:ln>
-          <a:effectLst/>
-        </p:spPr>
-        <p:style>
-          <a:lnRef idx="1">
-            <a:schemeClr val="accent1"/>
-          </a:lnRef>
-          <a:fillRef idx="3">
-            <a:schemeClr val="accent1"/>
-          </a:fillRef>
-          <a:effectRef idx="2">
-            <a:schemeClr val="accent1"/>
-          </a:effectRef>
-          <a:fontRef idx="minor">
-            <a:schemeClr val="lt1"/>
-          </a:fontRef>
-        </p:style>
-        <p:txBody>
-          <a:bodyPr rtlCol="0" anchor="ctr"/>
-          <a:lstStyle/>
-          <a:p>
-            <a:pPr algn="ctr"/>
-          </a:p>
-        </p:txBody>
-      </p:sp>
-      <p:sp>
-        <p:nvSpPr>
-          <p:cNvPr id="9" name="Oval 8"/>
-          <p:cNvSpPr/>
-          <p:nvPr/>
-        </p:nvSpPr>
-        <p:spPr>
-          <a:xfrm>
-            <a:off x="6492240" y="1920240"/>
-            <a:ext cx="548640" cy="548640"/>
-          </a:xfrm>
-          <a:prstGeom prst="ellipse">
-            <a:avLst/>
-          </a:prstGeom>
-          <a:solidFill>
-            <a:srgbClr val="0058B2"/>
-          </a:solidFill>
-          <a:ln>
-            <a:noFill/>
-          </a:ln>
-          <a:effectLst/>
-        </p:spPr>
-        <p:style>
-          <a:lnRef idx="1">
-            <a:schemeClr val="accent1"/>
-          </a:lnRef>
-          <a:fillRef idx="3">
-            <a:schemeClr val="accent1"/>
-          </a:fillRef>
-          <a:effectRef idx="2">
-            <a:schemeClr val="accent1"/>
-          </a:effectRef>
-          <a:fontRef idx="minor">
-            <a:schemeClr val="lt1"/>
-          </a:fontRef>
-        </p:style>
-        <p:txBody>
-          <a:bodyPr rtlCol="0" anchor="ctr"/>
-          <a:lstStyle/>
-          <a:p>
-            <a:pPr algn="ctr"/>
-          </a:p>
-        </p:txBody>
-      </p:sp>
-      <p:sp>
-        <p:nvSpPr>
-          <p:cNvPr id="10" name="TextBox 9"/>
-          <p:cNvSpPr txBox="1"/>
-          <p:nvPr/>
-        </p:nvSpPr>
-        <p:spPr>
-          <a:xfrm>
-            <a:off x="6492240" y="1920240"/>
-            <a:ext cx="548640" cy="548640"/>
-          </a:xfrm>
-          <a:prstGeom prst="rect">
-            <a:avLst/>
-          </a:prstGeom>
-          <a:noFill/>
-        </p:spPr>
-        <p:txBody>
-          <a:bodyPr wrap="square" lIns="0" rIns="0" tIns="0" bIns="0" anchor="ctr">
-            <a:spAutoFit/>
-          </a:bodyPr>
-          <a:lstStyle/>
-          <a:p>
-            <a:pPr algn="ctr"/>
-            <a:r>
-              <a:rPr sz="2000" b="1">
-                <a:solidFill>
-                  <a:srgbClr val="FFFFFF"/>
-                </a:solidFill>
-                <a:latin typeface="Malgun Gothic"/>
-                <a:ea typeface="Malgun Gothic"/>
-                <a:cs typeface="Malgun Gothic"/>
-              </a:rPr>
-              <a:t>2</a:t>
-            </a:r>
-          </a:p>
-        </p:txBody>
-      </p:sp>
-      <p:sp>
-        <p:nvSpPr>
-          <p:cNvPr id="11" name="TextBox 10"/>
-          <p:cNvSpPr txBox="1"/>
-          <p:nvPr/>
-        </p:nvSpPr>
-        <p:spPr>
-          <a:xfrm>
-            <a:off x="7269480" y="1938528"/>
-            <a:ext cx="4023360" cy="548640"/>
-          </a:xfrm>
-          <a:prstGeom prst="rect">
-            <a:avLst/>
-          </a:prstGeom>
-          <a:noFill/>
-        </p:spPr>
-        <p:txBody>
-          <a:bodyPr wrap="square" lIns="0" rIns="0" tIns="0" bIns="0" anchor="t">
-            <a:spAutoFit/>
-          </a:bodyPr>
-          <a:lstStyle/>
-          <a:p>
-            <a:pPr algn="l"/>
-            <a:r>
-              <a:rPr sz="1900" b="1">
-                <a:solidFill>
-                  <a:srgbClr val="1F1D1A"/>
-                </a:solidFill>
-                <a:latin typeface="Malgun Gothic"/>
-                <a:ea typeface="Malgun Gothic"/>
-                <a:cs typeface="Malgun Gothic"/>
-              </a:rPr>
-              <a:t>AI 비용 0원, 외부 전송 없음</a:t>
-            </a:r>
-          </a:p>
-        </p:txBody>
-      </p:sp>
-      <p:sp>
-        <p:nvSpPr>
-          <p:cNvPr id="12" name="TextBox 11"/>
-          <p:cNvSpPr txBox="1"/>
-          <p:nvPr/>
-        </p:nvSpPr>
-        <p:spPr>
-          <a:xfrm>
-            <a:off x="7269480" y="2560320"/>
-            <a:ext cx="3977639" cy="1097280"/>
-          </a:xfrm>
-          <a:prstGeom prst="rect">
-            <a:avLst/>
-          </a:prstGeom>
-          <a:noFill/>
-        </p:spPr>
-        <p:txBody>
-          <a:bodyPr wrap="square" lIns="0" rIns="0" tIns="0" bIns="0" anchor="t">
-            <a:spAutoFit/>
-          </a:bodyPr>
-          <a:lstStyle/>
-          <a:p>
-            <a:pPr algn="l"/>
-            <a:r>
-              <a:rPr sz="1400" b="0">
-                <a:solidFill>
-                  <a:srgbClr val="6B6862"/>
-                </a:solidFill>
-                <a:latin typeface="Malgun Gothic"/>
-                <a:ea typeface="Malgun Gothic"/>
-                <a:cs typeface="Malgun Gothic"/>
-              </a:rPr>
-              <a:t>유료 AI API 없이 오픈소스 경량 모델(MiniLM)을 서버에서 직접 실행. 공지 원문이 밖으로 나가지 않음</a:t>
-            </a:r>
-          </a:p>
-        </p:txBody>
-      </p:sp>
-      <p:sp>
-        <p:nvSpPr>
-          <p:cNvPr id="13" name="Rounded Rectangle 12"/>
-          <p:cNvSpPr/>
-          <p:nvPr/>
-        </p:nvSpPr>
-        <p:spPr>
-          <a:xfrm>
-            <a:off x="548640" y="4023360"/>
-            <a:ext cx="5349240" cy="2194560"/>
-          </a:xfrm>
-          <a:prstGeom prst="roundRect">
-            <a:avLst>
-              <a:gd name="adj" fmla="val 6000"/>
-            </a:avLst>
-          </a:prstGeom>
-          <a:solidFill>
-            <a:srgbClr val="EEF4FB"/>
-          </a:solidFill>
-          <a:ln>
-            <a:noFill/>
-          </a:ln>
-          <a:effectLst/>
-        </p:spPr>
-        <p:style>
-          <a:lnRef idx="1">
-            <a:schemeClr val="accent1"/>
-          </a:lnRef>
-          <a:fillRef idx="3">
-            <a:schemeClr val="accent1"/>
-          </a:fillRef>
-          <a:effectRef idx="2">
-            <a:schemeClr val="accent1"/>
-          </a:effectRef>
-          <a:fontRef idx="minor">
-            <a:schemeClr val="lt1"/>
-          </a:fontRef>
-        </p:style>
-        <p:txBody>
-          <a:bodyPr rtlCol="0" anchor="ctr"/>
-          <a:lstStyle/>
-          <a:p>
-            <a:pPr algn="ctr"/>
-          </a:p>
-        </p:txBody>
-      </p:sp>
-      <p:sp>
-        <p:nvSpPr>
-          <p:cNvPr id="14" name="Oval 13"/>
-          <p:cNvSpPr/>
-          <p:nvPr/>
-        </p:nvSpPr>
-        <p:spPr>
-          <a:xfrm>
-            <a:off x="868680" y="4389120"/>
-            <a:ext cx="548640" cy="548640"/>
-          </a:xfrm>
-          <a:prstGeom prst="ellipse">
-            <a:avLst/>
-          </a:prstGeom>
-          <a:solidFill>
-            <a:srgbClr val="0058B2"/>
-          </a:solidFill>
-          <a:ln>
-            <a:noFill/>
-          </a:ln>
-          <a:effectLst/>
-        </p:spPr>
-        <p:style>
-          <a:lnRef idx="1">
-            <a:schemeClr val="accent1"/>
-          </a:lnRef>
-          <a:fillRef idx="3">
-            <a:schemeClr val="accent1"/>
-          </a:fillRef>
-          <a:effectRef idx="2">
-            <a:schemeClr val="accent1"/>
-          </a:effectRef>
-          <a:fontRef idx="minor">
-            <a:schemeClr val="lt1"/>
-          </a:fontRef>
-        </p:style>
-        <p:txBody>
-          <a:bodyPr rtlCol="0" anchor="ctr"/>
-          <a:lstStyle/>
-          <a:p>
-            <a:pPr algn="ctr"/>
-          </a:p>
-        </p:txBody>
-      </p:sp>
-      <p:sp>
-        <p:nvSpPr>
-          <p:cNvPr id="15" name="TextBox 14"/>
-          <p:cNvSpPr txBox="1"/>
-          <p:nvPr/>
-        </p:nvSpPr>
-        <p:spPr>
-          <a:xfrm>
-            <a:off x="868680" y="4389120"/>
-            <a:ext cx="548640" cy="548640"/>
-          </a:xfrm>
-          <a:prstGeom prst="rect">
-            <a:avLst/>
-          </a:prstGeom>
-          <a:noFill/>
-        </p:spPr>
-        <p:txBody>
-          <a:bodyPr wrap="square" lIns="0" rIns="0" tIns="0" bIns="0" anchor="ctr">
-            <a:spAutoFit/>
-          </a:bodyPr>
-          <a:lstStyle/>
-          <a:p>
-            <a:pPr algn="ctr"/>
-            <a:r>
-              <a:rPr sz="2000" b="1">
-                <a:solidFill>
-                  <a:srgbClr val="FFFFFF"/>
-                </a:solidFill>
-                <a:latin typeface="Malgun Gothic"/>
-                <a:ea typeface="Malgun Gothic"/>
-                <a:cs typeface="Malgun Gothic"/>
-              </a:rPr>
-              <a:t>3</a:t>
-            </a:r>
-          </a:p>
-        </p:txBody>
-      </p:sp>
-      <p:sp>
-        <p:nvSpPr>
-          <p:cNvPr id="16" name="TextBox 15"/>
-          <p:cNvSpPr txBox="1"/>
-          <p:nvPr/>
-        </p:nvSpPr>
-        <p:spPr>
-          <a:xfrm>
-            <a:off x="1645919" y="4407408"/>
-            <a:ext cx="4023360" cy="548640"/>
-          </a:xfrm>
-          <a:prstGeom prst="rect">
-            <a:avLst/>
-          </a:prstGeom>
-          <a:noFill/>
-        </p:spPr>
-        <p:txBody>
-          <a:bodyPr wrap="square" lIns="0" rIns="0" tIns="0" bIns="0" anchor="t">
-            <a:spAutoFit/>
-          </a:bodyPr>
-          <a:lstStyle/>
-          <a:p>
-            <a:pPr algn="l"/>
-            <a:r>
-              <a:rPr sz="1900" b="1">
-                <a:solidFill>
-                  <a:srgbClr val="1F1D1A"/>
-                </a:solidFill>
-                <a:latin typeface="Malgun Gothic"/>
-                <a:ea typeface="Malgun Gothic"/>
-                <a:cs typeface="Malgun Gothic"/>
-              </a:rPr>
-              <a:t>"왜 나에게?"를 설명</a:t>
-            </a:r>
-          </a:p>
-        </p:txBody>
-      </p:sp>
-      <p:sp>
-        <p:nvSpPr>
-          <p:cNvPr id="17" name="TextBox 16"/>
-          <p:cNvSpPr txBox="1"/>
-          <p:nvPr/>
-        </p:nvSpPr>
-        <p:spPr>
-          <a:xfrm>
-            <a:off x="1645919" y="5029200"/>
-            <a:ext cx="3977639" cy="1097280"/>
-          </a:xfrm>
-          <a:prstGeom prst="rect">
-            <a:avLst/>
-          </a:prstGeom>
-          <a:noFill/>
-        </p:spPr>
-        <p:txBody>
-          <a:bodyPr wrap="square" lIns="0" rIns="0" tIns="0" bIns="0" anchor="t">
-            <a:spAutoFit/>
-          </a:bodyPr>
-          <a:lstStyle/>
-          <a:p>
-            <a:pPr algn="l"/>
-            <a:r>
-              <a:rPr sz="1400" b="0">
-                <a:solidFill>
-                  <a:srgbClr val="6B6862"/>
-                </a:solidFill>
-                <a:latin typeface="Malgun Gothic"/>
-                <a:ea typeface="Malgun Gothic"/>
-                <a:cs typeface="Malgun Gothic"/>
-              </a:rPr>
-              <a:t>블랙박스 추천이 아니라 근거(내 학과 게시판, 관심 키워드)를 문장으로 제시</a:t>
-            </a:r>
-          </a:p>
-        </p:txBody>
-      </p:sp>
-      <p:sp>
-        <p:nvSpPr>
-          <p:cNvPr id="18" name="Rounded Rectangle 17"/>
-          <p:cNvSpPr/>
-          <p:nvPr/>
-        </p:nvSpPr>
-        <p:spPr>
-          <a:xfrm>
-            <a:off x="6172200" y="4023360"/>
-            <a:ext cx="5349240" cy="2194560"/>
-          </a:xfrm>
-          <a:prstGeom prst="roundRect">
-            <a:avLst>
-              <a:gd name="adj" fmla="val 6000"/>
-            </a:avLst>
-          </a:prstGeom>
-          <a:solidFill>
-            <a:srgbClr val="EEF4FB"/>
-          </a:solidFill>
-          <a:ln>
-            <a:noFill/>
-          </a:ln>
-          <a:effectLst/>
-        </p:spPr>
-        <p:style>
-          <a:lnRef idx="1">
-            <a:schemeClr val="accent1"/>
-          </a:lnRef>
-          <a:fillRef idx="3">
-            <a:schemeClr val="accent1"/>
-          </a:fillRef>
-          <a:effectRef idx="2">
-            <a:schemeClr val="accent1"/>
-          </a:effectRef>
-          <a:fontRef idx="minor">
-            <a:schemeClr val="lt1"/>
-          </a:fontRef>
-        </p:style>
-        <p:txBody>
-          <a:bodyPr rtlCol="0" anchor="ctr"/>
-          <a:lstStyle/>
-          <a:p>
-            <a:pPr algn="ctr"/>
-          </a:p>
-        </p:txBody>
-      </p:sp>
-      <p:sp>
-        <p:nvSpPr>
-          <p:cNvPr id="19" name="Oval 18"/>
-          <p:cNvSpPr/>
-          <p:nvPr/>
-        </p:nvSpPr>
-        <p:spPr>
-          <a:xfrm>
-            <a:off x="6492240" y="4389120"/>
-            <a:ext cx="548640" cy="548640"/>
-          </a:xfrm>
-          <a:prstGeom prst="ellipse">
-            <a:avLst/>
-          </a:prstGeom>
-          <a:solidFill>
-            <a:srgbClr val="0058B2"/>
-          </a:solidFill>
-          <a:ln>
-            <a:noFill/>
-          </a:ln>
-          <a:effectLst/>
-        </p:spPr>
-        <p:style>
-          <a:lnRef idx="1">
-            <a:schemeClr val="accent1"/>
-          </a:lnRef>
-          <a:fillRef idx="3">
-            <a:schemeClr val="accent1"/>
-          </a:fillRef>
-          <a:effectRef idx="2">
-            <a:schemeClr val="accent1"/>
-          </a:effectRef>
-          <a:fontRef idx="minor">
-            <a:schemeClr val="lt1"/>
-          </a:fontRef>
-        </p:style>
-        <p:txBody>
-          <a:bodyPr rtlCol="0" anchor="ctr"/>
-          <a:lstStyle/>
-          <a:p>
-            <a:pPr algn="ctr"/>
-          </a:p>
-        </p:txBody>
-      </p:sp>
-      <p:sp>
-        <p:nvSpPr>
-          <p:cNvPr id="20" name="TextBox 19"/>
-          <p:cNvSpPr txBox="1"/>
-          <p:nvPr/>
-        </p:nvSpPr>
-        <p:spPr>
-          <a:xfrm>
-            <a:off x="6492240" y="4389120"/>
-            <a:ext cx="548640" cy="548640"/>
-          </a:xfrm>
-          <a:prstGeom prst="rect">
-            <a:avLst/>
-          </a:prstGeom>
-          <a:noFill/>
-        </p:spPr>
-        <p:txBody>
-          <a:bodyPr wrap="square" lIns="0" rIns="0" tIns="0" bIns="0" anchor="ctr">
-            <a:spAutoFit/>
-          </a:bodyPr>
-          <a:lstStyle/>
-          <a:p>
-            <a:pPr algn="ctr"/>
-            <a:r>
-              <a:rPr sz="2000" b="1">
-                <a:solidFill>
-                  <a:srgbClr val="FFFFFF"/>
-                </a:solidFill>
-                <a:latin typeface="Malgun Gothic"/>
-                <a:ea typeface="Malgun Gothic"/>
-                <a:cs typeface="Malgun Gothic"/>
-              </a:rPr>
-              <a:t>4</a:t>
-            </a:r>
-          </a:p>
-        </p:txBody>
-      </p:sp>
-      <p:sp>
-        <p:nvSpPr>
-          <p:cNvPr id="21" name="TextBox 20"/>
-          <p:cNvSpPr txBox="1"/>
-          <p:nvPr/>
-        </p:nvSpPr>
-        <p:spPr>
-          <a:xfrm>
-            <a:off x="7269480" y="4407408"/>
-            <a:ext cx="4023360" cy="548640"/>
-          </a:xfrm>
-          <a:prstGeom prst="rect">
-            <a:avLst/>
-          </a:prstGeom>
-          <a:noFill/>
-        </p:spPr>
-        <p:txBody>
-          <a:bodyPr wrap="square" lIns="0" rIns="0" tIns="0" bIns="0" anchor="t">
-            <a:spAutoFit/>
-          </a:bodyPr>
-          <a:lstStyle/>
-          <a:p>
-            <a:pPr algn="l"/>
-            <a:r>
-              <a:rPr sz="1900" b="1">
-                <a:solidFill>
-                  <a:srgbClr val="1F1D1A"/>
-                </a:solidFill>
-                <a:latin typeface="Malgun Gothic"/>
-                <a:ea typeface="Malgun Gothic"/>
-                <a:cs typeface="Malgun Gothic"/>
-              </a:rPr>
-              <a:t>실제로 써 보며 다듬은 규칙</a:t>
-            </a:r>
-          </a:p>
-        </p:txBody>
-      </p:sp>
-      <p:sp>
-        <p:nvSpPr>
-          <p:cNvPr id="22" name="TextBox 21"/>
-          <p:cNvSpPr txBox="1"/>
-          <p:nvPr/>
-        </p:nvSpPr>
-        <p:spPr>
-          <a:xfrm>
-            <a:off x="7269480" y="5029200"/>
-            <a:ext cx="3977639" cy="1097280"/>
-          </a:xfrm>
-          <a:prstGeom prst="rect">
-            <a:avLst/>
-          </a:prstGeom>
-          <a:noFill/>
-        </p:spPr>
-        <p:txBody>
-          <a:bodyPr wrap="square" lIns="0" rIns="0" tIns="0" bIns="0" anchor="t">
-            <a:spAutoFit/>
-          </a:bodyPr>
-          <a:lstStyle/>
-          <a:p>
-            <a:pPr algn="l"/>
-            <a:r>
-              <a:rPr sz="1400" b="0">
-                <a:solidFill>
-                  <a:srgbClr val="6B6862"/>
-                </a:solidFill>
-                <a:latin typeface="Malgun Gothic"/>
-                <a:ea typeface="Malgun Gothic"/>
-                <a:cs typeface="Malgun Gothic"/>
-              </a:rPr>
-              <a:t>신청기간과 운영기간 구분, '신청 시작'은 마감 아님, 다른 지역 한정 공고 제외</a:t>
-            </a:r>
-          </a:p>
-        </p:txBody>
-      </p:sp>
-    </p:spTree>
-  </p:cSld>
-  <p:clrMapOvr>
-    <a:masterClrMapping/>
-  </p:clrMapOvr>
-</p:sld>
-</file>
-
-<file path=ppt/slides/slide8.xml><?xml version="1.0" encoding="utf-8"?>
-<p:sld xmlns:a="http://schemas.openxmlformats.org/drawingml/2006/main" xmlns:p="http://schemas.openxmlformats.org/presentationml/2006/main" xmlns:r="http://schemas.openxmlformats.org/officeDocument/2006/relationships">
-  <p:cSld>
-    <p:bg>
-      <p:bgPr>
-        <a:solidFill>
-          <a:srgbClr val="FFFFFF"/>
-        </a:solidFill>
-        <a:effectLst/>
-      </p:bgPr>
-    </p:bg>
-    <p:spTree>
-      <p:nvGrpSpPr>
-        <p:cNvPr id="1" name=""/>
-        <p:cNvGrpSpPr/>
-        <p:nvPr/>
-      </p:nvGrpSpPr>
-      <p:grpSpPr/>
-      <p:sp>
-        <p:nvSpPr>
-          <p:cNvPr id="2" name="TextBox 1"/>
-          <p:cNvSpPr txBox="1"/>
-          <p:nvPr/>
-        </p:nvSpPr>
-        <p:spPr>
-          <a:xfrm>
-            <a:off x="548640" y="411480"/>
-            <a:ext cx="11064240" cy="640080"/>
-          </a:xfrm>
-          <a:prstGeom prst="rect">
-            <a:avLst/>
-          </a:prstGeom>
-          <a:noFill/>
-        </p:spPr>
-        <p:txBody>
-          <a:bodyPr wrap="square" lIns="0" rIns="0" tIns="0" bIns="0" anchor="t">
-            <a:spAutoFit/>
-          </a:bodyPr>
-          <a:lstStyle/>
-          <a:p>
-            <a:pPr algn="l"/>
-            <a:r>
-              <a:rPr sz="3200" b="1">
-                <a:solidFill>
-                  <a:srgbClr val="1F1D1A"/>
-                </a:solidFill>
-                <a:latin typeface="Malgun Gothic"/>
-                <a:ea typeface="Malgun Gothic"/>
-                <a:cs typeface="Malgun Gothic"/>
-              </a:rPr>
-              <a:t>어떻게 만들었나</a:t>
-            </a:r>
-          </a:p>
-        </p:txBody>
-      </p:sp>
-      <p:sp>
-        <p:nvSpPr>
-          <p:cNvPr id="3" name="TextBox 2"/>
-          <p:cNvSpPr txBox="1"/>
-          <p:nvPr/>
-        </p:nvSpPr>
-        <p:spPr>
-          <a:xfrm>
-            <a:off x="548640" y="1024128"/>
-            <a:ext cx="11064240" cy="411480"/>
-          </a:xfrm>
-          <a:prstGeom prst="rect">
-            <a:avLst/>
-          </a:prstGeom>
-          <a:noFill/>
-        </p:spPr>
-        <p:txBody>
-          <a:bodyPr wrap="square" lIns="0" rIns="0" tIns="0" bIns="0" anchor="t">
-            <a:spAutoFit/>
-          </a:bodyPr>
-          <a:lstStyle/>
-          <a:p>
-            <a:pPr algn="l"/>
-            <a:r>
-              <a:rPr sz="1600" b="0">
-                <a:solidFill>
-                  <a:srgbClr val="6B6862"/>
-                </a:solidFill>
-                <a:latin typeface="Malgun Gothic"/>
-                <a:ea typeface="Malgun Gothic"/>
-                <a:cs typeface="Malgun Gothic"/>
-              </a:rPr>
-              <a:t>모두 오픈소스, 24시간 운영 중</a:t>
-            </a:r>
-          </a:p>
-        </p:txBody>
-      </p:sp>
-      <p:sp>
-        <p:nvSpPr>
-          <p:cNvPr id="4" name="TextBox 3"/>
-          <p:cNvSpPr txBox="1"/>
-          <p:nvPr/>
-        </p:nvSpPr>
-        <p:spPr>
-          <a:xfrm>
-            <a:off x="548640" y="1828800"/>
-            <a:ext cx="5852160" cy="4114800"/>
-          </a:xfrm>
-          <a:prstGeom prst="rect">
-            <a:avLst/>
-          </a:prstGeom>
-          <a:noFill/>
-        </p:spPr>
-        <p:txBody>
-          <a:bodyPr wrap="square" lIns="0" rIns="0" tIns="0" bIns="0" anchor="t">
-            <a:spAutoFit/>
-          </a:bodyPr>
-          <a:lstStyle/>
-          <a:p>
-            <a:pPr algn="l">
-              <a:spcAft>
-                <a:spcPts val="1600"/>
-              </a:spcAft>
-            </a:pPr>
-            <a:r>
-              <a:rPr sz="1600" b="1">
-                <a:solidFill>
-                  <a:srgbClr val="0058B2"/>
-                </a:solidFill>
-                <a:latin typeface="Malgun Gothic"/>
-                <a:ea typeface="Malgun Gothic"/>
-                <a:cs typeface="Malgun Gothic"/>
-              </a:rPr>
-              <a:t>AI  </a:t>
-            </a:r>
-            <a:r>
-              <a:rPr sz="1600" b="0">
-                <a:solidFill>
-                  <a:srgbClr val="1F1D1A"/>
-                </a:solidFill>
-                <a:latin typeface="Malgun Gothic"/>
-                <a:ea typeface="Malgun Gothic"/>
-                <a:cs typeface="Malgun Gothic"/>
-              </a:rPr>
-              <a:t>MiniLM 다국어 임베딩(fastembed·ONNX) + 규칙 추출</a:t>
-            </a:r>
-          </a:p>
-          <a:p>
-            <a:pPr algn="l">
-              <a:spcAft>
-                <a:spcPts val="1600"/>
-              </a:spcAft>
-            </a:pPr>
-            <a:r>
-              <a:rPr sz="1600" b="1">
-                <a:solidFill>
-                  <a:srgbClr val="0058B2"/>
-                </a:solidFill>
-                <a:latin typeface="Malgun Gothic"/>
-                <a:ea typeface="Malgun Gothic"/>
-                <a:cs typeface="Malgun Gothic"/>
-              </a:rPr>
-              <a:t>백엔드  </a:t>
-            </a:r>
-            <a:r>
-              <a:rPr sz="1600" b="0">
-                <a:solidFill>
-                  <a:srgbClr val="1F1D1A"/>
-                </a:solidFill>
-                <a:latin typeface="Malgun Gothic"/>
-                <a:ea typeface="Malgun Gothic"/>
-                <a:cs typeface="Malgun Gothic"/>
-              </a:rPr>
-              <a:t>Python · FastAPI · SQLite · APScheduler · BeautifulSoup</a:t>
-            </a:r>
-          </a:p>
-          <a:p>
-            <a:pPr algn="l">
-              <a:spcAft>
-                <a:spcPts val="1600"/>
-              </a:spcAft>
-            </a:pPr>
-            <a:r>
-              <a:rPr sz="1600" b="1">
-                <a:solidFill>
-                  <a:srgbClr val="0058B2"/>
-                </a:solidFill>
-                <a:latin typeface="Malgun Gothic"/>
-                <a:ea typeface="Malgun Gothic"/>
-                <a:cs typeface="Malgun Gothic"/>
-              </a:rPr>
-              <a:t>화면  </a:t>
-            </a:r>
-            <a:r>
-              <a:rPr sz="1600" b="0">
-                <a:solidFill>
-                  <a:srgbClr val="1F1D1A"/>
-                </a:solidFill>
-                <a:latin typeface="Malgun Gothic"/>
-                <a:ea typeface="Malgun Gothic"/>
-                <a:cs typeface="Malgun Gothic"/>
-              </a:rPr>
-              <a:t>Next.js · React · TypeScript · PWA(웹 푸시)</a:t>
-            </a:r>
-          </a:p>
-          <a:p>
-            <a:pPr algn="l">
-              <a:spcAft>
-                <a:spcPts val="1600"/>
-              </a:spcAft>
-            </a:pPr>
-            <a:r>
-              <a:rPr sz="1600" b="1">
-                <a:solidFill>
-                  <a:srgbClr val="0058B2"/>
-                </a:solidFill>
-                <a:latin typeface="Malgun Gothic"/>
-                <a:ea typeface="Malgun Gothic"/>
-                <a:cs typeface="Malgun Gothic"/>
-              </a:rPr>
-              <a:t>데이터  </a:t>
-            </a:r>
-            <a:r>
-              <a:rPr sz="1600" b="0">
-                <a:solidFill>
-                  <a:srgbClr val="1F1D1A"/>
-                </a:solidFill>
-                <a:latin typeface="Malgun Gothic"/>
-                <a:ea typeface="Malgun Gothic"/>
-                <a:cs typeface="Malgun Gothic"/>
-              </a:rPr>
-              <a:t>순천대 게시판 + 공공데이터포털 API 3종</a:t>
-            </a:r>
-          </a:p>
-          <a:p>
-            <a:pPr algn="l">
-              <a:spcAft>
-                <a:spcPts val="1600"/>
-              </a:spcAft>
-            </a:pPr>
-            <a:r>
-              <a:rPr sz="1600" b="1">
-                <a:solidFill>
-                  <a:srgbClr val="0058B2"/>
-                </a:solidFill>
-                <a:latin typeface="Malgun Gothic"/>
-                <a:ea typeface="Malgun Gothic"/>
-                <a:cs typeface="Malgun Gothic"/>
-              </a:rPr>
-              <a:t>배포  </a:t>
-            </a:r>
-            <a:r>
-              <a:rPr sz="1600" b="0">
-                <a:solidFill>
-                  <a:srgbClr val="1F1D1A"/>
-                </a:solidFill>
-                <a:latin typeface="Malgun Gothic"/>
-                <a:ea typeface="Malgun Gothic"/>
-                <a:cs typeface="Malgun Gothic"/>
-              </a:rPr>
-              <a:t>화면 Vercel, 수집·알림 Oracle Cloud + Caddy(https)</a:t>
-            </a:r>
-          </a:p>
-        </p:txBody>
-      </p:sp>
-      <p:sp>
-        <p:nvSpPr>
-          <p:cNvPr id="5" name="Rounded Rectangle 4"/>
-          <p:cNvSpPr/>
-          <p:nvPr/>
-        </p:nvSpPr>
-        <p:spPr>
-          <a:xfrm>
-            <a:off x="6766560" y="1737360"/>
-            <a:ext cx="2377440" cy="1874519"/>
-          </a:xfrm>
-          <a:prstGeom prst="roundRect">
-            <a:avLst>
-              <a:gd name="adj" fmla="val 8000"/>
-            </a:avLst>
-          </a:prstGeom>
-          <a:solidFill>
-            <a:srgbClr val="EEF4FB"/>
-          </a:solidFill>
-          <a:ln>
-            <a:noFill/>
-          </a:ln>
-          <a:effectLst/>
-        </p:spPr>
-        <p:style>
-          <a:lnRef idx="1">
-            <a:schemeClr val="accent1"/>
-          </a:lnRef>
-          <a:fillRef idx="3">
-            <a:schemeClr val="accent1"/>
-          </a:fillRef>
-          <a:effectRef idx="2">
-            <a:schemeClr val="accent1"/>
-          </a:effectRef>
-          <a:fontRef idx="minor">
-            <a:schemeClr val="lt1"/>
-          </a:fontRef>
-        </p:style>
-        <p:txBody>
-          <a:bodyPr rtlCol="0" anchor="ctr"/>
-          <a:lstStyle/>
-          <a:p>
-            <a:pPr algn="ctr"/>
-          </a:p>
-        </p:txBody>
-      </p:sp>
-      <p:sp>
-        <p:nvSpPr>
-          <p:cNvPr id="6" name="TextBox 5"/>
-          <p:cNvSpPr txBox="1"/>
-          <p:nvPr/>
-        </p:nvSpPr>
-        <p:spPr>
-          <a:xfrm>
-            <a:off x="6766560" y="2011679"/>
-            <a:ext cx="2377440" cy="822960"/>
-          </a:xfrm>
-          <a:prstGeom prst="rect">
-            <a:avLst/>
-          </a:prstGeom>
-          <a:noFill/>
-        </p:spPr>
-        <p:txBody>
-          <a:bodyPr wrap="square" lIns="0" rIns="0" tIns="0" bIns="0" anchor="t">
-            <a:spAutoFit/>
-          </a:bodyPr>
-          <a:lstStyle/>
-          <a:p>
-            <a:pPr algn="ctr"/>
-            <a:r>
-              <a:rPr sz="4400" b="1">
-                <a:solidFill>
-                  <a:srgbClr val="0058B2"/>
-                </a:solidFill>
-                <a:latin typeface="Malgun Gothic"/>
-                <a:ea typeface="Malgun Gothic"/>
-                <a:cs typeface="Malgun Gothic"/>
-              </a:rPr>
-              <a:t>109</a:t>
-            </a:r>
-          </a:p>
-        </p:txBody>
-      </p:sp>
-      <p:sp>
-        <p:nvSpPr>
-          <p:cNvPr id="7" name="TextBox 6"/>
-          <p:cNvSpPr txBox="1"/>
-          <p:nvPr/>
-        </p:nvSpPr>
-        <p:spPr>
-          <a:xfrm>
-            <a:off x="6766560" y="2926080"/>
-            <a:ext cx="2377440" cy="457200"/>
-          </a:xfrm>
-          <a:prstGeom prst="rect">
-            <a:avLst/>
-          </a:prstGeom>
-          <a:noFill/>
-        </p:spPr>
-        <p:txBody>
-          <a:bodyPr wrap="square" lIns="0" rIns="0" tIns="0" bIns="0" anchor="t">
-            <a:spAutoFit/>
-          </a:bodyPr>
-          <a:lstStyle/>
-          <a:p>
-            <a:pPr algn="ctr"/>
-            <a:r>
-              <a:rPr sz="1400" b="0">
-                <a:solidFill>
-                  <a:srgbClr val="6B6862"/>
-                </a:solidFill>
-                <a:latin typeface="Malgun Gothic"/>
-                <a:ea typeface="Malgun Gothic"/>
-                <a:cs typeface="Malgun Gothic"/>
-              </a:rPr>
-              <a:t>학교 게시판</a:t>
-            </a:r>
-          </a:p>
-        </p:txBody>
-      </p:sp>
-      <p:sp>
-        <p:nvSpPr>
-          <p:cNvPr id="8" name="Rounded Rectangle 7"/>
-          <p:cNvSpPr/>
-          <p:nvPr/>
-        </p:nvSpPr>
-        <p:spPr>
-          <a:xfrm>
-            <a:off x="9372600" y="1737360"/>
-            <a:ext cx="2377440" cy="1874519"/>
-          </a:xfrm>
-          <a:prstGeom prst="roundRect">
-            <a:avLst>
-              <a:gd name="adj" fmla="val 8000"/>
-            </a:avLst>
-          </a:prstGeom>
-          <a:solidFill>
-            <a:srgbClr val="EEF4FB"/>
-          </a:solidFill>
-          <a:ln>
-            <a:noFill/>
-          </a:ln>
-          <a:effectLst/>
-        </p:spPr>
-        <p:style>
-          <a:lnRef idx="1">
-            <a:schemeClr val="accent1"/>
-          </a:lnRef>
-          <a:fillRef idx="3">
-            <a:schemeClr val="accent1"/>
-          </a:fillRef>
-          <a:effectRef idx="2">
-            <a:schemeClr val="accent1"/>
-          </a:effectRef>
-          <a:fontRef idx="minor">
-            <a:schemeClr val="lt1"/>
-          </a:fontRef>
-        </p:style>
-        <p:txBody>
-          <a:bodyPr rtlCol="0" anchor="ctr"/>
-          <a:lstStyle/>
-          <a:p>
-            <a:pPr algn="ctr"/>
-          </a:p>
-        </p:txBody>
-      </p:sp>
-      <p:sp>
-        <p:nvSpPr>
-          <p:cNvPr id="9" name="TextBox 8"/>
-          <p:cNvSpPr txBox="1"/>
-          <p:nvPr/>
-        </p:nvSpPr>
-        <p:spPr>
-          <a:xfrm>
-            <a:off x="9372600" y="2011679"/>
-            <a:ext cx="2377440" cy="822960"/>
-          </a:xfrm>
-          <a:prstGeom prst="rect">
-            <a:avLst/>
-          </a:prstGeom>
-          <a:noFill/>
-        </p:spPr>
-        <p:txBody>
-          <a:bodyPr wrap="square" lIns="0" rIns="0" tIns="0" bIns="0" anchor="t">
-            <a:spAutoFit/>
-          </a:bodyPr>
-          <a:lstStyle/>
-          <a:p>
-            <a:pPr algn="ctr"/>
-            <a:r>
-              <a:rPr sz="4400" b="1">
-                <a:solidFill>
-                  <a:srgbClr val="0058B2"/>
-                </a:solidFill>
-                <a:latin typeface="Malgun Gothic"/>
-                <a:ea typeface="Malgun Gothic"/>
-                <a:cs typeface="Malgun Gothic"/>
-              </a:rPr>
-              <a:t>70</a:t>
-            </a:r>
-          </a:p>
-        </p:txBody>
-      </p:sp>
-      <p:sp>
-        <p:nvSpPr>
-          <p:cNvPr id="10" name="TextBox 9"/>
-          <p:cNvSpPr txBox="1"/>
-          <p:nvPr/>
-        </p:nvSpPr>
-        <p:spPr>
-          <a:xfrm>
-            <a:off x="9372600" y="2926080"/>
-            <a:ext cx="2377440" cy="457200"/>
-          </a:xfrm>
-          <a:prstGeom prst="rect">
-            <a:avLst/>
-          </a:prstGeom>
-          <a:noFill/>
-        </p:spPr>
-        <p:txBody>
-          <a:bodyPr wrap="square" lIns="0" rIns="0" tIns="0" bIns="0" anchor="t">
-            <a:spAutoFit/>
-          </a:bodyPr>
-          <a:lstStyle/>
-          <a:p>
-            <a:pPr algn="ctr"/>
-            <a:r>
-              <a:rPr sz="1400" b="0">
-                <a:solidFill>
-                  <a:srgbClr val="6B6862"/>
-                </a:solidFill>
-                <a:latin typeface="Malgun Gothic"/>
-                <a:ea typeface="Malgun Gothic"/>
-                <a:cs typeface="Malgun Gothic"/>
-              </a:rPr>
-              <a:t>학과 선택 목록</a:t>
-            </a:r>
-          </a:p>
-        </p:txBody>
-      </p:sp>
-      <p:sp>
-        <p:nvSpPr>
-          <p:cNvPr id="11" name="Rounded Rectangle 10"/>
-          <p:cNvSpPr/>
-          <p:nvPr/>
-        </p:nvSpPr>
-        <p:spPr>
-          <a:xfrm>
-            <a:off x="6766560" y="3886200"/>
-            <a:ext cx="2377440" cy="1874519"/>
-          </a:xfrm>
-          <a:prstGeom prst="roundRect">
-            <a:avLst>
-              <a:gd name="adj" fmla="val 8000"/>
-            </a:avLst>
-          </a:prstGeom>
-          <a:solidFill>
-            <a:srgbClr val="EEF4FB"/>
-          </a:solidFill>
-          <a:ln>
-            <a:noFill/>
-          </a:ln>
-          <a:effectLst/>
-        </p:spPr>
-        <p:style>
-          <a:lnRef idx="1">
-            <a:schemeClr val="accent1"/>
-          </a:lnRef>
-          <a:fillRef idx="3">
-            <a:schemeClr val="accent1"/>
-          </a:fillRef>
-          <a:effectRef idx="2">
-            <a:schemeClr val="accent1"/>
-          </a:effectRef>
-          <a:fontRef idx="minor">
-            <a:schemeClr val="lt1"/>
-          </a:fontRef>
-        </p:style>
-        <p:txBody>
-          <a:bodyPr rtlCol="0" anchor="ctr"/>
-          <a:lstStyle/>
-          <a:p>
-            <a:pPr algn="ctr"/>
-          </a:p>
-        </p:txBody>
-      </p:sp>
-      <p:sp>
-        <p:nvSpPr>
-          <p:cNvPr id="12" name="TextBox 11"/>
-          <p:cNvSpPr txBox="1"/>
-          <p:nvPr/>
-        </p:nvSpPr>
-        <p:spPr>
-          <a:xfrm>
-            <a:off x="6766560" y="4160520"/>
-            <a:ext cx="2377440" cy="822960"/>
-          </a:xfrm>
-          <a:prstGeom prst="rect">
-            <a:avLst/>
-          </a:prstGeom>
-          <a:noFill/>
-        </p:spPr>
-        <p:txBody>
-          <a:bodyPr wrap="square" lIns="0" rIns="0" tIns="0" bIns="0" anchor="t">
-            <a:spAutoFit/>
-          </a:bodyPr>
-          <a:lstStyle/>
-          <a:p>
-            <a:pPr algn="ctr"/>
-            <a:r>
-              <a:rPr sz="4400" b="1">
-                <a:solidFill>
-                  <a:srgbClr val="0058B2"/>
-                </a:solidFill>
-                <a:latin typeface="Malgun Gothic"/>
-                <a:ea typeface="Malgun Gothic"/>
-                <a:cs typeface="Malgun Gothic"/>
-              </a:rPr>
-              <a:t>126</a:t>
-            </a:r>
-          </a:p>
-        </p:txBody>
-      </p:sp>
-      <p:sp>
-        <p:nvSpPr>
-          <p:cNvPr id="13" name="TextBox 12"/>
-          <p:cNvSpPr txBox="1"/>
-          <p:nvPr/>
-        </p:nvSpPr>
-        <p:spPr>
-          <a:xfrm>
-            <a:off x="6766560" y="5074920"/>
-            <a:ext cx="2377440" cy="457200"/>
-          </a:xfrm>
-          <a:prstGeom prst="rect">
-            <a:avLst/>
-          </a:prstGeom>
-          <a:noFill/>
-        </p:spPr>
-        <p:txBody>
-          <a:bodyPr wrap="square" lIns="0" rIns="0" tIns="0" bIns="0" anchor="t">
-            <a:spAutoFit/>
-          </a:bodyPr>
-          <a:lstStyle/>
-          <a:p>
-            <a:pPr algn="ctr"/>
-            <a:r>
-              <a:rPr sz="1400" b="0">
-                <a:solidFill>
-                  <a:srgbClr val="6B6862"/>
-                </a:solidFill>
-                <a:latin typeface="Malgun Gothic"/>
-                <a:ea typeface="Malgun Gothic"/>
-                <a:cs typeface="Malgun Gothic"/>
-              </a:rPr>
-              <a:t>자동 테스트 통과</a:t>
-            </a:r>
-          </a:p>
-        </p:txBody>
-      </p:sp>
-      <p:sp>
-        <p:nvSpPr>
-          <p:cNvPr id="14" name="Rounded Rectangle 13"/>
-          <p:cNvSpPr/>
-          <p:nvPr/>
-        </p:nvSpPr>
-        <p:spPr>
-          <a:xfrm>
-            <a:off x="9372600" y="3886200"/>
-            <a:ext cx="2377440" cy="1874519"/>
-          </a:xfrm>
-          <a:prstGeom prst="roundRect">
-            <a:avLst>
-              <a:gd name="adj" fmla="val 8000"/>
-            </a:avLst>
-          </a:prstGeom>
-          <a:solidFill>
-            <a:srgbClr val="EEF4FB"/>
-          </a:solidFill>
-          <a:ln>
-            <a:noFill/>
-          </a:ln>
-          <a:effectLst/>
-        </p:spPr>
-        <p:style>
-          <a:lnRef idx="1">
-            <a:schemeClr val="accent1"/>
-          </a:lnRef>
-          <a:fillRef idx="3">
-            <a:schemeClr val="accent1"/>
-          </a:fillRef>
-          <a:effectRef idx="2">
-            <a:schemeClr val="accent1"/>
-          </a:effectRef>
-          <a:fontRef idx="minor">
-            <a:schemeClr val="lt1"/>
-          </a:fontRef>
-        </p:style>
-        <p:txBody>
-          <a:bodyPr rtlCol="0" anchor="ctr"/>
-          <a:lstStyle/>
-          <a:p>
-            <a:pPr algn="ctr"/>
-          </a:p>
-        </p:txBody>
-      </p:sp>
-      <p:sp>
-        <p:nvSpPr>
-          <p:cNvPr id="15" name="TextBox 14"/>
-          <p:cNvSpPr txBox="1"/>
-          <p:nvPr/>
-        </p:nvSpPr>
-        <p:spPr>
-          <a:xfrm>
-            <a:off x="9372600" y="4160520"/>
-            <a:ext cx="2377440" cy="822960"/>
-          </a:xfrm>
-          <a:prstGeom prst="rect">
-            <a:avLst/>
-          </a:prstGeom>
-          <a:noFill/>
-        </p:spPr>
-        <p:txBody>
-          <a:bodyPr wrap="square" lIns="0" rIns="0" tIns="0" bIns="0" anchor="t">
-            <a:spAutoFit/>
-          </a:bodyPr>
-          <a:lstStyle/>
-          <a:p>
-            <a:pPr algn="ctr"/>
-            <a:r>
-              <a:rPr sz="4400" b="1">
-                <a:solidFill>
-                  <a:srgbClr val="0058B2"/>
-                </a:solidFill>
-                <a:latin typeface="Malgun Gothic"/>
-                <a:ea typeface="Malgun Gothic"/>
-                <a:cs typeface="Malgun Gothic"/>
-              </a:rPr>
-              <a:t>0원</a:t>
-            </a:r>
-          </a:p>
-        </p:txBody>
-      </p:sp>
-      <p:sp>
-        <p:nvSpPr>
-          <p:cNvPr id="16" name="TextBox 15"/>
-          <p:cNvSpPr txBox="1"/>
-          <p:nvPr/>
-        </p:nvSpPr>
-        <p:spPr>
-          <a:xfrm>
-            <a:off x="9372600" y="5074920"/>
-            <a:ext cx="2377440" cy="457200"/>
-          </a:xfrm>
-          <a:prstGeom prst="rect">
-            <a:avLst/>
-          </a:prstGeom>
-          <a:noFill/>
-        </p:spPr>
-        <p:txBody>
-          <a:bodyPr wrap="square" lIns="0" rIns="0" tIns="0" bIns="0" anchor="t">
-            <a:spAutoFit/>
-          </a:bodyPr>
-          <a:lstStyle/>
-          <a:p>
-            <a:pPr algn="ctr"/>
-            <a:r>
-              <a:rPr sz="1400" b="0">
-                <a:solidFill>
-                  <a:srgbClr val="6B6862"/>
-                </a:solidFill>
-                <a:latin typeface="Malgun Gothic"/>
-                <a:ea typeface="Malgun Gothic"/>
-                <a:cs typeface="Malgun Gothic"/>
-              </a:rPr>
-              <a:t>AI 운영 비용</a:t>
-            </a:r>
-          </a:p>
-        </p:txBody>
-      </p:sp>
-    </p:spTree>
-  </p:cSld>
-  <p:clrMapOvr>
-    <a:masterClrMapping/>
-  </p:clrMapOvr>
-</p:sld>
-</file>
-
-<file path=ppt/slides/slide9.xml><?xml version="1.0" encoding="utf-8"?>
 <p:sld xmlns:a="http://schemas.openxmlformats.org/drawingml/2006/main" xmlns:p="http://schemas.openxmlformats.org/presentationml/2006/main" xmlns:r="http://schemas.openxmlformats.org/officeDocument/2006/relationships">
   <p:cSld>
     <p:bg>
@@ -10529,8 +10581,8 @@
         </p:nvSpPr>
         <p:spPr>
           <a:xfrm>
-            <a:off x="685800" y="1371600"/>
-            <a:ext cx="7315200" cy="914400"/>
+            <a:off x="731520" y="822960"/>
+            <a:ext cx="5486400" cy="365760"/>
           </a:xfrm>
           <a:prstGeom prst="rect">
             <a:avLst/>
@@ -10545,15 +10597,15 @@
           <a:p>
             <a:pPr algn="l"/>
             <a:r>
-              <a:rPr sz="4400" b="1">
-                <a:solidFill>
-                  <a:srgbClr val="FFFFFF"/>
+              <a:rPr sz="1600" b="1">
+                <a:solidFill>
+                  <a:srgbClr val="A9CBF2"/>
                 </a:solidFill>
                 <a:latin typeface="Malgun Gothic"/>
                 <a:ea typeface="Malgun Gothic"/>
                 <a:cs typeface="Malgun Gothic"/>
               </a:rPr>
-              <a:t>지금 바로 써 보세요</a:t>
+              <a:t>감사합니다</a:t>
             </a:r>
           </a:p>
         </p:txBody>
@@ -10566,8 +10618,8 @@
         </p:nvSpPr>
         <p:spPr>
           <a:xfrm>
-            <a:off x="713232" y="2468880"/>
-            <a:ext cx="7315200" cy="548640"/>
+            <a:off x="731520" y="1463040"/>
+            <a:ext cx="6858000" cy="1737360"/>
           </a:xfrm>
           <a:prstGeom prst="rect">
             <a:avLst/>
@@ -10582,9 +10634,241 @@
           <a:p>
             <a:pPr algn="l"/>
             <a:r>
-              <a:rPr sz="3000" b="1">
-                <a:solidFill>
-                  <a:srgbClr val="CFE4FB"/>
+              <a:rPr sz="4600" b="1">
+                <a:solidFill>
+                  <a:srgbClr val="FFFFFF"/>
+                </a:solidFill>
+                <a:latin typeface="Malgun Gothic"/>
+                <a:ea typeface="Malgun Gothic"/>
+                <a:cs typeface="Malgun Gothic"/>
+              </a:rPr>
+              <a:t>휴대폰으로</a:t>
+            </a:r>
+          </a:p>
+          <a:p>
+            <a:pPr algn="l"/>
+            <a:r>
+              <a:rPr sz="4600" b="1">
+                <a:solidFill>
+                  <a:srgbClr val="FFFFFF"/>
+                </a:solidFill>
+                <a:latin typeface="Malgun Gothic"/>
+                <a:ea typeface="Malgun Gothic"/>
+                <a:cs typeface="Malgun Gothic"/>
+              </a:rPr>
+              <a:t>직접 써 보세요</a:t>
+            </a:r>
+          </a:p>
+        </p:txBody>
+      </p:sp>
+      <p:sp>
+        <p:nvSpPr>
+          <p:cNvPr id="4" name="TextBox 3"/>
+          <p:cNvSpPr txBox="1"/>
+          <p:nvPr/>
+        </p:nvSpPr>
+        <p:spPr>
+          <a:xfrm>
+            <a:off x="749808" y="3429000"/>
+            <a:ext cx="6858000" cy="822960"/>
+          </a:xfrm>
+          <a:prstGeom prst="rect">
+            <a:avLst/>
+          </a:prstGeom>
+          <a:noFill/>
+        </p:spPr>
+        <p:txBody>
+          <a:bodyPr wrap="square" lIns="0" rIns="0" tIns="0" bIns="0" anchor="t">
+            <a:spAutoFit/>
+          </a:bodyPr>
+          <a:lstStyle/>
+          <a:p>
+            <a:pPr algn="l">
+              <a:spcAft>
+                <a:spcPts val="400"/>
+              </a:spcAft>
+            </a:pPr>
+            <a:r>
+              <a:rPr sz="1500" b="0">
+                <a:solidFill>
+                  <a:srgbClr val="FFFFFF"/>
+                </a:solidFill>
+                <a:latin typeface="Malgun Gothic"/>
+                <a:ea typeface="Malgun Gothic"/>
+                <a:cs typeface="Malgun Gothic"/>
+              </a:rPr>
+              <a:t>카메라로 오른쪽 QR을 찍으면 바로 열립니다.</a:t>
+            </a:r>
+          </a:p>
+          <a:p>
+            <a:pPr algn="l">
+              <a:spcAft>
+                <a:spcPts val="400"/>
+              </a:spcAft>
+            </a:pPr>
+            <a:r>
+              <a:rPr sz="1500" b="0">
+                <a:solidFill>
+                  <a:srgbClr val="FFFFFF"/>
+                </a:solidFill>
+                <a:latin typeface="Malgun Gothic"/>
+                <a:ea typeface="Malgun Gothic"/>
+                <a:cs typeface="Malgun Gothic"/>
+              </a:rPr>
+              <a:t>학과를 고르면 30초 안에 나에게 맞는 공지가 보여요.</a:t>
+            </a:r>
+          </a:p>
+        </p:txBody>
+      </p:sp>
+      <p:sp>
+        <p:nvSpPr>
+          <p:cNvPr id="5" name="Rounded Rectangle 4">
+            <a:hlinkClick r:id="rId2"/>
+          </p:cNvPr>
+          <p:cNvSpPr/>
+          <p:nvPr/>
+        </p:nvSpPr>
+        <p:spPr>
+          <a:xfrm>
+            <a:off x="749808" y="4526280"/>
+            <a:ext cx="3017520" cy="640080"/>
+          </a:xfrm>
+          <a:prstGeom prst="roundRect">
+            <a:avLst>
+              <a:gd name="adj" fmla="val 50000"/>
+            </a:avLst>
+          </a:prstGeom>
+          <a:solidFill>
+            <a:srgbClr val="1E9E6A"/>
+          </a:solidFill>
+          <a:ln>
+            <a:noFill/>
+          </a:ln>
+          <a:effectLst/>
+        </p:spPr>
+        <p:style>
+          <a:lnRef idx="1">
+            <a:schemeClr val="accent1"/>
+          </a:lnRef>
+          <a:fillRef idx="3">
+            <a:schemeClr val="accent1"/>
+          </a:fillRef>
+          <a:effectRef idx="2">
+            <a:schemeClr val="accent1"/>
+          </a:effectRef>
+          <a:fontRef idx="minor">
+            <a:schemeClr val="lt1"/>
+          </a:fontRef>
+        </p:style>
+        <p:txBody>
+          <a:bodyPr rtlCol="0" anchor="ctr"/>
+          <a:lstStyle/>
+          <a:p>
+            <a:pPr algn="ctr"/>
+          </a:p>
+        </p:txBody>
+      </p:sp>
+      <p:sp>
+        <p:nvSpPr>
+          <p:cNvPr id="6" name="TextBox 5"/>
+          <p:cNvSpPr txBox="1"/>
+          <p:nvPr/>
+        </p:nvSpPr>
+        <p:spPr>
+          <a:xfrm>
+            <a:off x="749808" y="4526280"/>
+            <a:ext cx="3017520" cy="640080"/>
+          </a:xfrm>
+          <a:prstGeom prst="rect">
+            <a:avLst/>
+          </a:prstGeom>
+          <a:noFill/>
+        </p:spPr>
+        <p:txBody>
+          <a:bodyPr wrap="square" lIns="0" rIns="0" tIns="0" bIns="0" anchor="ctr">
+            <a:spAutoFit/>
+          </a:bodyPr>
+          <a:lstStyle/>
+          <a:p>
+            <a:pPr algn="ctr"/>
+            <a:r>
+              <a:rPr sz="1700" b="1">
+                <a:solidFill>
+                  <a:srgbClr val="FFFFFF"/>
+                </a:solidFill>
+                <a:latin typeface="Malgun Gothic"/>
+                <a:ea typeface="Malgun Gothic"/>
+                <a:cs typeface="Malgun Gothic"/>
+              </a:rPr>
+              <a:t>▶  지금 시연해 볼게요</a:t>
+            </a:r>
+          </a:p>
+        </p:txBody>
+      </p:sp>
+      <p:sp>
+        <p:nvSpPr>
+          <p:cNvPr id="7" name="TextBox 6"/>
+          <p:cNvSpPr txBox="1"/>
+          <p:nvPr/>
+        </p:nvSpPr>
+        <p:spPr>
+          <a:xfrm>
+            <a:off x="749808" y="5577840"/>
+            <a:ext cx="1097280" cy="274320"/>
+          </a:xfrm>
+          <a:prstGeom prst="rect">
+            <a:avLst/>
+          </a:prstGeom>
+          <a:noFill/>
+        </p:spPr>
+        <p:txBody>
+          <a:bodyPr wrap="square" lIns="0" rIns="0" tIns="0" bIns="0" anchor="t">
+            <a:spAutoFit/>
+          </a:bodyPr>
+          <a:lstStyle/>
+          <a:p>
+            <a:pPr algn="l"/>
+            <a:r>
+              <a:rPr sz="1200" b="1">
+                <a:solidFill>
+                  <a:srgbClr val="A9CBF2"/>
+                </a:solidFill>
+                <a:latin typeface="Malgun Gothic"/>
+                <a:ea typeface="Malgun Gothic"/>
+                <a:cs typeface="Malgun Gothic"/>
+              </a:rPr>
+              <a:t>바로 가기</a:t>
+            </a:r>
+          </a:p>
+        </p:txBody>
+      </p:sp>
+      <p:sp>
+        <p:nvSpPr>
+          <p:cNvPr id="8" name="TextBox 7"/>
+          <p:cNvSpPr txBox="1"/>
+          <p:nvPr/>
+        </p:nvSpPr>
+        <p:spPr>
+          <a:xfrm>
+            <a:off x="1828800" y="5577840"/>
+            <a:ext cx="5029200" cy="274320"/>
+          </a:xfrm>
+          <a:prstGeom prst="rect">
+            <a:avLst/>
+          </a:prstGeom>
+          <a:noFill/>
+        </p:spPr>
+        <p:txBody>
+          <a:bodyPr wrap="square" lIns="0" rIns="0" tIns="0" bIns="0" anchor="t">
+            <a:spAutoFit/>
+          </a:bodyPr>
+          <a:lstStyle/>
+          <a:p>
+            <a:pPr algn="l"/>
+            <a:r>
+              <a:rPr sz="1200" b="0">
+                <a:solidFill>
+                  <a:srgbClr val="FFFFFF"/>
                 </a:solidFill>
                 <a:latin typeface="Malgun Gothic"/>
                 <a:ea typeface="Malgun Gothic"/>
@@ -10597,14 +10881,14 @@
       </p:sp>
       <p:sp>
         <p:nvSpPr>
-          <p:cNvPr id="4" name="TextBox 3"/>
+          <p:cNvPr id="9" name="TextBox 8"/>
           <p:cNvSpPr txBox="1"/>
           <p:nvPr/>
         </p:nvSpPr>
         <p:spPr>
           <a:xfrm>
-            <a:off x="713232" y="3291840"/>
-            <a:ext cx="7315200" cy="1463040"/>
+            <a:off x="749808" y="5943600"/>
+            <a:ext cx="1097280" cy="274320"/>
           </a:xfrm>
           <a:prstGeom prst="rect">
             <a:avLst/>
@@ -10617,31 +10901,46 @@
           </a:bodyPr>
           <a:lstStyle/>
           <a:p>
-            <a:pPr algn="l">
-              <a:spcAft>
-                <a:spcPts val="1000"/>
-              </a:spcAft>
-            </a:pPr>
-            <a:r>
-              <a:rPr sz="1700" b="0">
-                <a:solidFill>
-                  <a:srgbClr val="FFFFFF"/>
+            <a:pPr algn="l"/>
+            <a:r>
+              <a:rPr sz="1200" b="1">
+                <a:solidFill>
+                  <a:srgbClr val="A9CBF2"/>
                 </a:solidFill>
                 <a:latin typeface="Malgun Gothic"/>
                 <a:ea typeface="Malgun Gothic"/>
                 <a:cs typeface="Malgun Gothic"/>
               </a:rPr>
-              <a:t>휴대폰에서 열고 '홈 화면에 추가'하면 앱처럼 쓸 수 있어요</a:t>
-            </a:r>
-          </a:p>
-          <a:p>
-            <a:pPr algn="l">
-              <a:spcAft>
-                <a:spcPts val="1000"/>
-              </a:spcAft>
-            </a:pPr>
-            <a:r>
-              <a:rPr sz="1700" b="0">
+              <a:t>소스 코드</a:t>
+            </a:r>
+          </a:p>
+        </p:txBody>
+      </p:sp>
+      <p:sp>
+        <p:nvSpPr>
+          <p:cNvPr id="10" name="TextBox 9"/>
+          <p:cNvSpPr txBox="1"/>
+          <p:nvPr/>
+        </p:nvSpPr>
+        <p:spPr>
+          <a:xfrm>
+            <a:off x="1828800" y="5943600"/>
+            <a:ext cx="5029200" cy="274320"/>
+          </a:xfrm>
+          <a:prstGeom prst="rect">
+            <a:avLst/>
+          </a:prstGeom>
+          <a:noFill/>
+        </p:spPr>
+        <p:txBody>
+          <a:bodyPr wrap="square" lIns="0" rIns="0" tIns="0" bIns="0" anchor="t">
+            <a:spAutoFit/>
+          </a:bodyPr>
+          <a:lstStyle/>
+          <a:p>
+            <a:pPr algn="l"/>
+            <a:r>
+              <a:rPr sz="1200" b="0">
                 <a:solidFill>
                   <a:srgbClr val="FFFFFF"/>
                 </a:solidFill>
@@ -10649,58 +10948,21 @@
                 <a:ea typeface="Malgun Gothic"/>
                 <a:cs typeface="Malgun Gothic"/>
               </a:rPr>
-              <a:t>GitHub  github.com/GOBIEBERPA/scnu-lens</a:t>
-            </a:r>
-          </a:p>
-        </p:txBody>
-      </p:sp>
-      <p:sp>
-        <p:nvSpPr>
-          <p:cNvPr id="5" name="TextBox 4"/>
-          <p:cNvSpPr txBox="1"/>
-          <p:nvPr/>
-        </p:nvSpPr>
-        <p:spPr>
-          <a:xfrm>
-            <a:off x="713232" y="5760720"/>
-            <a:ext cx="7315200" cy="365760"/>
-          </a:xfrm>
-          <a:prstGeom prst="rect">
-            <a:avLst/>
-          </a:prstGeom>
-          <a:noFill/>
-        </p:spPr>
-        <p:txBody>
-          <a:bodyPr wrap="square" lIns="0" rIns="0" tIns="0" bIns="0" anchor="t">
-            <a:spAutoFit/>
-          </a:bodyPr>
-          <a:lstStyle/>
-          <a:p>
-            <a:pPr algn="l"/>
-            <a:r>
-              <a:rPr sz="1400" b="0">
-                <a:solidFill>
-                  <a:srgbClr val="CFE4FB"/>
-                </a:solidFill>
-                <a:latin typeface="Malgun Gothic"/>
-                <a:ea typeface="Malgun Gothic"/>
-                <a:cs typeface="Malgun Gothic"/>
-              </a:rPr>
-              <a:t>감사합니다 · SCNU Lens · 이휴단</a:t>
-            </a:r>
-          </a:p>
-        </p:txBody>
-      </p:sp>
-      <p:sp>
-        <p:nvSpPr>
-          <p:cNvPr id="6" name="Rounded Rectangle 5"/>
+              <a:t>github.com/GOBIEBERPA/scnu-lens</a:t>
+            </a:r>
+          </a:p>
+        </p:txBody>
+      </p:sp>
+      <p:sp>
+        <p:nvSpPr>
+          <p:cNvPr id="11" name="Rounded Rectangle 10"/>
           <p:cNvSpPr/>
           <p:nvPr/>
         </p:nvSpPr>
         <p:spPr>
           <a:xfrm>
-            <a:off x="8549640" y="1417320"/>
-            <a:ext cx="3017520" cy="3017520"/>
+            <a:off x="8138160" y="1371600"/>
+            <a:ext cx="3291840" cy="3291840"/>
           </a:xfrm>
           <a:prstGeom prst="roundRect">
             <a:avLst>
@@ -10739,22 +11001,24 @@
       </p:sp>
       <p:pic>
         <p:nvPicPr>
-          <p:cNvPr id="7" name="Picture 6" descr="qr-scnuaram.png"/>
+          <p:cNvPr id="12" name="Picture 11" descr="qr-scnuaram.png">
+            <a:hlinkClick r:id="rId2"/>
+          </p:cNvPr>
           <p:cNvPicPr>
             <a:picLocks noChangeAspect="1"/>
           </p:cNvPicPr>
           <p:nvPr/>
         </p:nvPicPr>
         <p:blipFill>
-          <a:blip r:embed="rId2"/>
+          <a:blip r:embed="rId3"/>
           <a:stretch>
             <a:fillRect/>
           </a:stretch>
         </p:blipFill>
         <p:spPr>
           <a:xfrm>
-            <a:off x="8732520" y="1600200"/>
-            <a:ext cx="2651760" cy="2651760"/>
+            <a:off x="8321040" y="1554480"/>
+            <a:ext cx="2926080" cy="2926080"/>
           </a:xfrm>
           <a:prstGeom prst="rect">
             <a:avLst/>
@@ -10763,14 +11027,14 @@
       </p:pic>
       <p:sp>
         <p:nvSpPr>
-          <p:cNvPr id="8" name="TextBox 7"/>
+          <p:cNvPr id="13" name="TextBox 12"/>
           <p:cNvSpPr txBox="1"/>
           <p:nvPr/>
         </p:nvSpPr>
         <p:spPr>
           <a:xfrm>
-            <a:off x="8549640" y="4617720"/>
-            <a:ext cx="3017520" cy="365760"/>
+            <a:off x="8138160" y="4846320"/>
+            <a:ext cx="3291840" cy="365760"/>
           </a:xfrm>
           <a:prstGeom prst="rect">
             <a:avLst/>
@@ -10785,15 +11049,15 @@
           <a:p>
             <a:pPr algn="ctr"/>
             <a:r>
-              <a:rPr sz="1400" b="0">
-                <a:solidFill>
-                  <a:srgbClr val="CFE4FB"/>
+              <a:rPr sz="1300" b="0">
+                <a:solidFill>
+                  <a:srgbClr val="A9CBF2"/>
                 </a:solidFill>
                 <a:latin typeface="Malgun Gothic"/>
                 <a:ea typeface="Malgun Gothic"/>
                 <a:cs typeface="Malgun Gothic"/>
               </a:rPr>
-              <a:t>QR로 바로 접속</a:t>
+              <a:t>scnuaram.vercel.app</a:t>
             </a:r>
           </a:p>
         </p:txBody>

--- a/docs/SCNU-Lens-발표.pptx
+++ b/docs/SCNU-Lens-발표.pptx
@@ -508,7 +508,7 @@
           <a:lstStyle/>
           <a:p>
             <a:r>
-              <a:t>안녕하세요, SCNU Lens를 만든 이휴단입니다. 학교 곳곳에 흩어진 공지를 한곳에 모아서, 나에게 맞는 것만 마감 전에 알려 주는 앱입니다.</a:t>
+              <a:t>안녕하세요, SCNU Lens를 만든 이휴단입니다. SCNU Lens는 순천대 게시판 112곳과 교외 장학금·자격증·공모전 정보를 한 앱에 모아서, 나에게 맞는 것만 마감 전에 알려 주는 캠퍼스 알리미입니다. (팀 이름이 있으면 이름 옆에 적어 주세요)</a:t>
             </a:r>
           </a:p>
         </p:txBody>
@@ -578,7 +578,7 @@
           <a:lstStyle/>
           <a:p>
             <a:r>
-              <a:t>순천대 공지는 학사, 장학, 학과, 기관 게시판까지 109곳에 흩어져 있고, 공모전과 자격증 일정은 또 다른 사이트에 있습니다. 게다가 나에게 해당되는지, 언제까지인지는 긴 본문과 첨부파일 속에 있어서, 결국 마감이 지나서야 알게 됩니다.</a:t>
+              <a:t>순천대 공지는 본부와 학과·부속기관 게시판 112곳에 흩어져 있고, 장학금·자격증 시험·공모전은 또 다른 사이트 네 곳에 있습니다. 실제로 모은 공지 159건 중 87건은 신청 기간이나 대상이 본문이 아니라 첨부 한글 파일 안에 있었고, 18건은 여러 게시판에 중복으로 올라왔습니다. 게다가 시험이나 장학은 '접수 기간'으로 적혀 있어서 지금 신청할 수 있는지 한눈에 안 보입니다. 결국 마감이 지나서야 알게 됩니다.</a:t>
             </a:r>
           </a:p>
         </p:txBody>
@@ -648,7 +648,7 @@
           <a:lstStyle/>
           <a:p>
             <a:r>
-              <a:t>처음 들어오면 학과와 관심사를 30초 만에 고릅니다. 학과는 '컴공'처럼 줄여 써도 찾아 줍니다. 그러면 나에게 맞는 공지를 이유와 함께 보여 주고, 누르면 대상·기간·신청방법이 한 장으로 정리돼 있습니다. 마감 7일, 3일, 1일 전에는 휴대폰으로 알려 줍니다.</a:t>
+              <a:t>처음에 학과와 관심사를 30초 만에 고르면, 그다음부터는 사이트를 찾아다닐 필요가 없습니다. 나에게 맞는 공지를 이유와 함께 보여 주고, 접수 기간인 공지는 '10월 12일 접수 시작', '접수중 D-3'처럼 지금 상태를 표시합니다. 공지를 누르면 첨부파일까지 읽어서 대상·기간·신청방법을 표로 정리해 보여 주고, 마감 7·3·1일 전과 접수 시작 때 휴대폰으로 알려 줍니다.</a:t>
             </a:r>
           </a:p>
         </p:txBody>
@@ -718,7 +718,7 @@
           <a:lstStyle/>
           <a:p>
             <a:r>
-              <a:t>AI가 공지 본문과 첨부파일을 읽고, 어떤 분야인지, 누가 대상인지, 언제 마감인지를 뽑아서 한 장의 카드로 정리합니다. 여러 게시판에 같은 공지가 올라오면 하나로 합칩니다. 유료 AI 서비스 없이 공개된 AI 모델을 서버 안에서 돌리기 때문에 비용은 0원입니다.</a:t>
+              <a:t>구조는 네 단계입니다. 매시간 학교 게시판 112곳을 크롤링하고, 교외 정보는 공공데이터포털 공식 API 네 종류로 받습니다. 본문뿐 아니라 HWP·PDF 같은 첨부파일 글자까지 읽고, 여러 게시판에 올라온 같은 공지는 하나로 묶습니다. 그다음 서버 안에서 돌아가는 다국어 임베딩 모델로 분야를 나누고, 규칙으로 접수 시작일·마감일·시험일을 뽑고, 대상·기간·신청방법을 표로 만듭니다. 마지막으로 학과·관심사에 맞춰 이유와 함께 보여 주고 웹 푸시로 알립니다. 외부 AI API를 쓰지 않아 AI 비용은 0원이고, 자동 테스트 135개로 규칙을 지킵니다.</a:t>
             </a:r>
           </a:p>
         </p:txBody>
@@ -788,7 +788,7 @@
           <a:lstStyle/>
           <a:p>
             <a:r>
-              <a:t>지금 이 순간에도 학교 게시판 109곳과 공공 API 3종을 매시간 확인하고 있습니다. 컴퓨터에서도 휴대폰에서도 같은 주소로 열리고, 설치 없이 홈 화면에 추가하면 앱처럼 쓸 수 있습니다.</a:t>
+              <a:t>지금부터 시연하겠습니다. (1) 학과 입력에 '컴공'만 쳐도 컴퓨터공학전공이 나옵니다. (2) 알림은 녹화해 둔 영상으로 보여 드리겠습니다. (3) '나에게' 탭에서 내 학과 공지를 누르면 정리 카드가 열리고, 원문 버튼으로 학교 게시판에 바로 갑니다. (4) 교외 탭에서는 장학금·자격증을 '접수 예정', '접수중'으로 나눠 보고, 접수 시작순으로 정렬할 수 있습니다. (5) 캘린더에서 날짜를 누르면 그날 마감과 지금 접수중인 목록이 나옵니다. (오른쪽 위 '열기' 버튼 = 사이트)</a:t>
             </a:r>
           </a:p>
         </p:txBody>
@@ -858,7 +858,7 @@
           <a:lstStyle/>
           <a:p>
             <a:r>
-              <a:t>지금은 누구나 쓸 수 있는 웹앱으로 운영 중입니다. 다음으로는 학생들의 의견을 받아, 예를 들어 지역 한정 공고를 표시하고 추천이 빗나간 공지를 모아 규칙을 고치려고 합니다. 학교 사이트를 바꿀 필요 없이 이미 있는 게시판을 읽기 때문에, 같은 게시판 시스템을 쓰는 곳이라면 쉽게 넓힐 수 있습니다.</a:t>
+              <a:t>기대 효과는 네 가지입니다. 사이트를 돌아다니는 시간이 줄고, 알림으로 마감을 덜 놓치고, 교외 장학·자격증까지 발견하고, 신입생도 선배 없이 같은 정보를 얻습니다. 앞으로는 첫째, 지금은 무료 서버라 대형 LLM을 못 올렸는데, LLM을 붙이면 대화로 알림 규칙을 만들 수 있습니다. 둘째, 첨부 HWP·PDF 글자는 이미 읽고 있어서, 다음 단계는 표 안의 날짜와 이미지 포스터 인식입니다. 셋째, 시간표·전자출결과 연결해 공강 시간에 할 일을 추천하는 하루 체크리스트로 넓힐 수 있습니다(학교 협조 필요). 넷째, 토익처럼 공식 API가 없는 시험은 직접 입력 일정으로 대응하고, 게시판 목록만 바꾸면 다른 대학에도 쓸 수 있습니다. 운영비가 0원이라 학생에게는 무료로, 대학·학과 단위 공식 알리미로 도입하는 모델을 생각하고 있습니다.</a:t>
             </a:r>
           </a:p>
         </p:txBody>
@@ -928,7 +928,7 @@
           <a:lstStyle/>
           <a:p>
             <a:r>
-              <a:t>화면의 QR을 찍으시면 바로 써 보실 수 있습니다. 지금 시연해 보겠습니다. (초록 버튼을 누르면 사이트가 열립니다) 감사합니다.</a:t>
+              <a:t>들어 주셔서 감사합니다. 화면의 QR로 바로 써 보실 수 있습니다. 질문 받겠습니다.</a:t>
             </a:r>
           </a:p>
         </p:txBody>
@@ -3950,7 +3950,7 @@
         </p:nvSpPr>
         <p:spPr>
           <a:xfrm>
-            <a:off x="731520" y="1417320"/>
+            <a:off x="731520" y="1234440"/>
             <a:ext cx="6858000" cy="365760"/>
           </a:xfrm>
           <a:prstGeom prst="rect">
@@ -3995,7 +3995,7 @@
         </p:blipFill>
         <p:spPr>
           <a:xfrm>
-            <a:off x="731520" y="2011680"/>
+            <a:off x="731520" y="1828800"/>
             <a:ext cx="868680" cy="868680"/>
           </a:xfrm>
           <a:prstGeom prst="rect">
@@ -4011,7 +4011,7 @@
         </p:nvSpPr>
         <p:spPr>
           <a:xfrm>
-            <a:off x="1783080" y="1993392"/>
+            <a:off x="1783080" y="1810512"/>
             <a:ext cx="5943600" cy="914400"/>
           </a:xfrm>
           <a:prstGeom prst="rect">
@@ -4048,8 +4048,8 @@
         </p:nvSpPr>
         <p:spPr>
           <a:xfrm>
-            <a:off x="749808" y="3246120"/>
-            <a:ext cx="6675120" cy="1188720"/>
+            <a:off x="749808" y="3017520"/>
+            <a:ext cx="6949440" cy="1280160"/>
           </a:xfrm>
           <a:prstGeom prst="rect">
             <a:avLst/>
@@ -4064,11 +4064,11 @@
           <a:p>
             <a:pPr algn="l">
               <a:spcAft>
-                <a:spcPts val="600"/>
+                <a:spcPts val="400"/>
               </a:spcAft>
             </a:pPr>
             <a:r>
-              <a:rPr sz="2200" b="0">
+              <a:rPr sz="2600" b="1">
                 <a:solidFill>
                   <a:srgbClr val="FFFFFF"/>
                 </a:solidFill>
@@ -4076,17 +4076,17 @@
                 <a:ea typeface="Malgun Gothic"/>
                 <a:cs typeface="Malgun Gothic"/>
               </a:rPr>
-              <a:t>흩어진 학교 공지를 한곳에 모아</a:t>
+              <a:t>게시판 112곳을 돌지 않아도,</a:t>
             </a:r>
           </a:p>
           <a:p>
             <a:pPr algn="l">
               <a:spcAft>
-                <a:spcPts val="600"/>
+                <a:spcPts val="400"/>
               </a:spcAft>
             </a:pPr>
             <a:r>
-              <a:rPr sz="2200" b="0">
+              <a:rPr sz="2600" b="1">
                 <a:solidFill>
                   <a:srgbClr val="FFFFFF"/>
                 </a:solidFill>
@@ -4094,7 +4094,7 @@
                 <a:ea typeface="Malgun Gothic"/>
                 <a:cs typeface="Malgun Gothic"/>
               </a:rPr>
-              <a:t>나에게 맞는 것만, 마감 전에 알려 주는 앱</a:t>
+              <a:t>나에게 맞는 공지가 마감 전에 옵니다</a:t>
             </a:r>
           </a:p>
         </p:txBody>
@@ -4107,8 +4107,8 @@
         </p:nvSpPr>
         <p:spPr>
           <a:xfrm>
-            <a:off x="749808" y="5669280"/>
-            <a:ext cx="6675120" cy="365760"/>
+            <a:off x="749808" y="4343400"/>
+            <a:ext cx="6949440" cy="822960"/>
           </a:xfrm>
           <a:prstGeom prst="rect">
             <a:avLst/>
@@ -4123,7 +4123,7 @@
           <a:p>
             <a:pPr algn="l"/>
             <a:r>
-              <a:rPr sz="1300" b="0">
+              <a:rPr sz="1500" b="0">
                 <a:solidFill>
                   <a:srgbClr val="A9CBF2"/>
                 </a:solidFill>
@@ -4131,14 +4131,62 @@
                 <a:ea typeface="Malgun Gothic"/>
                 <a:cs typeface="Malgun Gothic"/>
               </a:rPr>
-              <a:t>이휴단  ·  scnuaram.vercel.app</a:t>
-            </a:r>
-          </a:p>
-        </p:txBody>
-      </p:sp>
-      <p:sp>
-        <p:nvSpPr>
-          <p:cNvPr id="7" name="Rounded Rectangle 6"/>
+              <a:t>순천대 공지 + 교외 장학금·자격증·공모전을 한 앱에서 모아 정리하고 알려 주는 캠퍼스 알리미</a:t>
+            </a:r>
+          </a:p>
+        </p:txBody>
+      </p:sp>
+      <p:sp>
+        <p:nvSpPr>
+          <p:cNvPr id="7" name="TextBox 6"/>
+          <p:cNvSpPr txBox="1"/>
+          <p:nvPr/>
+        </p:nvSpPr>
+        <p:spPr>
+          <a:xfrm>
+            <a:off x="749808" y="5669280"/>
+            <a:ext cx="6949440" cy="365760"/>
+          </a:xfrm>
+          <a:prstGeom prst="rect">
+            <a:avLst/>
+          </a:prstGeom>
+          <a:noFill/>
+        </p:spPr>
+        <p:txBody>
+          <a:bodyPr wrap="square" lIns="0" rIns="0" tIns="0" bIns="0" anchor="t">
+            <a:spAutoFit/>
+          </a:bodyPr>
+          <a:lstStyle/>
+          <a:p>
+            <a:pPr algn="l"/>
+            <a:r>
+              <a:rPr sz="1400" b="1">
+                <a:solidFill>
+                  <a:srgbClr val="FFFFFF"/>
+                </a:solidFill>
+                <a:latin typeface="Malgun Gothic"/>
+                <a:ea typeface="Malgun Gothic"/>
+                <a:cs typeface="Malgun Gothic"/>
+              </a:rPr>
+              <a:t>이휴단</a:t>
+            </a:r>
+            <a:r>
+              <a:rPr sz="1400" b="0">
+                <a:solidFill>
+                  <a:srgbClr val="A9CBF2"/>
+                </a:solidFill>
+                <a:latin typeface="Malgun Gothic"/>
+                <a:ea typeface="Malgun Gothic"/>
+                <a:cs typeface="Malgun Gothic"/>
+              </a:rPr>
+              <a:t>   ·   scnuaram.vercel.app</a:t>
+            </a:r>
+          </a:p>
+        </p:txBody>
+      </p:sp>
+      <p:sp>
+        <p:nvSpPr>
+          <p:cNvPr id="8" name="Rounded Rectangle 7"/>
           <p:cNvSpPr/>
           <p:nvPr/>
         </p:nvSpPr>
@@ -4183,7 +4231,7 @@
       </p:sp>
       <p:pic>
         <p:nvPicPr>
-          <p:cNvPr id="8" name="Picture 7" descr="2-for-me.png"/>
+          <p:cNvPr id="9" name="Picture 8" descr="1-for-me-open.png"/>
           <p:cNvPicPr>
             <a:picLocks noChangeAspect="1"/>
           </p:cNvPicPr>
@@ -4263,7 +4311,7 @@
                 <a:ea typeface="Malgun Gothic"/>
                 <a:cs typeface="Malgun Gothic"/>
               </a:rPr>
-              <a:t>학교 공지는 한곳에 모여 있지 않습니다</a:t>
+              <a:t>공지 하나 보려고, 사이트 100곳 넘게 돌아야 합니다</a:t>
             </a:r>
           </a:p>
         </p:txBody>
@@ -4277,11 +4325,11 @@
         <p:spPr>
           <a:xfrm>
             <a:off x="594360" y="1463040"/>
-            <a:ext cx="5120640" cy="4206240"/>
+            <a:ext cx="2606040" cy="1920240"/>
           </a:xfrm>
           <a:prstGeom prst="roundRect">
             <a:avLst>
-              <a:gd name="adj" fmla="val 5000"/>
+              <a:gd name="adj" fmla="val 7000"/>
             </a:avLst>
           </a:prstGeom>
           <a:solidFill>
@@ -4318,979 +4366,129 @@
       </p:sp>
       <p:sp>
         <p:nvSpPr>
-          <p:cNvPr id="4" name="Rounded Rectangle 3"/>
+          <p:cNvPr id="4" name="TextBox 3"/>
+          <p:cNvSpPr txBox="1"/>
+          <p:nvPr/>
+        </p:nvSpPr>
+        <p:spPr>
+          <a:xfrm>
+            <a:off x="822960" y="1645920"/>
+            <a:ext cx="2194560" cy="640080"/>
+          </a:xfrm>
+          <a:prstGeom prst="rect">
+            <a:avLst/>
+          </a:prstGeom>
+          <a:noFill/>
+        </p:spPr>
+        <p:txBody>
+          <a:bodyPr wrap="square" lIns="0" rIns="0" tIns="0" bIns="0" anchor="t">
+            <a:spAutoFit/>
+          </a:bodyPr>
+          <a:lstStyle/>
+          <a:p>
+            <a:pPr algn="l"/>
+            <a:r>
+              <a:rPr sz="3000" b="1">
+                <a:solidFill>
+                  <a:srgbClr val="0058B2"/>
+                </a:solidFill>
+                <a:latin typeface="Malgun Gothic"/>
+                <a:ea typeface="Malgun Gothic"/>
+                <a:cs typeface="Malgun Gothic"/>
+              </a:rPr>
+              <a:t>112곳</a:t>
+            </a:r>
+          </a:p>
+        </p:txBody>
+      </p:sp>
+      <p:sp>
+        <p:nvSpPr>
+          <p:cNvPr id="5" name="TextBox 4"/>
+          <p:cNvSpPr txBox="1"/>
+          <p:nvPr/>
+        </p:nvSpPr>
+        <p:spPr>
+          <a:xfrm>
+            <a:off x="822960" y="2331720"/>
+            <a:ext cx="2194560" cy="365760"/>
+          </a:xfrm>
+          <a:prstGeom prst="rect">
+            <a:avLst/>
+          </a:prstGeom>
+          <a:noFill/>
+        </p:spPr>
+        <p:txBody>
+          <a:bodyPr wrap="square" lIns="0" rIns="0" tIns="0" bIns="0" anchor="t">
+            <a:spAutoFit/>
+          </a:bodyPr>
+          <a:lstStyle/>
+          <a:p>
+            <a:pPr algn="l"/>
+            <a:r>
+              <a:rPr sz="1400" b="1">
+                <a:solidFill>
+                  <a:srgbClr val="1F232B"/>
+                </a:solidFill>
+                <a:latin typeface="Malgun Gothic"/>
+                <a:ea typeface="Malgun Gothic"/>
+                <a:cs typeface="Malgun Gothic"/>
+              </a:rPr>
+              <a:t>학교 게시판</a:t>
+            </a:r>
+          </a:p>
+        </p:txBody>
+      </p:sp>
+      <p:sp>
+        <p:nvSpPr>
+          <p:cNvPr id="6" name="TextBox 5"/>
+          <p:cNvSpPr txBox="1"/>
+          <p:nvPr/>
+        </p:nvSpPr>
+        <p:spPr>
+          <a:xfrm>
+            <a:off x="822960" y="2697480"/>
+            <a:ext cx="2240280" cy="640080"/>
+          </a:xfrm>
+          <a:prstGeom prst="rect">
+            <a:avLst/>
+          </a:prstGeom>
+          <a:noFill/>
+        </p:spPr>
+        <p:txBody>
+          <a:bodyPr wrap="square" lIns="0" rIns="0" tIns="0" bIns="0" anchor="t">
+            <a:spAutoFit/>
+          </a:bodyPr>
+          <a:lstStyle/>
+          <a:p>
+            <a:pPr algn="l"/>
+            <a:r>
+              <a:rPr sz="1050" b="0">
+                <a:solidFill>
+                  <a:srgbClr val="666E7A"/>
+                </a:solidFill>
+                <a:latin typeface="Malgun Gothic"/>
+                <a:ea typeface="Malgun Gothic"/>
+                <a:cs typeface="Malgun Gothic"/>
+              </a:rPr>
+              <a:t>본부 2곳 + 학과·부속기관 110곳</a:t>
+            </a:r>
+          </a:p>
+        </p:txBody>
+      </p:sp>
+      <p:sp>
+        <p:nvSpPr>
+          <p:cNvPr id="7" name="Rounded Rectangle 6"/>
           <p:cNvSpPr/>
           <p:nvPr/>
         </p:nvSpPr>
         <p:spPr>
           <a:xfrm>
-            <a:off x="868680" y="1783080"/>
-            <a:ext cx="987552" cy="384048"/>
+            <a:off x="3383279" y="1463040"/>
+            <a:ext cx="2606040" cy="1920240"/>
           </a:xfrm>
           <a:prstGeom prst="roundRect">
             <a:avLst>
-              <a:gd name="adj" fmla="val 50000"/>
-            </a:avLst>
-          </a:prstGeom>
-          <a:solidFill>
-            <a:srgbClr val="EEF4FB"/>
-          </a:solidFill>
-          <a:ln>
-            <a:noFill/>
-          </a:ln>
-          <a:effectLst/>
-        </p:spPr>
-        <p:style>
-          <a:lnRef idx="1">
-            <a:schemeClr val="accent1"/>
-          </a:lnRef>
-          <a:fillRef idx="3">
-            <a:schemeClr val="accent1"/>
-          </a:fillRef>
-          <a:effectRef idx="2">
-            <a:schemeClr val="accent1"/>
-          </a:effectRef>
-          <a:fontRef idx="minor">
-            <a:schemeClr val="lt1"/>
-          </a:fontRef>
-        </p:style>
-        <p:txBody>
-          <a:bodyPr rtlCol="0" anchor="ctr"/>
-          <a:lstStyle/>
-          <a:p>
-            <a:pPr algn="ctr"/>
-          </a:p>
-        </p:txBody>
-      </p:sp>
-      <p:sp>
-        <p:nvSpPr>
-          <p:cNvPr id="5" name="TextBox 4"/>
-          <p:cNvSpPr txBox="1"/>
-          <p:nvPr/>
-        </p:nvSpPr>
-        <p:spPr>
-          <a:xfrm>
-            <a:off x="868680" y="1783080"/>
-            <a:ext cx="987552" cy="384048"/>
-          </a:xfrm>
-          <a:prstGeom prst="rect">
-            <a:avLst/>
-          </a:prstGeom>
-          <a:noFill/>
-        </p:spPr>
-        <p:txBody>
-          <a:bodyPr wrap="square" lIns="0" rIns="0" tIns="0" bIns="0" anchor="ctr">
-            <a:spAutoFit/>
-          </a:bodyPr>
-          <a:lstStyle/>
-          <a:p>
-            <a:pPr algn="ctr"/>
-            <a:r>
-              <a:rPr sz="1200" b="1">
-                <a:solidFill>
-                  <a:srgbClr val="0058B2"/>
-                </a:solidFill>
-                <a:latin typeface="Malgun Gothic"/>
-                <a:ea typeface="Malgun Gothic"/>
-                <a:cs typeface="Malgun Gothic"/>
-              </a:rPr>
-              <a:t>학사공지</a:t>
-            </a:r>
-          </a:p>
-        </p:txBody>
-      </p:sp>
-      <p:sp>
-        <p:nvSpPr>
-          <p:cNvPr id="6" name="Rounded Rectangle 5"/>
-          <p:cNvSpPr/>
-          <p:nvPr/>
-        </p:nvSpPr>
-        <p:spPr>
-          <a:xfrm>
-            <a:off x="2788920" y="1874519"/>
-            <a:ext cx="987552" cy="384048"/>
-          </a:xfrm>
-          <a:prstGeom prst="roundRect">
-            <a:avLst>
-              <a:gd name="adj" fmla="val 50000"/>
-            </a:avLst>
-          </a:prstGeom>
-          <a:solidFill>
-            <a:srgbClr val="EEF4FB"/>
-          </a:solidFill>
-          <a:ln>
-            <a:noFill/>
-          </a:ln>
-          <a:effectLst/>
-        </p:spPr>
-        <p:style>
-          <a:lnRef idx="1">
-            <a:schemeClr val="accent1"/>
-          </a:lnRef>
-          <a:fillRef idx="3">
-            <a:schemeClr val="accent1"/>
-          </a:fillRef>
-          <a:effectRef idx="2">
-            <a:schemeClr val="accent1"/>
-          </a:effectRef>
-          <a:fontRef idx="minor">
-            <a:schemeClr val="lt1"/>
-          </a:fontRef>
-        </p:style>
-        <p:txBody>
-          <a:bodyPr rtlCol="0" anchor="ctr"/>
-          <a:lstStyle/>
-          <a:p>
-            <a:pPr algn="ctr"/>
-          </a:p>
-        </p:txBody>
-      </p:sp>
-      <p:sp>
-        <p:nvSpPr>
-          <p:cNvPr id="7" name="TextBox 6"/>
-          <p:cNvSpPr txBox="1"/>
-          <p:nvPr/>
-        </p:nvSpPr>
-        <p:spPr>
-          <a:xfrm>
-            <a:off x="2788920" y="1874519"/>
-            <a:ext cx="987552" cy="384048"/>
-          </a:xfrm>
-          <a:prstGeom prst="rect">
-            <a:avLst/>
-          </a:prstGeom>
-          <a:noFill/>
-        </p:spPr>
-        <p:txBody>
-          <a:bodyPr wrap="square" lIns="0" rIns="0" tIns="0" bIns="0" anchor="ctr">
-            <a:spAutoFit/>
-          </a:bodyPr>
-          <a:lstStyle/>
-          <a:p>
-            <a:pPr algn="ctr"/>
-            <a:r>
-              <a:rPr sz="1200" b="1">
-                <a:solidFill>
-                  <a:srgbClr val="0058B2"/>
-                </a:solidFill>
-                <a:latin typeface="Malgun Gothic"/>
-                <a:ea typeface="Malgun Gothic"/>
-                <a:cs typeface="Malgun Gothic"/>
-              </a:rPr>
-              <a:t>장학공지</a:t>
-            </a:r>
-          </a:p>
-        </p:txBody>
-      </p:sp>
-      <p:sp>
-        <p:nvSpPr>
-          <p:cNvPr id="8" name="Rounded Rectangle 7"/>
-          <p:cNvSpPr/>
-          <p:nvPr/>
-        </p:nvSpPr>
-        <p:spPr>
-          <a:xfrm>
-            <a:off x="3749039" y="2514600"/>
-            <a:ext cx="1335024" cy="384048"/>
-          </a:xfrm>
-          <a:prstGeom prst="roundRect">
-            <a:avLst>
-              <a:gd name="adj" fmla="val 50000"/>
-            </a:avLst>
-          </a:prstGeom>
-          <a:solidFill>
-            <a:srgbClr val="EEF4FB"/>
-          </a:solidFill>
-          <a:ln>
-            <a:noFill/>
-          </a:ln>
-          <a:effectLst/>
-        </p:spPr>
-        <p:style>
-          <a:lnRef idx="1">
-            <a:schemeClr val="accent1"/>
-          </a:lnRef>
-          <a:fillRef idx="3">
-            <a:schemeClr val="accent1"/>
-          </a:fillRef>
-          <a:effectRef idx="2">
-            <a:schemeClr val="accent1"/>
-          </a:effectRef>
-          <a:fontRef idx="minor">
-            <a:schemeClr val="lt1"/>
-          </a:fontRef>
-        </p:style>
-        <p:txBody>
-          <a:bodyPr rtlCol="0" anchor="ctr"/>
-          <a:lstStyle/>
-          <a:p>
-            <a:pPr algn="ctr"/>
-          </a:p>
-        </p:txBody>
-      </p:sp>
-      <p:sp>
-        <p:nvSpPr>
-          <p:cNvPr id="9" name="TextBox 8"/>
-          <p:cNvSpPr txBox="1"/>
-          <p:nvPr/>
-        </p:nvSpPr>
-        <p:spPr>
-          <a:xfrm>
-            <a:off x="3749039" y="2514600"/>
-            <a:ext cx="1335024" cy="384048"/>
-          </a:xfrm>
-          <a:prstGeom prst="rect">
-            <a:avLst/>
-          </a:prstGeom>
-          <a:noFill/>
-        </p:spPr>
-        <p:txBody>
-          <a:bodyPr wrap="square" lIns="0" rIns="0" tIns="0" bIns="0" anchor="ctr">
-            <a:spAutoFit/>
-          </a:bodyPr>
-          <a:lstStyle/>
-          <a:p>
-            <a:pPr algn="ctr"/>
-            <a:r>
-              <a:rPr sz="1200" b="1">
-                <a:solidFill>
-                  <a:srgbClr val="0058B2"/>
-                </a:solidFill>
-                <a:latin typeface="Malgun Gothic"/>
-                <a:ea typeface="Malgun Gothic"/>
-                <a:cs typeface="Malgun Gothic"/>
-              </a:rPr>
-              <a:t>취업지원센터</a:t>
-            </a:r>
-          </a:p>
-        </p:txBody>
-      </p:sp>
-      <p:sp>
-        <p:nvSpPr>
-          <p:cNvPr id="10" name="Rounded Rectangle 9"/>
-          <p:cNvSpPr/>
-          <p:nvPr/>
-        </p:nvSpPr>
-        <p:spPr>
-          <a:xfrm>
-            <a:off x="1005840" y="2560320"/>
-            <a:ext cx="1335024" cy="384048"/>
-          </a:xfrm>
-          <a:prstGeom prst="roundRect">
-            <a:avLst>
-              <a:gd name="adj" fmla="val 50000"/>
-            </a:avLst>
-          </a:prstGeom>
-          <a:solidFill>
-            <a:srgbClr val="EEF4FB"/>
-          </a:solidFill>
-          <a:ln>
-            <a:noFill/>
-          </a:ln>
-          <a:effectLst/>
-        </p:spPr>
-        <p:style>
-          <a:lnRef idx="1">
-            <a:schemeClr val="accent1"/>
-          </a:lnRef>
-          <a:fillRef idx="3">
-            <a:schemeClr val="accent1"/>
-          </a:fillRef>
-          <a:effectRef idx="2">
-            <a:schemeClr val="accent1"/>
-          </a:effectRef>
-          <a:fontRef idx="minor">
-            <a:schemeClr val="lt1"/>
-          </a:fontRef>
-        </p:style>
-        <p:txBody>
-          <a:bodyPr rtlCol="0" anchor="ctr"/>
-          <a:lstStyle/>
-          <a:p>
-            <a:pPr algn="ctr"/>
-          </a:p>
-        </p:txBody>
-      </p:sp>
-      <p:sp>
-        <p:nvSpPr>
-          <p:cNvPr id="11" name="TextBox 10"/>
-          <p:cNvSpPr txBox="1"/>
-          <p:nvPr/>
-        </p:nvSpPr>
-        <p:spPr>
-          <a:xfrm>
-            <a:off x="1005840" y="2560320"/>
-            <a:ext cx="1335024" cy="384048"/>
-          </a:xfrm>
-          <a:prstGeom prst="rect">
-            <a:avLst/>
-          </a:prstGeom>
-          <a:noFill/>
-        </p:spPr>
-        <p:txBody>
-          <a:bodyPr wrap="square" lIns="0" rIns="0" tIns="0" bIns="0" anchor="ctr">
-            <a:spAutoFit/>
-          </a:bodyPr>
-          <a:lstStyle/>
-          <a:p>
-            <a:pPr algn="ctr"/>
-            <a:r>
-              <a:rPr sz="1200" b="1">
-                <a:solidFill>
-                  <a:srgbClr val="0058B2"/>
-                </a:solidFill>
-                <a:latin typeface="Malgun Gothic"/>
-                <a:ea typeface="Malgun Gothic"/>
-                <a:cs typeface="Malgun Gothic"/>
-              </a:rPr>
-              <a:t>컴퓨터공학과</a:t>
-            </a:r>
-          </a:p>
-        </p:txBody>
-      </p:sp>
-      <p:sp>
-        <p:nvSpPr>
-          <p:cNvPr id="12" name="Rounded Rectangle 11"/>
-          <p:cNvSpPr/>
-          <p:nvPr/>
-        </p:nvSpPr>
-        <p:spPr>
-          <a:xfrm>
-            <a:off x="2606040" y="3200400"/>
-            <a:ext cx="987552" cy="384048"/>
-          </a:xfrm>
-          <a:prstGeom prst="roundRect">
-            <a:avLst>
-              <a:gd name="adj" fmla="val 50000"/>
-            </a:avLst>
-          </a:prstGeom>
-          <a:solidFill>
-            <a:srgbClr val="EEF4FB"/>
-          </a:solidFill>
-          <a:ln>
-            <a:noFill/>
-          </a:ln>
-          <a:effectLst/>
-        </p:spPr>
-        <p:style>
-          <a:lnRef idx="1">
-            <a:schemeClr val="accent1"/>
-          </a:lnRef>
-          <a:fillRef idx="3">
-            <a:schemeClr val="accent1"/>
-          </a:fillRef>
-          <a:effectRef idx="2">
-            <a:schemeClr val="accent1"/>
-          </a:effectRef>
-          <a:fontRef idx="minor">
-            <a:schemeClr val="lt1"/>
-          </a:fontRef>
-        </p:style>
-        <p:txBody>
-          <a:bodyPr rtlCol="0" anchor="ctr"/>
-          <a:lstStyle/>
-          <a:p>
-            <a:pPr algn="ctr"/>
-          </a:p>
-        </p:txBody>
-      </p:sp>
-      <p:sp>
-        <p:nvSpPr>
-          <p:cNvPr id="13" name="TextBox 12"/>
-          <p:cNvSpPr txBox="1"/>
-          <p:nvPr/>
-        </p:nvSpPr>
-        <p:spPr>
-          <a:xfrm>
-            <a:off x="2606040" y="3200400"/>
-            <a:ext cx="987552" cy="384048"/>
-          </a:xfrm>
-          <a:prstGeom prst="rect">
-            <a:avLst/>
-          </a:prstGeom>
-          <a:noFill/>
-        </p:spPr>
-        <p:txBody>
-          <a:bodyPr wrap="square" lIns="0" rIns="0" tIns="0" bIns="0" anchor="ctr">
-            <a:spAutoFit/>
-          </a:bodyPr>
-          <a:lstStyle/>
-          <a:p>
-            <a:pPr algn="ctr"/>
-            <a:r>
-              <a:rPr sz="1200" b="1">
-                <a:solidFill>
-                  <a:srgbClr val="0058B2"/>
-                </a:solidFill>
-                <a:latin typeface="Malgun Gothic"/>
-                <a:ea typeface="Malgun Gothic"/>
-                <a:cs typeface="Malgun Gothic"/>
-              </a:rPr>
-              <a:t>간호학과</a:t>
-            </a:r>
-          </a:p>
-        </p:txBody>
-      </p:sp>
-      <p:sp>
-        <p:nvSpPr>
-          <p:cNvPr id="14" name="Rounded Rectangle 13"/>
-          <p:cNvSpPr/>
-          <p:nvPr/>
-        </p:nvSpPr>
-        <p:spPr>
-          <a:xfrm>
-            <a:off x="822960" y="3429000"/>
-            <a:ext cx="1161288" cy="384048"/>
-          </a:xfrm>
-          <a:prstGeom prst="roundRect">
-            <a:avLst>
-              <a:gd name="adj" fmla="val 50000"/>
-            </a:avLst>
-          </a:prstGeom>
-          <a:solidFill>
-            <a:srgbClr val="EEF4FB"/>
-          </a:solidFill>
-          <a:ln>
-            <a:noFill/>
-          </a:ln>
-          <a:effectLst/>
-        </p:spPr>
-        <p:style>
-          <a:lnRef idx="1">
-            <a:schemeClr val="accent1"/>
-          </a:lnRef>
-          <a:fillRef idx="3">
-            <a:schemeClr val="accent1"/>
-          </a:fillRef>
-          <a:effectRef idx="2">
-            <a:schemeClr val="accent1"/>
-          </a:effectRef>
-          <a:fontRef idx="minor">
-            <a:schemeClr val="lt1"/>
-          </a:fontRef>
-        </p:style>
-        <p:txBody>
-          <a:bodyPr rtlCol="0" anchor="ctr"/>
-          <a:lstStyle/>
-          <a:p>
-            <a:pPr algn="ctr"/>
-          </a:p>
-        </p:txBody>
-      </p:sp>
-      <p:sp>
-        <p:nvSpPr>
-          <p:cNvPr id="15" name="TextBox 14"/>
-          <p:cNvSpPr txBox="1"/>
-          <p:nvPr/>
-        </p:nvSpPr>
-        <p:spPr>
-          <a:xfrm>
-            <a:off x="822960" y="3429000"/>
-            <a:ext cx="1161288" cy="384048"/>
-          </a:xfrm>
-          <a:prstGeom prst="rect">
-            <a:avLst/>
-          </a:prstGeom>
-          <a:noFill/>
-        </p:spPr>
-        <p:txBody>
-          <a:bodyPr wrap="square" lIns="0" rIns="0" tIns="0" bIns="0" anchor="ctr">
-            <a:spAutoFit/>
-          </a:bodyPr>
-          <a:lstStyle/>
-          <a:p>
-            <a:pPr algn="ctr"/>
-            <a:r>
-              <a:rPr sz="1200" b="1">
-                <a:solidFill>
-                  <a:srgbClr val="0058B2"/>
-                </a:solidFill>
-                <a:latin typeface="Malgun Gothic"/>
-                <a:ea typeface="Malgun Gothic"/>
-                <a:cs typeface="Malgun Gothic"/>
-              </a:rPr>
-              <a:t>식품공학과</a:t>
-            </a:r>
-          </a:p>
-        </p:txBody>
-      </p:sp>
-      <p:sp>
-        <p:nvSpPr>
-          <p:cNvPr id="16" name="Rounded Rectangle 15"/>
-          <p:cNvSpPr/>
-          <p:nvPr/>
-        </p:nvSpPr>
-        <p:spPr>
-          <a:xfrm>
-            <a:off x="3246120" y="3886200"/>
-            <a:ext cx="1682496" cy="384048"/>
-          </a:xfrm>
-          <a:prstGeom prst="roundRect">
-            <a:avLst>
-              <a:gd name="adj" fmla="val 50000"/>
-            </a:avLst>
-          </a:prstGeom>
-          <a:solidFill>
-            <a:srgbClr val="EEF4FB"/>
-          </a:solidFill>
-          <a:ln>
-            <a:noFill/>
-          </a:ln>
-          <a:effectLst/>
-        </p:spPr>
-        <p:style>
-          <a:lnRef idx="1">
-            <a:schemeClr val="accent1"/>
-          </a:lnRef>
-          <a:fillRef idx="3">
-            <a:schemeClr val="accent1"/>
-          </a:fillRef>
-          <a:effectRef idx="2">
-            <a:schemeClr val="accent1"/>
-          </a:effectRef>
-          <a:fontRef idx="minor">
-            <a:schemeClr val="lt1"/>
-          </a:fontRef>
-        </p:style>
-        <p:txBody>
-          <a:bodyPr rtlCol="0" anchor="ctr"/>
-          <a:lstStyle/>
-          <a:p>
-            <a:pPr algn="ctr"/>
-          </a:p>
-        </p:txBody>
-      </p:sp>
-      <p:sp>
-        <p:nvSpPr>
-          <p:cNvPr id="17" name="TextBox 16"/>
-          <p:cNvSpPr txBox="1"/>
-          <p:nvPr/>
-        </p:nvSpPr>
-        <p:spPr>
-          <a:xfrm>
-            <a:off x="3246120" y="3886200"/>
-            <a:ext cx="1682496" cy="384048"/>
-          </a:xfrm>
-          <a:prstGeom prst="rect">
-            <a:avLst/>
-          </a:prstGeom>
-          <a:noFill/>
-        </p:spPr>
-        <p:txBody>
-          <a:bodyPr wrap="square" lIns="0" rIns="0" tIns="0" bIns="0" anchor="ctr">
-            <a:spAutoFit/>
-          </a:bodyPr>
-          <a:lstStyle/>
-          <a:p>
-            <a:pPr algn="ctr"/>
-            <a:r>
-              <a:rPr sz="1200" b="1">
-                <a:solidFill>
-                  <a:srgbClr val="0058B2"/>
-                </a:solidFill>
-                <a:latin typeface="Malgun Gothic"/>
-                <a:ea typeface="Malgun Gothic"/>
-                <a:cs typeface="Malgun Gothic"/>
-              </a:rPr>
-              <a:t>큐넷 시험 일정</a:t>
-            </a:r>
-          </a:p>
-        </p:txBody>
-      </p:sp>
-      <p:sp>
-        <p:nvSpPr>
-          <p:cNvPr id="18" name="Rounded Rectangle 17"/>
-          <p:cNvSpPr/>
-          <p:nvPr/>
-        </p:nvSpPr>
-        <p:spPr>
-          <a:xfrm>
-            <a:off x="960120" y="4297680"/>
-            <a:ext cx="1682496" cy="384048"/>
-          </a:xfrm>
-          <a:prstGeom prst="roundRect">
-            <a:avLst>
-              <a:gd name="adj" fmla="val 50000"/>
-            </a:avLst>
-          </a:prstGeom>
-          <a:solidFill>
-            <a:srgbClr val="EEF4FB"/>
-          </a:solidFill>
-          <a:ln>
-            <a:noFill/>
-          </a:ln>
-          <a:effectLst/>
-        </p:spPr>
-        <p:style>
-          <a:lnRef idx="1">
-            <a:schemeClr val="accent1"/>
-          </a:lnRef>
-          <a:fillRef idx="3">
-            <a:schemeClr val="accent1"/>
-          </a:fillRef>
-          <a:effectRef idx="2">
-            <a:schemeClr val="accent1"/>
-          </a:effectRef>
-          <a:fontRef idx="minor">
-            <a:schemeClr val="lt1"/>
-          </a:fontRef>
-        </p:style>
-        <p:txBody>
-          <a:bodyPr rtlCol="0" anchor="ctr"/>
-          <a:lstStyle/>
-          <a:p>
-            <a:pPr algn="ctr"/>
-          </a:p>
-        </p:txBody>
-      </p:sp>
-      <p:sp>
-        <p:nvSpPr>
-          <p:cNvPr id="19" name="TextBox 18"/>
-          <p:cNvSpPr txBox="1"/>
-          <p:nvPr/>
-        </p:nvSpPr>
-        <p:spPr>
-          <a:xfrm>
-            <a:off x="960120" y="4297680"/>
-            <a:ext cx="1682496" cy="384048"/>
-          </a:xfrm>
-          <a:prstGeom prst="rect">
-            <a:avLst/>
-          </a:prstGeom>
-          <a:noFill/>
-        </p:spPr>
-        <p:txBody>
-          <a:bodyPr wrap="square" lIns="0" rIns="0" tIns="0" bIns="0" anchor="ctr">
-            <a:spAutoFit/>
-          </a:bodyPr>
-          <a:lstStyle/>
-          <a:p>
-            <a:pPr algn="ctr"/>
-            <a:r>
-              <a:rPr sz="1200" b="1">
-                <a:solidFill>
-                  <a:srgbClr val="0058B2"/>
-                </a:solidFill>
-                <a:latin typeface="Malgun Gothic"/>
-                <a:ea typeface="Malgun Gothic"/>
-                <a:cs typeface="Malgun Gothic"/>
-              </a:rPr>
-              <a:t>창업 지원 사업</a:t>
-            </a:r>
-          </a:p>
-        </p:txBody>
-      </p:sp>
-      <p:sp>
-        <p:nvSpPr>
-          <p:cNvPr id="20" name="Rounded Rectangle 19"/>
-          <p:cNvSpPr/>
-          <p:nvPr/>
-        </p:nvSpPr>
-        <p:spPr>
-          <a:xfrm>
-            <a:off x="2926080" y="4617720"/>
-            <a:ext cx="987552" cy="384048"/>
-          </a:xfrm>
-          <a:prstGeom prst="roundRect">
-            <a:avLst>
-              <a:gd name="adj" fmla="val 50000"/>
-            </a:avLst>
-          </a:prstGeom>
-          <a:solidFill>
-            <a:srgbClr val="EEF4FB"/>
-          </a:solidFill>
-          <a:ln>
-            <a:noFill/>
-          </a:ln>
-          <a:effectLst/>
-        </p:spPr>
-        <p:style>
-          <a:lnRef idx="1">
-            <a:schemeClr val="accent1"/>
-          </a:lnRef>
-          <a:fillRef idx="3">
-            <a:schemeClr val="accent1"/>
-          </a:fillRef>
-          <a:effectRef idx="2">
-            <a:schemeClr val="accent1"/>
-          </a:effectRef>
-          <a:fontRef idx="minor">
-            <a:schemeClr val="lt1"/>
-          </a:fontRef>
-        </p:style>
-        <p:txBody>
-          <a:bodyPr rtlCol="0" anchor="ctr"/>
-          <a:lstStyle/>
-          <a:p>
-            <a:pPr algn="ctr"/>
-          </a:p>
-        </p:txBody>
-      </p:sp>
-      <p:sp>
-        <p:nvSpPr>
-          <p:cNvPr id="21" name="TextBox 20"/>
-          <p:cNvSpPr txBox="1"/>
-          <p:nvPr/>
-        </p:nvSpPr>
-        <p:spPr>
-          <a:xfrm>
-            <a:off x="2926080" y="4617720"/>
-            <a:ext cx="987552" cy="384048"/>
-          </a:xfrm>
-          <a:prstGeom prst="rect">
-            <a:avLst/>
-          </a:prstGeom>
-          <a:noFill/>
-        </p:spPr>
-        <p:txBody>
-          <a:bodyPr wrap="square" lIns="0" rIns="0" tIns="0" bIns="0" anchor="ctr">
-            <a:spAutoFit/>
-          </a:bodyPr>
-          <a:lstStyle/>
-          <a:p>
-            <a:pPr algn="ctr"/>
-            <a:r>
-              <a:rPr sz="1200" b="1">
-                <a:solidFill>
-                  <a:srgbClr val="0058B2"/>
-                </a:solidFill>
-                <a:latin typeface="Malgun Gothic"/>
-                <a:ea typeface="Malgun Gothic"/>
-                <a:cs typeface="Malgun Gothic"/>
-              </a:rPr>
-              <a:t>국제교류</a:t>
-            </a:r>
-          </a:p>
-        </p:txBody>
-      </p:sp>
-      <p:sp>
-        <p:nvSpPr>
-          <p:cNvPr id="22" name="Rounded Rectangle 21"/>
-          <p:cNvSpPr/>
-          <p:nvPr/>
-        </p:nvSpPr>
-        <p:spPr>
-          <a:xfrm>
-            <a:off x="868680" y="5074920"/>
-            <a:ext cx="1508760" cy="384048"/>
-          </a:xfrm>
-          <a:prstGeom prst="roundRect">
-            <a:avLst>
-              <a:gd name="adj" fmla="val 50000"/>
-            </a:avLst>
-          </a:prstGeom>
-          <a:solidFill>
-            <a:srgbClr val="EEF4FB"/>
-          </a:solidFill>
-          <a:ln>
-            <a:noFill/>
-          </a:ln>
-          <a:effectLst/>
-        </p:spPr>
-        <p:style>
-          <a:lnRef idx="1">
-            <a:schemeClr val="accent1"/>
-          </a:lnRef>
-          <a:fillRef idx="3">
-            <a:schemeClr val="accent1"/>
-          </a:fillRef>
-          <a:effectRef idx="2">
-            <a:schemeClr val="accent1"/>
-          </a:effectRef>
-          <a:fontRef idx="minor">
-            <a:schemeClr val="lt1"/>
-          </a:fontRef>
-        </p:style>
-        <p:txBody>
-          <a:bodyPr rtlCol="0" anchor="ctr"/>
-          <a:lstStyle/>
-          <a:p>
-            <a:pPr algn="ctr"/>
-          </a:p>
-        </p:txBody>
-      </p:sp>
-      <p:sp>
-        <p:nvSpPr>
-          <p:cNvPr id="23" name="TextBox 22"/>
-          <p:cNvSpPr txBox="1"/>
-          <p:nvPr/>
-        </p:nvSpPr>
-        <p:spPr>
-          <a:xfrm>
-            <a:off x="868680" y="5074920"/>
-            <a:ext cx="1508760" cy="384048"/>
-          </a:xfrm>
-          <a:prstGeom prst="rect">
-            <a:avLst/>
-          </a:prstGeom>
-          <a:noFill/>
-        </p:spPr>
-        <p:txBody>
-          <a:bodyPr wrap="square" lIns="0" rIns="0" tIns="0" bIns="0" anchor="ctr">
-            <a:spAutoFit/>
-          </a:bodyPr>
-          <a:lstStyle/>
-          <a:p>
-            <a:pPr algn="ctr"/>
-            <a:r>
-              <a:rPr sz="1200" b="1">
-                <a:solidFill>
-                  <a:srgbClr val="0058B2"/>
-                </a:solidFill>
-                <a:latin typeface="Malgun Gothic"/>
-                <a:ea typeface="Malgun Gothic"/>
-                <a:cs typeface="Malgun Gothic"/>
-              </a:rPr>
-              <a:t>데이터자격검정</a:t>
-            </a:r>
-          </a:p>
-        </p:txBody>
-      </p:sp>
-      <p:sp>
-        <p:nvSpPr>
-          <p:cNvPr id="24" name="Rounded Rectangle 23"/>
-          <p:cNvSpPr/>
-          <p:nvPr/>
-        </p:nvSpPr>
-        <p:spPr>
-          <a:xfrm>
-            <a:off x="3566160" y="5074920"/>
-            <a:ext cx="1161288" cy="384048"/>
-          </a:xfrm>
-          <a:prstGeom prst="roundRect">
-            <a:avLst>
-              <a:gd name="adj" fmla="val 50000"/>
-            </a:avLst>
-          </a:prstGeom>
-          <a:solidFill>
-            <a:srgbClr val="EEF4FB"/>
-          </a:solidFill>
-          <a:ln>
-            <a:noFill/>
-          </a:ln>
-          <a:effectLst/>
-        </p:spPr>
-        <p:style>
-          <a:lnRef idx="1">
-            <a:schemeClr val="accent1"/>
-          </a:lnRef>
-          <a:fillRef idx="3">
-            <a:schemeClr val="accent1"/>
-          </a:fillRef>
-          <a:effectRef idx="2">
-            <a:schemeClr val="accent1"/>
-          </a:effectRef>
-          <a:fontRef idx="minor">
-            <a:schemeClr val="lt1"/>
-          </a:fontRef>
-        </p:style>
-        <p:txBody>
-          <a:bodyPr rtlCol="0" anchor="ctr"/>
-          <a:lstStyle/>
-          <a:p>
-            <a:pPr algn="ctr"/>
-          </a:p>
-        </p:txBody>
-      </p:sp>
-      <p:sp>
-        <p:nvSpPr>
-          <p:cNvPr id="25" name="TextBox 24"/>
-          <p:cNvSpPr txBox="1"/>
-          <p:nvPr/>
-        </p:nvSpPr>
-        <p:spPr>
-          <a:xfrm>
-            <a:off x="3566160" y="5074920"/>
-            <a:ext cx="1161288" cy="384048"/>
-          </a:xfrm>
-          <a:prstGeom prst="rect">
-            <a:avLst/>
-          </a:prstGeom>
-          <a:noFill/>
-        </p:spPr>
-        <p:txBody>
-          <a:bodyPr wrap="square" lIns="0" rIns="0" tIns="0" bIns="0" anchor="ctr">
-            <a:spAutoFit/>
-          </a:bodyPr>
-          <a:lstStyle/>
-          <a:p>
-            <a:pPr algn="ctr"/>
-            <a:r>
-              <a:rPr sz="1200" b="1">
-                <a:solidFill>
-                  <a:srgbClr val="0058B2"/>
-                </a:solidFill>
-                <a:latin typeface="Malgun Gothic"/>
-                <a:ea typeface="Malgun Gothic"/>
-                <a:cs typeface="Malgun Gothic"/>
-              </a:rPr>
-              <a:t>학생생활관</a:t>
-            </a:r>
-          </a:p>
-        </p:txBody>
-      </p:sp>
-      <p:sp>
-        <p:nvSpPr>
-          <p:cNvPr id="26" name="TextBox 25"/>
-          <p:cNvSpPr txBox="1"/>
-          <p:nvPr/>
-        </p:nvSpPr>
-        <p:spPr>
-          <a:xfrm>
-            <a:off x="594360" y="5806440"/>
-            <a:ext cx="5120640" cy="365760"/>
-          </a:xfrm>
-          <a:prstGeom prst="rect">
-            <a:avLst/>
-          </a:prstGeom>
-          <a:noFill/>
-        </p:spPr>
-        <p:txBody>
-          <a:bodyPr wrap="square" lIns="0" rIns="0" tIns="0" bIns="0" anchor="t">
-            <a:spAutoFit/>
-          </a:bodyPr>
-          <a:lstStyle/>
-          <a:p>
-            <a:pPr algn="ctr"/>
-            <a:r>
-              <a:rPr sz="1500" b="1">
-                <a:solidFill>
-                  <a:srgbClr val="0058B2"/>
-                </a:solidFill>
-                <a:latin typeface="Malgun Gothic"/>
-                <a:ea typeface="Malgun Gothic"/>
-                <a:cs typeface="Malgun Gothic"/>
-              </a:rPr>
-              <a:t>109곳</a:t>
-            </a:r>
-            <a:r>
-              <a:rPr sz="1500" b="0">
-                <a:solidFill>
-                  <a:srgbClr val="1F232B"/>
-                </a:solidFill>
-                <a:latin typeface="Malgun Gothic"/>
-                <a:ea typeface="Malgun Gothic"/>
-                <a:cs typeface="Malgun Gothic"/>
-              </a:rPr>
-              <a:t> 학교 게시판  +  공모전·자격증 사이트</a:t>
-            </a:r>
-          </a:p>
-        </p:txBody>
-      </p:sp>
-      <p:sp>
-        <p:nvSpPr>
-          <p:cNvPr id="27" name="Rounded Rectangle 26"/>
-          <p:cNvSpPr/>
-          <p:nvPr/>
-        </p:nvSpPr>
-        <p:spPr>
-          <a:xfrm>
-            <a:off x="6172200" y="1463040"/>
-            <a:ext cx="5440680" cy="1234440"/>
-          </a:xfrm>
-          <a:prstGeom prst="roundRect">
-            <a:avLst>
-              <a:gd name="adj" fmla="val 8000"/>
+              <a:gd name="adj" fmla="val 7000"/>
             </a:avLst>
           </a:prstGeom>
           <a:solidFill>
@@ -5327,95 +4525,14 @@
       </p:sp>
       <p:sp>
         <p:nvSpPr>
-          <p:cNvPr id="28" name="Oval 27"/>
-          <p:cNvSpPr/>
-          <p:nvPr/>
-        </p:nvSpPr>
-        <p:spPr>
-          <a:xfrm>
-            <a:off x="6446520" y="1828800"/>
-            <a:ext cx="502920" cy="502920"/>
-          </a:xfrm>
-          <a:prstGeom prst="ellipse">
-            <a:avLst/>
-          </a:prstGeom>
-          <a:solidFill>
-            <a:srgbClr val="0058B2"/>
-          </a:solidFill>
-          <a:ln>
-            <a:noFill/>
-          </a:ln>
-          <a:effectLst/>
-        </p:spPr>
-        <p:style>
-          <a:lnRef idx="1">
-            <a:schemeClr val="accent1"/>
-          </a:lnRef>
-          <a:fillRef idx="3">
-            <a:schemeClr val="accent1"/>
-          </a:fillRef>
-          <a:effectRef idx="2">
-            <a:schemeClr val="accent1"/>
-          </a:effectRef>
-          <a:fontRef idx="minor">
-            <a:schemeClr val="lt1"/>
-          </a:fontRef>
-        </p:style>
-        <p:txBody>
-          <a:bodyPr rtlCol="0" anchor="ctr"/>
-          <a:lstStyle/>
-          <a:p>
-            <a:pPr algn="ctr"/>
-          </a:p>
-        </p:txBody>
-      </p:sp>
-      <p:sp>
-        <p:nvSpPr>
-          <p:cNvPr id="29" name="TextBox 28"/>
+          <p:cNvPr id="8" name="TextBox 7"/>
           <p:cNvSpPr txBox="1"/>
           <p:nvPr/>
         </p:nvSpPr>
         <p:spPr>
           <a:xfrm>
-            <a:off x="6446520" y="1828800"/>
-            <a:ext cx="502920" cy="502920"/>
-          </a:xfrm>
-          <a:prstGeom prst="rect">
-            <a:avLst/>
-          </a:prstGeom>
-          <a:noFill/>
-        </p:spPr>
-        <p:txBody>
-          <a:bodyPr wrap="square" lIns="0" rIns="0" tIns="0" bIns="0" anchor="ctr">
-            <a:spAutoFit/>
-          </a:bodyPr>
-          <a:lstStyle/>
-          <a:p>
-            <a:pPr algn="ctr"/>
-            <a:r>
-              <a:rPr sz="1500" b="1">
-                <a:solidFill>
-                  <a:srgbClr val="FFFFFF"/>
-                </a:solidFill>
-                <a:latin typeface="Malgun Gothic"/>
-                <a:ea typeface="Malgun Gothic"/>
-                <a:cs typeface="Malgun Gothic"/>
-              </a:rPr>
-              <a:t>1</a:t>
-            </a:r>
-          </a:p>
-        </p:txBody>
-      </p:sp>
-      <p:sp>
-        <p:nvSpPr>
-          <p:cNvPr id="30" name="TextBox 29"/>
-          <p:cNvSpPr txBox="1"/>
-          <p:nvPr/>
-        </p:nvSpPr>
-        <p:spPr>
-          <a:xfrm>
-            <a:off x="7178040" y="1691640"/>
-            <a:ext cx="4297680" cy="411480"/>
+            <a:off x="3611879" y="1645920"/>
+            <a:ext cx="2194560" cy="640080"/>
           </a:xfrm>
           <a:prstGeom prst="rect">
             <a:avLst/>
@@ -5430,29 +4547,29 @@
           <a:p>
             <a:pPr algn="l"/>
             <a:r>
-              <a:rPr sz="1900" b="1">
-                <a:solidFill>
-                  <a:srgbClr val="1F232B"/>
-                </a:solidFill>
-                <a:latin typeface="Malgun Gothic"/>
-                <a:ea typeface="Malgun Gothic"/>
-                <a:cs typeface="Malgun Gothic"/>
-              </a:rPr>
-              <a:t>어디서 봐야 할지 모름</a:t>
-            </a:r>
-          </a:p>
-        </p:txBody>
-      </p:sp>
-      <p:sp>
-        <p:nvSpPr>
-          <p:cNvPr id="31" name="TextBox 30"/>
+              <a:rPr sz="3000" b="1">
+                <a:solidFill>
+                  <a:srgbClr val="0058B2"/>
+                </a:solidFill>
+                <a:latin typeface="Malgun Gothic"/>
+                <a:ea typeface="Malgun Gothic"/>
+                <a:cs typeface="Malgun Gothic"/>
+              </a:rPr>
+              <a:t>+4곳</a:t>
+            </a:r>
+          </a:p>
+        </p:txBody>
+      </p:sp>
+      <p:sp>
+        <p:nvSpPr>
+          <p:cNvPr id="9" name="TextBox 8"/>
           <p:cNvSpPr txBox="1"/>
           <p:nvPr/>
         </p:nvSpPr>
         <p:spPr>
           <a:xfrm>
-            <a:off x="7178040" y="2121408"/>
-            <a:ext cx="4297680" cy="548640"/>
+            <a:off x="3611879" y="2331720"/>
+            <a:ext cx="2194560" cy="365760"/>
           </a:xfrm>
           <a:prstGeom prst="rect">
             <a:avLst/>
@@ -5467,7 +4584,44 @@
           <a:p>
             <a:pPr algn="l"/>
             <a:r>
-              <a:rPr sz="1300" b="0">
+              <a:rPr sz="1400" b="1">
+                <a:solidFill>
+                  <a:srgbClr val="1F232B"/>
+                </a:solidFill>
+                <a:latin typeface="Malgun Gothic"/>
+                <a:ea typeface="Malgun Gothic"/>
+                <a:cs typeface="Malgun Gothic"/>
+              </a:rPr>
+              <a:t>교외 사이트</a:t>
+            </a:r>
+          </a:p>
+        </p:txBody>
+      </p:sp>
+      <p:sp>
+        <p:nvSpPr>
+          <p:cNvPr id="10" name="TextBox 9"/>
+          <p:cNvSpPr txBox="1"/>
+          <p:nvPr/>
+        </p:nvSpPr>
+        <p:spPr>
+          <a:xfrm>
+            <a:off x="3611879" y="2697480"/>
+            <a:ext cx="2240280" cy="640080"/>
+          </a:xfrm>
+          <a:prstGeom prst="rect">
+            <a:avLst/>
+          </a:prstGeom>
+          <a:noFill/>
+        </p:spPr>
+        <p:txBody>
+          <a:bodyPr wrap="square" lIns="0" rIns="0" tIns="0" bIns="0" anchor="t">
+            <a:spAutoFit/>
+          </a:bodyPr>
+          <a:lstStyle/>
+          <a:p>
+            <a:pPr algn="l"/>
+            <a:r>
+              <a:rPr sz="1050" b="0">
                 <a:solidFill>
                   <a:srgbClr val="666E7A"/>
                 </a:solidFill>
@@ -5475,25 +4629,25 @@
                 <a:ea typeface="Malgun Gothic"/>
                 <a:cs typeface="Malgun Gothic"/>
               </a:rPr>
-              <a:t>본부·학과·기관 게시판을 하나씩 들어가 봐야 함</a:t>
-            </a:r>
-          </a:p>
-        </p:txBody>
-      </p:sp>
-      <p:sp>
-        <p:nvSpPr>
-          <p:cNvPr id="32" name="Rounded Rectangle 31"/>
+              <a:t>큐넷 · 데이터자격검정 · K-Startup · 한국장학재단</a:t>
+            </a:r>
+          </a:p>
+        </p:txBody>
+      </p:sp>
+      <p:sp>
+        <p:nvSpPr>
+          <p:cNvPr id="11" name="Rounded Rectangle 10"/>
           <p:cNvSpPr/>
           <p:nvPr/>
         </p:nvSpPr>
         <p:spPr>
           <a:xfrm>
-            <a:off x="6172200" y="2926080"/>
-            <a:ext cx="5440680" cy="1234440"/>
+            <a:off x="594360" y="3611880"/>
+            <a:ext cx="2606040" cy="1920240"/>
           </a:xfrm>
           <a:prstGeom prst="roundRect">
             <a:avLst>
-              <a:gd name="adj" fmla="val 8000"/>
+              <a:gd name="adj" fmla="val 7000"/>
             </a:avLst>
           </a:prstGeom>
           <a:solidFill>
@@ -5530,14 +4684,332 @@
       </p:sp>
       <p:sp>
         <p:nvSpPr>
-          <p:cNvPr id="33" name="Oval 32"/>
+          <p:cNvPr id="12" name="TextBox 11"/>
+          <p:cNvSpPr txBox="1"/>
+          <p:nvPr/>
+        </p:nvSpPr>
+        <p:spPr>
+          <a:xfrm>
+            <a:off x="822960" y="3794760"/>
+            <a:ext cx="2194560" cy="640080"/>
+          </a:xfrm>
+          <a:prstGeom prst="rect">
+            <a:avLst/>
+          </a:prstGeom>
+          <a:noFill/>
+        </p:spPr>
+        <p:txBody>
+          <a:bodyPr wrap="square" lIns="0" rIns="0" tIns="0" bIns="0" anchor="t">
+            <a:spAutoFit/>
+          </a:bodyPr>
+          <a:lstStyle/>
+          <a:p>
+            <a:pPr algn="l"/>
+            <a:r>
+              <a:rPr sz="3000" b="1">
+                <a:solidFill>
+                  <a:srgbClr val="0058B2"/>
+                </a:solidFill>
+                <a:latin typeface="Malgun Gothic"/>
+                <a:ea typeface="Malgun Gothic"/>
+                <a:cs typeface="Malgun Gothic"/>
+              </a:rPr>
+              <a:t>55%</a:t>
+            </a:r>
+          </a:p>
+        </p:txBody>
+      </p:sp>
+      <p:sp>
+        <p:nvSpPr>
+          <p:cNvPr id="13" name="TextBox 12"/>
+          <p:cNvSpPr txBox="1"/>
+          <p:nvPr/>
+        </p:nvSpPr>
+        <p:spPr>
+          <a:xfrm>
+            <a:off x="822960" y="4480560"/>
+            <a:ext cx="2194560" cy="365760"/>
+          </a:xfrm>
+          <a:prstGeom prst="rect">
+            <a:avLst/>
+          </a:prstGeom>
+          <a:noFill/>
+        </p:spPr>
+        <p:txBody>
+          <a:bodyPr wrap="square" lIns="0" rIns="0" tIns="0" bIns="0" anchor="t">
+            <a:spAutoFit/>
+          </a:bodyPr>
+          <a:lstStyle/>
+          <a:p>
+            <a:pPr algn="l"/>
+            <a:r>
+              <a:rPr sz="1400" b="1">
+                <a:solidFill>
+                  <a:srgbClr val="1F232B"/>
+                </a:solidFill>
+                <a:latin typeface="Malgun Gothic"/>
+                <a:ea typeface="Malgun Gothic"/>
+                <a:cs typeface="Malgun Gothic"/>
+              </a:rPr>
+              <a:t>첨부파일 속 정보</a:t>
+            </a:r>
+          </a:p>
+        </p:txBody>
+      </p:sp>
+      <p:sp>
+        <p:nvSpPr>
+          <p:cNvPr id="14" name="TextBox 13"/>
+          <p:cNvSpPr txBox="1"/>
+          <p:nvPr/>
+        </p:nvSpPr>
+        <p:spPr>
+          <a:xfrm>
+            <a:off x="822960" y="4846320"/>
+            <a:ext cx="2240280" cy="640080"/>
+          </a:xfrm>
+          <a:prstGeom prst="rect">
+            <a:avLst/>
+          </a:prstGeom>
+          <a:noFill/>
+        </p:spPr>
+        <p:txBody>
+          <a:bodyPr wrap="square" lIns="0" rIns="0" tIns="0" bIns="0" anchor="t">
+            <a:spAutoFit/>
+          </a:bodyPr>
+          <a:lstStyle/>
+          <a:p>
+            <a:pPr algn="l"/>
+            <a:r>
+              <a:rPr sz="1050" b="0">
+                <a:solidFill>
+                  <a:srgbClr val="666E7A"/>
+                </a:solidFill>
+                <a:latin typeface="Malgun Gothic"/>
+                <a:ea typeface="Malgun Gothic"/>
+                <a:cs typeface="Malgun Gothic"/>
+              </a:rPr>
+              <a:t>수집한 공지 159건 중 87건은 신청 기간·대상이 HWP·PDF 안에</a:t>
+            </a:r>
+          </a:p>
+        </p:txBody>
+      </p:sp>
+      <p:sp>
+        <p:nvSpPr>
+          <p:cNvPr id="15" name="Rounded Rectangle 14"/>
           <p:cNvSpPr/>
           <p:nvPr/>
         </p:nvSpPr>
         <p:spPr>
           <a:xfrm>
-            <a:off x="6446520" y="3291840"/>
-            <a:ext cx="502920" cy="502920"/>
+            <a:off x="3383279" y="3611880"/>
+            <a:ext cx="2606040" cy="1920240"/>
+          </a:xfrm>
+          <a:prstGeom prst="roundRect">
+            <a:avLst>
+              <a:gd name="adj" fmla="val 7000"/>
+            </a:avLst>
+          </a:prstGeom>
+          <a:solidFill>
+            <a:srgbClr val="FFFFFF"/>
+          </a:solidFill>
+          <a:ln w="12700">
+            <a:solidFill>
+              <a:srgbClr val="DDE3EA"/>
+            </a:solidFill>
+          </a:ln>
+          <a:effectLst/>
+        </p:spPr>
+        <p:style>
+          <a:lnRef idx="1">
+            <a:schemeClr val="accent1"/>
+          </a:lnRef>
+          <a:fillRef idx="3">
+            <a:schemeClr val="accent1"/>
+          </a:fillRef>
+          <a:effectRef idx="2">
+            <a:schemeClr val="accent1"/>
+          </a:effectRef>
+          <a:fontRef idx="minor">
+            <a:schemeClr val="lt1"/>
+          </a:fontRef>
+        </p:style>
+        <p:txBody>
+          <a:bodyPr rtlCol="0" anchor="ctr"/>
+          <a:lstStyle/>
+          <a:p>
+            <a:pPr algn="ctr"/>
+          </a:p>
+        </p:txBody>
+      </p:sp>
+      <p:sp>
+        <p:nvSpPr>
+          <p:cNvPr id="16" name="TextBox 15"/>
+          <p:cNvSpPr txBox="1"/>
+          <p:nvPr/>
+        </p:nvSpPr>
+        <p:spPr>
+          <a:xfrm>
+            <a:off x="3611879" y="3794760"/>
+            <a:ext cx="2194560" cy="640080"/>
+          </a:xfrm>
+          <a:prstGeom prst="rect">
+            <a:avLst/>
+          </a:prstGeom>
+          <a:noFill/>
+        </p:spPr>
+        <p:txBody>
+          <a:bodyPr wrap="square" lIns="0" rIns="0" tIns="0" bIns="0" anchor="t">
+            <a:spAutoFit/>
+          </a:bodyPr>
+          <a:lstStyle/>
+          <a:p>
+            <a:pPr algn="l"/>
+            <a:r>
+              <a:rPr sz="3000" b="1">
+                <a:solidFill>
+                  <a:srgbClr val="0058B2"/>
+                </a:solidFill>
+                <a:latin typeface="Malgun Gothic"/>
+                <a:ea typeface="Malgun Gothic"/>
+                <a:cs typeface="Malgun Gothic"/>
+              </a:rPr>
+              <a:t>18건</a:t>
+            </a:r>
+          </a:p>
+        </p:txBody>
+      </p:sp>
+      <p:sp>
+        <p:nvSpPr>
+          <p:cNvPr id="17" name="TextBox 16"/>
+          <p:cNvSpPr txBox="1"/>
+          <p:nvPr/>
+        </p:nvSpPr>
+        <p:spPr>
+          <a:xfrm>
+            <a:off x="3611879" y="4480560"/>
+            <a:ext cx="2194560" cy="365760"/>
+          </a:xfrm>
+          <a:prstGeom prst="rect">
+            <a:avLst/>
+          </a:prstGeom>
+          <a:noFill/>
+        </p:spPr>
+        <p:txBody>
+          <a:bodyPr wrap="square" lIns="0" rIns="0" tIns="0" bIns="0" anchor="t">
+            <a:spAutoFit/>
+          </a:bodyPr>
+          <a:lstStyle/>
+          <a:p>
+            <a:pPr algn="l"/>
+            <a:r>
+              <a:rPr sz="1400" b="1">
+                <a:solidFill>
+                  <a:srgbClr val="1F232B"/>
+                </a:solidFill>
+                <a:latin typeface="Malgun Gothic"/>
+                <a:ea typeface="Malgun Gothic"/>
+                <a:cs typeface="Malgun Gothic"/>
+              </a:rPr>
+              <a:t>중복 게시</a:t>
+            </a:r>
+          </a:p>
+        </p:txBody>
+      </p:sp>
+      <p:sp>
+        <p:nvSpPr>
+          <p:cNvPr id="18" name="TextBox 17"/>
+          <p:cNvSpPr txBox="1"/>
+          <p:nvPr/>
+        </p:nvSpPr>
+        <p:spPr>
+          <a:xfrm>
+            <a:off x="3611879" y="4846320"/>
+            <a:ext cx="2240280" cy="640080"/>
+          </a:xfrm>
+          <a:prstGeom prst="rect">
+            <a:avLst/>
+          </a:prstGeom>
+          <a:noFill/>
+        </p:spPr>
+        <p:txBody>
+          <a:bodyPr wrap="square" lIns="0" rIns="0" tIns="0" bIns="0" anchor="t">
+            <a:spAutoFit/>
+          </a:bodyPr>
+          <a:lstStyle/>
+          <a:p>
+            <a:pPr algn="l"/>
+            <a:r>
+              <a:rPr sz="1050" b="0">
+                <a:solidFill>
+                  <a:srgbClr val="666E7A"/>
+                </a:solidFill>
+                <a:latin typeface="Malgun Gothic"/>
+                <a:ea typeface="Malgun Gothic"/>
+                <a:cs typeface="Malgun Gothic"/>
+              </a:rPr>
+              <a:t>같은 공지가 여러 게시판에 따로 올라옴</a:t>
+            </a:r>
+          </a:p>
+        </p:txBody>
+      </p:sp>
+      <p:sp>
+        <p:nvSpPr>
+          <p:cNvPr id="19" name="Rounded Rectangle 18"/>
+          <p:cNvSpPr/>
+          <p:nvPr/>
+        </p:nvSpPr>
+        <p:spPr>
+          <a:xfrm>
+            <a:off x="6355080" y="1463040"/>
+            <a:ext cx="5257800" cy="932688"/>
+          </a:xfrm>
+          <a:prstGeom prst="roundRect">
+            <a:avLst>
+              <a:gd name="adj" fmla="val 10000"/>
+            </a:avLst>
+          </a:prstGeom>
+          <a:solidFill>
+            <a:srgbClr val="FFFFFF"/>
+          </a:solidFill>
+          <a:ln w="12700">
+            <a:solidFill>
+              <a:srgbClr val="DDE3EA"/>
+            </a:solidFill>
+          </a:ln>
+          <a:effectLst/>
+        </p:spPr>
+        <p:style>
+          <a:lnRef idx="1">
+            <a:schemeClr val="accent1"/>
+          </a:lnRef>
+          <a:fillRef idx="3">
+            <a:schemeClr val="accent1"/>
+          </a:fillRef>
+          <a:effectRef idx="2">
+            <a:schemeClr val="accent1"/>
+          </a:effectRef>
+          <a:fontRef idx="minor">
+            <a:schemeClr val="lt1"/>
+          </a:fontRef>
+        </p:style>
+        <p:txBody>
+          <a:bodyPr rtlCol="0" anchor="ctr"/>
+          <a:lstStyle/>
+          <a:p>
+            <a:pPr algn="ctr"/>
+          </a:p>
+        </p:txBody>
+      </p:sp>
+      <p:sp>
+        <p:nvSpPr>
+          <p:cNvPr id="20" name="Oval 19"/>
+          <p:cNvSpPr/>
+          <p:nvPr/>
+        </p:nvSpPr>
+        <p:spPr>
+          <a:xfrm>
+            <a:off x="6583680" y="1700784"/>
+            <a:ext cx="457200" cy="457200"/>
           </a:xfrm>
           <a:prstGeom prst="ellipse">
             <a:avLst/>
@@ -5574,14 +5046,14 @@
       </p:sp>
       <p:sp>
         <p:nvSpPr>
-          <p:cNvPr id="34" name="TextBox 33"/>
+          <p:cNvPr id="21" name="TextBox 20"/>
           <p:cNvSpPr txBox="1"/>
           <p:nvPr/>
         </p:nvSpPr>
         <p:spPr>
           <a:xfrm>
-            <a:off x="6446520" y="3291840"/>
-            <a:ext cx="502920" cy="502920"/>
+            <a:off x="6583680" y="1700784"/>
+            <a:ext cx="457200" cy="457200"/>
           </a:xfrm>
           <a:prstGeom prst="rect">
             <a:avLst/>
@@ -5596,7 +5068,7 @@
           <a:p>
             <a:pPr algn="ctr"/>
             <a:r>
-              <a:rPr sz="1500" b="1">
+              <a:rPr sz="1400" b="1">
                 <a:solidFill>
                   <a:srgbClr val="FFFFFF"/>
                 </a:solidFill>
@@ -5604,21 +5076,21 @@
                 <a:ea typeface="Malgun Gothic"/>
                 <a:cs typeface="Malgun Gothic"/>
               </a:rPr>
-              <a:t>2</a:t>
-            </a:r>
-          </a:p>
-        </p:txBody>
-      </p:sp>
-      <p:sp>
-        <p:nvSpPr>
-          <p:cNvPr id="35" name="TextBox 34"/>
+              <a:t>1</a:t>
+            </a:r>
+          </a:p>
+        </p:txBody>
+      </p:sp>
+      <p:sp>
+        <p:nvSpPr>
+          <p:cNvPr id="22" name="TextBox 21"/>
           <p:cNvSpPr txBox="1"/>
           <p:nvPr/>
         </p:nvSpPr>
         <p:spPr>
           <a:xfrm>
-            <a:off x="7178040" y="3154680"/>
-            <a:ext cx="4297680" cy="411480"/>
+            <a:off x="7223760" y="1591056"/>
+            <a:ext cx="4297680" cy="365760"/>
           </a:xfrm>
           <a:prstGeom prst="rect">
             <a:avLst/>
@@ -5633,7 +5105,7 @@
           <a:p>
             <a:pPr algn="l"/>
             <a:r>
-              <a:rPr sz="1900" b="1">
+              <a:rPr sz="1550" b="1">
                 <a:solidFill>
                   <a:srgbClr val="1F232B"/>
                 </a:solidFill>
@@ -5641,21 +5113,21 @@
                 <a:ea typeface="Malgun Gothic"/>
                 <a:cs typeface="Malgun Gothic"/>
               </a:rPr>
-              <a:t>나에게 해당되는지 모름</a:t>
-            </a:r>
-          </a:p>
-        </p:txBody>
-      </p:sp>
-      <p:sp>
-        <p:nvSpPr>
-          <p:cNvPr id="36" name="TextBox 35"/>
+              <a:t>어디를 봐야 할지 모른다</a:t>
+            </a:r>
+          </a:p>
+        </p:txBody>
+      </p:sp>
+      <p:sp>
+        <p:nvSpPr>
+          <p:cNvPr id="23" name="TextBox 22"/>
           <p:cNvSpPr txBox="1"/>
           <p:nvPr/>
         </p:nvSpPr>
         <p:spPr>
           <a:xfrm>
-            <a:off x="7178040" y="3584448"/>
-            <a:ext cx="4297680" cy="548640"/>
+            <a:off x="7223760" y="1938528"/>
+            <a:ext cx="4297680" cy="411480"/>
           </a:xfrm>
           <a:prstGeom prst="rect">
             <a:avLst/>
@@ -5670,7 +5142,7 @@
           <a:p>
             <a:pPr algn="l"/>
             <a:r>
-              <a:rPr sz="1300" b="0">
+              <a:rPr sz="1100" b="0">
                 <a:solidFill>
                   <a:srgbClr val="666E7A"/>
                 </a:solidFill>
@@ -5678,25 +5150,431 @@
                 <a:ea typeface="Malgun Gothic"/>
                 <a:cs typeface="Malgun Gothic"/>
               </a:rPr>
-              <a:t>대상·마감일은 긴 본문과 HWP·PDF 첨부 속에</a:t>
-            </a:r>
-          </a:p>
-        </p:txBody>
-      </p:sp>
-      <p:sp>
-        <p:nvSpPr>
-          <p:cNvPr id="37" name="Rounded Rectangle 36"/>
+              <a:t>학과·부속기관 게시판을 하나씩 들어가 봐야 하고, 장학·시험은 또 다른 사이트에 있다</a:t>
+            </a:r>
+          </a:p>
+        </p:txBody>
+      </p:sp>
+      <p:sp>
+        <p:nvSpPr>
+          <p:cNvPr id="24" name="Rounded Rectangle 23"/>
           <p:cNvSpPr/>
           <p:nvPr/>
         </p:nvSpPr>
         <p:spPr>
           <a:xfrm>
-            <a:off x="6172200" y="4389120"/>
-            <a:ext cx="5440680" cy="1234440"/>
+            <a:off x="6355080" y="2542032"/>
+            <a:ext cx="5257800" cy="932688"/>
           </a:xfrm>
           <a:prstGeom prst="roundRect">
             <a:avLst>
-              <a:gd name="adj" fmla="val 8000"/>
+              <a:gd name="adj" fmla="val 10000"/>
+            </a:avLst>
+          </a:prstGeom>
+          <a:solidFill>
+            <a:srgbClr val="FFFFFF"/>
+          </a:solidFill>
+          <a:ln w="12700">
+            <a:solidFill>
+              <a:srgbClr val="DDE3EA"/>
+            </a:solidFill>
+          </a:ln>
+          <a:effectLst/>
+        </p:spPr>
+        <p:style>
+          <a:lnRef idx="1">
+            <a:schemeClr val="accent1"/>
+          </a:lnRef>
+          <a:fillRef idx="3">
+            <a:schemeClr val="accent1"/>
+          </a:fillRef>
+          <a:effectRef idx="2">
+            <a:schemeClr val="accent1"/>
+          </a:effectRef>
+          <a:fontRef idx="minor">
+            <a:schemeClr val="lt1"/>
+          </a:fontRef>
+        </p:style>
+        <p:txBody>
+          <a:bodyPr rtlCol="0" anchor="ctr"/>
+          <a:lstStyle/>
+          <a:p>
+            <a:pPr algn="ctr"/>
+          </a:p>
+        </p:txBody>
+      </p:sp>
+      <p:sp>
+        <p:nvSpPr>
+          <p:cNvPr id="25" name="Oval 24"/>
+          <p:cNvSpPr/>
+          <p:nvPr/>
+        </p:nvSpPr>
+        <p:spPr>
+          <a:xfrm>
+            <a:off x="6583680" y="2779776"/>
+            <a:ext cx="457200" cy="457200"/>
+          </a:xfrm>
+          <a:prstGeom prst="ellipse">
+            <a:avLst/>
+          </a:prstGeom>
+          <a:solidFill>
+            <a:srgbClr val="0058B2"/>
+          </a:solidFill>
+          <a:ln>
+            <a:noFill/>
+          </a:ln>
+          <a:effectLst/>
+        </p:spPr>
+        <p:style>
+          <a:lnRef idx="1">
+            <a:schemeClr val="accent1"/>
+          </a:lnRef>
+          <a:fillRef idx="3">
+            <a:schemeClr val="accent1"/>
+          </a:fillRef>
+          <a:effectRef idx="2">
+            <a:schemeClr val="accent1"/>
+          </a:effectRef>
+          <a:fontRef idx="minor">
+            <a:schemeClr val="lt1"/>
+          </a:fontRef>
+        </p:style>
+        <p:txBody>
+          <a:bodyPr rtlCol="0" anchor="ctr"/>
+          <a:lstStyle/>
+          <a:p>
+            <a:pPr algn="ctr"/>
+          </a:p>
+        </p:txBody>
+      </p:sp>
+      <p:sp>
+        <p:nvSpPr>
+          <p:cNvPr id="26" name="TextBox 25"/>
+          <p:cNvSpPr txBox="1"/>
+          <p:nvPr/>
+        </p:nvSpPr>
+        <p:spPr>
+          <a:xfrm>
+            <a:off x="6583680" y="2779776"/>
+            <a:ext cx="457200" cy="457200"/>
+          </a:xfrm>
+          <a:prstGeom prst="rect">
+            <a:avLst/>
+          </a:prstGeom>
+          <a:noFill/>
+        </p:spPr>
+        <p:txBody>
+          <a:bodyPr wrap="square" lIns="0" rIns="0" tIns="0" bIns="0" anchor="ctr">
+            <a:spAutoFit/>
+          </a:bodyPr>
+          <a:lstStyle/>
+          <a:p>
+            <a:pPr algn="ctr"/>
+            <a:r>
+              <a:rPr sz="1400" b="1">
+                <a:solidFill>
+                  <a:srgbClr val="FFFFFF"/>
+                </a:solidFill>
+                <a:latin typeface="Malgun Gothic"/>
+                <a:ea typeface="Malgun Gothic"/>
+                <a:cs typeface="Malgun Gothic"/>
+              </a:rPr>
+              <a:t>2</a:t>
+            </a:r>
+          </a:p>
+        </p:txBody>
+      </p:sp>
+      <p:sp>
+        <p:nvSpPr>
+          <p:cNvPr id="27" name="TextBox 26"/>
+          <p:cNvSpPr txBox="1"/>
+          <p:nvPr/>
+        </p:nvSpPr>
+        <p:spPr>
+          <a:xfrm>
+            <a:off x="7223760" y="2670048"/>
+            <a:ext cx="4297680" cy="365760"/>
+          </a:xfrm>
+          <a:prstGeom prst="rect">
+            <a:avLst/>
+          </a:prstGeom>
+          <a:noFill/>
+        </p:spPr>
+        <p:txBody>
+          <a:bodyPr wrap="square" lIns="0" rIns="0" tIns="0" bIns="0" anchor="t">
+            <a:spAutoFit/>
+          </a:bodyPr>
+          <a:lstStyle/>
+          <a:p>
+            <a:pPr algn="l"/>
+            <a:r>
+              <a:rPr sz="1550" b="1">
+                <a:solidFill>
+                  <a:srgbClr val="1F232B"/>
+                </a:solidFill>
+                <a:latin typeface="Malgun Gothic"/>
+                <a:ea typeface="Malgun Gothic"/>
+                <a:cs typeface="Malgun Gothic"/>
+              </a:rPr>
+              <a:t>나에게 해당되는지, 언제까지인지 모른다</a:t>
+            </a:r>
+          </a:p>
+        </p:txBody>
+      </p:sp>
+      <p:sp>
+        <p:nvSpPr>
+          <p:cNvPr id="28" name="TextBox 27"/>
+          <p:cNvSpPr txBox="1"/>
+          <p:nvPr/>
+        </p:nvSpPr>
+        <p:spPr>
+          <a:xfrm>
+            <a:off x="7223760" y="3017520"/>
+            <a:ext cx="4297680" cy="411480"/>
+          </a:xfrm>
+          <a:prstGeom prst="rect">
+            <a:avLst/>
+          </a:prstGeom>
+          <a:noFill/>
+        </p:spPr>
+        <p:txBody>
+          <a:bodyPr wrap="square" lIns="0" rIns="0" tIns="0" bIns="0" anchor="t">
+            <a:spAutoFit/>
+          </a:bodyPr>
+          <a:lstStyle/>
+          <a:p>
+            <a:pPr algn="l"/>
+            <a:r>
+              <a:rPr sz="1100" b="0">
+                <a:solidFill>
+                  <a:srgbClr val="666E7A"/>
+                </a:solidFill>
+                <a:latin typeface="Malgun Gothic"/>
+                <a:ea typeface="Malgun Gothic"/>
+                <a:cs typeface="Malgun Gothic"/>
+              </a:rPr>
+              <a:t>대상·마감일은 긴 본문과 첨부 한글 파일 속에 있다</a:t>
+            </a:r>
+          </a:p>
+        </p:txBody>
+      </p:sp>
+      <p:sp>
+        <p:nvSpPr>
+          <p:cNvPr id="29" name="Rounded Rectangle 28"/>
+          <p:cNvSpPr/>
+          <p:nvPr/>
+        </p:nvSpPr>
+        <p:spPr>
+          <a:xfrm>
+            <a:off x="6355080" y="3621024"/>
+            <a:ext cx="5257800" cy="932688"/>
+          </a:xfrm>
+          <a:prstGeom prst="roundRect">
+            <a:avLst>
+              <a:gd name="adj" fmla="val 10000"/>
+            </a:avLst>
+          </a:prstGeom>
+          <a:solidFill>
+            <a:srgbClr val="FFFFFF"/>
+          </a:solidFill>
+          <a:ln w="12700">
+            <a:solidFill>
+              <a:srgbClr val="DDE3EA"/>
+            </a:solidFill>
+          </a:ln>
+          <a:effectLst/>
+        </p:spPr>
+        <p:style>
+          <a:lnRef idx="1">
+            <a:schemeClr val="accent1"/>
+          </a:lnRef>
+          <a:fillRef idx="3">
+            <a:schemeClr val="accent1"/>
+          </a:fillRef>
+          <a:effectRef idx="2">
+            <a:schemeClr val="accent1"/>
+          </a:effectRef>
+          <a:fontRef idx="minor">
+            <a:schemeClr val="lt1"/>
+          </a:fontRef>
+        </p:style>
+        <p:txBody>
+          <a:bodyPr rtlCol="0" anchor="ctr"/>
+          <a:lstStyle/>
+          <a:p>
+            <a:pPr algn="ctr"/>
+          </a:p>
+        </p:txBody>
+      </p:sp>
+      <p:sp>
+        <p:nvSpPr>
+          <p:cNvPr id="30" name="Oval 29"/>
+          <p:cNvSpPr/>
+          <p:nvPr/>
+        </p:nvSpPr>
+        <p:spPr>
+          <a:xfrm>
+            <a:off x="6583680" y="3858768"/>
+            <a:ext cx="457200" cy="457200"/>
+          </a:xfrm>
+          <a:prstGeom prst="ellipse">
+            <a:avLst/>
+          </a:prstGeom>
+          <a:solidFill>
+            <a:srgbClr val="0058B2"/>
+          </a:solidFill>
+          <a:ln>
+            <a:noFill/>
+          </a:ln>
+          <a:effectLst/>
+        </p:spPr>
+        <p:style>
+          <a:lnRef idx="1">
+            <a:schemeClr val="accent1"/>
+          </a:lnRef>
+          <a:fillRef idx="3">
+            <a:schemeClr val="accent1"/>
+          </a:fillRef>
+          <a:effectRef idx="2">
+            <a:schemeClr val="accent1"/>
+          </a:effectRef>
+          <a:fontRef idx="minor">
+            <a:schemeClr val="lt1"/>
+          </a:fontRef>
+        </p:style>
+        <p:txBody>
+          <a:bodyPr rtlCol="0" anchor="ctr"/>
+          <a:lstStyle/>
+          <a:p>
+            <a:pPr algn="ctr"/>
+          </a:p>
+        </p:txBody>
+      </p:sp>
+      <p:sp>
+        <p:nvSpPr>
+          <p:cNvPr id="31" name="TextBox 30"/>
+          <p:cNvSpPr txBox="1"/>
+          <p:nvPr/>
+        </p:nvSpPr>
+        <p:spPr>
+          <a:xfrm>
+            <a:off x="6583680" y="3858768"/>
+            <a:ext cx="457200" cy="457200"/>
+          </a:xfrm>
+          <a:prstGeom prst="rect">
+            <a:avLst/>
+          </a:prstGeom>
+          <a:noFill/>
+        </p:spPr>
+        <p:txBody>
+          <a:bodyPr wrap="square" lIns="0" rIns="0" tIns="0" bIns="0" anchor="ctr">
+            <a:spAutoFit/>
+          </a:bodyPr>
+          <a:lstStyle/>
+          <a:p>
+            <a:pPr algn="ctr"/>
+            <a:r>
+              <a:rPr sz="1400" b="1">
+                <a:solidFill>
+                  <a:srgbClr val="FFFFFF"/>
+                </a:solidFill>
+                <a:latin typeface="Malgun Gothic"/>
+                <a:ea typeface="Malgun Gothic"/>
+                <a:cs typeface="Malgun Gothic"/>
+              </a:rPr>
+              <a:t>3</a:t>
+            </a:r>
+          </a:p>
+        </p:txBody>
+      </p:sp>
+      <p:sp>
+        <p:nvSpPr>
+          <p:cNvPr id="32" name="TextBox 31"/>
+          <p:cNvSpPr txBox="1"/>
+          <p:nvPr/>
+        </p:nvSpPr>
+        <p:spPr>
+          <a:xfrm>
+            <a:off x="7223760" y="3749039"/>
+            <a:ext cx="4297680" cy="365760"/>
+          </a:xfrm>
+          <a:prstGeom prst="rect">
+            <a:avLst/>
+          </a:prstGeom>
+          <a:noFill/>
+        </p:spPr>
+        <p:txBody>
+          <a:bodyPr wrap="square" lIns="0" rIns="0" tIns="0" bIns="0" anchor="t">
+            <a:spAutoFit/>
+          </a:bodyPr>
+          <a:lstStyle/>
+          <a:p>
+            <a:pPr algn="l"/>
+            <a:r>
+              <a:rPr sz="1550" b="1">
+                <a:solidFill>
+                  <a:srgbClr val="1F232B"/>
+                </a:solidFill>
+                <a:latin typeface="Malgun Gothic"/>
+                <a:ea typeface="Malgun Gothic"/>
+                <a:cs typeface="Malgun Gothic"/>
+              </a:rPr>
+              <a:t>'접수 기간'이라 열렸는지 헷갈린다</a:t>
+            </a:r>
+          </a:p>
+        </p:txBody>
+      </p:sp>
+      <p:sp>
+        <p:nvSpPr>
+          <p:cNvPr id="33" name="TextBox 32"/>
+          <p:cNvSpPr txBox="1"/>
+          <p:nvPr/>
+        </p:nvSpPr>
+        <p:spPr>
+          <a:xfrm>
+            <a:off x="7223760" y="4096512"/>
+            <a:ext cx="4297680" cy="411480"/>
+          </a:xfrm>
+          <a:prstGeom prst="rect">
+            <a:avLst/>
+          </a:prstGeom>
+          <a:noFill/>
+        </p:spPr>
+        <p:txBody>
+          <a:bodyPr wrap="square" lIns="0" rIns="0" tIns="0" bIns="0" anchor="t">
+            <a:spAutoFit/>
+          </a:bodyPr>
+          <a:lstStyle/>
+          <a:p>
+            <a:pPr algn="l"/>
+            <a:r>
+              <a:rPr sz="1100" b="0">
+                <a:solidFill>
+                  <a:srgbClr val="666E7A"/>
+                </a:solidFill>
+                <a:latin typeface="Malgun Gothic"/>
+                <a:ea typeface="Malgun Gothic"/>
+                <a:cs typeface="Malgun Gothic"/>
+              </a:rPr>
+              <a:t>시험·장학은 기간 접수라, 아직 안 열렸는지 이미 끝났는지 한눈에 안 보인다</a:t>
+            </a:r>
+          </a:p>
+        </p:txBody>
+      </p:sp>
+      <p:sp>
+        <p:nvSpPr>
+          <p:cNvPr id="34" name="Rounded Rectangle 33"/>
+          <p:cNvSpPr/>
+          <p:nvPr/>
+        </p:nvSpPr>
+        <p:spPr>
+          <a:xfrm>
+            <a:off x="6355080" y="4700016"/>
+            <a:ext cx="5257800" cy="932688"/>
+          </a:xfrm>
+          <a:prstGeom prst="roundRect">
+            <a:avLst>
+              <a:gd name="adj" fmla="val 10000"/>
             </a:avLst>
           </a:prstGeom>
           <a:solidFill>
@@ -5731,14 +5609,14 @@
       </p:sp>
       <p:sp>
         <p:nvSpPr>
-          <p:cNvPr id="38" name="Oval 37"/>
+          <p:cNvPr id="35" name="Oval 34"/>
           <p:cNvSpPr/>
           <p:nvPr/>
         </p:nvSpPr>
         <p:spPr>
           <a:xfrm>
-            <a:off x="6446520" y="4754880"/>
-            <a:ext cx="502920" cy="502920"/>
+            <a:off x="6583680" y="4937760"/>
+            <a:ext cx="457200" cy="457200"/>
           </a:xfrm>
           <a:prstGeom prst="ellipse">
             <a:avLst/>
@@ -5775,14 +5653,14 @@
       </p:sp>
       <p:sp>
         <p:nvSpPr>
-          <p:cNvPr id="39" name="TextBox 38"/>
+          <p:cNvPr id="36" name="TextBox 35"/>
           <p:cNvSpPr txBox="1"/>
           <p:nvPr/>
         </p:nvSpPr>
         <p:spPr>
           <a:xfrm>
-            <a:off x="6446520" y="4754880"/>
-            <a:ext cx="502920" cy="502920"/>
+            <a:off x="6583680" y="4937760"/>
+            <a:ext cx="457200" cy="457200"/>
           </a:xfrm>
           <a:prstGeom prst="rect">
             <a:avLst/>
@@ -5797,7 +5675,7 @@
           <a:p>
             <a:pPr algn="ctr"/>
             <a:r>
-              <a:rPr sz="1500" b="1">
+              <a:rPr sz="1400" b="1">
                 <a:solidFill>
                   <a:srgbClr val="FFFFFF"/>
                 </a:solidFill>
@@ -5805,21 +5683,21 @@
                 <a:ea typeface="Malgun Gothic"/>
                 <a:cs typeface="Malgun Gothic"/>
               </a:rPr>
-              <a:t>3</a:t>
-            </a:r>
-          </a:p>
-        </p:txBody>
-      </p:sp>
-      <p:sp>
-        <p:nvSpPr>
-          <p:cNvPr id="40" name="TextBox 39"/>
+              <a:t>4</a:t>
+            </a:r>
+          </a:p>
+        </p:txBody>
+      </p:sp>
+      <p:sp>
+        <p:nvSpPr>
+          <p:cNvPr id="37" name="TextBox 36"/>
           <p:cNvSpPr txBox="1"/>
           <p:nvPr/>
         </p:nvSpPr>
         <p:spPr>
           <a:xfrm>
-            <a:off x="7178040" y="4617720"/>
-            <a:ext cx="4297680" cy="411480"/>
+            <a:off x="7223760" y="4828032"/>
+            <a:ext cx="4297680" cy="365760"/>
           </a:xfrm>
           <a:prstGeom prst="rect">
             <a:avLst/>
@@ -5834,7 +5712,7 @@
           <a:p>
             <a:pPr algn="l"/>
             <a:r>
-              <a:rPr sz="1900" b="1">
+              <a:rPr sz="1550" b="1">
                 <a:solidFill>
                   <a:srgbClr val="1F232B"/>
                 </a:solidFill>
@@ -5842,21 +5720,21 @@
                 <a:ea typeface="Malgun Gothic"/>
                 <a:cs typeface="Malgun Gothic"/>
               </a:rPr>
-              <a:t>마감이 지나서야 앎</a:t>
-            </a:r>
-          </a:p>
-        </p:txBody>
-      </p:sp>
-      <p:sp>
-        <p:nvSpPr>
-          <p:cNvPr id="41" name="TextBox 40"/>
+              <a:t>그래서 마감이 지나서야 안다</a:t>
+            </a:r>
+          </a:p>
+        </p:txBody>
+      </p:sp>
+      <p:sp>
+        <p:nvSpPr>
+          <p:cNvPr id="38" name="TextBox 37"/>
           <p:cNvSpPr txBox="1"/>
           <p:nvPr/>
         </p:nvSpPr>
         <p:spPr>
           <a:xfrm>
-            <a:off x="7178040" y="5047488"/>
-            <a:ext cx="4297680" cy="548640"/>
+            <a:off x="7223760" y="5175504"/>
+            <a:ext cx="4297680" cy="411480"/>
           </a:xfrm>
           <a:prstGeom prst="rect">
             <a:avLst/>
@@ -5871,7 +5749,7 @@
           <a:p>
             <a:pPr algn="l"/>
             <a:r>
-              <a:rPr sz="1300" b="0">
+              <a:rPr sz="1100" b="0">
                 <a:solidFill>
                   <a:srgbClr val="666E7A"/>
                 </a:solidFill>
@@ -5879,14 +5757,14 @@
                 <a:ea typeface="Malgun Gothic"/>
                 <a:cs typeface="Malgun Gothic"/>
               </a:rPr>
-              <a:t>장학금·공모전·채용 기회를 놓침</a:t>
-            </a:r>
-          </a:p>
-        </p:txBody>
-      </p:sp>
-      <p:sp>
-        <p:nvSpPr>
-          <p:cNvPr id="42" name="TextBox 41"/>
+              <a:t>장학금·공모전·자격증 기회를 놓친다</a:t>
+            </a:r>
+          </a:p>
+        </p:txBody>
+      </p:sp>
+      <p:sp>
+        <p:nvSpPr>
+          <p:cNvPr id="39" name="TextBox 38"/>
           <p:cNvSpPr txBox="1"/>
           <p:nvPr/>
         </p:nvSpPr>
@@ -5979,21 +5857,69 @@
                 <a:ea typeface="Malgun Gothic"/>
                 <a:cs typeface="Malgun Gothic"/>
               </a:rPr>
-              <a:t>그래서, 나에게 맞는 공지만 골라 주는 앱을 만들었습니다</a:t>
-            </a:r>
-          </a:p>
-        </p:txBody>
-      </p:sp>
-      <p:sp>
-        <p:nvSpPr>
-          <p:cNvPr id="3" name="Rounded Rectangle 2"/>
+              <a:t>한 번 설정하면, 찾아가지 않아도 알려 줍니다</a:t>
+            </a:r>
+          </a:p>
+        </p:txBody>
+      </p:sp>
+      <p:sp>
+        <p:nvSpPr>
+          <p:cNvPr id="3" name="TextBox 2"/>
+          <p:cNvSpPr txBox="1"/>
+          <p:nvPr/>
+        </p:nvSpPr>
+        <p:spPr>
+          <a:xfrm>
+            <a:off x="594360" y="1097280"/>
+            <a:ext cx="10972800" cy="365760"/>
+          </a:xfrm>
+          <a:prstGeom prst="rect">
+            <a:avLst/>
+          </a:prstGeom>
+          <a:noFill/>
+        </p:spPr>
+        <p:txBody>
+          <a:bodyPr wrap="square" lIns="0" rIns="0" tIns="0" bIns="0" anchor="t">
+            <a:spAutoFit/>
+          </a:bodyPr>
+          <a:lstStyle/>
+          <a:p>
+            <a:pPr algn="l"/>
+            <a:r>
+              <a:rPr sz="1400" b="1">
+                <a:solidFill>
+                  <a:srgbClr val="0058B2"/>
+                </a:solidFill>
+                <a:latin typeface="Malgun Gothic"/>
+                <a:ea typeface="Malgun Gothic"/>
+                <a:cs typeface="Malgun Gothic"/>
+              </a:rPr>
+              <a:t>핵심 가치: </a:t>
+            </a:r>
+            <a:r>
+              <a:rPr sz="1400" b="0">
+                <a:solidFill>
+                  <a:srgbClr val="1F232B"/>
+                </a:solidFill>
+                <a:latin typeface="Malgun Gothic"/>
+                <a:ea typeface="Malgun Gothic"/>
+                <a:cs typeface="Malgun Gothic"/>
+              </a:rPr>
+              <a:t>사이트를 하나하나 들어가는 시간을 없앱니다. 알림으로 받고, 궁금하면 앱에서 자세히 찾아봅니다.</a:t>
+            </a:r>
+          </a:p>
+        </p:txBody>
+      </p:sp>
+      <p:sp>
+        <p:nvSpPr>
+          <p:cNvPr id="4" name="Rounded Rectangle 3"/>
           <p:cNvSpPr/>
           <p:nvPr/>
         </p:nvSpPr>
         <p:spPr>
           <a:xfrm>
-            <a:off x="1069848" y="1527048"/>
-            <a:ext cx="1899806" cy="3941064"/>
+            <a:off x="1115568" y="1618488"/>
+            <a:ext cx="1730794" cy="3575304"/>
           </a:xfrm>
           <a:prstGeom prst="roundRect">
             <a:avLst>
@@ -6031,7 +5957,7 @@
       </p:sp>
       <p:pic>
         <p:nvPicPr>
-          <p:cNvPr id="4" name="Picture 3" descr="1-onboarding.png"/>
+          <p:cNvPr id="5" name="Picture 4" descr="1-for-me-open.png"/>
           <p:cNvPicPr>
             <a:picLocks noChangeAspect="1"/>
           </p:cNvPicPr>
@@ -6045,58 +5971,14 @@
         </p:blipFill>
         <p:spPr>
           <a:xfrm>
-            <a:off x="1143000" y="1600200"/>
-            <a:ext cx="1753502" cy="3794760"/>
+            <a:off x="1188720" y="1691640"/>
+            <a:ext cx="1584490" cy="3429000"/>
           </a:xfrm>
           <a:prstGeom prst="rect">
             <a:avLst/>
           </a:prstGeom>
         </p:spPr>
       </p:pic>
-      <p:sp>
-        <p:nvSpPr>
-          <p:cNvPr id="5" name="Oval 4"/>
-          <p:cNvSpPr/>
-          <p:nvPr/>
-        </p:nvSpPr>
-        <p:spPr>
-          <a:xfrm>
-            <a:off x="822959" y="1371600"/>
-            <a:ext cx="457200" cy="457200"/>
-          </a:xfrm>
-          <a:prstGeom prst="ellipse">
-            <a:avLst/>
-          </a:prstGeom>
-          <a:solidFill>
-            <a:srgbClr val="0058B2"/>
-          </a:solidFill>
-          <a:ln>
-            <a:noFill/>
-          </a:ln>
-          <a:effectLst/>
-        </p:spPr>
-        <p:style>
-          <a:lnRef idx="1">
-            <a:schemeClr val="accent1"/>
-          </a:lnRef>
-          <a:fillRef idx="3">
-            <a:schemeClr val="accent1"/>
-          </a:fillRef>
-          <a:effectRef idx="2">
-            <a:schemeClr val="accent1"/>
-          </a:effectRef>
-          <a:fontRef idx="minor">
-            <a:schemeClr val="lt1"/>
-          </a:fontRef>
-        </p:style>
-        <p:txBody>
-          <a:bodyPr rtlCol="0" anchor="ctr"/>
-          <a:lstStyle/>
-          <a:p>
-            <a:pPr algn="ctr"/>
-          </a:p>
-        </p:txBody>
-      </p:sp>
       <p:sp>
         <p:nvSpPr>
           <p:cNvPr id="6" name="TextBox 5"/>
@@ -6105,8 +5987,8 @@
         </p:nvSpPr>
         <p:spPr>
           <a:xfrm>
-            <a:off x="822959" y="1371600"/>
-            <a:ext cx="457200" cy="457200"/>
+            <a:off x="594360" y="5303520"/>
+            <a:ext cx="2681770" cy="365760"/>
           </a:xfrm>
           <a:prstGeom prst="rect">
             <a:avLst/>
@@ -6114,22 +5996,22 @@
           <a:noFill/>
         </p:spPr>
         <p:txBody>
-          <a:bodyPr wrap="square" lIns="0" rIns="0" tIns="0" bIns="0" anchor="ctr">
+          <a:bodyPr wrap="square" lIns="0" rIns="0" tIns="0" bIns="0" anchor="t">
             <a:spAutoFit/>
           </a:bodyPr>
           <a:lstStyle/>
           <a:p>
             <a:pPr algn="ctr"/>
             <a:r>
-              <a:rPr sz="1500" b="1">
-                <a:solidFill>
-                  <a:srgbClr val="FFFFFF"/>
-                </a:solidFill>
-                <a:latin typeface="Malgun Gothic"/>
-                <a:ea typeface="Malgun Gothic"/>
-                <a:cs typeface="Malgun Gothic"/>
-              </a:rPr>
-              <a:t>1</a:t>
+              <a:rPr sz="1600" b="1">
+                <a:solidFill>
+                  <a:srgbClr val="1F232B"/>
+                </a:solidFill>
+                <a:latin typeface="Malgun Gothic"/>
+                <a:ea typeface="Malgun Gothic"/>
+                <a:cs typeface="Malgun Gothic"/>
+              </a:rPr>
+              <a:t>나에게 맞는 공지</a:t>
             </a:r>
           </a:p>
         </p:txBody>
@@ -6142,8 +6024,8 @@
         </p:nvSpPr>
         <p:spPr>
           <a:xfrm>
-            <a:off x="594359" y="5577840"/>
-            <a:ext cx="2850782" cy="411480"/>
+            <a:off x="502920" y="5715000"/>
+            <a:ext cx="2864650" cy="731520"/>
           </a:xfrm>
           <a:prstGeom prst="rect">
             <a:avLst/>
@@ -6158,44 +6040,7 @@
           <a:p>
             <a:pPr algn="ctr"/>
             <a:r>
-              <a:rPr sz="1800" b="1">
-                <a:solidFill>
-                  <a:srgbClr val="1F232B"/>
-                </a:solidFill>
-                <a:latin typeface="Malgun Gothic"/>
-                <a:ea typeface="Malgun Gothic"/>
-                <a:cs typeface="Malgun Gothic"/>
-              </a:rPr>
-              <a:t>30초 설정</a:t>
-            </a:r>
-          </a:p>
-        </p:txBody>
-      </p:sp>
-      <p:sp>
-        <p:nvSpPr>
-          <p:cNvPr id="8" name="TextBox 7"/>
-          <p:cNvSpPr txBox="1"/>
-          <p:nvPr/>
-        </p:nvSpPr>
-        <p:spPr>
-          <a:xfrm>
-            <a:off x="594359" y="5989320"/>
-            <a:ext cx="2850782" cy="365760"/>
-          </a:xfrm>
-          <a:prstGeom prst="rect">
-            <a:avLst/>
-          </a:prstGeom>
-          <a:noFill/>
-        </p:spPr>
-        <p:txBody>
-          <a:bodyPr wrap="square" lIns="0" rIns="0" tIns="0" bIns="0" anchor="t">
-            <a:spAutoFit/>
-          </a:bodyPr>
-          <a:lstStyle/>
-          <a:p>
-            <a:pPr algn="ctr"/>
-            <a:r>
-              <a:rPr sz="1200" b="0">
+              <a:rPr sz="1050" b="0">
                 <a:solidFill>
                   <a:srgbClr val="666E7A"/>
                 </a:solidFill>
@@ -6203,65 +6048,22 @@
                 <a:ea typeface="Malgun Gothic"/>
                 <a:cs typeface="Malgun Gothic"/>
               </a:rPr>
-              <a:t>학과는 '컴공'처럼 줄여 써도 OK</a:t>
-            </a:r>
-          </a:p>
-        </p:txBody>
-      </p:sp>
-      <p:sp>
-        <p:nvSpPr>
-          <p:cNvPr id="9" name="Right Arrow 8"/>
+              <a:t>학과·관심사로 골라 주고
+왜 추천했는지 이유까지</a:t>
+            </a:r>
+          </a:p>
+        </p:txBody>
+      </p:sp>
+      <p:sp>
+        <p:nvSpPr>
+          <p:cNvPr id="8" name="Rounded Rectangle 7"/>
           <p:cNvSpPr/>
           <p:nvPr/>
         </p:nvSpPr>
         <p:spPr>
           <a:xfrm>
-            <a:off x="3189110" y="3337560"/>
-            <a:ext cx="329184" cy="365760"/>
-          </a:xfrm>
-          <a:prstGeom prst="rightArrow">
-            <a:avLst/>
-          </a:prstGeom>
-          <a:solidFill>
-            <a:srgbClr val="B8C1CC"/>
-          </a:solidFill>
-          <a:ln>
-            <a:noFill/>
-          </a:ln>
-          <a:effectLst/>
-        </p:spPr>
-        <p:style>
-          <a:lnRef idx="1">
-            <a:schemeClr val="accent1"/>
-          </a:lnRef>
-          <a:fillRef idx="3">
-            <a:schemeClr val="accent1"/>
-          </a:fillRef>
-          <a:effectRef idx="2">
-            <a:schemeClr val="accent1"/>
-          </a:effectRef>
-          <a:fontRef idx="minor">
-            <a:schemeClr val="lt1"/>
-          </a:fontRef>
-        </p:style>
-        <p:txBody>
-          <a:bodyPr rtlCol="0" anchor="ctr"/>
-          <a:lstStyle/>
-          <a:p>
-            <a:pPr algn="ctr"/>
-          </a:p>
-        </p:txBody>
-      </p:sp>
-      <p:sp>
-        <p:nvSpPr>
-          <p:cNvPr id="10" name="Rounded Rectangle 9"/>
-          <p:cNvSpPr/>
-          <p:nvPr/>
-        </p:nvSpPr>
-        <p:spPr>
-          <a:xfrm>
-            <a:off x="3904487" y="1527048"/>
-            <a:ext cx="1899806" cy="3941064"/>
+            <a:off x="3995928" y="1618488"/>
+            <a:ext cx="1730794" cy="3575304"/>
           </a:xfrm>
           <a:prstGeom prst="roundRect">
             <a:avLst>
@@ -6299,7 +6101,7 @@
       </p:sp>
       <p:pic>
         <p:nvPicPr>
-          <p:cNvPr id="11" name="Picture 10" descr="2-for-me.png"/>
+          <p:cNvPr id="9" name="Picture 8" descr="2-upcoming.png"/>
           <p:cNvPicPr>
             <a:picLocks noChangeAspect="1"/>
           </p:cNvPicPr>
@@ -6313,8 +6115,8 @@
         </p:blipFill>
         <p:spPr>
           <a:xfrm>
-            <a:off x="3977639" y="1600200"/>
-            <a:ext cx="1753502" cy="3794760"/>
+            <a:off x="4069080" y="1691640"/>
+            <a:ext cx="1584490" cy="3429000"/>
           </a:xfrm>
           <a:prstGeom prst="rect">
             <a:avLst/>
@@ -6323,95 +6125,14 @@
       </p:pic>
       <p:sp>
         <p:nvSpPr>
-          <p:cNvPr id="12" name="Oval 11"/>
-          <p:cNvSpPr/>
-          <p:nvPr/>
-        </p:nvSpPr>
-        <p:spPr>
-          <a:xfrm>
-            <a:off x="3657600" y="1371600"/>
-            <a:ext cx="457200" cy="457200"/>
-          </a:xfrm>
-          <a:prstGeom prst="ellipse">
-            <a:avLst/>
-          </a:prstGeom>
-          <a:solidFill>
-            <a:srgbClr val="0058B2"/>
-          </a:solidFill>
-          <a:ln>
-            <a:noFill/>
-          </a:ln>
-          <a:effectLst/>
-        </p:spPr>
-        <p:style>
-          <a:lnRef idx="1">
-            <a:schemeClr val="accent1"/>
-          </a:lnRef>
-          <a:fillRef idx="3">
-            <a:schemeClr val="accent1"/>
-          </a:fillRef>
-          <a:effectRef idx="2">
-            <a:schemeClr val="accent1"/>
-          </a:effectRef>
-          <a:fontRef idx="minor">
-            <a:schemeClr val="lt1"/>
-          </a:fontRef>
-        </p:style>
-        <p:txBody>
-          <a:bodyPr rtlCol="0" anchor="ctr"/>
-          <a:lstStyle/>
-          <a:p>
-            <a:pPr algn="ctr"/>
-          </a:p>
-        </p:txBody>
-      </p:sp>
-      <p:sp>
-        <p:nvSpPr>
-          <p:cNvPr id="13" name="TextBox 12"/>
+          <p:cNvPr id="10" name="TextBox 9"/>
           <p:cNvSpPr txBox="1"/>
           <p:nvPr/>
         </p:nvSpPr>
         <p:spPr>
           <a:xfrm>
-            <a:off x="3657600" y="1371600"/>
-            <a:ext cx="457200" cy="457200"/>
-          </a:xfrm>
-          <a:prstGeom prst="rect">
-            <a:avLst/>
-          </a:prstGeom>
-          <a:noFill/>
-        </p:spPr>
-        <p:txBody>
-          <a:bodyPr wrap="square" lIns="0" rIns="0" tIns="0" bIns="0" anchor="ctr">
-            <a:spAutoFit/>
-          </a:bodyPr>
-          <a:lstStyle/>
-          <a:p>
-            <a:pPr algn="ctr"/>
-            <a:r>
-              <a:rPr sz="1500" b="1">
-                <a:solidFill>
-                  <a:srgbClr val="FFFFFF"/>
-                </a:solidFill>
-                <a:latin typeface="Malgun Gothic"/>
-                <a:ea typeface="Malgun Gothic"/>
-                <a:cs typeface="Malgun Gothic"/>
-              </a:rPr>
-              <a:t>2</a:t>
-            </a:r>
-          </a:p>
-        </p:txBody>
-      </p:sp>
-      <p:sp>
-        <p:nvSpPr>
-          <p:cNvPr id="14" name="TextBox 13"/>
-          <p:cNvSpPr txBox="1"/>
-          <p:nvPr/>
-        </p:nvSpPr>
-        <p:spPr>
-          <a:xfrm>
-            <a:off x="3429000" y="5577840"/>
-            <a:ext cx="2850782" cy="411480"/>
+            <a:off x="3474720" y="5303520"/>
+            <a:ext cx="2681770" cy="365760"/>
           </a:xfrm>
           <a:prstGeom prst="rect">
             <a:avLst/>
@@ -6426,7 +6147,7 @@
           <a:p>
             <a:pPr algn="ctr"/>
             <a:r>
-              <a:rPr sz="1800" b="1">
+              <a:rPr sz="1600" b="1">
                 <a:solidFill>
                   <a:srgbClr val="1F232B"/>
                 </a:solidFill>
@@ -6434,21 +6155,21 @@
                 <a:ea typeface="Malgun Gothic"/>
                 <a:cs typeface="Malgun Gothic"/>
               </a:rPr>
-              <a:t>나에게 맞는 공지</a:t>
-            </a:r>
-          </a:p>
-        </p:txBody>
-      </p:sp>
-      <p:sp>
-        <p:nvSpPr>
-          <p:cNvPr id="15" name="TextBox 14"/>
+              <a:t>접수 상태가 한눈에</a:t>
+            </a:r>
+          </a:p>
+        </p:txBody>
+      </p:sp>
+      <p:sp>
+        <p:nvSpPr>
+          <p:cNvPr id="11" name="TextBox 10"/>
           <p:cNvSpPr txBox="1"/>
           <p:nvPr/>
         </p:nvSpPr>
         <p:spPr>
           <a:xfrm>
-            <a:off x="3429000" y="5989320"/>
-            <a:ext cx="2850782" cy="365760"/>
+            <a:off x="3383279" y="5715000"/>
+            <a:ext cx="2864650" cy="731520"/>
           </a:xfrm>
           <a:prstGeom prst="rect">
             <a:avLst/>
@@ -6463,7 +6184,7 @@
           <a:p>
             <a:pPr algn="ctr"/>
             <a:r>
-              <a:rPr sz="1200" b="0">
+              <a:rPr sz="1050" b="0">
                 <a:solidFill>
                   <a:srgbClr val="666E7A"/>
                 </a:solidFill>
@@ -6471,65 +6192,22 @@
                 <a:ea typeface="Malgun Gothic"/>
                 <a:cs typeface="Malgun Gothic"/>
               </a:rPr>
-              <a:t>왜 추천했는지 이유까지</a:t>
-            </a:r>
-          </a:p>
-        </p:txBody>
-      </p:sp>
-      <p:sp>
-        <p:nvSpPr>
-          <p:cNvPr id="16" name="Right Arrow 15"/>
+              <a:t>'10/12 접수 시작' · '접수중 D-3'
+접수중·접수 예정 필터, 4가지 정렬</a:t>
+            </a:r>
+          </a:p>
+        </p:txBody>
+      </p:sp>
+      <p:sp>
+        <p:nvSpPr>
+          <p:cNvPr id="12" name="Rounded Rectangle 11"/>
           <p:cNvSpPr/>
           <p:nvPr/>
         </p:nvSpPr>
         <p:spPr>
           <a:xfrm>
-            <a:off x="6023750" y="3337560"/>
-            <a:ext cx="329184" cy="365760"/>
-          </a:xfrm>
-          <a:prstGeom prst="rightArrow">
-            <a:avLst/>
-          </a:prstGeom>
-          <a:solidFill>
-            <a:srgbClr val="B8C1CC"/>
-          </a:solidFill>
-          <a:ln>
-            <a:noFill/>
-          </a:ln>
-          <a:effectLst/>
-        </p:spPr>
-        <p:style>
-          <a:lnRef idx="1">
-            <a:schemeClr val="accent1"/>
-          </a:lnRef>
-          <a:fillRef idx="3">
-            <a:schemeClr val="accent1"/>
-          </a:fillRef>
-          <a:effectRef idx="2">
-            <a:schemeClr val="accent1"/>
-          </a:effectRef>
-          <a:fontRef idx="minor">
-            <a:schemeClr val="lt1"/>
-          </a:fontRef>
-        </p:style>
-        <p:txBody>
-          <a:bodyPr rtlCol="0" anchor="ctr"/>
-          <a:lstStyle/>
-          <a:p>
-            <a:pPr algn="ctr"/>
-          </a:p>
-        </p:txBody>
-      </p:sp>
-      <p:sp>
-        <p:nvSpPr>
-          <p:cNvPr id="17" name="Rounded Rectangle 16"/>
-          <p:cNvSpPr/>
-          <p:nvPr/>
-        </p:nvSpPr>
-        <p:spPr>
-          <a:xfrm>
-            <a:off x="6739128" y="1527048"/>
-            <a:ext cx="1899806" cy="3941064"/>
+            <a:off x="6876288" y="1618488"/>
+            <a:ext cx="1730794" cy="3575304"/>
           </a:xfrm>
           <a:prstGeom prst="roundRect">
             <a:avLst>
@@ -6567,7 +6245,7 @@
       </p:sp>
       <p:pic>
         <p:nvPicPr>
-          <p:cNvPr id="18" name="Picture 17" descr="3-detail.png"/>
+          <p:cNvPr id="13" name="Picture 12" descr="3b-detail-scholarship.png"/>
           <p:cNvPicPr>
             <a:picLocks noChangeAspect="1"/>
           </p:cNvPicPr>
@@ -6581,8 +6259,8 @@
         </p:blipFill>
         <p:spPr>
           <a:xfrm>
-            <a:off x="6812280" y="1600200"/>
-            <a:ext cx="1753502" cy="3794760"/>
+            <a:off x="6949440" y="1691640"/>
+            <a:ext cx="1584490" cy="3429000"/>
           </a:xfrm>
           <a:prstGeom prst="rect">
             <a:avLst/>
@@ -6591,95 +6269,14 @@
       </p:pic>
       <p:sp>
         <p:nvSpPr>
-          <p:cNvPr id="19" name="Oval 18"/>
-          <p:cNvSpPr/>
-          <p:nvPr/>
-        </p:nvSpPr>
-        <p:spPr>
-          <a:xfrm>
-            <a:off x="6492240" y="1371600"/>
-            <a:ext cx="457200" cy="457200"/>
-          </a:xfrm>
-          <a:prstGeom prst="ellipse">
-            <a:avLst/>
-          </a:prstGeom>
-          <a:solidFill>
-            <a:srgbClr val="0058B2"/>
-          </a:solidFill>
-          <a:ln>
-            <a:noFill/>
-          </a:ln>
-          <a:effectLst/>
-        </p:spPr>
-        <p:style>
-          <a:lnRef idx="1">
-            <a:schemeClr val="accent1"/>
-          </a:lnRef>
-          <a:fillRef idx="3">
-            <a:schemeClr val="accent1"/>
-          </a:fillRef>
-          <a:effectRef idx="2">
-            <a:schemeClr val="accent1"/>
-          </a:effectRef>
-          <a:fontRef idx="minor">
-            <a:schemeClr val="lt1"/>
-          </a:fontRef>
-        </p:style>
-        <p:txBody>
-          <a:bodyPr rtlCol="0" anchor="ctr"/>
-          <a:lstStyle/>
-          <a:p>
-            <a:pPr algn="ctr"/>
-          </a:p>
-        </p:txBody>
-      </p:sp>
-      <p:sp>
-        <p:nvSpPr>
-          <p:cNvPr id="20" name="TextBox 19"/>
+          <p:cNvPr id="14" name="TextBox 13"/>
           <p:cNvSpPr txBox="1"/>
           <p:nvPr/>
         </p:nvSpPr>
         <p:spPr>
           <a:xfrm>
-            <a:off x="6492240" y="1371600"/>
-            <a:ext cx="457200" cy="457200"/>
-          </a:xfrm>
-          <a:prstGeom prst="rect">
-            <a:avLst/>
-          </a:prstGeom>
-          <a:noFill/>
-        </p:spPr>
-        <p:txBody>
-          <a:bodyPr wrap="square" lIns="0" rIns="0" tIns="0" bIns="0" anchor="ctr">
-            <a:spAutoFit/>
-          </a:bodyPr>
-          <a:lstStyle/>
-          <a:p>
-            <a:pPr algn="ctr"/>
-            <a:r>
-              <a:rPr sz="1500" b="1">
-                <a:solidFill>
-                  <a:srgbClr val="FFFFFF"/>
-                </a:solidFill>
-                <a:latin typeface="Malgun Gothic"/>
-                <a:ea typeface="Malgun Gothic"/>
-                <a:cs typeface="Malgun Gothic"/>
-              </a:rPr>
-              <a:t>3</a:t>
-            </a:r>
-          </a:p>
-        </p:txBody>
-      </p:sp>
-      <p:sp>
-        <p:nvSpPr>
-          <p:cNvPr id="21" name="TextBox 20"/>
-          <p:cNvSpPr txBox="1"/>
-          <p:nvPr/>
-        </p:nvSpPr>
-        <p:spPr>
-          <a:xfrm>
-            <a:off x="6263640" y="5577840"/>
-            <a:ext cx="2850782" cy="411480"/>
+            <a:off x="6355080" y="5303520"/>
+            <a:ext cx="2681770" cy="365760"/>
           </a:xfrm>
           <a:prstGeom prst="rect">
             <a:avLst/>
@@ -6694,7 +6291,7 @@
           <a:p>
             <a:pPr algn="ctr"/>
             <a:r>
-              <a:rPr sz="1800" b="1">
+              <a:rPr sz="1600" b="1">
                 <a:solidFill>
                   <a:srgbClr val="1F232B"/>
                 </a:solidFill>
@@ -6702,21 +6299,21 @@
                 <a:ea typeface="Malgun Gothic"/>
                 <a:cs typeface="Malgun Gothic"/>
               </a:rPr>
-              <a:t>한 장으로 정리</a:t>
-            </a:r>
-          </a:p>
-        </p:txBody>
-      </p:sp>
-      <p:sp>
-        <p:nvSpPr>
-          <p:cNvPr id="22" name="TextBox 21"/>
+              <a:t>긴 공지를 한 장으로</a:t>
+            </a:r>
+          </a:p>
+        </p:txBody>
+      </p:sp>
+      <p:sp>
+        <p:nvSpPr>
+          <p:cNvPr id="15" name="TextBox 14"/>
           <p:cNvSpPr txBox="1"/>
           <p:nvPr/>
         </p:nvSpPr>
         <p:spPr>
           <a:xfrm>
-            <a:off x="6263640" y="5989320"/>
-            <a:ext cx="2850782" cy="365760"/>
+            <a:off x="6263640" y="5715000"/>
+            <a:ext cx="2864650" cy="731520"/>
           </a:xfrm>
           <a:prstGeom prst="rect">
             <a:avLst/>
@@ -6731,7 +6328,7 @@
           <a:p>
             <a:pPr algn="ctr"/>
             <a:r>
-              <a:rPr sz="1200" b="0">
+              <a:rPr sz="1050" b="0">
                 <a:solidFill>
                   <a:srgbClr val="666E7A"/>
                 </a:solidFill>
@@ -6739,65 +6336,22 @@
                 <a:ea typeface="Malgun Gothic"/>
                 <a:cs typeface="Malgun Gothic"/>
               </a:rPr>
-              <a:t>대상·기간·신청방법·문의</a:t>
-            </a:r>
-          </a:p>
-        </p:txBody>
-      </p:sp>
-      <p:sp>
-        <p:nvSpPr>
-          <p:cNvPr id="23" name="Right Arrow 22"/>
+              <a:t>대상·기간·신청방법·지원내용·
+제출서류를 표로 (첨부파일까지 읽음)</a:t>
+            </a:r>
+          </a:p>
+        </p:txBody>
+      </p:sp>
+      <p:sp>
+        <p:nvSpPr>
+          <p:cNvPr id="16" name="Rounded Rectangle 15"/>
           <p:cNvSpPr/>
           <p:nvPr/>
         </p:nvSpPr>
         <p:spPr>
           <a:xfrm>
-            <a:off x="8858390" y="3337560"/>
-            <a:ext cx="329184" cy="365760"/>
-          </a:xfrm>
-          <a:prstGeom prst="rightArrow">
-            <a:avLst/>
-          </a:prstGeom>
-          <a:solidFill>
-            <a:srgbClr val="B8C1CC"/>
-          </a:solidFill>
-          <a:ln>
-            <a:noFill/>
-          </a:ln>
-          <a:effectLst/>
-        </p:spPr>
-        <p:style>
-          <a:lnRef idx="1">
-            <a:schemeClr val="accent1"/>
-          </a:lnRef>
-          <a:fillRef idx="3">
-            <a:schemeClr val="accent1"/>
-          </a:fillRef>
-          <a:effectRef idx="2">
-            <a:schemeClr val="accent1"/>
-          </a:effectRef>
-          <a:fontRef idx="minor">
-            <a:schemeClr val="lt1"/>
-          </a:fontRef>
-        </p:style>
-        <p:txBody>
-          <a:bodyPr rtlCol="0" anchor="ctr"/>
-          <a:lstStyle/>
-          <a:p>
-            <a:pPr algn="ctr"/>
-          </a:p>
-        </p:txBody>
-      </p:sp>
-      <p:sp>
-        <p:nvSpPr>
-          <p:cNvPr id="24" name="Rounded Rectangle 23"/>
-          <p:cNvSpPr/>
-          <p:nvPr/>
-        </p:nvSpPr>
-        <p:spPr>
-          <a:xfrm>
-            <a:off x="9573768" y="1527048"/>
-            <a:ext cx="1899806" cy="3941064"/>
+            <a:off x="9756648" y="1618488"/>
+            <a:ext cx="1730794" cy="3575304"/>
           </a:xfrm>
           <a:prstGeom prst="roundRect">
             <a:avLst>
@@ -6835,7 +6389,7 @@
       </p:sp>
       <p:pic>
         <p:nvPicPr>
-          <p:cNvPr id="25" name="Picture 24" descr="4-calendar.png"/>
+          <p:cNvPr id="17" name="Picture 16" descr="4-calendar-open.png"/>
           <p:cNvPicPr>
             <a:picLocks noChangeAspect="1"/>
           </p:cNvPicPr>
@@ -6849,8 +6403,8 @@
         </p:blipFill>
         <p:spPr>
           <a:xfrm>
-            <a:off x="9646920" y="1600200"/>
-            <a:ext cx="1753502" cy="3794760"/>
+            <a:off x="9829800" y="1691640"/>
+            <a:ext cx="1584490" cy="3429000"/>
           </a:xfrm>
           <a:prstGeom prst="rect">
             <a:avLst/>
@@ -6859,95 +6413,14 @@
       </p:pic>
       <p:sp>
         <p:nvSpPr>
-          <p:cNvPr id="26" name="Oval 25"/>
-          <p:cNvSpPr/>
-          <p:nvPr/>
-        </p:nvSpPr>
-        <p:spPr>
-          <a:xfrm>
-            <a:off x="9326880" y="1371600"/>
-            <a:ext cx="457200" cy="457200"/>
-          </a:xfrm>
-          <a:prstGeom prst="ellipse">
-            <a:avLst/>
-          </a:prstGeom>
-          <a:solidFill>
-            <a:srgbClr val="0058B2"/>
-          </a:solidFill>
-          <a:ln>
-            <a:noFill/>
-          </a:ln>
-          <a:effectLst/>
-        </p:spPr>
-        <p:style>
-          <a:lnRef idx="1">
-            <a:schemeClr val="accent1"/>
-          </a:lnRef>
-          <a:fillRef idx="3">
-            <a:schemeClr val="accent1"/>
-          </a:fillRef>
-          <a:effectRef idx="2">
-            <a:schemeClr val="accent1"/>
-          </a:effectRef>
-          <a:fontRef idx="minor">
-            <a:schemeClr val="lt1"/>
-          </a:fontRef>
-        </p:style>
-        <p:txBody>
-          <a:bodyPr rtlCol="0" anchor="ctr"/>
-          <a:lstStyle/>
-          <a:p>
-            <a:pPr algn="ctr"/>
-          </a:p>
-        </p:txBody>
-      </p:sp>
-      <p:sp>
-        <p:nvSpPr>
-          <p:cNvPr id="27" name="TextBox 26"/>
+          <p:cNvPr id="18" name="TextBox 17"/>
           <p:cNvSpPr txBox="1"/>
           <p:nvPr/>
         </p:nvSpPr>
         <p:spPr>
           <a:xfrm>
-            <a:off x="9326880" y="1371600"/>
-            <a:ext cx="457200" cy="457200"/>
-          </a:xfrm>
-          <a:prstGeom prst="rect">
-            <a:avLst/>
-          </a:prstGeom>
-          <a:noFill/>
-        </p:spPr>
-        <p:txBody>
-          <a:bodyPr wrap="square" lIns="0" rIns="0" tIns="0" bIns="0" anchor="ctr">
-            <a:spAutoFit/>
-          </a:bodyPr>
-          <a:lstStyle/>
-          <a:p>
-            <a:pPr algn="ctr"/>
-            <a:r>
-              <a:rPr sz="1500" b="1">
-                <a:solidFill>
-                  <a:srgbClr val="FFFFFF"/>
-                </a:solidFill>
-                <a:latin typeface="Malgun Gothic"/>
-                <a:ea typeface="Malgun Gothic"/>
-                <a:cs typeface="Malgun Gothic"/>
-              </a:rPr>
-              <a:t>4</a:t>
-            </a:r>
-          </a:p>
-        </p:txBody>
-      </p:sp>
-      <p:sp>
-        <p:nvSpPr>
-          <p:cNvPr id="28" name="TextBox 27"/>
-          <p:cNvSpPr txBox="1"/>
-          <p:nvPr/>
-        </p:nvSpPr>
-        <p:spPr>
-          <a:xfrm>
-            <a:off x="9098280" y="5577840"/>
-            <a:ext cx="2850782" cy="411480"/>
+            <a:off x="9235440" y="5303520"/>
+            <a:ext cx="2681770" cy="365760"/>
           </a:xfrm>
           <a:prstGeom prst="rect">
             <a:avLst/>
@@ -6962,7 +6435,7 @@
           <a:p>
             <a:pPr algn="ctr"/>
             <a:r>
-              <a:rPr sz="1800" b="1">
+              <a:rPr sz="1600" b="1">
                 <a:solidFill>
                   <a:srgbClr val="1F232B"/>
                 </a:solidFill>
@@ -6970,21 +6443,21 @@
                 <a:ea typeface="Malgun Gothic"/>
                 <a:cs typeface="Malgun Gothic"/>
               </a:rPr>
-              <a:t>마감 전에 알림</a:t>
-            </a:r>
-          </a:p>
-        </p:txBody>
-      </p:sp>
-      <p:sp>
-        <p:nvSpPr>
-          <p:cNvPr id="29" name="TextBox 28"/>
+              <a:t>놓치지 않게 알림</a:t>
+            </a:r>
+          </a:p>
+        </p:txBody>
+      </p:sp>
+      <p:sp>
+        <p:nvSpPr>
+          <p:cNvPr id="19" name="TextBox 18"/>
           <p:cNvSpPr txBox="1"/>
           <p:nvPr/>
         </p:nvSpPr>
         <p:spPr>
           <a:xfrm>
-            <a:off x="9098280" y="5989320"/>
-            <a:ext cx="2850782" cy="365760"/>
+            <a:off x="9144000" y="5715000"/>
+            <a:ext cx="2864650" cy="731520"/>
           </a:xfrm>
           <a:prstGeom prst="rect">
             <a:avLst/>
@@ -6999,7 +6472,7 @@
           <a:p>
             <a:pPr algn="ctr"/>
             <a:r>
-              <a:rPr sz="1200" b="0">
+              <a:rPr sz="1050" b="0">
                 <a:solidFill>
                   <a:srgbClr val="666E7A"/>
                 </a:solidFill>
@@ -7007,14 +6480,15 @@
                 <a:ea typeface="Malgun Gothic"/>
                 <a:cs typeface="Malgun Gothic"/>
               </a:rPr>
-              <a:t>7·3·1일 전 휴대폰으로</a:t>
-            </a:r>
-          </a:p>
-        </p:txBody>
-      </p:sp>
-      <p:sp>
-        <p:nvSpPr>
-          <p:cNvPr id="30" name="TextBox 29"/>
+              <a:t>마감 7·3·1일 전 · 접수 시작 알림
+캘린더에 '지금 접수중' 목록</a:t>
+            </a:r>
+          </a:p>
+        </p:txBody>
+      </p:sp>
+      <p:sp>
+        <p:nvSpPr>
+          <p:cNvPr id="20" name="TextBox 19"/>
           <p:cNvSpPr txBox="1"/>
           <p:nvPr/>
         </p:nvSpPr>
@@ -7107,143 +6581,25 @@
                 <a:ea typeface="Malgun Gothic"/>
                 <a:cs typeface="Malgun Gothic"/>
               </a:rPr>
-              <a:t>AI는 이렇게 긴 공지를 정리합니다</a:t>
-            </a:r>
-          </a:p>
-        </p:txBody>
-      </p:sp>
-      <p:sp>
-        <p:nvSpPr>
-          <p:cNvPr id="3" name="Oval 2"/>
+              <a:t>모으고 → 읽고 → 정리해서 → 전달합니다</a:t>
+            </a:r>
+          </a:p>
+        </p:txBody>
+      </p:sp>
+      <p:sp>
+        <p:nvSpPr>
+          <p:cNvPr id="3" name="Rounded Rectangle 2"/>
           <p:cNvSpPr/>
           <p:nvPr/>
         </p:nvSpPr>
         <p:spPr>
           <a:xfrm>
             <a:off x="594360" y="1417320"/>
-            <a:ext cx="411480" cy="411480"/>
-          </a:xfrm>
-          <a:prstGeom prst="ellipse">
-            <a:avLst/>
-          </a:prstGeom>
-          <a:solidFill>
-            <a:srgbClr val="0058B2"/>
-          </a:solidFill>
-          <a:ln>
-            <a:noFill/>
-          </a:ln>
-          <a:effectLst/>
-        </p:spPr>
-        <p:style>
-          <a:lnRef idx="1">
-            <a:schemeClr val="accent1"/>
-          </a:lnRef>
-          <a:fillRef idx="3">
-            <a:schemeClr val="accent1"/>
-          </a:fillRef>
-          <a:effectRef idx="2">
-            <a:schemeClr val="accent1"/>
-          </a:effectRef>
-          <a:fontRef idx="minor">
-            <a:schemeClr val="lt1"/>
-          </a:fontRef>
-        </p:style>
-        <p:txBody>
-          <a:bodyPr rtlCol="0" anchor="ctr"/>
-          <a:lstStyle/>
-          <a:p>
-            <a:pPr algn="ctr"/>
-          </a:p>
-        </p:txBody>
-      </p:sp>
-      <p:sp>
-        <p:nvSpPr>
-          <p:cNvPr id="4" name="TextBox 3"/>
-          <p:cNvSpPr txBox="1"/>
-          <p:nvPr/>
-        </p:nvSpPr>
-        <p:spPr>
-          <a:xfrm>
-            <a:off x="594360" y="1417320"/>
-            <a:ext cx="411480" cy="411480"/>
-          </a:xfrm>
-          <a:prstGeom prst="rect">
-            <a:avLst/>
-          </a:prstGeom>
-          <a:noFill/>
-        </p:spPr>
-        <p:txBody>
-          <a:bodyPr wrap="square" lIns="0" rIns="0" tIns="0" bIns="0" anchor="ctr">
-            <a:spAutoFit/>
-          </a:bodyPr>
-          <a:lstStyle/>
-          <a:p>
-            <a:pPr algn="ctr"/>
-            <a:r>
-              <a:rPr sz="1400" b="1">
-                <a:solidFill>
-                  <a:srgbClr val="FFFFFF"/>
-                </a:solidFill>
-                <a:latin typeface="Malgun Gothic"/>
-                <a:ea typeface="Malgun Gothic"/>
-                <a:cs typeface="Malgun Gothic"/>
-              </a:rPr>
-              <a:t>1</a:t>
-            </a:r>
-          </a:p>
-        </p:txBody>
-      </p:sp>
-      <p:sp>
-        <p:nvSpPr>
-          <p:cNvPr id="5" name="TextBox 4"/>
-          <p:cNvSpPr txBox="1"/>
-          <p:nvPr/>
-        </p:nvSpPr>
-        <p:spPr>
-          <a:xfrm>
-            <a:off x="1097280" y="1444752"/>
-            <a:ext cx="2926080" cy="365760"/>
-          </a:xfrm>
-          <a:prstGeom prst="rect">
-            <a:avLst/>
-          </a:prstGeom>
-          <a:noFill/>
-        </p:spPr>
-        <p:txBody>
-          <a:bodyPr wrap="square" lIns="0" rIns="0" tIns="0" bIns="0" anchor="t">
-            <a:spAutoFit/>
-          </a:bodyPr>
-          <a:lstStyle/>
-          <a:p>
-            <a:pPr algn="l"/>
-            <a:r>
-              <a:rPr sz="1600" b="1">
-                <a:solidFill>
-                  <a:srgbClr val="1F232B"/>
-                </a:solidFill>
-                <a:latin typeface="Malgun Gothic"/>
-                <a:ea typeface="Malgun Gothic"/>
-                <a:cs typeface="Malgun Gothic"/>
-              </a:rPr>
-              <a:t>학교 공지 원문</a:t>
-            </a:r>
-          </a:p>
-        </p:txBody>
-      </p:sp>
-      <p:sp>
-        <p:nvSpPr>
-          <p:cNvPr id="6" name="Rounded Rectangle 5"/>
-          <p:cNvSpPr/>
-          <p:nvPr/>
-        </p:nvSpPr>
-        <p:spPr>
-          <a:xfrm>
-            <a:off x="594360" y="2011680"/>
-            <a:ext cx="3246120" cy="3017520"/>
+            <a:ext cx="2560320" cy="3108960"/>
           </a:xfrm>
           <a:prstGeom prst="roundRect">
             <a:avLst>
-              <a:gd name="adj" fmla="val 5000"/>
+              <a:gd name="adj" fmla="val 6000"/>
             </a:avLst>
           </a:prstGeom>
           <a:solidFill>
@@ -7280,22 +6636,20 @@
       </p:sp>
       <p:sp>
         <p:nvSpPr>
-          <p:cNvPr id="7" name="Rounded Rectangle 6"/>
+          <p:cNvPr id="4" name="Oval 3"/>
           <p:cNvSpPr/>
           <p:nvPr/>
         </p:nvSpPr>
         <p:spPr>
           <a:xfrm>
-            <a:off x="822960" y="2240280"/>
-            <a:ext cx="2743200" cy="91440"/>
-          </a:xfrm>
-          <a:prstGeom prst="roundRect">
-            <a:avLst>
-              <a:gd name="adj" fmla="val 50000"/>
-            </a:avLst>
+            <a:off x="822960" y="1645920"/>
+            <a:ext cx="502920" cy="502920"/>
+          </a:xfrm>
+          <a:prstGeom prst="ellipse">
+            <a:avLst/>
           </a:prstGeom>
           <a:solidFill>
-            <a:srgbClr val="DDE3EA"/>
+            <a:srgbClr val="0058B2"/>
           </a:solidFill>
           <a:ln>
             <a:noFill/>
@@ -7326,428 +6680,14 @@
       </p:sp>
       <p:sp>
         <p:nvSpPr>
-          <p:cNvPr id="8" name="Rounded Rectangle 7"/>
-          <p:cNvSpPr/>
-          <p:nvPr/>
-        </p:nvSpPr>
-        <p:spPr>
-          <a:xfrm>
-            <a:off x="822960" y="2468880"/>
-            <a:ext cx="2468880" cy="91440"/>
-          </a:xfrm>
-          <a:prstGeom prst="roundRect">
-            <a:avLst>
-              <a:gd name="adj" fmla="val 50000"/>
-            </a:avLst>
-          </a:prstGeom>
-          <a:solidFill>
-            <a:srgbClr val="DDE3EA"/>
-          </a:solidFill>
-          <a:ln>
-            <a:noFill/>
-          </a:ln>
-          <a:effectLst/>
-        </p:spPr>
-        <p:style>
-          <a:lnRef idx="1">
-            <a:schemeClr val="accent1"/>
-          </a:lnRef>
-          <a:fillRef idx="3">
-            <a:schemeClr val="accent1"/>
-          </a:fillRef>
-          <a:effectRef idx="2">
-            <a:schemeClr val="accent1"/>
-          </a:effectRef>
-          <a:fontRef idx="minor">
-            <a:schemeClr val="lt1"/>
-          </a:fontRef>
-        </p:style>
-        <p:txBody>
-          <a:bodyPr rtlCol="0" anchor="ctr"/>
-          <a:lstStyle/>
-          <a:p>
-            <a:pPr algn="ctr"/>
-          </a:p>
-        </p:txBody>
-      </p:sp>
-      <p:sp>
-        <p:nvSpPr>
-          <p:cNvPr id="9" name="Rounded Rectangle 8"/>
-          <p:cNvSpPr/>
-          <p:nvPr/>
-        </p:nvSpPr>
-        <p:spPr>
-          <a:xfrm>
-            <a:off x="822960" y="2697480"/>
-            <a:ext cx="2834640" cy="91440"/>
-          </a:xfrm>
-          <a:prstGeom prst="roundRect">
-            <a:avLst>
-              <a:gd name="adj" fmla="val 50000"/>
-            </a:avLst>
-          </a:prstGeom>
-          <a:solidFill>
-            <a:srgbClr val="DDE3EA"/>
-          </a:solidFill>
-          <a:ln>
-            <a:noFill/>
-          </a:ln>
-          <a:effectLst/>
-        </p:spPr>
-        <p:style>
-          <a:lnRef idx="1">
-            <a:schemeClr val="accent1"/>
-          </a:lnRef>
-          <a:fillRef idx="3">
-            <a:schemeClr val="accent1"/>
-          </a:fillRef>
-          <a:effectRef idx="2">
-            <a:schemeClr val="accent1"/>
-          </a:effectRef>
-          <a:fontRef idx="minor">
-            <a:schemeClr val="lt1"/>
-          </a:fontRef>
-        </p:style>
-        <p:txBody>
-          <a:bodyPr rtlCol="0" anchor="ctr"/>
-          <a:lstStyle/>
-          <a:p>
-            <a:pPr algn="ctr"/>
-          </a:p>
-        </p:txBody>
-      </p:sp>
-      <p:sp>
-        <p:nvSpPr>
-          <p:cNvPr id="10" name="Rounded Rectangle 9"/>
-          <p:cNvSpPr/>
-          <p:nvPr/>
-        </p:nvSpPr>
-        <p:spPr>
-          <a:xfrm>
-            <a:off x="822960" y="2926080"/>
-            <a:ext cx="2011680" cy="91440"/>
-          </a:xfrm>
-          <a:prstGeom prst="roundRect">
-            <a:avLst>
-              <a:gd name="adj" fmla="val 50000"/>
-            </a:avLst>
-          </a:prstGeom>
-          <a:solidFill>
-            <a:srgbClr val="DDE3EA"/>
-          </a:solidFill>
-          <a:ln>
-            <a:noFill/>
-          </a:ln>
-          <a:effectLst/>
-        </p:spPr>
-        <p:style>
-          <a:lnRef idx="1">
-            <a:schemeClr val="accent1"/>
-          </a:lnRef>
-          <a:fillRef idx="3">
-            <a:schemeClr val="accent1"/>
-          </a:fillRef>
-          <a:effectRef idx="2">
-            <a:schemeClr val="accent1"/>
-          </a:effectRef>
-          <a:fontRef idx="minor">
-            <a:schemeClr val="lt1"/>
-          </a:fontRef>
-        </p:style>
-        <p:txBody>
-          <a:bodyPr rtlCol="0" anchor="ctr"/>
-          <a:lstStyle/>
-          <a:p>
-            <a:pPr algn="ctr"/>
-          </a:p>
-        </p:txBody>
-      </p:sp>
-      <p:sp>
-        <p:nvSpPr>
-          <p:cNvPr id="11" name="Rounded Rectangle 10"/>
-          <p:cNvSpPr/>
-          <p:nvPr/>
-        </p:nvSpPr>
-        <p:spPr>
-          <a:xfrm>
-            <a:off x="822960" y="3154680"/>
-            <a:ext cx="2651760" cy="91440"/>
-          </a:xfrm>
-          <a:prstGeom prst="roundRect">
-            <a:avLst>
-              <a:gd name="adj" fmla="val 50000"/>
-            </a:avLst>
-          </a:prstGeom>
-          <a:solidFill>
-            <a:srgbClr val="DDE3EA"/>
-          </a:solidFill>
-          <a:ln>
-            <a:noFill/>
-          </a:ln>
-          <a:effectLst/>
-        </p:spPr>
-        <p:style>
-          <a:lnRef idx="1">
-            <a:schemeClr val="accent1"/>
-          </a:lnRef>
-          <a:fillRef idx="3">
-            <a:schemeClr val="accent1"/>
-          </a:fillRef>
-          <a:effectRef idx="2">
-            <a:schemeClr val="accent1"/>
-          </a:effectRef>
-          <a:fontRef idx="minor">
-            <a:schemeClr val="lt1"/>
-          </a:fontRef>
-        </p:style>
-        <p:txBody>
-          <a:bodyPr rtlCol="0" anchor="ctr"/>
-          <a:lstStyle/>
-          <a:p>
-            <a:pPr algn="ctr"/>
-          </a:p>
-        </p:txBody>
-      </p:sp>
-      <p:sp>
-        <p:nvSpPr>
-          <p:cNvPr id="12" name="Rounded Rectangle 11"/>
-          <p:cNvSpPr/>
-          <p:nvPr/>
-        </p:nvSpPr>
-        <p:spPr>
-          <a:xfrm>
-            <a:off x="822960" y="3383280"/>
-            <a:ext cx="2743200" cy="91440"/>
-          </a:xfrm>
-          <a:prstGeom prst="roundRect">
-            <a:avLst>
-              <a:gd name="adj" fmla="val 50000"/>
-            </a:avLst>
-          </a:prstGeom>
-          <a:solidFill>
-            <a:srgbClr val="DDE3EA"/>
-          </a:solidFill>
-          <a:ln>
-            <a:noFill/>
-          </a:ln>
-          <a:effectLst/>
-        </p:spPr>
-        <p:style>
-          <a:lnRef idx="1">
-            <a:schemeClr val="accent1"/>
-          </a:lnRef>
-          <a:fillRef idx="3">
-            <a:schemeClr val="accent1"/>
-          </a:fillRef>
-          <a:effectRef idx="2">
-            <a:schemeClr val="accent1"/>
-          </a:effectRef>
-          <a:fontRef idx="minor">
-            <a:schemeClr val="lt1"/>
-          </a:fontRef>
-        </p:style>
-        <p:txBody>
-          <a:bodyPr rtlCol="0" anchor="ctr"/>
-          <a:lstStyle/>
-          <a:p>
-            <a:pPr algn="ctr"/>
-          </a:p>
-        </p:txBody>
-      </p:sp>
-      <p:sp>
-        <p:nvSpPr>
-          <p:cNvPr id="13" name="Rounded Rectangle 12"/>
-          <p:cNvSpPr/>
-          <p:nvPr/>
-        </p:nvSpPr>
-        <p:spPr>
-          <a:xfrm>
-            <a:off x="822960" y="3611880"/>
-            <a:ext cx="1737360" cy="91440"/>
-          </a:xfrm>
-          <a:prstGeom prst="roundRect">
-            <a:avLst>
-              <a:gd name="adj" fmla="val 50000"/>
-            </a:avLst>
-          </a:prstGeom>
-          <a:solidFill>
-            <a:srgbClr val="DDE3EA"/>
-          </a:solidFill>
-          <a:ln>
-            <a:noFill/>
-          </a:ln>
-          <a:effectLst/>
-        </p:spPr>
-        <p:style>
-          <a:lnRef idx="1">
-            <a:schemeClr val="accent1"/>
-          </a:lnRef>
-          <a:fillRef idx="3">
-            <a:schemeClr val="accent1"/>
-          </a:fillRef>
-          <a:effectRef idx="2">
-            <a:schemeClr val="accent1"/>
-          </a:effectRef>
-          <a:fontRef idx="minor">
-            <a:schemeClr val="lt1"/>
-          </a:fontRef>
-        </p:style>
-        <p:txBody>
-          <a:bodyPr rtlCol="0" anchor="ctr"/>
-          <a:lstStyle/>
-          <a:p>
-            <a:pPr algn="ctr"/>
-          </a:p>
-        </p:txBody>
-      </p:sp>
-      <p:sp>
-        <p:nvSpPr>
-          <p:cNvPr id="14" name="Rounded Rectangle 13"/>
-          <p:cNvSpPr/>
-          <p:nvPr/>
-        </p:nvSpPr>
-        <p:spPr>
-          <a:xfrm>
-            <a:off x="822960" y="3840480"/>
-            <a:ext cx="2560320" cy="91440"/>
-          </a:xfrm>
-          <a:prstGeom prst="roundRect">
-            <a:avLst>
-              <a:gd name="adj" fmla="val 50000"/>
-            </a:avLst>
-          </a:prstGeom>
-          <a:solidFill>
-            <a:srgbClr val="DDE3EA"/>
-          </a:solidFill>
-          <a:ln>
-            <a:noFill/>
-          </a:ln>
-          <a:effectLst/>
-        </p:spPr>
-        <p:style>
-          <a:lnRef idx="1">
-            <a:schemeClr val="accent1"/>
-          </a:lnRef>
-          <a:fillRef idx="3">
-            <a:schemeClr val="accent1"/>
-          </a:fillRef>
-          <a:effectRef idx="2">
-            <a:schemeClr val="accent1"/>
-          </a:effectRef>
-          <a:fontRef idx="minor">
-            <a:schemeClr val="lt1"/>
-          </a:fontRef>
-        </p:style>
-        <p:txBody>
-          <a:bodyPr rtlCol="0" anchor="ctr"/>
-          <a:lstStyle/>
-          <a:p>
-            <a:pPr algn="ctr"/>
-          </a:p>
-        </p:txBody>
-      </p:sp>
-      <p:sp>
-        <p:nvSpPr>
-          <p:cNvPr id="15" name="Rounded Rectangle 14"/>
-          <p:cNvSpPr/>
-          <p:nvPr/>
-        </p:nvSpPr>
-        <p:spPr>
-          <a:xfrm>
-            <a:off x="822960" y="4069080"/>
-            <a:ext cx="2286000" cy="91440"/>
-          </a:xfrm>
-          <a:prstGeom prst="roundRect">
-            <a:avLst>
-              <a:gd name="adj" fmla="val 50000"/>
-            </a:avLst>
-          </a:prstGeom>
-          <a:solidFill>
-            <a:srgbClr val="DDE3EA"/>
-          </a:solidFill>
-          <a:ln>
-            <a:noFill/>
-          </a:ln>
-          <a:effectLst/>
-        </p:spPr>
-        <p:style>
-          <a:lnRef idx="1">
-            <a:schemeClr val="accent1"/>
-          </a:lnRef>
-          <a:fillRef idx="3">
-            <a:schemeClr val="accent1"/>
-          </a:fillRef>
-          <a:effectRef idx="2">
-            <a:schemeClr val="accent1"/>
-          </a:effectRef>
-          <a:fontRef idx="minor">
-            <a:schemeClr val="lt1"/>
-          </a:fontRef>
-        </p:style>
-        <p:txBody>
-          <a:bodyPr rtlCol="0" anchor="ctr"/>
-          <a:lstStyle/>
-          <a:p>
-            <a:pPr algn="ctr"/>
-          </a:p>
-        </p:txBody>
-      </p:sp>
-      <p:sp>
-        <p:nvSpPr>
-          <p:cNvPr id="16" name="Rounded Rectangle 15"/>
-          <p:cNvSpPr/>
-          <p:nvPr/>
-        </p:nvSpPr>
-        <p:spPr>
-          <a:xfrm>
-            <a:off x="822960" y="4434840"/>
-            <a:ext cx="1188720" cy="365760"/>
-          </a:xfrm>
-          <a:prstGeom prst="roundRect">
-            <a:avLst>
-              <a:gd name="adj" fmla="val 50000"/>
-            </a:avLst>
-          </a:prstGeom>
-          <a:solidFill>
-            <a:srgbClr val="EEF4FB"/>
-          </a:solidFill>
-          <a:ln>
-            <a:noFill/>
-          </a:ln>
-          <a:effectLst/>
-        </p:spPr>
-        <p:style>
-          <a:lnRef idx="1">
-            <a:schemeClr val="accent1"/>
-          </a:lnRef>
-          <a:fillRef idx="3">
-            <a:schemeClr val="accent1"/>
-          </a:fillRef>
-          <a:effectRef idx="2">
-            <a:schemeClr val="accent1"/>
-          </a:effectRef>
-          <a:fontRef idx="minor">
-            <a:schemeClr val="lt1"/>
-          </a:fontRef>
-        </p:style>
-        <p:txBody>
-          <a:bodyPr rtlCol="0" anchor="ctr"/>
-          <a:lstStyle/>
-          <a:p>
-            <a:pPr algn="ctr"/>
-          </a:p>
-        </p:txBody>
-      </p:sp>
-      <p:sp>
-        <p:nvSpPr>
-          <p:cNvPr id="17" name="TextBox 16"/>
+          <p:cNvPr id="5" name="TextBox 4"/>
           <p:cNvSpPr txBox="1"/>
           <p:nvPr/>
         </p:nvSpPr>
         <p:spPr>
           <a:xfrm>
-            <a:off x="822960" y="4434840"/>
-            <a:ext cx="1188720" cy="365760"/>
+            <a:off x="822960" y="1645920"/>
+            <a:ext cx="502920" cy="502920"/>
           </a:xfrm>
           <a:prstGeom prst="rect">
             <a:avLst/>
@@ -7762,75 +6702,29 @@
           <a:p>
             <a:pPr algn="ctr"/>
             <a:r>
-              <a:rPr sz="1100" b="1">
-                <a:solidFill>
-                  <a:srgbClr val="0058B2"/>
-                </a:solidFill>
-                <a:latin typeface="Malgun Gothic"/>
-                <a:ea typeface="Malgun Gothic"/>
-                <a:cs typeface="Malgun Gothic"/>
-              </a:rPr>
-              <a:t>첨부.hwp</a:t>
-            </a:r>
-          </a:p>
-        </p:txBody>
-      </p:sp>
-      <p:sp>
-        <p:nvSpPr>
-          <p:cNvPr id="18" name="Rounded Rectangle 17"/>
-          <p:cNvSpPr/>
-          <p:nvPr/>
-        </p:nvSpPr>
-        <p:spPr>
-          <a:xfrm>
-            <a:off x="2148840" y="4434840"/>
-            <a:ext cx="1188720" cy="365760"/>
-          </a:xfrm>
-          <a:prstGeom prst="roundRect">
-            <a:avLst>
-              <a:gd name="adj" fmla="val 50000"/>
-            </a:avLst>
-          </a:prstGeom>
-          <a:solidFill>
-            <a:srgbClr val="EEF4FB"/>
-          </a:solidFill>
-          <a:ln>
-            <a:noFill/>
-          </a:ln>
-          <a:effectLst/>
-        </p:spPr>
-        <p:style>
-          <a:lnRef idx="1">
-            <a:schemeClr val="accent1"/>
-          </a:lnRef>
-          <a:fillRef idx="3">
-            <a:schemeClr val="accent1"/>
-          </a:fillRef>
-          <a:effectRef idx="2">
-            <a:schemeClr val="accent1"/>
-          </a:effectRef>
-          <a:fontRef idx="minor">
-            <a:schemeClr val="lt1"/>
-          </a:fontRef>
-        </p:style>
-        <p:txBody>
-          <a:bodyPr rtlCol="0" anchor="ctr"/>
-          <a:lstStyle/>
-          <a:p>
-            <a:pPr algn="ctr"/>
-          </a:p>
-        </p:txBody>
-      </p:sp>
-      <p:sp>
-        <p:nvSpPr>
-          <p:cNvPr id="19" name="TextBox 18"/>
+              <a:rPr sz="1500" b="1">
+                <a:solidFill>
+                  <a:srgbClr val="FFFFFF"/>
+                </a:solidFill>
+                <a:latin typeface="Malgun Gothic"/>
+                <a:ea typeface="Malgun Gothic"/>
+                <a:cs typeface="Malgun Gothic"/>
+              </a:rPr>
+              <a:t>1</a:t>
+            </a:r>
+          </a:p>
+        </p:txBody>
+      </p:sp>
+      <p:sp>
+        <p:nvSpPr>
+          <p:cNvPr id="6" name="TextBox 5"/>
           <p:cNvSpPr txBox="1"/>
           <p:nvPr/>
         </p:nvSpPr>
         <p:spPr>
           <a:xfrm>
-            <a:off x="2148840" y="4434840"/>
-            <a:ext cx="1188720" cy="365760"/>
+            <a:off x="1463040" y="1645920"/>
+            <a:ext cx="1645920" cy="502920"/>
           </a:xfrm>
           <a:prstGeom prst="rect">
             <a:avLst/>
@@ -7843,9 +6737,46 @@
           </a:bodyPr>
           <a:lstStyle/>
           <a:p>
-            <a:pPr algn="ctr"/>
-            <a:r>
-              <a:rPr sz="1100" b="1">
+            <a:pPr algn="l"/>
+            <a:r>
+              <a:rPr sz="2000" b="1">
+                <a:solidFill>
+                  <a:srgbClr val="1F232B"/>
+                </a:solidFill>
+                <a:latin typeface="Malgun Gothic"/>
+                <a:ea typeface="Malgun Gothic"/>
+                <a:cs typeface="Malgun Gothic"/>
+              </a:rPr>
+              <a:t>수집</a:t>
+            </a:r>
+          </a:p>
+        </p:txBody>
+      </p:sp>
+      <p:sp>
+        <p:nvSpPr>
+          <p:cNvPr id="7" name="TextBox 6"/>
+          <p:cNvSpPr txBox="1"/>
+          <p:nvPr/>
+        </p:nvSpPr>
+        <p:spPr>
+          <a:xfrm>
+            <a:off x="822960" y="2286000"/>
+            <a:ext cx="2194560" cy="320040"/>
+          </a:xfrm>
+          <a:prstGeom prst="rect">
+            <a:avLst/>
+          </a:prstGeom>
+          <a:noFill/>
+        </p:spPr>
+        <p:txBody>
+          <a:bodyPr wrap="square" lIns="0" rIns="0" tIns="0" bIns="0" anchor="t">
+            <a:spAutoFit/>
+          </a:bodyPr>
+          <a:lstStyle/>
+          <a:p>
+            <a:pPr algn="l"/>
+            <a:r>
+              <a:rPr sz="1200" b="1">
                 <a:solidFill>
                   <a:srgbClr val="0058B2"/>
                 </a:solidFill>
@@ -7853,21 +6784,134 @@
                 <a:ea typeface="Malgun Gothic"/>
                 <a:cs typeface="Malgun Gothic"/>
               </a:rPr>
-              <a:t>안내.pdf</a:t>
-            </a:r>
-          </a:p>
-        </p:txBody>
-      </p:sp>
-      <p:sp>
-        <p:nvSpPr>
-          <p:cNvPr id="20" name="Right Arrow 19"/>
+              <a:t>매시간 자동</a:t>
+            </a:r>
+          </a:p>
+        </p:txBody>
+      </p:sp>
+      <p:sp>
+        <p:nvSpPr>
+          <p:cNvPr id="8" name="TextBox 7"/>
+          <p:cNvSpPr txBox="1"/>
+          <p:nvPr/>
+        </p:nvSpPr>
+        <p:spPr>
+          <a:xfrm>
+            <a:off x="822960" y="2697480"/>
+            <a:ext cx="2286000" cy="1920240"/>
+          </a:xfrm>
+          <a:prstGeom prst="rect">
+            <a:avLst/>
+          </a:prstGeom>
+          <a:noFill/>
+        </p:spPr>
+        <p:txBody>
+          <a:bodyPr wrap="square" lIns="0" rIns="0" tIns="0" bIns="0" anchor="t">
+            <a:spAutoFit/>
+          </a:bodyPr>
+          <a:lstStyle/>
+          <a:p>
+            <a:pPr algn="l">
+              <a:spcAft>
+                <a:spcPts val="100"/>
+              </a:spcAft>
+            </a:pPr>
+            <a:r>
+              <a:rPr sz="1150" b="0">
+                <a:solidFill>
+                  <a:srgbClr val="1F232B"/>
+                </a:solidFill>
+                <a:latin typeface="Malgun Gothic"/>
+                <a:ea typeface="Malgun Gothic"/>
+                <a:cs typeface="Malgun Gothic"/>
+              </a:rPr>
+              <a:t>학교 게시판 112곳 크롤링</a:t>
+            </a:r>
+          </a:p>
+          <a:p>
+            <a:pPr algn="l">
+              <a:spcAft>
+                <a:spcPts val="100"/>
+              </a:spcAft>
+            </a:pPr>
+            <a:r>
+              <a:rPr sz="1150" b="0">
+                <a:solidFill>
+                  <a:srgbClr val="1F232B"/>
+                </a:solidFill>
+                <a:latin typeface="Malgun Gothic"/>
+                <a:ea typeface="Malgun Gothic"/>
+                <a:cs typeface="Malgun Gothic"/>
+              </a:rPr>
+              <a:t>(학교 사이트만)</a:t>
+            </a:r>
+          </a:p>
+          <a:p>
+            <a:pPr algn="l">
+              <a:spcAft>
+                <a:spcPts val="100"/>
+              </a:spcAft>
+            </a:pPr>
+            <a:r>
+              <a:rPr sz="1150" b="0">
+                <a:solidFill>
+                  <a:srgbClr val="1F232B"/>
+                </a:solidFill>
+                <a:latin typeface="Malgun Gothic"/>
+                <a:ea typeface="Malgun Gothic"/>
+                <a:cs typeface="Malgun Gothic"/>
+              </a:rPr>
+              <a:t>공공데이터 API 4종</a:t>
+            </a:r>
+          </a:p>
+          <a:p>
+            <a:pPr algn="l">
+              <a:spcAft>
+                <a:spcPts val="100"/>
+              </a:spcAft>
+            </a:pPr>
+            <a:r>
+              <a:rPr sz="1150" b="0">
+                <a:solidFill>
+                  <a:srgbClr val="1F232B"/>
+                </a:solidFill>
+                <a:latin typeface="Malgun Gothic"/>
+                <a:ea typeface="Malgun Gothic"/>
+                <a:cs typeface="Malgun Gothic"/>
+              </a:rPr>
+              <a:t>큐넷·데이터자격·</a:t>
+            </a:r>
+          </a:p>
+          <a:p>
+            <a:pPr algn="l">
+              <a:spcAft>
+                <a:spcPts val="100"/>
+              </a:spcAft>
+            </a:pPr>
+            <a:r>
+              <a:rPr sz="1150" b="0">
+                <a:solidFill>
+                  <a:srgbClr val="1F232B"/>
+                </a:solidFill>
+                <a:latin typeface="Malgun Gothic"/>
+                <a:ea typeface="Malgun Gothic"/>
+                <a:cs typeface="Malgun Gothic"/>
+              </a:rPr>
+              <a:t>K-Startup·한국장학재단</a:t>
+            </a:r>
+          </a:p>
+        </p:txBody>
+      </p:sp>
+      <p:sp>
+        <p:nvSpPr>
+          <p:cNvPr id="9" name="Right Arrow 8"/>
           <p:cNvSpPr/>
           <p:nvPr/>
         </p:nvSpPr>
         <p:spPr>
           <a:xfrm>
-            <a:off x="3977639" y="3291840"/>
-            <a:ext cx="329184" cy="365760"/>
+            <a:off x="3182112" y="2788920"/>
+            <a:ext cx="237744" cy="365760"/>
           </a:xfrm>
           <a:prstGeom prst="rightArrow">
             <a:avLst/>
@@ -7904,136 +6948,18 @@
       </p:sp>
       <p:sp>
         <p:nvSpPr>
-          <p:cNvPr id="21" name="Oval 20"/>
+          <p:cNvPr id="10" name="Rounded Rectangle 9"/>
           <p:cNvSpPr/>
           <p:nvPr/>
         </p:nvSpPr>
         <p:spPr>
           <a:xfrm>
-            <a:off x="4480560" y="1417320"/>
-            <a:ext cx="411480" cy="411480"/>
-          </a:xfrm>
-          <a:prstGeom prst="ellipse">
-            <a:avLst/>
-          </a:prstGeom>
-          <a:solidFill>
-            <a:srgbClr val="0058B2"/>
-          </a:solidFill>
-          <a:ln>
-            <a:noFill/>
-          </a:ln>
-          <a:effectLst/>
-        </p:spPr>
-        <p:style>
-          <a:lnRef idx="1">
-            <a:schemeClr val="accent1"/>
-          </a:lnRef>
-          <a:fillRef idx="3">
-            <a:schemeClr val="accent1"/>
-          </a:fillRef>
-          <a:effectRef idx="2">
-            <a:schemeClr val="accent1"/>
-          </a:effectRef>
-          <a:fontRef idx="minor">
-            <a:schemeClr val="lt1"/>
-          </a:fontRef>
-        </p:style>
-        <p:txBody>
-          <a:bodyPr rtlCol="0" anchor="ctr"/>
-          <a:lstStyle/>
-          <a:p>
-            <a:pPr algn="ctr"/>
-          </a:p>
-        </p:txBody>
-      </p:sp>
-      <p:sp>
-        <p:nvSpPr>
-          <p:cNvPr id="22" name="TextBox 21"/>
-          <p:cNvSpPr txBox="1"/>
-          <p:nvPr/>
-        </p:nvSpPr>
-        <p:spPr>
-          <a:xfrm>
-            <a:off x="4480560" y="1417320"/>
-            <a:ext cx="411480" cy="411480"/>
-          </a:xfrm>
-          <a:prstGeom prst="rect">
-            <a:avLst/>
-          </a:prstGeom>
-          <a:noFill/>
-        </p:spPr>
-        <p:txBody>
-          <a:bodyPr wrap="square" lIns="0" rIns="0" tIns="0" bIns="0" anchor="ctr">
-            <a:spAutoFit/>
-          </a:bodyPr>
-          <a:lstStyle/>
-          <a:p>
-            <a:pPr algn="ctr"/>
-            <a:r>
-              <a:rPr sz="1400" b="1">
-                <a:solidFill>
-                  <a:srgbClr val="FFFFFF"/>
-                </a:solidFill>
-                <a:latin typeface="Malgun Gothic"/>
-                <a:ea typeface="Malgun Gothic"/>
-                <a:cs typeface="Malgun Gothic"/>
-              </a:rPr>
-              <a:t>2</a:t>
-            </a:r>
-          </a:p>
-        </p:txBody>
-      </p:sp>
-      <p:sp>
-        <p:nvSpPr>
-          <p:cNvPr id="23" name="TextBox 22"/>
-          <p:cNvSpPr txBox="1"/>
-          <p:nvPr/>
-        </p:nvSpPr>
-        <p:spPr>
-          <a:xfrm>
-            <a:off x="4983480" y="1444752"/>
-            <a:ext cx="2743200" cy="365760"/>
-          </a:xfrm>
-          <a:prstGeom prst="rect">
-            <a:avLst/>
-          </a:prstGeom>
-          <a:noFill/>
-        </p:spPr>
-        <p:txBody>
-          <a:bodyPr wrap="square" lIns="0" rIns="0" tIns="0" bIns="0" anchor="t">
-            <a:spAutoFit/>
-          </a:bodyPr>
-          <a:lstStyle/>
-          <a:p>
-            <a:pPr algn="l"/>
-            <a:r>
-              <a:rPr sz="1600" b="1">
-                <a:solidFill>
-                  <a:srgbClr val="1F232B"/>
-                </a:solidFill>
-                <a:latin typeface="Malgun Gothic"/>
-                <a:ea typeface="Malgun Gothic"/>
-                <a:cs typeface="Malgun Gothic"/>
-              </a:rPr>
-              <a:t>AI가 읽고 판단</a:t>
-            </a:r>
-          </a:p>
-        </p:txBody>
-      </p:sp>
-      <p:sp>
-        <p:nvSpPr>
-          <p:cNvPr id="24" name="Rounded Rectangle 23"/>
-          <p:cNvSpPr/>
-          <p:nvPr/>
-        </p:nvSpPr>
-        <p:spPr>
-          <a:xfrm>
-            <a:off x="4480560" y="2011680"/>
-            <a:ext cx="3063240" cy="621792"/>
+            <a:off x="3447288" y="1417320"/>
+            <a:ext cx="2560320" cy="3108960"/>
           </a:xfrm>
           <a:prstGeom prst="roundRect">
             <a:avLst>
-              <a:gd name="adj" fmla="val 12000"/>
+              <a:gd name="adj" fmla="val 6000"/>
             </a:avLst>
           </a:prstGeom>
           <a:solidFill>
@@ -8070,14 +6996,58 @@
       </p:sp>
       <p:sp>
         <p:nvSpPr>
-          <p:cNvPr id="25" name="TextBox 24"/>
+          <p:cNvPr id="11" name="Oval 10"/>
+          <p:cNvSpPr/>
+          <p:nvPr/>
+        </p:nvSpPr>
+        <p:spPr>
+          <a:xfrm>
+            <a:off x="3675887" y="1645920"/>
+            <a:ext cx="502920" cy="502920"/>
+          </a:xfrm>
+          <a:prstGeom prst="ellipse">
+            <a:avLst/>
+          </a:prstGeom>
+          <a:solidFill>
+            <a:srgbClr val="0058B2"/>
+          </a:solidFill>
+          <a:ln>
+            <a:noFill/>
+          </a:ln>
+          <a:effectLst/>
+        </p:spPr>
+        <p:style>
+          <a:lnRef idx="1">
+            <a:schemeClr val="accent1"/>
+          </a:lnRef>
+          <a:fillRef idx="3">
+            <a:schemeClr val="accent1"/>
+          </a:fillRef>
+          <a:effectRef idx="2">
+            <a:schemeClr val="accent1"/>
+          </a:effectRef>
+          <a:fontRef idx="minor">
+            <a:schemeClr val="lt1"/>
+          </a:fontRef>
+        </p:style>
+        <p:txBody>
+          <a:bodyPr rtlCol="0" anchor="ctr"/>
+          <a:lstStyle/>
+          <a:p>
+            <a:pPr algn="ctr"/>
+          </a:p>
+        </p:txBody>
+      </p:sp>
+      <p:sp>
+        <p:nvSpPr>
+          <p:cNvPr id="12" name="TextBox 11"/>
           <p:cNvSpPr txBox="1"/>
           <p:nvPr/>
         </p:nvSpPr>
         <p:spPr>
           <a:xfrm>
-            <a:off x="4663440" y="2011680"/>
-            <a:ext cx="640080" cy="621792"/>
+            <a:off x="3675887" y="1645920"/>
+            <a:ext cx="502920" cy="502920"/>
           </a:xfrm>
           <a:prstGeom prst="rect">
             <a:avLst/>
@@ -8090,31 +7060,31 @@
           </a:bodyPr>
           <a:lstStyle/>
           <a:p>
-            <a:pPr algn="l"/>
-            <a:r>
-              <a:rPr sz="1200" b="1">
-                <a:solidFill>
-                  <a:srgbClr val="0058B2"/>
-                </a:solidFill>
-                <a:latin typeface="Malgun Gothic"/>
-                <a:ea typeface="Malgun Gothic"/>
-                <a:cs typeface="Malgun Gothic"/>
-              </a:rPr>
-              <a:t>분야</a:t>
-            </a:r>
-          </a:p>
-        </p:txBody>
-      </p:sp>
-      <p:sp>
-        <p:nvSpPr>
-          <p:cNvPr id="26" name="TextBox 25"/>
+            <a:pPr algn="ctr"/>
+            <a:r>
+              <a:rPr sz="1500" b="1">
+                <a:solidFill>
+                  <a:srgbClr val="FFFFFF"/>
+                </a:solidFill>
+                <a:latin typeface="Malgun Gothic"/>
+                <a:ea typeface="Malgun Gothic"/>
+                <a:cs typeface="Malgun Gothic"/>
+              </a:rPr>
+              <a:t>2</a:t>
+            </a:r>
+          </a:p>
+        </p:txBody>
+      </p:sp>
+      <p:sp>
+        <p:nvSpPr>
+          <p:cNvPr id="13" name="TextBox 12"/>
           <p:cNvSpPr txBox="1"/>
           <p:nvPr/>
         </p:nvSpPr>
         <p:spPr>
           <a:xfrm>
-            <a:off x="5303520" y="2011680"/>
-            <a:ext cx="2194560" cy="621792"/>
+            <a:off x="4315968" y="1645920"/>
+            <a:ext cx="1645920" cy="502920"/>
           </a:xfrm>
           <a:prstGeom prst="rect">
             <a:avLst/>
@@ -8129,7 +7099,7 @@
           <a:p>
             <a:pPr algn="l"/>
             <a:r>
-              <a:rPr sz="1200" b="0">
+              <a:rPr sz="2000" b="1">
                 <a:solidFill>
                   <a:srgbClr val="1F232B"/>
                 </a:solidFill>
@@ -8137,25 +7107,183 @@
                 <a:ea typeface="Malgun Gothic"/>
                 <a:cs typeface="Malgun Gothic"/>
               </a:rPr>
-              <a:t>장학 · 취업 · 공모전 · 자격증 …</a:t>
-            </a:r>
-          </a:p>
-        </p:txBody>
-      </p:sp>
-      <p:sp>
-        <p:nvSpPr>
-          <p:cNvPr id="27" name="Rounded Rectangle 26"/>
+              <a:t>읽기</a:t>
+            </a:r>
+          </a:p>
+        </p:txBody>
+      </p:sp>
+      <p:sp>
+        <p:nvSpPr>
+          <p:cNvPr id="14" name="TextBox 13"/>
+          <p:cNvSpPr txBox="1"/>
+          <p:nvPr/>
+        </p:nvSpPr>
+        <p:spPr>
+          <a:xfrm>
+            <a:off x="3675887" y="2286000"/>
+            <a:ext cx="2194560" cy="320040"/>
+          </a:xfrm>
+          <a:prstGeom prst="rect">
+            <a:avLst/>
+          </a:prstGeom>
+          <a:noFill/>
+        </p:spPr>
+        <p:txBody>
+          <a:bodyPr wrap="square" lIns="0" rIns="0" tIns="0" bIns="0" anchor="t">
+            <a:spAutoFit/>
+          </a:bodyPr>
+          <a:lstStyle/>
+          <a:p>
+            <a:pPr algn="l"/>
+            <a:r>
+              <a:rPr sz="1200" b="1">
+                <a:solidFill>
+                  <a:srgbClr val="0058B2"/>
+                </a:solidFill>
+                <a:latin typeface="Malgun Gothic"/>
+                <a:ea typeface="Malgun Gothic"/>
+                <a:cs typeface="Malgun Gothic"/>
+              </a:rPr>
+              <a:t>본문 + 첨부</a:t>
+            </a:r>
+          </a:p>
+        </p:txBody>
+      </p:sp>
+      <p:sp>
+        <p:nvSpPr>
+          <p:cNvPr id="15" name="TextBox 14"/>
+          <p:cNvSpPr txBox="1"/>
+          <p:nvPr/>
+        </p:nvSpPr>
+        <p:spPr>
+          <a:xfrm>
+            <a:off x="3675887" y="2697480"/>
+            <a:ext cx="2286000" cy="1920240"/>
+          </a:xfrm>
+          <a:prstGeom prst="rect">
+            <a:avLst/>
+          </a:prstGeom>
+          <a:noFill/>
+        </p:spPr>
+        <p:txBody>
+          <a:bodyPr wrap="square" lIns="0" rIns="0" tIns="0" bIns="0" anchor="t">
+            <a:spAutoFit/>
+          </a:bodyPr>
+          <a:lstStyle/>
+          <a:p>
+            <a:pPr algn="l">
+              <a:spcAft>
+                <a:spcPts val="100"/>
+              </a:spcAft>
+            </a:pPr>
+            <a:r>
+              <a:rPr sz="1150" b="0">
+                <a:solidFill>
+                  <a:srgbClr val="1F232B"/>
+                </a:solidFill>
+                <a:latin typeface="Malgun Gothic"/>
+                <a:ea typeface="Malgun Gothic"/>
+                <a:cs typeface="Malgun Gothic"/>
+              </a:rPr>
+              <a:t>HWP·HWPX·PDF·DOCX</a:t>
+            </a:r>
+          </a:p>
+          <a:p>
+            <a:pPr algn="l">
+              <a:spcAft>
+                <a:spcPts val="100"/>
+              </a:spcAft>
+            </a:pPr>
+            <a:r>
+              <a:rPr sz="1150" b="0">
+                <a:solidFill>
+                  <a:srgbClr val="1F232B"/>
+                </a:solidFill>
+                <a:latin typeface="Malgun Gothic"/>
+                <a:ea typeface="Malgun Gothic"/>
+                <a:cs typeface="Malgun Gothic"/>
+              </a:rPr>
+              <a:t>첨부파일 텍스트 추출</a:t>
+            </a:r>
+          </a:p>
+          <a:p>
+            <a:pPr algn="l">
+              <a:spcAft>
+                <a:spcPts val="100"/>
+              </a:spcAft>
+            </a:pPr>
+            <a:r>
+              <a:rPr sz="1150" b="0">
+                <a:solidFill>
+                  <a:srgbClr val="1F232B"/>
+                </a:solidFill>
+                <a:latin typeface="Malgun Gothic"/>
+                <a:ea typeface="Malgun Gothic"/>
+                <a:cs typeface="Malgun Gothic"/>
+              </a:rPr>
+              <a:t>같은 공지 중복 묶기</a:t>
+            </a:r>
+          </a:p>
+        </p:txBody>
+      </p:sp>
+      <p:sp>
+        <p:nvSpPr>
+          <p:cNvPr id="16" name="Right Arrow 15"/>
           <p:cNvSpPr/>
           <p:nvPr/>
         </p:nvSpPr>
         <p:spPr>
           <a:xfrm>
-            <a:off x="4480560" y="2779776"/>
-            <a:ext cx="3063240" cy="621792"/>
+            <a:off x="6035040" y="2788920"/>
+            <a:ext cx="237744" cy="365760"/>
+          </a:xfrm>
+          <a:prstGeom prst="rightArrow">
+            <a:avLst/>
+          </a:prstGeom>
+          <a:solidFill>
+            <a:srgbClr val="B8C1CC"/>
+          </a:solidFill>
+          <a:ln>
+            <a:noFill/>
+          </a:ln>
+          <a:effectLst/>
+        </p:spPr>
+        <p:style>
+          <a:lnRef idx="1">
+            <a:schemeClr val="accent1"/>
+          </a:lnRef>
+          <a:fillRef idx="3">
+            <a:schemeClr val="accent1"/>
+          </a:fillRef>
+          <a:effectRef idx="2">
+            <a:schemeClr val="accent1"/>
+          </a:effectRef>
+          <a:fontRef idx="minor">
+            <a:schemeClr val="lt1"/>
+          </a:fontRef>
+        </p:style>
+        <p:txBody>
+          <a:bodyPr rtlCol="0" anchor="ctr"/>
+          <a:lstStyle/>
+          <a:p>
+            <a:pPr algn="ctr"/>
+          </a:p>
+        </p:txBody>
+      </p:sp>
+      <p:sp>
+        <p:nvSpPr>
+          <p:cNvPr id="17" name="Rounded Rectangle 16"/>
+          <p:cNvSpPr/>
+          <p:nvPr/>
+        </p:nvSpPr>
+        <p:spPr>
+          <a:xfrm>
+            <a:off x="6300216" y="1417320"/>
+            <a:ext cx="2560320" cy="3108960"/>
           </a:xfrm>
           <a:prstGeom prst="roundRect">
             <a:avLst>
-              <a:gd name="adj" fmla="val 12000"/>
+              <a:gd name="adj" fmla="val 6000"/>
             </a:avLst>
           </a:prstGeom>
           <a:solidFill>
@@ -8192,14 +7320,58 @@
       </p:sp>
       <p:sp>
         <p:nvSpPr>
-          <p:cNvPr id="28" name="TextBox 27"/>
+          <p:cNvPr id="18" name="Oval 17"/>
+          <p:cNvSpPr/>
+          <p:nvPr/>
+        </p:nvSpPr>
+        <p:spPr>
+          <a:xfrm>
+            <a:off x="6528816" y="1645920"/>
+            <a:ext cx="502920" cy="502920"/>
+          </a:xfrm>
+          <a:prstGeom prst="ellipse">
+            <a:avLst/>
+          </a:prstGeom>
+          <a:solidFill>
+            <a:srgbClr val="0058B2"/>
+          </a:solidFill>
+          <a:ln>
+            <a:noFill/>
+          </a:ln>
+          <a:effectLst/>
+        </p:spPr>
+        <p:style>
+          <a:lnRef idx="1">
+            <a:schemeClr val="accent1"/>
+          </a:lnRef>
+          <a:fillRef idx="3">
+            <a:schemeClr val="accent1"/>
+          </a:fillRef>
+          <a:effectRef idx="2">
+            <a:schemeClr val="accent1"/>
+          </a:effectRef>
+          <a:fontRef idx="minor">
+            <a:schemeClr val="lt1"/>
+          </a:fontRef>
+        </p:style>
+        <p:txBody>
+          <a:bodyPr rtlCol="0" anchor="ctr"/>
+          <a:lstStyle/>
+          <a:p>
+            <a:pPr algn="ctr"/>
+          </a:p>
+        </p:txBody>
+      </p:sp>
+      <p:sp>
+        <p:nvSpPr>
+          <p:cNvPr id="19" name="TextBox 18"/>
           <p:cNvSpPr txBox="1"/>
           <p:nvPr/>
         </p:nvSpPr>
         <p:spPr>
           <a:xfrm>
-            <a:off x="4663440" y="2779776"/>
-            <a:ext cx="640080" cy="621792"/>
+            <a:off x="6528816" y="1645920"/>
+            <a:ext cx="502920" cy="502920"/>
           </a:xfrm>
           <a:prstGeom prst="rect">
             <a:avLst/>
@@ -8212,31 +7384,31 @@
           </a:bodyPr>
           <a:lstStyle/>
           <a:p>
-            <a:pPr algn="l"/>
-            <a:r>
-              <a:rPr sz="1200" b="1">
-                <a:solidFill>
-                  <a:srgbClr val="0058B2"/>
-                </a:solidFill>
-                <a:latin typeface="Malgun Gothic"/>
-                <a:ea typeface="Malgun Gothic"/>
-                <a:cs typeface="Malgun Gothic"/>
-              </a:rPr>
-              <a:t>대상</a:t>
-            </a:r>
-          </a:p>
-        </p:txBody>
-      </p:sp>
-      <p:sp>
-        <p:nvSpPr>
-          <p:cNvPr id="29" name="TextBox 28"/>
+            <a:pPr algn="ctr"/>
+            <a:r>
+              <a:rPr sz="1500" b="1">
+                <a:solidFill>
+                  <a:srgbClr val="FFFFFF"/>
+                </a:solidFill>
+                <a:latin typeface="Malgun Gothic"/>
+                <a:ea typeface="Malgun Gothic"/>
+                <a:cs typeface="Malgun Gothic"/>
+              </a:rPr>
+              <a:t>3</a:t>
+            </a:r>
+          </a:p>
+        </p:txBody>
+      </p:sp>
+      <p:sp>
+        <p:nvSpPr>
+          <p:cNvPr id="20" name="TextBox 19"/>
           <p:cNvSpPr txBox="1"/>
           <p:nvPr/>
         </p:nvSpPr>
         <p:spPr>
           <a:xfrm>
-            <a:off x="5303520" y="2779776"/>
-            <a:ext cx="2194560" cy="621792"/>
+            <a:off x="7168896" y="1645920"/>
+            <a:ext cx="1645920" cy="502920"/>
           </a:xfrm>
           <a:prstGeom prst="rect">
             <a:avLst/>
@@ -8251,7 +7423,7 @@
           <a:p>
             <a:pPr algn="l"/>
             <a:r>
-              <a:rPr sz="1200" b="0">
+              <a:rPr sz="2000" b="1">
                 <a:solidFill>
                   <a:srgbClr val="1F232B"/>
                 </a:solidFill>
@@ -8259,25 +7431,237 @@
                 <a:ea typeface="Malgun Gothic"/>
                 <a:cs typeface="Malgun Gothic"/>
               </a:rPr>
-              <a:t>대학원생, 재학생, 신입생</a:t>
-            </a:r>
-          </a:p>
-        </p:txBody>
-      </p:sp>
-      <p:sp>
-        <p:nvSpPr>
-          <p:cNvPr id="30" name="Rounded Rectangle 29"/>
+              <a:t>정리</a:t>
+            </a:r>
+          </a:p>
+        </p:txBody>
+      </p:sp>
+      <p:sp>
+        <p:nvSpPr>
+          <p:cNvPr id="21" name="TextBox 20"/>
+          <p:cNvSpPr txBox="1"/>
+          <p:nvPr/>
+        </p:nvSpPr>
+        <p:spPr>
+          <a:xfrm>
+            <a:off x="6528816" y="2286000"/>
+            <a:ext cx="2194560" cy="320040"/>
+          </a:xfrm>
+          <a:prstGeom prst="rect">
+            <a:avLst/>
+          </a:prstGeom>
+          <a:noFill/>
+        </p:spPr>
+        <p:txBody>
+          <a:bodyPr wrap="square" lIns="0" rIns="0" tIns="0" bIns="0" anchor="t">
+            <a:spAutoFit/>
+          </a:bodyPr>
+          <a:lstStyle/>
+          <a:p>
+            <a:pPr algn="l"/>
+            <a:r>
+              <a:rPr sz="1200" b="1">
+                <a:solidFill>
+                  <a:srgbClr val="0058B2"/>
+                </a:solidFill>
+                <a:latin typeface="Malgun Gothic"/>
+                <a:ea typeface="Malgun Gothic"/>
+                <a:cs typeface="Malgun Gothic"/>
+              </a:rPr>
+              <a:t>서버 안 AI + 규칙</a:t>
+            </a:r>
+          </a:p>
+        </p:txBody>
+      </p:sp>
+      <p:sp>
+        <p:nvSpPr>
+          <p:cNvPr id="22" name="TextBox 21"/>
+          <p:cNvSpPr txBox="1"/>
+          <p:nvPr/>
+        </p:nvSpPr>
+        <p:spPr>
+          <a:xfrm>
+            <a:off x="6528816" y="2697480"/>
+            <a:ext cx="2286000" cy="1920240"/>
+          </a:xfrm>
+          <a:prstGeom prst="rect">
+            <a:avLst/>
+          </a:prstGeom>
+          <a:noFill/>
+        </p:spPr>
+        <p:txBody>
+          <a:bodyPr wrap="square" lIns="0" rIns="0" tIns="0" bIns="0" anchor="t">
+            <a:spAutoFit/>
+          </a:bodyPr>
+          <a:lstStyle/>
+          <a:p>
+            <a:pPr algn="l">
+              <a:spcAft>
+                <a:spcPts val="100"/>
+              </a:spcAft>
+            </a:pPr>
+            <a:r>
+              <a:rPr sz="1150" b="0">
+                <a:solidFill>
+                  <a:srgbClr val="1F232B"/>
+                </a:solidFill>
+                <a:latin typeface="Malgun Gothic"/>
+                <a:ea typeface="Malgun Gothic"/>
+                <a:cs typeface="Malgun Gothic"/>
+              </a:rPr>
+              <a:t>분야 분류: MiniLM 다국어</a:t>
+            </a:r>
+          </a:p>
+          <a:p>
+            <a:pPr algn="l">
+              <a:spcAft>
+                <a:spcPts val="100"/>
+              </a:spcAft>
+            </a:pPr>
+            <a:r>
+              <a:rPr sz="1150" b="0">
+                <a:solidFill>
+                  <a:srgbClr val="1F232B"/>
+                </a:solidFill>
+                <a:latin typeface="Malgun Gothic"/>
+                <a:ea typeface="Malgun Gothic"/>
+                <a:cs typeface="Malgun Gothic"/>
+              </a:rPr>
+              <a:t>임베딩(서버에서 실행)</a:t>
+            </a:r>
+          </a:p>
+          <a:p>
+            <a:pPr algn="l">
+              <a:spcAft>
+                <a:spcPts val="100"/>
+              </a:spcAft>
+            </a:pPr>
+            <a:r>
+              <a:rPr sz="1150" b="0">
+                <a:solidFill>
+                  <a:srgbClr val="1F232B"/>
+                </a:solidFill>
+                <a:latin typeface="Malgun Gothic"/>
+                <a:ea typeface="Malgun Gothic"/>
+                <a:cs typeface="Malgun Gothic"/>
+              </a:rPr>
+              <a:t>날짜 추출: 접수 시작·마감·</a:t>
+            </a:r>
+          </a:p>
+          <a:p>
+            <a:pPr algn="l">
+              <a:spcAft>
+                <a:spcPts val="100"/>
+              </a:spcAft>
+            </a:pPr>
+            <a:r>
+              <a:rPr sz="1150" b="0">
+                <a:solidFill>
+                  <a:srgbClr val="1F232B"/>
+                </a:solidFill>
+                <a:latin typeface="Malgun Gothic"/>
+                <a:ea typeface="Malgun Gothic"/>
+                <a:cs typeface="Malgun Gothic"/>
+              </a:rPr>
+              <a:t>시험일·발표일</a:t>
+            </a:r>
+          </a:p>
+          <a:p>
+            <a:pPr algn="l">
+              <a:spcAft>
+                <a:spcPts val="100"/>
+              </a:spcAft>
+            </a:pPr>
+            <a:r>
+              <a:rPr sz="1150" b="0">
+                <a:solidFill>
+                  <a:srgbClr val="1F232B"/>
+                </a:solidFill>
+                <a:latin typeface="Malgun Gothic"/>
+                <a:ea typeface="Malgun Gothic"/>
+                <a:cs typeface="Malgun Gothic"/>
+              </a:rPr>
+              <a:t>상세 칸 표: 대상·기간·</a:t>
+            </a:r>
+          </a:p>
+          <a:p>
+            <a:pPr algn="l">
+              <a:spcAft>
+                <a:spcPts val="100"/>
+              </a:spcAft>
+            </a:pPr>
+            <a:r>
+              <a:rPr sz="1150" b="0">
+                <a:solidFill>
+                  <a:srgbClr val="1F232B"/>
+                </a:solidFill>
+                <a:latin typeface="Malgun Gothic"/>
+                <a:ea typeface="Malgun Gothic"/>
+                <a:cs typeface="Malgun Gothic"/>
+              </a:rPr>
+              <a:t>신청방법·문의·주관</a:t>
+            </a:r>
+          </a:p>
+        </p:txBody>
+      </p:sp>
+      <p:sp>
+        <p:nvSpPr>
+          <p:cNvPr id="23" name="Right Arrow 22"/>
           <p:cNvSpPr/>
           <p:nvPr/>
         </p:nvSpPr>
         <p:spPr>
           <a:xfrm>
-            <a:off x="4480560" y="3547872"/>
-            <a:ext cx="3063240" cy="621792"/>
+            <a:off x="8887968" y="2788920"/>
+            <a:ext cx="237744" cy="365760"/>
+          </a:xfrm>
+          <a:prstGeom prst="rightArrow">
+            <a:avLst/>
+          </a:prstGeom>
+          <a:solidFill>
+            <a:srgbClr val="B8C1CC"/>
+          </a:solidFill>
+          <a:ln>
+            <a:noFill/>
+          </a:ln>
+          <a:effectLst/>
+        </p:spPr>
+        <p:style>
+          <a:lnRef idx="1">
+            <a:schemeClr val="accent1"/>
+          </a:lnRef>
+          <a:fillRef idx="3">
+            <a:schemeClr val="accent1"/>
+          </a:fillRef>
+          <a:effectRef idx="2">
+            <a:schemeClr val="accent1"/>
+          </a:effectRef>
+          <a:fontRef idx="minor">
+            <a:schemeClr val="lt1"/>
+          </a:fontRef>
+        </p:style>
+        <p:txBody>
+          <a:bodyPr rtlCol="0" anchor="ctr"/>
+          <a:lstStyle/>
+          <a:p>
+            <a:pPr algn="ctr"/>
+          </a:p>
+        </p:txBody>
+      </p:sp>
+      <p:sp>
+        <p:nvSpPr>
+          <p:cNvPr id="24" name="Rounded Rectangle 23"/>
+          <p:cNvSpPr/>
+          <p:nvPr/>
+        </p:nvSpPr>
+        <p:spPr>
+          <a:xfrm>
+            <a:off x="9153144" y="1417320"/>
+            <a:ext cx="2560320" cy="3108960"/>
           </a:xfrm>
           <a:prstGeom prst="roundRect">
             <a:avLst>
-              <a:gd name="adj" fmla="val 12000"/>
+              <a:gd name="adj" fmla="val 6000"/>
             </a:avLst>
           </a:prstGeom>
           <a:solidFill>
@@ -8314,254 +7698,14 @@
       </p:sp>
       <p:sp>
         <p:nvSpPr>
-          <p:cNvPr id="31" name="TextBox 30"/>
-          <p:cNvSpPr txBox="1"/>
-          <p:nvPr/>
-        </p:nvSpPr>
-        <p:spPr>
-          <a:xfrm>
-            <a:off x="4663440" y="3547872"/>
-            <a:ext cx="640080" cy="621792"/>
-          </a:xfrm>
-          <a:prstGeom prst="rect">
-            <a:avLst/>
-          </a:prstGeom>
-          <a:noFill/>
-        </p:spPr>
-        <p:txBody>
-          <a:bodyPr wrap="square" lIns="0" rIns="0" tIns="0" bIns="0" anchor="ctr">
-            <a:spAutoFit/>
-          </a:bodyPr>
-          <a:lstStyle/>
-          <a:p>
-            <a:pPr algn="l"/>
-            <a:r>
-              <a:rPr sz="1200" b="1">
-                <a:solidFill>
-                  <a:srgbClr val="0058B2"/>
-                </a:solidFill>
-                <a:latin typeface="Malgun Gothic"/>
-                <a:ea typeface="Malgun Gothic"/>
-                <a:cs typeface="Malgun Gothic"/>
-              </a:rPr>
-              <a:t>마감</a:t>
-            </a:r>
-          </a:p>
-        </p:txBody>
-      </p:sp>
-      <p:sp>
-        <p:nvSpPr>
-          <p:cNvPr id="32" name="TextBox 31"/>
-          <p:cNvSpPr txBox="1"/>
-          <p:nvPr/>
-        </p:nvSpPr>
-        <p:spPr>
-          <a:xfrm>
-            <a:off x="5303520" y="3547872"/>
-            <a:ext cx="2194560" cy="621792"/>
-          </a:xfrm>
-          <a:prstGeom prst="rect">
-            <a:avLst/>
-          </a:prstGeom>
-          <a:noFill/>
-        </p:spPr>
-        <p:txBody>
-          <a:bodyPr wrap="square" lIns="0" rIns="0" tIns="0" bIns="0" anchor="ctr">
-            <a:spAutoFit/>
-          </a:bodyPr>
-          <a:lstStyle/>
-          <a:p>
-            <a:pPr algn="l"/>
-            <a:r>
-              <a:rPr sz="1200" b="0">
-                <a:solidFill>
-                  <a:srgbClr val="1F232B"/>
-                </a:solidFill>
-                <a:latin typeface="Malgun Gothic"/>
-                <a:ea typeface="Malgun Gothic"/>
-                <a:cs typeface="Malgun Gothic"/>
-              </a:rPr>
-              <a:t>10. 23.(금)  →  D-26</a:t>
-            </a:r>
-          </a:p>
-        </p:txBody>
-      </p:sp>
-      <p:sp>
-        <p:nvSpPr>
-          <p:cNvPr id="33" name="Rounded Rectangle 32"/>
+          <p:cNvPr id="25" name="Oval 24"/>
           <p:cNvSpPr/>
           <p:nvPr/>
         </p:nvSpPr>
         <p:spPr>
           <a:xfrm>
-            <a:off x="4480560" y="4315968"/>
-            <a:ext cx="3063240" cy="621792"/>
-          </a:xfrm>
-          <a:prstGeom prst="roundRect">
-            <a:avLst>
-              <a:gd name="adj" fmla="val 12000"/>
-            </a:avLst>
-          </a:prstGeom>
-          <a:solidFill>
-            <a:srgbClr val="FFFFFF"/>
-          </a:solidFill>
-          <a:ln w="12700">
-            <a:solidFill>
-              <a:srgbClr val="DDE3EA"/>
-            </a:solidFill>
-          </a:ln>
-          <a:effectLst/>
-        </p:spPr>
-        <p:style>
-          <a:lnRef idx="1">
-            <a:schemeClr val="accent1"/>
-          </a:lnRef>
-          <a:fillRef idx="3">
-            <a:schemeClr val="accent1"/>
-          </a:fillRef>
-          <a:effectRef idx="2">
-            <a:schemeClr val="accent1"/>
-          </a:effectRef>
-          <a:fontRef idx="minor">
-            <a:schemeClr val="lt1"/>
-          </a:fontRef>
-        </p:style>
-        <p:txBody>
-          <a:bodyPr rtlCol="0" anchor="ctr"/>
-          <a:lstStyle/>
-          <a:p>
-            <a:pPr algn="ctr"/>
-          </a:p>
-        </p:txBody>
-      </p:sp>
-      <p:sp>
-        <p:nvSpPr>
-          <p:cNvPr id="34" name="TextBox 33"/>
-          <p:cNvSpPr txBox="1"/>
-          <p:nvPr/>
-        </p:nvSpPr>
-        <p:spPr>
-          <a:xfrm>
-            <a:off x="4663440" y="4315968"/>
-            <a:ext cx="640080" cy="621792"/>
-          </a:xfrm>
-          <a:prstGeom prst="rect">
-            <a:avLst/>
-          </a:prstGeom>
-          <a:noFill/>
-        </p:spPr>
-        <p:txBody>
-          <a:bodyPr wrap="square" lIns="0" rIns="0" tIns="0" bIns="0" anchor="ctr">
-            <a:spAutoFit/>
-          </a:bodyPr>
-          <a:lstStyle/>
-          <a:p>
-            <a:pPr algn="l"/>
-            <a:r>
-              <a:rPr sz="1200" b="1">
-                <a:solidFill>
-                  <a:srgbClr val="0058B2"/>
-                </a:solidFill>
-                <a:latin typeface="Malgun Gothic"/>
-                <a:ea typeface="Malgun Gothic"/>
-                <a:cs typeface="Malgun Gothic"/>
-              </a:rPr>
-              <a:t>중복</a:t>
-            </a:r>
-          </a:p>
-        </p:txBody>
-      </p:sp>
-      <p:sp>
-        <p:nvSpPr>
-          <p:cNvPr id="35" name="TextBox 34"/>
-          <p:cNvSpPr txBox="1"/>
-          <p:nvPr/>
-        </p:nvSpPr>
-        <p:spPr>
-          <a:xfrm>
-            <a:off x="5303520" y="4315968"/>
-            <a:ext cx="2194560" cy="621792"/>
-          </a:xfrm>
-          <a:prstGeom prst="rect">
-            <a:avLst/>
-          </a:prstGeom>
-          <a:noFill/>
-        </p:spPr>
-        <p:txBody>
-          <a:bodyPr wrap="square" lIns="0" rIns="0" tIns="0" bIns="0" anchor="ctr">
-            <a:spAutoFit/>
-          </a:bodyPr>
-          <a:lstStyle/>
-          <a:p>
-            <a:pPr algn="l"/>
-            <a:r>
-              <a:rPr sz="1200" b="0">
-                <a:solidFill>
-                  <a:srgbClr val="1F232B"/>
-                </a:solidFill>
-                <a:latin typeface="Malgun Gothic"/>
-                <a:ea typeface="Malgun Gothic"/>
-                <a:cs typeface="Malgun Gothic"/>
-              </a:rPr>
-              <a:t>같은 공지는 하나로</a:t>
-            </a:r>
-          </a:p>
-        </p:txBody>
-      </p:sp>
-      <p:sp>
-        <p:nvSpPr>
-          <p:cNvPr id="36" name="Right Arrow 35"/>
-          <p:cNvSpPr/>
-          <p:nvPr/>
-        </p:nvSpPr>
-        <p:spPr>
-          <a:xfrm>
-            <a:off x="7680960" y="3291840"/>
-            <a:ext cx="329184" cy="365760"/>
-          </a:xfrm>
-          <a:prstGeom prst="rightArrow">
-            <a:avLst/>
-          </a:prstGeom>
-          <a:solidFill>
-            <a:srgbClr val="B8C1CC"/>
-          </a:solidFill>
-          <a:ln>
-            <a:noFill/>
-          </a:ln>
-          <a:effectLst/>
-        </p:spPr>
-        <p:style>
-          <a:lnRef idx="1">
-            <a:schemeClr val="accent1"/>
-          </a:lnRef>
-          <a:fillRef idx="3">
-            <a:schemeClr val="accent1"/>
-          </a:fillRef>
-          <a:effectRef idx="2">
-            <a:schemeClr val="accent1"/>
-          </a:effectRef>
-          <a:fontRef idx="minor">
-            <a:schemeClr val="lt1"/>
-          </a:fontRef>
-        </p:style>
-        <p:txBody>
-          <a:bodyPr rtlCol="0" anchor="ctr"/>
-          <a:lstStyle/>
-          <a:p>
-            <a:pPr algn="ctr"/>
-          </a:p>
-        </p:txBody>
-      </p:sp>
-      <p:sp>
-        <p:nvSpPr>
-          <p:cNvPr id="37" name="Oval 36"/>
-          <p:cNvSpPr/>
-          <p:nvPr/>
-        </p:nvSpPr>
-        <p:spPr>
-          <a:xfrm>
-            <a:off x="8183879" y="1417320"/>
-            <a:ext cx="411480" cy="411480"/>
+            <a:off x="9381744" y="1645920"/>
+            <a:ext cx="502920" cy="502920"/>
           </a:xfrm>
           <a:prstGeom prst="ellipse">
             <a:avLst/>
@@ -8598,14 +7742,14 @@
       </p:sp>
       <p:sp>
         <p:nvSpPr>
-          <p:cNvPr id="38" name="TextBox 37"/>
+          <p:cNvPr id="26" name="TextBox 25"/>
           <p:cNvSpPr txBox="1"/>
           <p:nvPr/>
         </p:nvSpPr>
         <p:spPr>
           <a:xfrm>
-            <a:off x="8183879" y="1417320"/>
-            <a:ext cx="411480" cy="411480"/>
+            <a:off x="9381744" y="1645920"/>
+            <a:ext cx="502920" cy="502920"/>
           </a:xfrm>
           <a:prstGeom prst="rect">
             <a:avLst/>
@@ -8620,7 +7764,7 @@
           <a:p>
             <a:pPr algn="ctr"/>
             <a:r>
-              <a:rPr sz="1400" b="1">
+              <a:rPr sz="1500" b="1">
                 <a:solidFill>
                   <a:srgbClr val="FFFFFF"/>
                 </a:solidFill>
@@ -8628,21 +7772,58 @@
                 <a:ea typeface="Malgun Gothic"/>
                 <a:cs typeface="Malgun Gothic"/>
               </a:rPr>
-              <a:t>3</a:t>
-            </a:r>
-          </a:p>
-        </p:txBody>
-      </p:sp>
-      <p:sp>
-        <p:nvSpPr>
-          <p:cNvPr id="39" name="TextBox 38"/>
+              <a:t>4</a:t>
+            </a:r>
+          </a:p>
+        </p:txBody>
+      </p:sp>
+      <p:sp>
+        <p:nvSpPr>
+          <p:cNvPr id="27" name="TextBox 26"/>
           <p:cNvSpPr txBox="1"/>
           <p:nvPr/>
         </p:nvSpPr>
         <p:spPr>
           <a:xfrm>
-            <a:off x="8686800" y="1444752"/>
-            <a:ext cx="2926080" cy="365760"/>
+            <a:off x="10021824" y="1645920"/>
+            <a:ext cx="1645920" cy="502920"/>
+          </a:xfrm>
+          <a:prstGeom prst="rect">
+            <a:avLst/>
+          </a:prstGeom>
+          <a:noFill/>
+        </p:spPr>
+        <p:txBody>
+          <a:bodyPr wrap="square" lIns="0" rIns="0" tIns="0" bIns="0" anchor="ctr">
+            <a:spAutoFit/>
+          </a:bodyPr>
+          <a:lstStyle/>
+          <a:p>
+            <a:pPr algn="l"/>
+            <a:r>
+              <a:rPr sz="2000" b="1">
+                <a:solidFill>
+                  <a:srgbClr val="1F232B"/>
+                </a:solidFill>
+                <a:latin typeface="Malgun Gothic"/>
+                <a:ea typeface="Malgun Gothic"/>
+                <a:cs typeface="Malgun Gothic"/>
+              </a:rPr>
+              <a:t>전달</a:t>
+            </a:r>
+          </a:p>
+        </p:txBody>
+      </p:sp>
+      <p:sp>
+        <p:nvSpPr>
+          <p:cNvPr id="28" name="TextBox 27"/>
+          <p:cNvSpPr txBox="1"/>
+          <p:nvPr/>
+        </p:nvSpPr>
+        <p:spPr>
+          <a:xfrm>
+            <a:off x="9381744" y="2286000"/>
+            <a:ext cx="2194560" cy="320040"/>
           </a:xfrm>
           <a:prstGeom prst="rect">
             <a:avLst/>
@@ -8657,7 +7838,48 @@
           <a:p>
             <a:pPr algn="l"/>
             <a:r>
-              <a:rPr sz="1600" b="1">
+              <a:rPr sz="1200" b="1">
+                <a:solidFill>
+                  <a:srgbClr val="0058B2"/>
+                </a:solidFill>
+                <a:latin typeface="Malgun Gothic"/>
+                <a:ea typeface="Malgun Gothic"/>
+                <a:cs typeface="Malgun Gothic"/>
+              </a:rPr>
+              <a:t>나에게 맞게</a:t>
+            </a:r>
+          </a:p>
+        </p:txBody>
+      </p:sp>
+      <p:sp>
+        <p:nvSpPr>
+          <p:cNvPr id="29" name="TextBox 28"/>
+          <p:cNvSpPr txBox="1"/>
+          <p:nvPr/>
+        </p:nvSpPr>
+        <p:spPr>
+          <a:xfrm>
+            <a:off x="9381744" y="2697480"/>
+            <a:ext cx="2286000" cy="1920240"/>
+          </a:xfrm>
+          <a:prstGeom prst="rect">
+            <a:avLst/>
+          </a:prstGeom>
+          <a:noFill/>
+        </p:spPr>
+        <p:txBody>
+          <a:bodyPr wrap="square" lIns="0" rIns="0" tIns="0" bIns="0" anchor="t">
+            <a:spAutoFit/>
+          </a:bodyPr>
+          <a:lstStyle/>
+          <a:p>
+            <a:pPr algn="l">
+              <a:spcAft>
+                <a:spcPts val="100"/>
+              </a:spcAft>
+            </a:pPr>
+            <a:r>
+              <a:rPr sz="1150" b="0">
                 <a:solidFill>
                   <a:srgbClr val="1F232B"/>
                 </a:solidFill>
@@ -8665,29 +7887,83 @@
                 <a:ea typeface="Malgun Gothic"/>
                 <a:cs typeface="Malgun Gothic"/>
               </a:rPr>
-              <a:t>한 장으로 정리</a:t>
-            </a:r>
-          </a:p>
-        </p:txBody>
-      </p:sp>
-      <p:sp>
-        <p:nvSpPr>
-          <p:cNvPr id="40" name="Rounded Rectangle 39"/>
+              <a:t>학과·관심사 점수 + 이유</a:t>
+            </a:r>
+          </a:p>
+          <a:p>
+            <a:pPr algn="l">
+              <a:spcAft>
+                <a:spcPts val="100"/>
+              </a:spcAft>
+            </a:pPr>
+            <a:r>
+              <a:rPr sz="1150" b="0">
+                <a:solidFill>
+                  <a:srgbClr val="1F232B"/>
+                </a:solidFill>
+                <a:latin typeface="Malgun Gothic"/>
+                <a:ea typeface="Malgun Gothic"/>
+                <a:cs typeface="Malgun Gothic"/>
+              </a:rPr>
+              <a:t>웹 푸시(설치 없는 PWA)</a:t>
+            </a:r>
+          </a:p>
+          <a:p>
+            <a:pPr algn="l">
+              <a:spcAft>
+                <a:spcPts val="100"/>
+              </a:spcAft>
+            </a:pPr>
+            <a:r>
+              <a:rPr sz="1150" b="0">
+                <a:solidFill>
+                  <a:srgbClr val="1F232B"/>
+                </a:solidFill>
+                <a:latin typeface="Malgun Gothic"/>
+                <a:ea typeface="Malgun Gothic"/>
+                <a:cs typeface="Malgun Gothic"/>
+              </a:rPr>
+              <a:t>알림함 · 캘린더(.ics)</a:t>
+            </a:r>
+          </a:p>
+          <a:p>
+            <a:pPr algn="l">
+              <a:spcAft>
+                <a:spcPts val="100"/>
+              </a:spcAft>
+            </a:pPr>
+            <a:r>
+              <a:rPr sz="1150" b="0">
+                <a:solidFill>
+                  <a:srgbClr val="1F232B"/>
+                </a:solidFill>
+                <a:latin typeface="Malgun Gothic"/>
+                <a:ea typeface="Malgun Gothic"/>
+                <a:cs typeface="Malgun Gothic"/>
+              </a:rPr>
+              <a:t>밤에는 모아서 아침에</a:t>
+            </a:r>
+          </a:p>
+        </p:txBody>
+      </p:sp>
+      <p:sp>
+        <p:nvSpPr>
+          <p:cNvPr id="30" name="Rounded Rectangle 29"/>
           <p:cNvSpPr/>
           <p:nvPr/>
         </p:nvSpPr>
         <p:spPr>
           <a:xfrm>
-            <a:off x="8138159" y="1965960"/>
-            <a:ext cx="3520440" cy="4432742"/>
+            <a:off x="594360" y="4937760"/>
+            <a:ext cx="5440680" cy="530352"/>
           </a:xfrm>
           <a:prstGeom prst="roundRect">
             <a:avLst>
-              <a:gd name="adj" fmla="val 3000"/>
+              <a:gd name="adj" fmla="val 20000"/>
             </a:avLst>
           </a:prstGeom>
           <a:solidFill>
-            <a:srgbClr val="DDE3EA"/>
+            <a:srgbClr val="EEF4FB"/>
           </a:solidFill>
           <a:ln>
             <a:noFill/>
@@ -8716,53 +7992,101 @@
           </a:p>
         </p:txBody>
       </p:sp>
-      <p:pic>
-        <p:nvPicPr>
-          <p:cNvPr id="41" name="Picture 40" descr="detail-card.png"/>
-          <p:cNvPicPr>
-            <a:picLocks noChangeAspect="1"/>
-          </p:cNvPicPr>
-          <p:nvPr/>
-        </p:nvPicPr>
-        <p:blipFill>
-          <a:blip r:embed="rId2"/>
-          <a:stretch>
-            <a:fillRect/>
-          </a:stretch>
-        </p:blipFill>
-        <p:spPr>
-          <a:xfrm>
-            <a:off x="8183879" y="2011680"/>
-            <a:ext cx="3429000" cy="4341302"/>
-          </a:xfrm>
-          <a:prstGeom prst="rect">
-            <a:avLst/>
-          </a:prstGeom>
-        </p:spPr>
-      </p:pic>
-      <p:sp>
-        <p:nvSpPr>
-          <p:cNvPr id="42" name="Rounded Rectangle 41"/>
+      <p:sp>
+        <p:nvSpPr>
+          <p:cNvPr id="31" name="TextBox 30"/>
+          <p:cNvSpPr txBox="1"/>
+          <p:nvPr/>
+        </p:nvSpPr>
+        <p:spPr>
+          <a:xfrm>
+            <a:off x="822960" y="4937760"/>
+            <a:ext cx="731520" cy="530352"/>
+          </a:xfrm>
+          <a:prstGeom prst="rect">
+            <a:avLst/>
+          </a:prstGeom>
+          <a:noFill/>
+        </p:spPr>
+        <p:txBody>
+          <a:bodyPr wrap="square" lIns="0" rIns="0" tIns="0" bIns="0" anchor="ctr">
+            <a:spAutoFit/>
+          </a:bodyPr>
+          <a:lstStyle/>
+          <a:p>
+            <a:pPr algn="l"/>
+            <a:r>
+              <a:rPr sz="1200" b="1">
+                <a:solidFill>
+                  <a:srgbClr val="0058B2"/>
+                </a:solidFill>
+                <a:latin typeface="Malgun Gothic"/>
+                <a:ea typeface="Malgun Gothic"/>
+                <a:cs typeface="Malgun Gothic"/>
+              </a:rPr>
+              <a:t>화면</a:t>
+            </a:r>
+          </a:p>
+        </p:txBody>
+      </p:sp>
+      <p:sp>
+        <p:nvSpPr>
+          <p:cNvPr id="32" name="TextBox 31"/>
+          <p:cNvSpPr txBox="1"/>
+          <p:nvPr/>
+        </p:nvSpPr>
+        <p:spPr>
+          <a:xfrm>
+            <a:off x="1508760" y="4937760"/>
+            <a:ext cx="4434840" cy="530352"/>
+          </a:xfrm>
+          <a:prstGeom prst="rect">
+            <a:avLst/>
+          </a:prstGeom>
+          <a:noFill/>
+        </p:spPr>
+        <p:txBody>
+          <a:bodyPr wrap="square" lIns="0" rIns="0" tIns="0" bIns="0" anchor="ctr">
+            <a:spAutoFit/>
+          </a:bodyPr>
+          <a:lstStyle/>
+          <a:p>
+            <a:pPr algn="l"/>
+            <a:r>
+              <a:rPr sz="1150" b="0">
+                <a:solidFill>
+                  <a:srgbClr val="1F232B"/>
+                </a:solidFill>
+                <a:latin typeface="Malgun Gothic"/>
+                <a:ea typeface="Malgun Gothic"/>
+                <a:cs typeface="Malgun Gothic"/>
+              </a:rPr>
+              <a:t>Next.js · React · TypeScript · PWA → Vercel</a:t>
+            </a:r>
+          </a:p>
+        </p:txBody>
+      </p:sp>
+      <p:sp>
+        <p:nvSpPr>
+          <p:cNvPr id="33" name="Rounded Rectangle 32"/>
           <p:cNvSpPr/>
           <p:nvPr/>
         </p:nvSpPr>
         <p:spPr>
           <a:xfrm>
-            <a:off x="594360" y="5349240"/>
-            <a:ext cx="6949440" cy="914400"/>
+            <a:off x="6263640" y="4937760"/>
+            <a:ext cx="5440680" cy="530352"/>
           </a:xfrm>
           <a:prstGeom prst="roundRect">
             <a:avLst>
-              <a:gd name="adj" fmla="val 12000"/>
+              <a:gd name="adj" fmla="val 20000"/>
             </a:avLst>
           </a:prstGeom>
           <a:solidFill>
-            <a:srgbClr val="FFFFFF"/>
+            <a:srgbClr val="EEF4FB"/>
           </a:solidFill>
-          <a:ln w="12700">
-            <a:solidFill>
-              <a:srgbClr val="DDE3EA"/>
-            </a:solidFill>
+          <a:ln>
+            <a:noFill/>
           </a:ln>
           <a:effectLst/>
         </p:spPr>
@@ -8790,14 +8114,14 @@
       </p:sp>
       <p:sp>
         <p:nvSpPr>
-          <p:cNvPr id="43" name="TextBox 42"/>
+          <p:cNvPr id="34" name="TextBox 33"/>
           <p:cNvSpPr txBox="1"/>
           <p:nvPr/>
         </p:nvSpPr>
         <p:spPr>
           <a:xfrm>
-            <a:off x="868680" y="5349240"/>
-            <a:ext cx="1371600" cy="914400"/>
+            <a:off x="6492240" y="4937760"/>
+            <a:ext cx="731520" cy="530352"/>
           </a:xfrm>
           <a:prstGeom prst="rect">
             <a:avLst/>
@@ -8812,7 +8136,7 @@
           <a:p>
             <a:pPr algn="l"/>
             <a:r>
-              <a:rPr sz="3600" b="1">
+              <a:rPr sz="1200" b="1">
                 <a:solidFill>
                   <a:srgbClr val="0058B2"/>
                 </a:solidFill>
@@ -8820,21 +8144,21 @@
                 <a:ea typeface="Malgun Gothic"/>
                 <a:cs typeface="Malgun Gothic"/>
               </a:rPr>
-              <a:t>0원</a:t>
-            </a:r>
-          </a:p>
-        </p:txBody>
-      </p:sp>
-      <p:sp>
-        <p:nvSpPr>
-          <p:cNvPr id="44" name="TextBox 43"/>
+              <a:t>서버</a:t>
+            </a:r>
+          </a:p>
+        </p:txBody>
+      </p:sp>
+      <p:sp>
+        <p:nvSpPr>
+          <p:cNvPr id="35" name="TextBox 34"/>
           <p:cNvSpPr txBox="1"/>
           <p:nvPr/>
         </p:nvSpPr>
         <p:spPr>
           <a:xfrm>
-            <a:off x="2286000" y="5440680"/>
-            <a:ext cx="5120640" cy="731520"/>
+            <a:off x="7178040" y="4937760"/>
+            <a:ext cx="4434840" cy="530352"/>
           </a:xfrm>
           <a:prstGeom prst="rect">
             <a:avLst/>
@@ -8847,13 +8171,9 @@
           </a:bodyPr>
           <a:lstStyle/>
           <a:p>
-            <a:pPr algn="l">
-              <a:spcAft>
-                <a:spcPts val="200"/>
-              </a:spcAft>
-            </a:pPr>
-            <a:r>
-              <a:rPr sz="1300" b="1">
+            <a:pPr algn="l"/>
+            <a:r>
+              <a:rPr sz="1150" b="0">
                 <a:solidFill>
                   <a:srgbClr val="1F232B"/>
                 </a:solidFill>
@@ -8861,17 +8181,119 @@
                 <a:ea typeface="Malgun Gothic"/>
                 <a:cs typeface="Malgun Gothic"/>
               </a:rPr>
-              <a:t>유료 AI 서비스 없이</a:t>
-            </a:r>
-          </a:p>
-          <a:p>
-            <a:pPr algn="l">
-              <a:spcAft>
-                <a:spcPts val="200"/>
-              </a:spcAft>
-            </a:pPr>
-            <a:r>
-              <a:rPr sz="1300" b="0">
+              <a:t>Python · FastAPI · SQLite · APScheduler(매시간 수집·1분 알림)</a:t>
+            </a:r>
+          </a:p>
+        </p:txBody>
+      </p:sp>
+      <p:sp>
+        <p:nvSpPr>
+          <p:cNvPr id="36" name="Rounded Rectangle 35"/>
+          <p:cNvSpPr/>
+          <p:nvPr/>
+        </p:nvSpPr>
+        <p:spPr>
+          <a:xfrm>
+            <a:off x="594360" y="5596128"/>
+            <a:ext cx="5440680" cy="530352"/>
+          </a:xfrm>
+          <a:prstGeom prst="roundRect">
+            <a:avLst>
+              <a:gd name="adj" fmla="val 20000"/>
+            </a:avLst>
+          </a:prstGeom>
+          <a:solidFill>
+            <a:srgbClr val="EEF4FB"/>
+          </a:solidFill>
+          <a:ln>
+            <a:noFill/>
+          </a:ln>
+          <a:effectLst/>
+        </p:spPr>
+        <p:style>
+          <a:lnRef idx="1">
+            <a:schemeClr val="accent1"/>
+          </a:lnRef>
+          <a:fillRef idx="3">
+            <a:schemeClr val="accent1"/>
+          </a:fillRef>
+          <a:effectRef idx="2">
+            <a:schemeClr val="accent1"/>
+          </a:effectRef>
+          <a:fontRef idx="minor">
+            <a:schemeClr val="lt1"/>
+          </a:fontRef>
+        </p:style>
+        <p:txBody>
+          <a:bodyPr rtlCol="0" anchor="ctr"/>
+          <a:lstStyle/>
+          <a:p>
+            <a:pPr algn="ctr"/>
+          </a:p>
+        </p:txBody>
+      </p:sp>
+      <p:sp>
+        <p:nvSpPr>
+          <p:cNvPr id="37" name="TextBox 36"/>
+          <p:cNvSpPr txBox="1"/>
+          <p:nvPr/>
+        </p:nvSpPr>
+        <p:spPr>
+          <a:xfrm>
+            <a:off x="822960" y="5596128"/>
+            <a:ext cx="731520" cy="530352"/>
+          </a:xfrm>
+          <a:prstGeom prst="rect">
+            <a:avLst/>
+          </a:prstGeom>
+          <a:noFill/>
+        </p:spPr>
+        <p:txBody>
+          <a:bodyPr wrap="square" lIns="0" rIns="0" tIns="0" bIns="0" anchor="ctr">
+            <a:spAutoFit/>
+          </a:bodyPr>
+          <a:lstStyle/>
+          <a:p>
+            <a:pPr algn="l"/>
+            <a:r>
+              <a:rPr sz="1200" b="1">
+                <a:solidFill>
+                  <a:srgbClr val="0058B2"/>
+                </a:solidFill>
+                <a:latin typeface="Malgun Gothic"/>
+                <a:ea typeface="Malgun Gothic"/>
+                <a:cs typeface="Malgun Gothic"/>
+              </a:rPr>
+              <a:t>운영</a:t>
+            </a:r>
+          </a:p>
+        </p:txBody>
+      </p:sp>
+      <p:sp>
+        <p:nvSpPr>
+          <p:cNvPr id="38" name="TextBox 37"/>
+          <p:cNvSpPr txBox="1"/>
+          <p:nvPr/>
+        </p:nvSpPr>
+        <p:spPr>
+          <a:xfrm>
+            <a:off x="1508760" y="5596128"/>
+            <a:ext cx="4434840" cy="530352"/>
+          </a:xfrm>
+          <a:prstGeom prst="rect">
+            <a:avLst/>
+          </a:prstGeom>
+          <a:noFill/>
+        </p:spPr>
+        <p:txBody>
+          <a:bodyPr wrap="square" lIns="0" rIns="0" tIns="0" bIns="0" anchor="ctr">
+            <a:spAutoFit/>
+          </a:bodyPr>
+          <a:lstStyle/>
+          <a:p>
+            <a:pPr algn="l"/>
+            <a:r>
+              <a:rPr sz="1150" b="0">
                 <a:solidFill>
                   <a:srgbClr val="1F232B"/>
                 </a:solidFill>
@@ -8879,14 +8301,134 @@
                 <a:ea typeface="Malgun Gothic"/>
                 <a:cs typeface="Malgun Gothic"/>
               </a:rPr>
-              <a:t>공개 AI 모델을 우리 서버 안에서 돌려요</a:t>
-            </a:r>
-          </a:p>
-        </p:txBody>
-      </p:sp>
-      <p:sp>
-        <p:nvSpPr>
-          <p:cNvPr id="45" name="TextBox 44"/>
+              <a:t>Oracle Cloud 무료 서버(ARM 2코어) · Caddy(https) · systemd</a:t>
+            </a:r>
+          </a:p>
+        </p:txBody>
+      </p:sp>
+      <p:sp>
+        <p:nvSpPr>
+          <p:cNvPr id="39" name="Rounded Rectangle 38"/>
+          <p:cNvSpPr/>
+          <p:nvPr/>
+        </p:nvSpPr>
+        <p:spPr>
+          <a:xfrm>
+            <a:off x="6263640" y="5596128"/>
+            <a:ext cx="5440680" cy="530352"/>
+          </a:xfrm>
+          <a:prstGeom prst="roundRect">
+            <a:avLst>
+              <a:gd name="adj" fmla="val 20000"/>
+            </a:avLst>
+          </a:prstGeom>
+          <a:solidFill>
+            <a:srgbClr val="EEF4FB"/>
+          </a:solidFill>
+          <a:ln>
+            <a:noFill/>
+          </a:ln>
+          <a:effectLst/>
+        </p:spPr>
+        <p:style>
+          <a:lnRef idx="1">
+            <a:schemeClr val="accent1"/>
+          </a:lnRef>
+          <a:fillRef idx="3">
+            <a:schemeClr val="accent1"/>
+          </a:fillRef>
+          <a:effectRef idx="2">
+            <a:schemeClr val="accent1"/>
+          </a:effectRef>
+          <a:fontRef idx="minor">
+            <a:schemeClr val="lt1"/>
+          </a:fontRef>
+        </p:style>
+        <p:txBody>
+          <a:bodyPr rtlCol="0" anchor="ctr"/>
+          <a:lstStyle/>
+          <a:p>
+            <a:pPr algn="ctr"/>
+          </a:p>
+        </p:txBody>
+      </p:sp>
+      <p:sp>
+        <p:nvSpPr>
+          <p:cNvPr id="40" name="TextBox 39"/>
+          <p:cNvSpPr txBox="1"/>
+          <p:nvPr/>
+        </p:nvSpPr>
+        <p:spPr>
+          <a:xfrm>
+            <a:off x="6492240" y="5596128"/>
+            <a:ext cx="731520" cy="530352"/>
+          </a:xfrm>
+          <a:prstGeom prst="rect">
+            <a:avLst/>
+          </a:prstGeom>
+          <a:noFill/>
+        </p:spPr>
+        <p:txBody>
+          <a:bodyPr wrap="square" lIns="0" rIns="0" tIns="0" bIns="0" anchor="ctr">
+            <a:spAutoFit/>
+          </a:bodyPr>
+          <a:lstStyle/>
+          <a:p>
+            <a:pPr algn="l"/>
+            <a:r>
+              <a:rPr sz="1200" b="1">
+                <a:solidFill>
+                  <a:srgbClr val="0058B2"/>
+                </a:solidFill>
+                <a:latin typeface="Malgun Gothic"/>
+                <a:ea typeface="Malgun Gothic"/>
+                <a:cs typeface="Malgun Gothic"/>
+              </a:rPr>
+              <a:t>품질</a:t>
+            </a:r>
+          </a:p>
+        </p:txBody>
+      </p:sp>
+      <p:sp>
+        <p:nvSpPr>
+          <p:cNvPr id="41" name="TextBox 40"/>
+          <p:cNvSpPr txBox="1"/>
+          <p:nvPr/>
+        </p:nvSpPr>
+        <p:spPr>
+          <a:xfrm>
+            <a:off x="7178040" y="5596128"/>
+            <a:ext cx="4434840" cy="530352"/>
+          </a:xfrm>
+          <a:prstGeom prst="rect">
+            <a:avLst/>
+          </a:prstGeom>
+          <a:noFill/>
+        </p:spPr>
+        <p:txBody>
+          <a:bodyPr wrap="square" lIns="0" rIns="0" tIns="0" bIns="0" anchor="ctr">
+            <a:spAutoFit/>
+          </a:bodyPr>
+          <a:lstStyle/>
+          <a:p>
+            <a:pPr algn="l"/>
+            <a:r>
+              <a:rPr sz="1150" b="0">
+                <a:solidFill>
+                  <a:srgbClr val="1F232B"/>
+                </a:solidFill>
+                <a:latin typeface="Malgun Gothic"/>
+                <a:ea typeface="Malgun Gothic"/>
+                <a:cs typeface="Malgun Gothic"/>
+              </a:rPr>
+              <a:t>자동 테스트 135개 · 외부 AI API 없음 → AI 비용 0원</a:t>
+            </a:r>
+          </a:p>
+        </p:txBody>
+      </p:sp>
+      <p:sp>
+        <p:nvSpPr>
+          <p:cNvPr id="42" name="TextBox 41"/>
           <p:cNvSpPr txBox="1"/>
           <p:nvPr/>
         </p:nvSpPr>
@@ -8979,33 +8521,32 @@
                 <a:ea typeface="Malgun Gothic"/>
                 <a:cs typeface="Malgun Gothic"/>
               </a:rPr>
-              <a:t>지금 실제로 매시간 돌아가고 있습니다</a:t>
-            </a:r>
-          </a:p>
-        </p:txBody>
-      </p:sp>
-      <p:sp>
-        <p:nvSpPr>
-          <p:cNvPr id="3" name="Rounded Rectangle 2"/>
+              <a:t>시연: 설정 → 알림 → 교내·교외 공지 확인</a:t>
+            </a:r>
+          </a:p>
+        </p:txBody>
+      </p:sp>
+      <p:sp>
+        <p:nvSpPr>
+          <p:cNvPr id="3" name="Oval 2"/>
           <p:cNvSpPr/>
           <p:nvPr/>
         </p:nvSpPr>
         <p:spPr>
           <a:xfrm>
-            <a:off x="676656" y="1453895"/>
-            <a:ext cx="6053328" cy="4346448"/>
-          </a:xfrm>
-          <a:prstGeom prst="roundRect">
-            <a:avLst>
-              <a:gd name="adj" fmla="val 3000"/>
-            </a:avLst>
+            <a:off x="640080" y="1490472"/>
+            <a:ext cx="457200" cy="457200"/>
+          </a:xfrm>
+          <a:prstGeom prst="ellipse">
+            <a:avLst/>
           </a:prstGeom>
           <a:solidFill>
-            <a:srgbClr val="262A33"/>
+            <a:srgbClr val="0058B2"/>
           </a:solidFill>
           <a:ln>
             <a:noFill/>
           </a:ln>
+          <a:effectLst/>
         </p:spPr>
         <p:style>
           <a:lnRef idx="1">
@@ -9031,20 +8572,131 @@
       </p:sp>
       <p:sp>
         <p:nvSpPr>
-          <p:cNvPr id="4" name="Oval 3"/>
+          <p:cNvPr id="4" name="TextBox 3"/>
+          <p:cNvSpPr txBox="1"/>
+          <p:nvPr/>
+        </p:nvSpPr>
+        <p:spPr>
+          <a:xfrm>
+            <a:off x="640080" y="1490472"/>
+            <a:ext cx="457200" cy="457200"/>
+          </a:xfrm>
+          <a:prstGeom prst="rect">
+            <a:avLst/>
+          </a:prstGeom>
+          <a:noFill/>
+        </p:spPr>
+        <p:txBody>
+          <a:bodyPr wrap="square" lIns="0" rIns="0" tIns="0" bIns="0" anchor="ctr">
+            <a:spAutoFit/>
+          </a:bodyPr>
+          <a:lstStyle/>
+          <a:p>
+            <a:pPr algn="ctr"/>
+            <a:r>
+              <a:rPr sz="1400" b="1">
+                <a:solidFill>
+                  <a:srgbClr val="FFFFFF"/>
+                </a:solidFill>
+                <a:latin typeface="Malgun Gothic"/>
+                <a:ea typeface="Malgun Gothic"/>
+                <a:cs typeface="Malgun Gothic"/>
+              </a:rPr>
+              <a:t>1</a:t>
+            </a:r>
+          </a:p>
+        </p:txBody>
+      </p:sp>
+      <p:sp>
+        <p:nvSpPr>
+          <p:cNvPr id="5" name="TextBox 4"/>
+          <p:cNvSpPr txBox="1"/>
+          <p:nvPr/>
+        </p:nvSpPr>
+        <p:spPr>
+          <a:xfrm>
+            <a:off x="1280160" y="1435608"/>
+            <a:ext cx="4023360" cy="320040"/>
+          </a:xfrm>
+          <a:prstGeom prst="rect">
+            <a:avLst/>
+          </a:prstGeom>
+          <a:noFill/>
+        </p:spPr>
+        <p:txBody>
+          <a:bodyPr wrap="square" lIns="0" rIns="0" tIns="0" bIns="0" anchor="t">
+            <a:spAutoFit/>
+          </a:bodyPr>
+          <a:lstStyle/>
+          <a:p>
+            <a:pPr algn="l"/>
+            <a:r>
+              <a:rPr sz="1500" b="1">
+                <a:solidFill>
+                  <a:srgbClr val="1F232B"/>
+                </a:solidFill>
+                <a:latin typeface="Malgun Gothic"/>
+                <a:ea typeface="Malgun Gothic"/>
+                <a:cs typeface="Malgun Gothic"/>
+              </a:rPr>
+              <a:t>학과 설정</a:t>
+            </a:r>
+          </a:p>
+        </p:txBody>
+      </p:sp>
+      <p:sp>
+        <p:nvSpPr>
+          <p:cNvPr id="6" name="TextBox 5"/>
+          <p:cNvSpPr txBox="1"/>
+          <p:nvPr/>
+        </p:nvSpPr>
+        <p:spPr>
+          <a:xfrm>
+            <a:off x="1280160" y="1764792"/>
+            <a:ext cx="4206240" cy="365760"/>
+          </a:xfrm>
+          <a:prstGeom prst="rect">
+            <a:avLst/>
+          </a:prstGeom>
+          <a:noFill/>
+        </p:spPr>
+        <p:txBody>
+          <a:bodyPr wrap="square" lIns="0" rIns="0" tIns="0" bIns="0" anchor="t">
+            <a:spAutoFit/>
+          </a:bodyPr>
+          <a:lstStyle/>
+          <a:p>
+            <a:pPr algn="l"/>
+            <a:r>
+              <a:rPr sz="1100" b="0">
+                <a:solidFill>
+                  <a:srgbClr val="666E7A"/>
+                </a:solidFill>
+                <a:latin typeface="Malgun Gothic"/>
+                <a:ea typeface="Malgun Gothic"/>
+                <a:cs typeface="Malgun Gothic"/>
+              </a:rPr>
+              <a:t>'컴공'만 쳐도 컴퓨터공학전공 · 관심사 고르기</a:t>
+            </a:r>
+          </a:p>
+        </p:txBody>
+      </p:sp>
+      <p:sp>
+        <p:nvSpPr>
+          <p:cNvPr id="7" name="Oval 6"/>
           <p:cNvSpPr/>
           <p:nvPr/>
         </p:nvSpPr>
         <p:spPr>
           <a:xfrm>
-            <a:off x="841248" y="1591056"/>
-            <a:ext cx="100584" cy="100584"/>
+            <a:off x="640080" y="2276856"/>
+            <a:ext cx="457200" cy="457200"/>
           </a:xfrm>
           <a:prstGeom prst="ellipse">
             <a:avLst/>
           </a:prstGeom>
           <a:solidFill>
-            <a:srgbClr val="FF5F57"/>
+            <a:srgbClr val="0058B2"/>
           </a:solidFill>
           <a:ln>
             <a:noFill/>
@@ -9075,20 +8727,131 @@
       </p:sp>
       <p:sp>
         <p:nvSpPr>
-          <p:cNvPr id="5" name="Oval 4"/>
+          <p:cNvPr id="8" name="TextBox 7"/>
+          <p:cNvSpPr txBox="1"/>
+          <p:nvPr/>
+        </p:nvSpPr>
+        <p:spPr>
+          <a:xfrm>
+            <a:off x="640080" y="2276856"/>
+            <a:ext cx="457200" cy="457200"/>
+          </a:xfrm>
+          <a:prstGeom prst="rect">
+            <a:avLst/>
+          </a:prstGeom>
+          <a:noFill/>
+        </p:spPr>
+        <p:txBody>
+          <a:bodyPr wrap="square" lIns="0" rIns="0" tIns="0" bIns="0" anchor="ctr">
+            <a:spAutoFit/>
+          </a:bodyPr>
+          <a:lstStyle/>
+          <a:p>
+            <a:pPr algn="ctr"/>
+            <a:r>
+              <a:rPr sz="1400" b="1">
+                <a:solidFill>
+                  <a:srgbClr val="FFFFFF"/>
+                </a:solidFill>
+                <a:latin typeface="Malgun Gothic"/>
+                <a:ea typeface="Malgun Gothic"/>
+                <a:cs typeface="Malgun Gothic"/>
+              </a:rPr>
+              <a:t>2</a:t>
+            </a:r>
+          </a:p>
+        </p:txBody>
+      </p:sp>
+      <p:sp>
+        <p:nvSpPr>
+          <p:cNvPr id="9" name="TextBox 8"/>
+          <p:cNvSpPr txBox="1"/>
+          <p:nvPr/>
+        </p:nvSpPr>
+        <p:spPr>
+          <a:xfrm>
+            <a:off x="1280160" y="2221992"/>
+            <a:ext cx="4023360" cy="320040"/>
+          </a:xfrm>
+          <a:prstGeom prst="rect">
+            <a:avLst/>
+          </a:prstGeom>
+          <a:noFill/>
+        </p:spPr>
+        <p:txBody>
+          <a:bodyPr wrap="square" lIns="0" rIns="0" tIns="0" bIns="0" anchor="t">
+            <a:spAutoFit/>
+          </a:bodyPr>
+          <a:lstStyle/>
+          <a:p>
+            <a:pPr algn="l"/>
+            <a:r>
+              <a:rPr sz="1500" b="1">
+                <a:solidFill>
+                  <a:srgbClr val="1F232B"/>
+                </a:solidFill>
+                <a:latin typeface="Malgun Gothic"/>
+                <a:ea typeface="Malgun Gothic"/>
+                <a:cs typeface="Malgun Gothic"/>
+              </a:rPr>
+              <a:t>알림 받기</a:t>
+            </a:r>
+          </a:p>
+        </p:txBody>
+      </p:sp>
+      <p:sp>
+        <p:nvSpPr>
+          <p:cNvPr id="10" name="TextBox 9"/>
+          <p:cNvSpPr txBox="1"/>
+          <p:nvPr/>
+        </p:nvSpPr>
+        <p:spPr>
+          <a:xfrm>
+            <a:off x="1280160" y="2551176"/>
+            <a:ext cx="4206240" cy="365760"/>
+          </a:xfrm>
+          <a:prstGeom prst="rect">
+            <a:avLst/>
+          </a:prstGeom>
+          <a:noFill/>
+        </p:spPr>
+        <p:txBody>
+          <a:bodyPr wrap="square" lIns="0" rIns="0" tIns="0" bIns="0" anchor="t">
+            <a:spAutoFit/>
+          </a:bodyPr>
+          <a:lstStyle/>
+          <a:p>
+            <a:pPr algn="l"/>
+            <a:r>
+              <a:rPr sz="1100" b="0">
+                <a:solidFill>
+                  <a:srgbClr val="666E7A"/>
+                </a:solidFill>
+                <a:latin typeface="Malgun Gothic"/>
+                <a:ea typeface="Malgun Gothic"/>
+                <a:cs typeface="Malgun Gothic"/>
+              </a:rPr>
+              <a:t>내 학과 공지·마감 알림이 휴대폰에 (녹화 영상)</a:t>
+            </a:r>
+          </a:p>
+        </p:txBody>
+      </p:sp>
+      <p:sp>
+        <p:nvSpPr>
+          <p:cNvPr id="11" name="Oval 10"/>
           <p:cNvSpPr/>
           <p:nvPr/>
         </p:nvSpPr>
         <p:spPr>
           <a:xfrm>
-            <a:off x="1005840" y="1591056"/>
-            <a:ext cx="100584" cy="100584"/>
+            <a:off x="640080" y="3063240"/>
+            <a:ext cx="457200" cy="457200"/>
           </a:xfrm>
           <a:prstGeom prst="ellipse">
             <a:avLst/>
           </a:prstGeom>
           <a:solidFill>
-            <a:srgbClr val="FEBC2E"/>
+            <a:srgbClr val="0058B2"/>
           </a:solidFill>
           <a:ln>
             <a:noFill/>
@@ -9119,20 +8882,131 @@
       </p:sp>
       <p:sp>
         <p:nvSpPr>
-          <p:cNvPr id="6" name="Oval 5"/>
+          <p:cNvPr id="12" name="TextBox 11"/>
+          <p:cNvSpPr txBox="1"/>
+          <p:nvPr/>
+        </p:nvSpPr>
+        <p:spPr>
+          <a:xfrm>
+            <a:off x="640080" y="3063240"/>
+            <a:ext cx="457200" cy="457200"/>
+          </a:xfrm>
+          <a:prstGeom prst="rect">
+            <a:avLst/>
+          </a:prstGeom>
+          <a:noFill/>
+        </p:spPr>
+        <p:txBody>
+          <a:bodyPr wrap="square" lIns="0" rIns="0" tIns="0" bIns="0" anchor="ctr">
+            <a:spAutoFit/>
+          </a:bodyPr>
+          <a:lstStyle/>
+          <a:p>
+            <a:pPr algn="ctr"/>
+            <a:r>
+              <a:rPr sz="1400" b="1">
+                <a:solidFill>
+                  <a:srgbClr val="FFFFFF"/>
+                </a:solidFill>
+                <a:latin typeface="Malgun Gothic"/>
+                <a:ea typeface="Malgun Gothic"/>
+                <a:cs typeface="Malgun Gothic"/>
+              </a:rPr>
+              <a:t>3</a:t>
+            </a:r>
+          </a:p>
+        </p:txBody>
+      </p:sp>
+      <p:sp>
+        <p:nvSpPr>
+          <p:cNvPr id="13" name="TextBox 12"/>
+          <p:cNvSpPr txBox="1"/>
+          <p:nvPr/>
+        </p:nvSpPr>
+        <p:spPr>
+          <a:xfrm>
+            <a:off x="1280160" y="3008376"/>
+            <a:ext cx="4023360" cy="320040"/>
+          </a:xfrm>
+          <a:prstGeom prst="rect">
+            <a:avLst/>
+          </a:prstGeom>
+          <a:noFill/>
+        </p:spPr>
+        <p:txBody>
+          <a:bodyPr wrap="square" lIns="0" rIns="0" tIns="0" bIns="0" anchor="t">
+            <a:spAutoFit/>
+          </a:bodyPr>
+          <a:lstStyle/>
+          <a:p>
+            <a:pPr algn="l"/>
+            <a:r>
+              <a:rPr sz="1500" b="1">
+                <a:solidFill>
+                  <a:srgbClr val="1F232B"/>
+                </a:solidFill>
+                <a:latin typeface="Malgun Gothic"/>
+                <a:ea typeface="Malgun Gothic"/>
+                <a:cs typeface="Malgun Gothic"/>
+              </a:rPr>
+              <a:t>교내 공지</a:t>
+            </a:r>
+          </a:p>
+        </p:txBody>
+      </p:sp>
+      <p:sp>
+        <p:nvSpPr>
+          <p:cNvPr id="14" name="TextBox 13"/>
+          <p:cNvSpPr txBox="1"/>
+          <p:nvPr/>
+        </p:nvSpPr>
+        <p:spPr>
+          <a:xfrm>
+            <a:off x="1280160" y="3337560"/>
+            <a:ext cx="4206240" cy="365760"/>
+          </a:xfrm>
+          <a:prstGeom prst="rect">
+            <a:avLst/>
+          </a:prstGeom>
+          <a:noFill/>
+        </p:spPr>
+        <p:txBody>
+          <a:bodyPr wrap="square" lIns="0" rIns="0" tIns="0" bIns="0" anchor="t">
+            <a:spAutoFit/>
+          </a:bodyPr>
+          <a:lstStyle/>
+          <a:p>
+            <a:pPr algn="l"/>
+            <a:r>
+              <a:rPr sz="1100" b="0">
+                <a:solidFill>
+                  <a:srgbClr val="666E7A"/>
+                </a:solidFill>
+                <a:latin typeface="Malgun Gothic"/>
+                <a:ea typeface="Malgun Gothic"/>
+                <a:cs typeface="Malgun Gothic"/>
+              </a:rPr>
+              <a:t>'나에게' 탭 → 정리 카드 → 학교 원문 열기</a:t>
+            </a:r>
+          </a:p>
+        </p:txBody>
+      </p:sp>
+      <p:sp>
+        <p:nvSpPr>
+          <p:cNvPr id="15" name="Oval 14"/>
           <p:cNvSpPr/>
           <p:nvPr/>
         </p:nvSpPr>
         <p:spPr>
           <a:xfrm>
-            <a:off x="1170432" y="1591056"/>
-            <a:ext cx="100584" cy="100584"/>
+            <a:off x="640080" y="3849624"/>
+            <a:ext cx="457200" cy="457200"/>
           </a:xfrm>
           <a:prstGeom prst="ellipse">
             <a:avLst/>
           </a:prstGeom>
           <a:solidFill>
-            <a:srgbClr val="28C840"/>
+            <a:srgbClr val="0058B2"/>
           </a:solidFill>
           <a:ln>
             <a:noFill/>
@@ -9163,22 +9037,131 @@
       </p:sp>
       <p:sp>
         <p:nvSpPr>
-          <p:cNvPr id="7" name="Rounded Rectangle 6"/>
+          <p:cNvPr id="16" name="TextBox 15"/>
+          <p:cNvSpPr txBox="1"/>
+          <p:nvPr/>
+        </p:nvSpPr>
+        <p:spPr>
+          <a:xfrm>
+            <a:off x="640080" y="3849624"/>
+            <a:ext cx="457200" cy="457200"/>
+          </a:xfrm>
+          <a:prstGeom prst="rect">
+            <a:avLst/>
+          </a:prstGeom>
+          <a:noFill/>
+        </p:spPr>
+        <p:txBody>
+          <a:bodyPr wrap="square" lIns="0" rIns="0" tIns="0" bIns="0" anchor="ctr">
+            <a:spAutoFit/>
+          </a:bodyPr>
+          <a:lstStyle/>
+          <a:p>
+            <a:pPr algn="ctr"/>
+            <a:r>
+              <a:rPr sz="1400" b="1">
+                <a:solidFill>
+                  <a:srgbClr val="FFFFFF"/>
+                </a:solidFill>
+                <a:latin typeface="Malgun Gothic"/>
+                <a:ea typeface="Malgun Gothic"/>
+                <a:cs typeface="Malgun Gothic"/>
+              </a:rPr>
+              <a:t>4</a:t>
+            </a:r>
+          </a:p>
+        </p:txBody>
+      </p:sp>
+      <p:sp>
+        <p:nvSpPr>
+          <p:cNvPr id="17" name="TextBox 16"/>
+          <p:cNvSpPr txBox="1"/>
+          <p:nvPr/>
+        </p:nvSpPr>
+        <p:spPr>
+          <a:xfrm>
+            <a:off x="1280160" y="3794759"/>
+            <a:ext cx="4023360" cy="320040"/>
+          </a:xfrm>
+          <a:prstGeom prst="rect">
+            <a:avLst/>
+          </a:prstGeom>
+          <a:noFill/>
+        </p:spPr>
+        <p:txBody>
+          <a:bodyPr wrap="square" lIns="0" rIns="0" tIns="0" bIns="0" anchor="t">
+            <a:spAutoFit/>
+          </a:bodyPr>
+          <a:lstStyle/>
+          <a:p>
+            <a:pPr algn="l"/>
+            <a:r>
+              <a:rPr sz="1500" b="1">
+                <a:solidFill>
+                  <a:srgbClr val="1F232B"/>
+                </a:solidFill>
+                <a:latin typeface="Malgun Gothic"/>
+                <a:ea typeface="Malgun Gothic"/>
+                <a:cs typeface="Malgun Gothic"/>
+              </a:rPr>
+              <a:t>교외 정보</a:t>
+            </a:r>
+          </a:p>
+        </p:txBody>
+      </p:sp>
+      <p:sp>
+        <p:nvSpPr>
+          <p:cNvPr id="18" name="TextBox 17"/>
+          <p:cNvSpPr txBox="1"/>
+          <p:nvPr/>
+        </p:nvSpPr>
+        <p:spPr>
+          <a:xfrm>
+            <a:off x="1280160" y="4123944"/>
+            <a:ext cx="4206240" cy="365760"/>
+          </a:xfrm>
+          <a:prstGeom prst="rect">
+            <a:avLst/>
+          </a:prstGeom>
+          <a:noFill/>
+        </p:spPr>
+        <p:txBody>
+          <a:bodyPr wrap="square" lIns="0" rIns="0" tIns="0" bIns="0" anchor="t">
+            <a:spAutoFit/>
+          </a:bodyPr>
+          <a:lstStyle/>
+          <a:p>
+            <a:pPr algn="l"/>
+            <a:r>
+              <a:rPr sz="1100" b="0">
+                <a:solidFill>
+                  <a:srgbClr val="666E7A"/>
+                </a:solidFill>
+                <a:latin typeface="Malgun Gothic"/>
+                <a:ea typeface="Malgun Gothic"/>
+                <a:cs typeface="Malgun Gothic"/>
+              </a:rPr>
+              <a:t>장학·자격증: 접수 예정 / 접수중, 접수 시작순</a:t>
+            </a:r>
+          </a:p>
+        </p:txBody>
+      </p:sp>
+      <p:sp>
+        <p:nvSpPr>
+          <p:cNvPr id="19" name="Oval 18"/>
           <p:cNvSpPr/>
           <p:nvPr/>
         </p:nvSpPr>
         <p:spPr>
           <a:xfrm>
-            <a:off x="1417320" y="1554480"/>
-            <a:ext cx="5029200" cy="182880"/>
-          </a:xfrm>
-          <a:prstGeom prst="roundRect">
-            <a:avLst>
-              <a:gd name="adj" fmla="val 50000"/>
-            </a:avLst>
+            <a:off x="640080" y="4636008"/>
+            <a:ext cx="457200" cy="457200"/>
+          </a:xfrm>
+          <a:prstGeom prst="ellipse">
+            <a:avLst/>
           </a:prstGeom>
           <a:solidFill>
-            <a:srgbClr val="3A3F4A"/>
+            <a:srgbClr val="0058B2"/>
           </a:solidFill>
           <a:ln>
             <a:noFill/>
@@ -9209,14 +9192,14 @@
       </p:sp>
       <p:sp>
         <p:nvSpPr>
-          <p:cNvPr id="8" name="TextBox 7"/>
+          <p:cNvPr id="20" name="TextBox 19"/>
           <p:cNvSpPr txBox="1"/>
           <p:nvPr/>
         </p:nvSpPr>
         <p:spPr>
           <a:xfrm>
-            <a:off x="1554480" y="1554480"/>
-            <a:ext cx="4754880" cy="182880"/>
+            <a:off x="640080" y="4636008"/>
+            <a:ext cx="457200" cy="457200"/>
           </a:xfrm>
           <a:prstGeom prst="rect">
             <a:avLst/>
@@ -9229,59 +9212,109 @@
           </a:bodyPr>
           <a:lstStyle/>
           <a:p>
+            <a:pPr algn="ctr"/>
+            <a:r>
+              <a:rPr sz="1400" b="1">
+                <a:solidFill>
+                  <a:srgbClr val="FFFFFF"/>
+                </a:solidFill>
+                <a:latin typeface="Malgun Gothic"/>
+                <a:ea typeface="Malgun Gothic"/>
+                <a:cs typeface="Malgun Gothic"/>
+              </a:rPr>
+              <a:t>5</a:t>
+            </a:r>
+          </a:p>
+        </p:txBody>
+      </p:sp>
+      <p:sp>
+        <p:nvSpPr>
+          <p:cNvPr id="21" name="TextBox 20"/>
+          <p:cNvSpPr txBox="1"/>
+          <p:nvPr/>
+        </p:nvSpPr>
+        <p:spPr>
+          <a:xfrm>
+            <a:off x="1280160" y="4581144"/>
+            <a:ext cx="4023360" cy="320040"/>
+          </a:xfrm>
+          <a:prstGeom prst="rect">
+            <a:avLst/>
+          </a:prstGeom>
+          <a:noFill/>
+        </p:spPr>
+        <p:txBody>
+          <a:bodyPr wrap="square" lIns="0" rIns="0" tIns="0" bIns="0" anchor="t">
+            <a:spAutoFit/>
+          </a:bodyPr>
+          <a:lstStyle/>
+          <a:p>
             <a:pPr algn="l"/>
             <a:r>
-              <a:rPr sz="900" b="0">
-                <a:solidFill>
-                  <a:srgbClr val="C9CED6"/>
-                </a:solidFill>
-                <a:latin typeface="Malgun Gothic"/>
-                <a:ea typeface="Malgun Gothic"/>
-                <a:cs typeface="Malgun Gothic"/>
-              </a:rPr>
-              <a:t>scnuaram.vercel.app</a:t>
-            </a:r>
-          </a:p>
-        </p:txBody>
-      </p:sp>
-      <p:pic>
-        <p:nvPicPr>
-          <p:cNvPr id="9" name="Picture 8" descr="desktop-for-me.png"/>
-          <p:cNvPicPr>
-            <a:picLocks noChangeAspect="1"/>
-          </p:cNvPicPr>
-          <p:nvPr/>
-        </p:nvPicPr>
-        <p:blipFill>
-          <a:blip r:embed="rId2"/>
-          <a:stretch>
-            <a:fillRect/>
-          </a:stretch>
-        </p:blipFill>
-        <p:spPr>
-          <a:xfrm>
-            <a:off x="731520" y="1783080"/>
-            <a:ext cx="5943600" cy="3962399"/>
-          </a:xfrm>
-          <a:prstGeom prst="rect">
-            <a:avLst/>
-          </a:prstGeom>
-        </p:spPr>
-      </p:pic>
-      <p:sp>
-        <p:nvSpPr>
-          <p:cNvPr id="10" name="Rounded Rectangle 9"/>
+              <a:rPr sz="1500" b="1">
+                <a:solidFill>
+                  <a:srgbClr val="1F232B"/>
+                </a:solidFill>
+                <a:latin typeface="Malgun Gothic"/>
+                <a:ea typeface="Malgun Gothic"/>
+                <a:cs typeface="Malgun Gothic"/>
+              </a:rPr>
+              <a:t>캘린더</a:t>
+            </a:r>
+          </a:p>
+        </p:txBody>
+      </p:sp>
+      <p:sp>
+        <p:nvSpPr>
+          <p:cNvPr id="22" name="TextBox 21"/>
+          <p:cNvSpPr txBox="1"/>
+          <p:nvPr/>
+        </p:nvSpPr>
+        <p:spPr>
+          <a:xfrm>
+            <a:off x="1280160" y="4910328"/>
+            <a:ext cx="4206240" cy="365760"/>
+          </a:xfrm>
+          <a:prstGeom prst="rect">
+            <a:avLst/>
+          </a:prstGeom>
+          <a:noFill/>
+        </p:spPr>
+        <p:txBody>
+          <a:bodyPr wrap="square" lIns="0" rIns="0" tIns="0" bIns="0" anchor="t">
+            <a:spAutoFit/>
+          </a:bodyPr>
+          <a:lstStyle/>
+          <a:p>
+            <a:pPr algn="l"/>
+            <a:r>
+              <a:rPr sz="1100" b="0">
+                <a:solidFill>
+                  <a:srgbClr val="666E7A"/>
+                </a:solidFill>
+                <a:latin typeface="Malgun Gothic"/>
+                <a:ea typeface="Malgun Gothic"/>
+                <a:cs typeface="Malgun Gothic"/>
+              </a:rPr>
+              <a:t>날짜를 누르면 그날 마감 · 지금 접수중 목록</a:t>
+            </a:r>
+          </a:p>
+        </p:txBody>
+      </p:sp>
+      <p:sp>
+        <p:nvSpPr>
+          <p:cNvPr id="23" name="Rounded Rectangle 22"/>
           <p:cNvSpPr/>
           <p:nvPr/>
         </p:nvSpPr>
         <p:spPr>
           <a:xfrm>
-            <a:off x="7498079" y="1508760"/>
-            <a:ext cx="1920240" cy="1920240"/>
+            <a:off x="640080" y="5440680"/>
+            <a:ext cx="4754880" cy="868680"/>
           </a:xfrm>
           <a:prstGeom prst="roundRect">
             <a:avLst>
-              <a:gd name="adj" fmla="val 8000"/>
+              <a:gd name="adj" fmla="val 12000"/>
             </a:avLst>
           </a:prstGeom>
           <a:solidFill>
@@ -9318,14 +9351,14 @@
       </p:sp>
       <p:sp>
         <p:nvSpPr>
-          <p:cNvPr id="11" name="TextBox 10"/>
+          <p:cNvPr id="24" name="TextBox 23"/>
           <p:cNvSpPr txBox="1"/>
           <p:nvPr/>
         </p:nvSpPr>
         <p:spPr>
           <a:xfrm>
-            <a:off x="7498079" y="1783080"/>
-            <a:ext cx="1920240" cy="731520"/>
+            <a:off x="868680" y="5440680"/>
+            <a:ext cx="4389120" cy="868680"/>
           </a:xfrm>
           <a:prstGeom prst="rect">
             <a:avLst/>
@@ -9333,74 +9366,61 @@
           <a:noFill/>
         </p:spPr>
         <p:txBody>
-          <a:bodyPr wrap="square" lIns="0" rIns="0" tIns="0" bIns="0" anchor="t">
+          <a:bodyPr wrap="square" lIns="0" rIns="0" tIns="0" bIns="0" anchor="ctr">
             <a:spAutoFit/>
           </a:bodyPr>
           <a:lstStyle/>
           <a:p>
-            <a:pPr algn="ctr"/>
-            <a:r>
-              <a:rPr sz="3200" b="1">
-                <a:solidFill>
-                  <a:srgbClr val="0058B2"/>
-                </a:solidFill>
-                <a:latin typeface="Malgun Gothic"/>
-                <a:ea typeface="Malgun Gothic"/>
-                <a:cs typeface="Malgun Gothic"/>
-              </a:rPr>
-              <a:t>109곳</a:t>
-            </a:r>
-          </a:p>
-        </p:txBody>
-      </p:sp>
-      <p:sp>
-        <p:nvSpPr>
-          <p:cNvPr id="12" name="TextBox 11"/>
-          <p:cNvSpPr txBox="1"/>
-          <p:nvPr/>
-        </p:nvSpPr>
-        <p:spPr>
-          <a:xfrm>
-            <a:off x="7589519" y="2560320"/>
-            <a:ext cx="1737360" cy="731520"/>
-          </a:xfrm>
-          <a:prstGeom prst="rect">
-            <a:avLst/>
-          </a:prstGeom>
-          <a:noFill/>
-        </p:spPr>
-        <p:txBody>
-          <a:bodyPr wrap="square" lIns="0" rIns="0" tIns="0" bIns="0" anchor="t">
-            <a:spAutoFit/>
-          </a:bodyPr>
-          <a:lstStyle/>
-          <a:p>
-            <a:pPr algn="ctr"/>
-            <a:r>
-              <a:rPr sz="1200" b="0">
-                <a:solidFill>
-                  <a:srgbClr val="666E7A"/>
-                </a:solidFill>
-                <a:latin typeface="Malgun Gothic"/>
-                <a:ea typeface="Malgun Gothic"/>
-                <a:cs typeface="Malgun Gothic"/>
-              </a:rPr>
-              <a:t>학교 게시판을
-매시간 확인</a:t>
-            </a:r>
-          </a:p>
-        </p:txBody>
-      </p:sp>
-      <p:sp>
-        <p:nvSpPr>
-          <p:cNvPr id="13" name="Rounded Rectangle 12"/>
+            <a:pPr algn="l"/>
+            <a:r>
+              <a:rPr sz="1150" b="1">
+                <a:solidFill>
+                  <a:srgbClr val="1F232B"/>
+                </a:solidFill>
+                <a:latin typeface="Malgun Gothic"/>
+                <a:ea typeface="Malgun Gothic"/>
+                <a:cs typeface="Malgun Gothic"/>
+              </a:rPr>
+              <a:t>🎬 알림 녹화 영상</a:t>
+            </a:r>
+            <a:r>
+              <a:rPr sz="1150" b="0">
+                <a:solidFill>
+                  <a:srgbClr val="1F232B"/>
+                </a:solidFill>
+                <a:latin typeface="Malgun Gothic"/>
+                <a:ea typeface="Malgun Gothic"/>
+                <a:cs typeface="Malgun Gothic"/>
+              </a:rPr>
+              <a:t> — 여기에 영상을 넣어 주세요</a:t>
+            </a:r>
+          </a:p>
+          <a:p>
+            <a:pPr algn="l"/>
+            <a:r>
+              <a:rPr sz="1150" b="0">
+                <a:solidFill>
+                  <a:srgbClr val="1F232B"/>
+                </a:solidFill>
+                <a:latin typeface="Malgun Gothic"/>
+                <a:ea typeface="Malgun Gothic"/>
+                <a:cs typeface="Malgun Gothic"/>
+              </a:rPr>
+              <a:t>나머지는 휴대폰으로 직접 시연</a:t>
+            </a:r>
+          </a:p>
+        </p:txBody>
+      </p:sp>
+      <p:sp>
+        <p:nvSpPr>
+          <p:cNvPr id="25" name="Rounded Rectangle 24"/>
           <p:cNvSpPr/>
           <p:nvPr/>
         </p:nvSpPr>
         <p:spPr>
           <a:xfrm>
-            <a:off x="9601200" y="1508760"/>
-            <a:ext cx="1920240" cy="1920240"/>
+            <a:off x="5824728" y="1298448"/>
+            <a:ext cx="2385717" cy="4992624"/>
           </a:xfrm>
           <a:prstGeom prst="roundRect">
             <a:avLst>
@@ -9408,14 +9428,11 @@
             </a:avLst>
           </a:prstGeom>
           <a:solidFill>
-            <a:srgbClr val="FFFFFF"/>
+            <a:srgbClr val="111114"/>
           </a:solidFill>
-          <a:ln w="12700">
-            <a:solidFill>
-              <a:srgbClr val="DDE3EA"/>
-            </a:solidFill>
+          <a:ln>
+            <a:noFill/>
           </a:ln>
-          <a:effectLst/>
         </p:spPr>
         <p:style>
           <a:lnRef idx="1">
@@ -9439,91 +9456,40 @@
           </a:p>
         </p:txBody>
       </p:sp>
-      <p:sp>
-        <p:nvSpPr>
-          <p:cNvPr id="14" name="TextBox 13"/>
-          <p:cNvSpPr txBox="1"/>
-          <p:nvPr/>
-        </p:nvSpPr>
-        <p:spPr>
-          <a:xfrm>
-            <a:off x="9601200" y="1783080"/>
-            <a:ext cx="1920240" cy="731520"/>
-          </a:xfrm>
-          <a:prstGeom prst="rect">
-            <a:avLst/>
-          </a:prstGeom>
-          <a:noFill/>
-        </p:spPr>
-        <p:txBody>
-          <a:bodyPr wrap="square" lIns="0" rIns="0" tIns="0" bIns="0" anchor="t">
-            <a:spAutoFit/>
-          </a:bodyPr>
-          <a:lstStyle/>
-          <a:p>
-            <a:pPr algn="ctr"/>
-            <a:r>
-              <a:rPr sz="3200" b="1">
-                <a:solidFill>
-                  <a:srgbClr val="0058B2"/>
-                </a:solidFill>
-                <a:latin typeface="Malgun Gothic"/>
-                <a:ea typeface="Malgun Gothic"/>
-                <a:cs typeface="Malgun Gothic"/>
-              </a:rPr>
-              <a:t>3종</a:t>
-            </a:r>
-          </a:p>
-        </p:txBody>
-      </p:sp>
-      <p:sp>
-        <p:nvSpPr>
-          <p:cNvPr id="15" name="TextBox 14"/>
-          <p:cNvSpPr txBox="1"/>
-          <p:nvPr/>
-        </p:nvSpPr>
-        <p:spPr>
-          <a:xfrm>
-            <a:off x="9692640" y="2560320"/>
-            <a:ext cx="1737360" cy="731520"/>
-          </a:xfrm>
-          <a:prstGeom prst="rect">
-            <a:avLst/>
-          </a:prstGeom>
-          <a:noFill/>
-        </p:spPr>
-        <p:txBody>
-          <a:bodyPr wrap="square" lIns="0" rIns="0" tIns="0" bIns="0" anchor="t">
-            <a:spAutoFit/>
-          </a:bodyPr>
-          <a:lstStyle/>
-          <a:p>
-            <a:pPr algn="ctr"/>
-            <a:r>
-              <a:rPr sz="1200" b="0">
-                <a:solidFill>
-                  <a:srgbClr val="666E7A"/>
-                </a:solidFill>
-                <a:latin typeface="Malgun Gothic"/>
-                <a:ea typeface="Malgun Gothic"/>
-                <a:cs typeface="Malgun Gothic"/>
-              </a:rPr>
-              <a:t>큐넷·데이터자격·
-K-Startup 공공 API</a:t>
-            </a:r>
-          </a:p>
-        </p:txBody>
-      </p:sp>
-      <p:sp>
-        <p:nvSpPr>
-          <p:cNvPr id="16" name="Rounded Rectangle 15"/>
+      <p:pic>
+        <p:nvPicPr>
+          <p:cNvPr id="26" name="Picture 25" descr="3-detail-period.png"/>
+          <p:cNvPicPr>
+            <a:picLocks noChangeAspect="1"/>
+          </p:cNvPicPr>
+          <p:nvPr/>
+        </p:nvPicPr>
+        <p:blipFill>
+          <a:blip r:embed="rId2"/>
+          <a:stretch>
+            <a:fillRect/>
+          </a:stretch>
+        </p:blipFill>
+        <p:spPr>
+          <a:xfrm>
+            <a:off x="5897880" y="1371600"/>
+            <a:ext cx="2239413" cy="4846320"/>
+          </a:xfrm>
+          <a:prstGeom prst="rect">
+            <a:avLst/>
+          </a:prstGeom>
+        </p:spPr>
+      </p:pic>
+      <p:sp>
+        <p:nvSpPr>
+          <p:cNvPr id="27" name="Rounded Rectangle 26"/>
           <p:cNvSpPr/>
           <p:nvPr/>
         </p:nvSpPr>
         <p:spPr>
           <a:xfrm>
-            <a:off x="7498079" y="3657600"/>
-            <a:ext cx="1920240" cy="1920240"/>
+            <a:off x="8476488" y="1298448"/>
+            <a:ext cx="2385717" cy="4992624"/>
           </a:xfrm>
           <a:prstGeom prst="roundRect">
             <a:avLst>
@@ -9531,14 +9497,11 @@
             </a:avLst>
           </a:prstGeom>
           <a:solidFill>
-            <a:srgbClr val="FFFFFF"/>
+            <a:srgbClr val="111114"/>
           </a:solidFill>
-          <a:ln w="12700">
-            <a:solidFill>
-              <a:srgbClr val="DDE3EA"/>
-            </a:solidFill>
+          <a:ln>
+            <a:noFill/>
           </a:ln>
-          <a:effectLst/>
         </p:spPr>
         <p:style>
           <a:lnRef idx="1">
@@ -9562,16 +9525,40 @@
           </a:p>
         </p:txBody>
       </p:sp>
-      <p:sp>
-        <p:nvSpPr>
-          <p:cNvPr id="17" name="TextBox 16"/>
+      <p:pic>
+        <p:nvPicPr>
+          <p:cNvPr id="28" name="Picture 27" descr="2b-scholarship.png"/>
+          <p:cNvPicPr>
+            <a:picLocks noChangeAspect="1"/>
+          </p:cNvPicPr>
+          <p:nvPr/>
+        </p:nvPicPr>
+        <p:blipFill>
+          <a:blip r:embed="rId3"/>
+          <a:stretch>
+            <a:fillRect/>
+          </a:stretch>
+        </p:blipFill>
+        <p:spPr>
+          <a:xfrm>
+            <a:off x="8549640" y="1371600"/>
+            <a:ext cx="2239413" cy="4846320"/>
+          </a:xfrm>
+          <a:prstGeom prst="rect">
+            <a:avLst/>
+          </a:prstGeom>
+        </p:spPr>
+      </p:pic>
+      <p:sp>
+        <p:nvSpPr>
+          <p:cNvPr id="29" name="TextBox 28"/>
           <p:cNvSpPr txBox="1"/>
           <p:nvPr/>
         </p:nvSpPr>
         <p:spPr>
           <a:xfrm>
-            <a:off x="7498079" y="3931920"/>
-            <a:ext cx="1920240" cy="731520"/>
+            <a:off x="5669280" y="6355080"/>
+            <a:ext cx="2743200" cy="320040"/>
           </a:xfrm>
           <a:prstGeom prst="rect">
             <a:avLst/>
@@ -9586,29 +9573,29 @@
           <a:p>
             <a:pPr algn="ctr"/>
             <a:r>
-              <a:rPr sz="3200" b="1">
-                <a:solidFill>
-                  <a:srgbClr val="0058B2"/>
-                </a:solidFill>
-                <a:latin typeface="Malgun Gothic"/>
-                <a:ea typeface="Malgun Gothic"/>
-                <a:cs typeface="Malgun Gothic"/>
-              </a:rPr>
-              <a:t>70개</a:t>
-            </a:r>
-          </a:p>
-        </p:txBody>
-      </p:sp>
-      <p:sp>
-        <p:nvSpPr>
-          <p:cNvPr id="18" name="TextBox 17"/>
+              <a:rPr sz="1050" b="0">
+                <a:solidFill>
+                  <a:srgbClr val="666E7A"/>
+                </a:solidFill>
+                <a:latin typeface="Malgun Gothic"/>
+                <a:ea typeface="Malgun Gothic"/>
+                <a:cs typeface="Malgun Gothic"/>
+              </a:rPr>
+              <a:t>시험: 접수 전 · 신청 기간</a:t>
+            </a:r>
+          </a:p>
+        </p:txBody>
+      </p:sp>
+      <p:sp>
+        <p:nvSpPr>
+          <p:cNvPr id="30" name="TextBox 29"/>
           <p:cNvSpPr txBox="1"/>
           <p:nvPr/>
         </p:nvSpPr>
         <p:spPr>
           <a:xfrm>
-            <a:off x="7589519" y="4709160"/>
-            <a:ext cx="1737360" cy="731520"/>
+            <a:off x="8321040" y="6355080"/>
+            <a:ext cx="2743200" cy="320040"/>
           </a:xfrm>
           <a:prstGeom prst="rect">
             <a:avLst/>
@@ -9623,7 +9610,7 @@
           <a:p>
             <a:pPr algn="ctr"/>
             <a:r>
-              <a:rPr sz="1200" b="0">
+              <a:rPr sz="1050" b="0">
                 <a:solidFill>
                   <a:srgbClr val="666E7A"/>
                 </a:solidFill>
@@ -9631,35 +9618,34 @@
                 <a:ea typeface="Malgun Gothic"/>
                 <a:cs typeface="Malgun Gothic"/>
               </a:rPr>
-              <a:t>학과 목록에서
-골라서 추천</a:t>
-            </a:r>
-          </a:p>
-        </p:txBody>
-      </p:sp>
-      <p:sp>
-        <p:nvSpPr>
-          <p:cNvPr id="19" name="Rounded Rectangle 18"/>
+              <a:t>교외 장학금 · 접수중 D-1</a:t>
+            </a:r>
+          </a:p>
+        </p:txBody>
+      </p:sp>
+      <p:sp>
+        <p:nvSpPr>
+          <p:cNvPr id="31" name="Rounded Rectangle 30">
+            <a:hlinkClick r:id="rId4"/>
+          </p:cNvPr>
           <p:cNvSpPr/>
           <p:nvPr/>
         </p:nvSpPr>
         <p:spPr>
           <a:xfrm>
-            <a:off x="9601200" y="3657600"/>
-            <a:ext cx="1920240" cy="1920240"/>
+            <a:off x="10881360" y="1371600"/>
+            <a:ext cx="1097280" cy="457200"/>
           </a:xfrm>
           <a:prstGeom prst="roundRect">
             <a:avLst>
-              <a:gd name="adj" fmla="val 8000"/>
+              <a:gd name="adj" fmla="val 50000"/>
             </a:avLst>
           </a:prstGeom>
           <a:solidFill>
-            <a:srgbClr val="FFFFFF"/>
+            <a:srgbClr val="1E9E6A"/>
           </a:solidFill>
-          <a:ln w="12700">
-            <a:solidFill>
-              <a:srgbClr val="DDE3EA"/>
-            </a:solidFill>
+          <a:ln>
+            <a:noFill/>
           </a:ln>
           <a:effectLst/>
         </p:spPr>
@@ -9687,14 +9673,14 @@
       </p:sp>
       <p:sp>
         <p:nvSpPr>
-          <p:cNvPr id="20" name="TextBox 19"/>
+          <p:cNvPr id="32" name="TextBox 31"/>
           <p:cNvSpPr txBox="1"/>
           <p:nvPr/>
         </p:nvSpPr>
         <p:spPr>
           <a:xfrm>
-            <a:off x="9601200" y="3931920"/>
-            <a:ext cx="1920240" cy="731520"/>
+            <a:off x="10881360" y="1371600"/>
+            <a:ext cx="1097280" cy="457200"/>
           </a:xfrm>
           <a:prstGeom prst="rect">
             <a:avLst/>
@@ -9702,104 +9688,29 @@
           <a:noFill/>
         </p:spPr>
         <p:txBody>
-          <a:bodyPr wrap="square" lIns="0" rIns="0" tIns="0" bIns="0" anchor="t">
+          <a:bodyPr wrap="square" lIns="0" rIns="0" tIns="0" bIns="0" anchor="ctr">
             <a:spAutoFit/>
           </a:bodyPr>
           <a:lstStyle/>
           <a:p>
             <a:pPr algn="ctr"/>
             <a:r>
-              <a:rPr sz="3200" b="1">
-                <a:solidFill>
-                  <a:srgbClr val="0058B2"/>
-                </a:solidFill>
-                <a:latin typeface="Malgun Gothic"/>
-                <a:ea typeface="Malgun Gothic"/>
-                <a:cs typeface="Malgun Gothic"/>
-              </a:rPr>
-              <a:t>0원</a:t>
-            </a:r>
-          </a:p>
-        </p:txBody>
-      </p:sp>
-      <p:sp>
-        <p:nvSpPr>
-          <p:cNvPr id="21" name="TextBox 20"/>
-          <p:cNvSpPr txBox="1"/>
-          <p:nvPr/>
-        </p:nvSpPr>
-        <p:spPr>
-          <a:xfrm>
-            <a:off x="9692640" y="4709160"/>
-            <a:ext cx="1737360" cy="731520"/>
-          </a:xfrm>
-          <a:prstGeom prst="rect">
-            <a:avLst/>
-          </a:prstGeom>
-          <a:noFill/>
-        </p:spPr>
-        <p:txBody>
-          <a:bodyPr wrap="square" lIns="0" rIns="0" tIns="0" bIns="0" anchor="t">
-            <a:spAutoFit/>
-          </a:bodyPr>
-          <a:lstStyle/>
-          <a:p>
-            <a:pPr algn="ctr"/>
-            <a:r>
-              <a:rPr sz="1200" b="0">
-                <a:solidFill>
-                  <a:srgbClr val="666E7A"/>
-                </a:solidFill>
-                <a:latin typeface="Malgun Gothic"/>
-                <a:ea typeface="Malgun Gothic"/>
-                <a:cs typeface="Malgun Gothic"/>
-              </a:rPr>
-              <a:t>서버·AI
-운영 비용</a:t>
-            </a:r>
-          </a:p>
-        </p:txBody>
-      </p:sp>
-      <p:sp>
-        <p:nvSpPr>
-          <p:cNvPr id="22" name="TextBox 21"/>
-          <p:cNvSpPr txBox="1"/>
-          <p:nvPr/>
-        </p:nvSpPr>
-        <p:spPr>
-          <a:xfrm>
-            <a:off x="640080" y="6035040"/>
-            <a:ext cx="10972800" cy="365760"/>
-          </a:xfrm>
-          <a:prstGeom prst="rect">
-            <a:avLst/>
-          </a:prstGeom>
-          <a:noFill/>
-        </p:spPr>
-        <p:txBody>
-          <a:bodyPr wrap="square" lIns="0" rIns="0" tIns="0" bIns="0" anchor="t">
-            <a:spAutoFit/>
-          </a:bodyPr>
-          <a:lstStyle/>
-          <a:p>
-            <a:pPr algn="ctr"/>
-            <a:r>
-              <a:rPr sz="1400" b="1">
-                <a:solidFill>
-                  <a:srgbClr val="1F232B"/>
-                </a:solidFill>
-                <a:latin typeface="Malgun Gothic"/>
-                <a:ea typeface="Malgun Gothic"/>
-                <a:cs typeface="Malgun Gothic"/>
-              </a:rPr>
-              <a:t>휴대폰에서도, 컴퓨터에서도 같은 주소로 열립니다. 설치 없이 '홈 화면에 추가'하면 앱처럼 씁니다.</a:t>
-            </a:r>
-          </a:p>
-        </p:txBody>
-      </p:sp>
-      <p:sp>
-        <p:nvSpPr>
-          <p:cNvPr id="23" name="TextBox 22"/>
+              <a:rPr sz="1200" b="1">
+                <a:solidFill>
+                  <a:srgbClr val="FFFFFF"/>
+                </a:solidFill>
+                <a:latin typeface="Malgun Gothic"/>
+                <a:ea typeface="Malgun Gothic"/>
+                <a:cs typeface="Malgun Gothic"/>
+              </a:rPr>
+              <a:t>▶ 열기</a:t>
+            </a:r>
+          </a:p>
+        </p:txBody>
+      </p:sp>
+      <p:sp>
+        <p:nvSpPr>
+          <p:cNvPr id="33" name="TextBox 32"/>
           <p:cNvSpPr txBox="1"/>
           <p:nvPr/>
         </p:nvSpPr>
@@ -9892,25 +9803,62 @@
                 <a:ea typeface="Malgun Gothic"/>
                 <a:cs typeface="Malgun Gothic"/>
               </a:rPr>
-              <a:t>학생들이 쓸수록 더 정확해집니다</a:t>
-            </a:r>
-          </a:p>
-        </p:txBody>
-      </p:sp>
-      <p:sp>
-        <p:nvSpPr>
-          <p:cNvPr id="3" name="Rounded Rectangle 2"/>
+              <a:t>기대 효과와 앞으로</a:t>
+            </a:r>
+          </a:p>
+        </p:txBody>
+      </p:sp>
+      <p:sp>
+        <p:nvSpPr>
+          <p:cNvPr id="3" name="TextBox 2"/>
+          <p:cNvSpPr txBox="1"/>
+          <p:nvPr/>
+        </p:nvSpPr>
+        <p:spPr>
+          <a:xfrm>
+            <a:off x="594360" y="1234440"/>
+            <a:ext cx="4937760" cy="365760"/>
+          </a:xfrm>
+          <a:prstGeom prst="rect">
+            <a:avLst/>
+          </a:prstGeom>
+          <a:noFill/>
+        </p:spPr>
+        <p:txBody>
+          <a:bodyPr wrap="square" lIns="0" rIns="0" tIns="0" bIns="0" anchor="t">
+            <a:spAutoFit/>
+          </a:bodyPr>
+          <a:lstStyle/>
+          <a:p>
+            <a:pPr algn="l"/>
+            <a:r>
+              <a:rPr sz="1800" b="1">
+                <a:solidFill>
+                  <a:srgbClr val="0058B2"/>
+                </a:solidFill>
+                <a:latin typeface="Malgun Gothic"/>
+                <a:ea typeface="Malgun Gothic"/>
+                <a:cs typeface="Malgun Gothic"/>
+              </a:rPr>
+              <a:t>기대 효과</a:t>
+            </a:r>
+          </a:p>
+        </p:txBody>
+      </p:sp>
+      <p:sp>
+        <p:nvSpPr>
+          <p:cNvPr id="4" name="Rounded Rectangle 3"/>
           <p:cNvSpPr/>
           <p:nvPr/>
         </p:nvSpPr>
         <p:spPr>
           <a:xfrm>
-            <a:off x="594360" y="2011680"/>
-            <a:ext cx="3474720" cy="2651760"/>
+            <a:off x="594360" y="1737360"/>
+            <a:ext cx="4937760" cy="914400"/>
           </a:xfrm>
           <a:prstGeom prst="roundRect">
             <a:avLst>
-              <a:gd name="adj" fmla="val 6000"/>
+              <a:gd name="adj" fmla="val 10000"/>
             </a:avLst>
           </a:prstGeom>
           <a:solidFill>
@@ -9947,14 +9895,14 @@
       </p:sp>
       <p:sp>
         <p:nvSpPr>
-          <p:cNvPr id="4" name="TextBox 3"/>
+          <p:cNvPr id="5" name="TextBox 4"/>
           <p:cNvSpPr txBox="1"/>
           <p:nvPr/>
         </p:nvSpPr>
         <p:spPr>
           <a:xfrm>
-            <a:off x="914400" y="2286000"/>
-            <a:ext cx="2834640" cy="365760"/>
+            <a:off x="868680" y="1847088"/>
+            <a:ext cx="4480560" cy="365760"/>
           </a:xfrm>
           <a:prstGeom prst="rect">
             <a:avLst/>
@@ -9969,7 +9917,7 @@
           <a:p>
             <a:pPr algn="l"/>
             <a:r>
-              <a:rPr sz="1400" b="1">
+              <a:rPr sz="1500" b="1">
                 <a:solidFill>
                   <a:srgbClr val="1F232B"/>
                 </a:solidFill>
@@ -9977,21 +9925,21 @@
                 <a:ea typeface="Malgun Gothic"/>
                 <a:cs typeface="Malgun Gothic"/>
               </a:rPr>
-              <a:t>지금</a:t>
-            </a:r>
-          </a:p>
-        </p:txBody>
-      </p:sp>
-      <p:sp>
-        <p:nvSpPr>
-          <p:cNvPr id="5" name="TextBox 4"/>
+              <a:t>확인 시간 단축</a:t>
+            </a:r>
+          </a:p>
+        </p:txBody>
+      </p:sp>
+      <p:sp>
+        <p:nvSpPr>
+          <p:cNvPr id="6" name="TextBox 5"/>
           <p:cNvSpPr txBox="1"/>
           <p:nvPr/>
         </p:nvSpPr>
         <p:spPr>
           <a:xfrm>
-            <a:off x="914400" y="2743200"/>
-            <a:ext cx="2926080" cy="548640"/>
+            <a:off x="868680" y="2212848"/>
+            <a:ext cx="4480560" cy="365760"/>
           </a:xfrm>
           <a:prstGeom prst="rect">
             <a:avLst/>
@@ -10006,48 +9954,7 @@
           <a:p>
             <a:pPr algn="l"/>
             <a:r>
-              <a:rPr sz="2000" b="1">
-                <a:solidFill>
-                  <a:srgbClr val="1F232B"/>
-                </a:solidFill>
-                <a:latin typeface="Malgun Gothic"/>
-                <a:ea typeface="Malgun Gothic"/>
-                <a:cs typeface="Malgun Gothic"/>
-              </a:rPr>
-              <a:t>누구나 쓸 수 있는 웹앱</a:t>
-            </a:r>
-          </a:p>
-        </p:txBody>
-      </p:sp>
-      <p:sp>
-        <p:nvSpPr>
-          <p:cNvPr id="6" name="TextBox 5"/>
-          <p:cNvSpPr txBox="1"/>
-          <p:nvPr/>
-        </p:nvSpPr>
-        <p:spPr>
-          <a:xfrm>
-            <a:off x="914400" y="3474720"/>
-            <a:ext cx="2926080" cy="1645920"/>
-          </a:xfrm>
-          <a:prstGeom prst="rect">
-            <a:avLst/>
-          </a:prstGeom>
-          <a:noFill/>
-        </p:spPr>
-        <p:txBody>
-          <a:bodyPr wrap="square" lIns="0" rIns="0" tIns="0" bIns="0" anchor="t">
-            <a:spAutoFit/>
-          </a:bodyPr>
-          <a:lstStyle/>
-          <a:p>
-            <a:pPr algn="l">
-              <a:spcAft>
-                <a:spcPts val="200"/>
-              </a:spcAft>
-            </a:pPr>
-            <a:r>
-              <a:rPr sz="1400" b="0">
+              <a:rPr sz="1100" b="0">
                 <a:solidFill>
                   <a:srgbClr val="666E7A"/>
                 </a:solidFill>
@@ -10055,31 +9962,34 @@
                 <a:ea typeface="Malgun Gothic"/>
                 <a:cs typeface="Malgun Gothic"/>
               </a:rPr>
-              <a:t>매시간 수집, 추천, 마감 알림까지
-실제 주소에서 운영 중입니다.</a:t>
-            </a:r>
-          </a:p>
-        </p:txBody>
-      </p:sp>
-      <p:sp>
-        <p:nvSpPr>
-          <p:cNvPr id="7" name="Right Arrow 6"/>
+              <a:t>게시판 112곳 + 교외 4곳을 도는 대신 앱 한 곳</a:t>
+            </a:r>
+          </a:p>
+        </p:txBody>
+      </p:sp>
+      <p:sp>
+        <p:nvSpPr>
+          <p:cNvPr id="7" name="Rounded Rectangle 6"/>
           <p:cNvSpPr/>
           <p:nvPr/>
         </p:nvSpPr>
         <p:spPr>
           <a:xfrm>
-            <a:off x="4096512" y="3154680"/>
-            <a:ext cx="292608" cy="365760"/>
-          </a:xfrm>
-          <a:prstGeom prst="rightArrow">
-            <a:avLst/>
+            <a:off x="594360" y="2816352"/>
+            <a:ext cx="4937760" cy="914400"/>
+          </a:xfrm>
+          <a:prstGeom prst="roundRect">
+            <a:avLst>
+              <a:gd name="adj" fmla="val 10000"/>
+            </a:avLst>
           </a:prstGeom>
           <a:solidFill>
-            <a:srgbClr val="B8C1CC"/>
+            <a:srgbClr val="FFFFFF"/>
           </a:solidFill>
-          <a:ln>
-            <a:noFill/>
+          <a:ln w="12700">
+            <a:solidFill>
+              <a:srgbClr val="DDE3EA"/>
+            </a:solidFill>
           </a:ln>
           <a:effectLst/>
         </p:spPr>
@@ -10107,25 +10017,101 @@
       </p:sp>
       <p:sp>
         <p:nvSpPr>
-          <p:cNvPr id="8" name="Rounded Rectangle 7"/>
+          <p:cNvPr id="8" name="TextBox 7"/>
+          <p:cNvSpPr txBox="1"/>
+          <p:nvPr/>
+        </p:nvSpPr>
+        <p:spPr>
+          <a:xfrm>
+            <a:off x="868680" y="2926080"/>
+            <a:ext cx="4480560" cy="365760"/>
+          </a:xfrm>
+          <a:prstGeom prst="rect">
+            <a:avLst/>
+          </a:prstGeom>
+          <a:noFill/>
+        </p:spPr>
+        <p:txBody>
+          <a:bodyPr wrap="square" lIns="0" rIns="0" tIns="0" bIns="0" anchor="t">
+            <a:spAutoFit/>
+          </a:bodyPr>
+          <a:lstStyle/>
+          <a:p>
+            <a:pPr algn="l"/>
+            <a:r>
+              <a:rPr sz="1500" b="1">
+                <a:solidFill>
+                  <a:srgbClr val="1F232B"/>
+                </a:solidFill>
+                <a:latin typeface="Malgun Gothic"/>
+                <a:ea typeface="Malgun Gothic"/>
+                <a:cs typeface="Malgun Gothic"/>
+              </a:rPr>
+              <a:t>마감 놓침 감소</a:t>
+            </a:r>
+          </a:p>
+        </p:txBody>
+      </p:sp>
+      <p:sp>
+        <p:nvSpPr>
+          <p:cNvPr id="9" name="TextBox 8"/>
+          <p:cNvSpPr txBox="1"/>
+          <p:nvPr/>
+        </p:nvSpPr>
+        <p:spPr>
+          <a:xfrm>
+            <a:off x="868680" y="3291840"/>
+            <a:ext cx="4480560" cy="365760"/>
+          </a:xfrm>
+          <a:prstGeom prst="rect">
+            <a:avLst/>
+          </a:prstGeom>
+          <a:noFill/>
+        </p:spPr>
+        <p:txBody>
+          <a:bodyPr wrap="square" lIns="0" rIns="0" tIns="0" bIns="0" anchor="t">
+            <a:spAutoFit/>
+          </a:bodyPr>
+          <a:lstStyle/>
+          <a:p>
+            <a:pPr algn="l"/>
+            <a:r>
+              <a:rPr sz="1100" b="0">
+                <a:solidFill>
+                  <a:srgbClr val="666E7A"/>
+                </a:solidFill>
+                <a:latin typeface="Malgun Gothic"/>
+                <a:ea typeface="Malgun Gothic"/>
+                <a:cs typeface="Malgun Gothic"/>
+              </a:rPr>
+              <a:t>마감 7·3·1일 전 · 접수 시작 알림, 밤에는 모아서 아침에</a:t>
+            </a:r>
+          </a:p>
+        </p:txBody>
+      </p:sp>
+      <p:sp>
+        <p:nvSpPr>
+          <p:cNvPr id="10" name="Rounded Rectangle 9"/>
           <p:cNvSpPr/>
           <p:nvPr/>
         </p:nvSpPr>
         <p:spPr>
           <a:xfrm>
-            <a:off x="4434840" y="2011680"/>
-            <a:ext cx="3474720" cy="2651760"/>
+            <a:off x="594360" y="3895344"/>
+            <a:ext cx="4937760" cy="914400"/>
           </a:xfrm>
           <a:prstGeom prst="roundRect">
             <a:avLst>
-              <a:gd name="adj" fmla="val 6000"/>
+              <a:gd name="adj" fmla="val 10000"/>
             </a:avLst>
           </a:prstGeom>
           <a:solidFill>
-            <a:srgbClr val="EEF4FB"/>
+            <a:srgbClr val="FFFFFF"/>
           </a:solidFill>
-          <a:ln>
-            <a:noFill/>
+          <a:ln w="12700">
+            <a:solidFill>
+              <a:srgbClr val="DDE3EA"/>
+            </a:solidFill>
           </a:ln>
           <a:effectLst/>
         </p:spPr>
@@ -10153,14 +10139,14 @@
       </p:sp>
       <p:sp>
         <p:nvSpPr>
-          <p:cNvPr id="9" name="TextBox 8"/>
+          <p:cNvPr id="11" name="TextBox 10"/>
           <p:cNvSpPr txBox="1"/>
           <p:nvPr/>
         </p:nvSpPr>
         <p:spPr>
           <a:xfrm>
-            <a:off x="4754880" y="2286000"/>
-            <a:ext cx="2834640" cy="365760"/>
+            <a:off x="868680" y="4005072"/>
+            <a:ext cx="4480560" cy="365760"/>
           </a:xfrm>
           <a:prstGeom prst="rect">
             <a:avLst/>
@@ -10175,29 +10161,29 @@
           <a:p>
             <a:pPr algn="l"/>
             <a:r>
-              <a:rPr sz="1400" b="1">
-                <a:solidFill>
-                  <a:srgbClr val="0058B2"/>
-                </a:solidFill>
-                <a:latin typeface="Malgun Gothic"/>
-                <a:ea typeface="Malgun Gothic"/>
-                <a:cs typeface="Malgun Gothic"/>
-              </a:rPr>
-              <a:t>다음</a:t>
-            </a:r>
-          </a:p>
-        </p:txBody>
-      </p:sp>
-      <p:sp>
-        <p:nvSpPr>
-          <p:cNvPr id="10" name="TextBox 9"/>
+              <a:rPr sz="1500" b="1">
+                <a:solidFill>
+                  <a:srgbClr val="1F232B"/>
+                </a:solidFill>
+                <a:latin typeface="Malgun Gothic"/>
+                <a:ea typeface="Malgun Gothic"/>
+                <a:cs typeface="Malgun Gothic"/>
+              </a:rPr>
+              <a:t>기회 발견</a:t>
+            </a:r>
+          </a:p>
+        </p:txBody>
+      </p:sp>
+      <p:sp>
+        <p:nvSpPr>
+          <p:cNvPr id="12" name="TextBox 11"/>
           <p:cNvSpPr txBox="1"/>
           <p:nvPr/>
         </p:nvSpPr>
         <p:spPr>
           <a:xfrm>
-            <a:off x="4754880" y="2743200"/>
-            <a:ext cx="2926080" cy="548640"/>
+            <a:off x="868680" y="4370831"/>
+            <a:ext cx="4480560" cy="365760"/>
           </a:xfrm>
           <a:prstGeom prst="rect">
             <a:avLst/>
@@ -10212,48 +10198,7 @@
           <a:p>
             <a:pPr algn="l"/>
             <a:r>
-              <a:rPr sz="2000" b="1">
-                <a:solidFill>
-                  <a:srgbClr val="1F232B"/>
-                </a:solidFill>
-                <a:latin typeface="Malgun Gothic"/>
-                <a:ea typeface="Malgun Gothic"/>
-                <a:cs typeface="Malgun Gothic"/>
-              </a:rPr>
-              <a:t>학생 의견으로 다듬기</a:t>
-            </a:r>
-          </a:p>
-        </p:txBody>
-      </p:sp>
-      <p:sp>
-        <p:nvSpPr>
-          <p:cNvPr id="11" name="TextBox 10"/>
-          <p:cNvSpPr txBox="1"/>
-          <p:nvPr/>
-        </p:nvSpPr>
-        <p:spPr>
-          <a:xfrm>
-            <a:off x="4754880" y="3474720"/>
-            <a:ext cx="2926080" cy="1645920"/>
-          </a:xfrm>
-          <a:prstGeom prst="rect">
-            <a:avLst/>
-          </a:prstGeom>
-          <a:noFill/>
-        </p:spPr>
-        <p:txBody>
-          <a:bodyPr wrap="square" lIns="0" rIns="0" tIns="0" bIns="0" anchor="t">
-            <a:spAutoFit/>
-          </a:bodyPr>
-          <a:lstStyle/>
-          <a:p>
-            <a:pPr algn="l">
-              <a:spcAft>
-                <a:spcPts val="200"/>
-              </a:spcAft>
-            </a:pPr>
-            <a:r>
-              <a:rPr sz="1400" b="0">
+              <a:rPr sz="1100" b="0">
                 <a:solidFill>
                   <a:srgbClr val="666E7A"/>
                 </a:solidFill>
@@ -10261,31 +10206,34 @@
                 <a:ea typeface="Malgun Gothic"/>
                 <a:cs typeface="Malgun Gothic"/>
               </a:rPr>
-              <a:t>지역 한정 공고 표시, 추천이 빗나간
-공지를 모아 규칙을 고칩니다.</a:t>
-            </a:r>
-          </a:p>
-        </p:txBody>
-      </p:sp>
-      <p:sp>
-        <p:nvSpPr>
-          <p:cNvPr id="12" name="Right Arrow 11"/>
+              <a:t>교내만 보던 학생도 교외 장학·자격증·공모전까지</a:t>
+            </a:r>
+          </a:p>
+        </p:txBody>
+      </p:sp>
+      <p:sp>
+        <p:nvSpPr>
+          <p:cNvPr id="13" name="Rounded Rectangle 12"/>
           <p:cNvSpPr/>
           <p:nvPr/>
         </p:nvSpPr>
         <p:spPr>
           <a:xfrm>
-            <a:off x="7936992" y="3154680"/>
-            <a:ext cx="292608" cy="365760"/>
-          </a:xfrm>
-          <a:prstGeom prst="rightArrow">
-            <a:avLst/>
+            <a:off x="594360" y="4974336"/>
+            <a:ext cx="4937760" cy="914400"/>
+          </a:xfrm>
+          <a:prstGeom prst="roundRect">
+            <a:avLst>
+              <a:gd name="adj" fmla="val 10000"/>
+            </a:avLst>
           </a:prstGeom>
           <a:solidFill>
-            <a:srgbClr val="B8C1CC"/>
+            <a:srgbClr val="FFFFFF"/>
           </a:solidFill>
-          <a:ln>
-            <a:noFill/>
+          <a:ln w="12700">
+            <a:solidFill>
+              <a:srgbClr val="DDE3EA"/>
+            </a:solidFill>
           </a:ln>
           <a:effectLst/>
         </p:spPr>
@@ -10313,18 +10261,129 @@
       </p:sp>
       <p:sp>
         <p:nvSpPr>
-          <p:cNvPr id="13" name="Rounded Rectangle 12"/>
+          <p:cNvPr id="14" name="TextBox 13"/>
+          <p:cNvSpPr txBox="1"/>
+          <p:nvPr/>
+        </p:nvSpPr>
+        <p:spPr>
+          <a:xfrm>
+            <a:off x="868680" y="5084064"/>
+            <a:ext cx="4480560" cy="365760"/>
+          </a:xfrm>
+          <a:prstGeom prst="rect">
+            <a:avLst/>
+          </a:prstGeom>
+          <a:noFill/>
+        </p:spPr>
+        <p:txBody>
+          <a:bodyPr wrap="square" lIns="0" rIns="0" tIns="0" bIns="0" anchor="t">
+            <a:spAutoFit/>
+          </a:bodyPr>
+          <a:lstStyle/>
+          <a:p>
+            <a:pPr algn="l"/>
+            <a:r>
+              <a:rPr sz="1500" b="1">
+                <a:solidFill>
+                  <a:srgbClr val="1F232B"/>
+                </a:solidFill>
+                <a:latin typeface="Malgun Gothic"/>
+                <a:ea typeface="Malgun Gothic"/>
+                <a:cs typeface="Malgun Gothic"/>
+              </a:rPr>
+              <a:t>정보 격차 완화</a:t>
+            </a:r>
+          </a:p>
+        </p:txBody>
+      </p:sp>
+      <p:sp>
+        <p:nvSpPr>
+          <p:cNvPr id="15" name="TextBox 14"/>
+          <p:cNvSpPr txBox="1"/>
+          <p:nvPr/>
+        </p:nvSpPr>
+        <p:spPr>
+          <a:xfrm>
+            <a:off x="868680" y="5449823"/>
+            <a:ext cx="4480560" cy="365760"/>
+          </a:xfrm>
+          <a:prstGeom prst="rect">
+            <a:avLst/>
+          </a:prstGeom>
+          <a:noFill/>
+        </p:spPr>
+        <p:txBody>
+          <a:bodyPr wrap="square" lIns="0" rIns="0" tIns="0" bIns="0" anchor="t">
+            <a:spAutoFit/>
+          </a:bodyPr>
+          <a:lstStyle/>
+          <a:p>
+            <a:pPr algn="l"/>
+            <a:r>
+              <a:rPr sz="1100" b="0">
+                <a:solidFill>
+                  <a:srgbClr val="666E7A"/>
+                </a:solidFill>
+                <a:latin typeface="Malgun Gothic"/>
+                <a:ea typeface="Malgun Gothic"/>
+                <a:cs typeface="Malgun Gothic"/>
+              </a:rPr>
+              <a:t>선배·단톡방 없이도 신입생이 같은 정보를</a:t>
+            </a:r>
+          </a:p>
+        </p:txBody>
+      </p:sp>
+      <p:sp>
+        <p:nvSpPr>
+          <p:cNvPr id="16" name="TextBox 15"/>
+          <p:cNvSpPr txBox="1"/>
+          <p:nvPr/>
+        </p:nvSpPr>
+        <p:spPr>
+          <a:xfrm>
+            <a:off x="5989320" y="1234440"/>
+            <a:ext cx="5669280" cy="365760"/>
+          </a:xfrm>
+          <a:prstGeom prst="rect">
+            <a:avLst/>
+          </a:prstGeom>
+          <a:noFill/>
+        </p:spPr>
+        <p:txBody>
+          <a:bodyPr wrap="square" lIns="0" rIns="0" tIns="0" bIns="0" anchor="t">
+            <a:spAutoFit/>
+          </a:bodyPr>
+          <a:lstStyle/>
+          <a:p>
+            <a:pPr algn="l"/>
+            <a:r>
+              <a:rPr sz="1800" b="1">
+                <a:solidFill>
+                  <a:srgbClr val="1E9E6A"/>
+                </a:solidFill>
+                <a:latin typeface="Malgun Gothic"/>
+                <a:ea typeface="Malgun Gothic"/>
+                <a:cs typeface="Malgun Gothic"/>
+              </a:rPr>
+              <a:t>확장 계획</a:t>
+            </a:r>
+          </a:p>
+        </p:txBody>
+      </p:sp>
+      <p:sp>
+        <p:nvSpPr>
+          <p:cNvPr id="17" name="Rounded Rectangle 16"/>
           <p:cNvSpPr/>
           <p:nvPr/>
         </p:nvSpPr>
         <p:spPr>
           <a:xfrm>
-            <a:off x="8275320" y="2011680"/>
-            <a:ext cx="3474720" cy="2651760"/>
+            <a:off x="5989320" y="1737360"/>
+            <a:ext cx="5623560" cy="914400"/>
           </a:xfrm>
           <a:prstGeom prst="roundRect">
             <a:avLst>
-              <a:gd name="adj" fmla="val 6000"/>
+              <a:gd name="adj" fmla="val 10000"/>
             </a:avLst>
           </a:prstGeom>
           <a:solidFill>
@@ -10359,14 +10418,14 @@
       </p:sp>
       <p:sp>
         <p:nvSpPr>
-          <p:cNvPr id="14" name="TextBox 13"/>
+          <p:cNvPr id="18" name="TextBox 17"/>
           <p:cNvSpPr txBox="1"/>
           <p:nvPr/>
         </p:nvSpPr>
         <p:spPr>
           <a:xfrm>
-            <a:off x="8595360" y="2286000"/>
-            <a:ext cx="2834640" cy="365760"/>
+            <a:off x="6263640" y="1828800"/>
+            <a:ext cx="5212080" cy="347472"/>
           </a:xfrm>
           <a:prstGeom prst="rect">
             <a:avLst/>
@@ -10381,29 +10440,29 @@
           <a:p>
             <a:pPr algn="l"/>
             <a:r>
-              <a:rPr sz="1400" b="1">
-                <a:solidFill>
-                  <a:srgbClr val="1E9E6A"/>
-                </a:solidFill>
-                <a:latin typeface="Malgun Gothic"/>
-                <a:ea typeface="Malgun Gothic"/>
-                <a:cs typeface="Malgun Gothic"/>
-              </a:rPr>
-              <a:t>나중에</a:t>
-            </a:r>
-          </a:p>
-        </p:txBody>
-      </p:sp>
-      <p:sp>
-        <p:nvSpPr>
-          <p:cNvPr id="15" name="TextBox 14"/>
+              <a:rPr sz="1450" b="1">
+                <a:solidFill>
+                  <a:srgbClr val="1F232B"/>
+                </a:solidFill>
+                <a:latin typeface="Malgun Gothic"/>
+                <a:ea typeface="Malgun Gothic"/>
+                <a:cs typeface="Malgun Gothic"/>
+              </a:rPr>
+              <a:t>대화로 설정하는 LLM</a:t>
+            </a:r>
+          </a:p>
+        </p:txBody>
+      </p:sp>
+      <p:sp>
+        <p:nvSpPr>
+          <p:cNvPr id="19" name="TextBox 18"/>
           <p:cNvSpPr txBox="1"/>
           <p:nvPr/>
         </p:nvSpPr>
         <p:spPr>
           <a:xfrm>
-            <a:off x="8595360" y="2743200"/>
-            <a:ext cx="2926080" cy="548640"/>
+            <a:off x="6263640" y="2167128"/>
+            <a:ext cx="5212080" cy="457200"/>
           </a:xfrm>
           <a:prstGeom prst="rect">
             <a:avLst/>
@@ -10418,29 +10477,75 @@
           <a:p>
             <a:pPr algn="l"/>
             <a:r>
-              <a:rPr sz="2000" b="1">
-                <a:solidFill>
-                  <a:srgbClr val="1F232B"/>
-                </a:solidFill>
-                <a:latin typeface="Malgun Gothic"/>
-                <a:ea typeface="Malgun Gothic"/>
-                <a:cs typeface="Malgun Gothic"/>
-              </a:rPr>
-              <a:t>다른 학과·다른 학교로</a:t>
-            </a:r>
-          </a:p>
-        </p:txBody>
-      </p:sp>
-      <p:sp>
-        <p:nvSpPr>
-          <p:cNvPr id="16" name="TextBox 15"/>
+              <a:rPr sz="1050" b="0">
+                <a:solidFill>
+                  <a:srgbClr val="666E7A"/>
+                </a:solidFill>
+                <a:latin typeface="Malgun Gothic"/>
+                <a:ea typeface="Malgun Gothic"/>
+                <a:cs typeface="Malgun Gothic"/>
+              </a:rPr>
+              <a:t>지금은 선택식. 무료 서버(2코어·12GB)라 대형 LLM은 못 올렸지만, LLM을 붙이면 "장학금 중 성적 기준 없는 것만"처럼 대화로 규칙을 만들 수 있음</a:t>
+            </a:r>
+          </a:p>
+        </p:txBody>
+      </p:sp>
+      <p:sp>
+        <p:nvSpPr>
+          <p:cNvPr id="20" name="Rounded Rectangle 19"/>
+          <p:cNvSpPr/>
+          <p:nvPr/>
+        </p:nvSpPr>
+        <p:spPr>
+          <a:xfrm>
+            <a:off x="5989320" y="2816352"/>
+            <a:ext cx="5623560" cy="914400"/>
+          </a:xfrm>
+          <a:prstGeom prst="roundRect">
+            <a:avLst>
+              <a:gd name="adj" fmla="val 10000"/>
+            </a:avLst>
+          </a:prstGeom>
+          <a:solidFill>
+            <a:srgbClr val="E6F6EE"/>
+          </a:solidFill>
+          <a:ln>
+            <a:noFill/>
+          </a:ln>
+          <a:effectLst/>
+        </p:spPr>
+        <p:style>
+          <a:lnRef idx="1">
+            <a:schemeClr val="accent1"/>
+          </a:lnRef>
+          <a:fillRef idx="3">
+            <a:schemeClr val="accent1"/>
+          </a:fillRef>
+          <a:effectRef idx="2">
+            <a:schemeClr val="accent1"/>
+          </a:effectRef>
+          <a:fontRef idx="minor">
+            <a:schemeClr val="lt1"/>
+          </a:fontRef>
+        </p:style>
+        <p:txBody>
+          <a:bodyPr rtlCol="0" anchor="ctr"/>
+          <a:lstStyle/>
+          <a:p>
+            <a:pPr algn="ctr"/>
+          </a:p>
+        </p:txBody>
+      </p:sp>
+      <p:sp>
+        <p:nvSpPr>
+          <p:cNvPr id="21" name="TextBox 20"/>
           <p:cNvSpPr txBox="1"/>
           <p:nvPr/>
         </p:nvSpPr>
         <p:spPr>
           <a:xfrm>
-            <a:off x="8595360" y="3474720"/>
-            <a:ext cx="2926080" cy="1645920"/>
+            <a:off x="6263640" y="2907792"/>
+            <a:ext cx="5212080" cy="347472"/>
           </a:xfrm>
           <a:prstGeom prst="rect">
             <a:avLst/>
@@ -10453,36 +10558,31 @@
           </a:bodyPr>
           <a:lstStyle/>
           <a:p>
-            <a:pPr algn="l">
-              <a:spcAft>
-                <a:spcPts val="200"/>
-              </a:spcAft>
-            </a:pPr>
-            <a:r>
-              <a:rPr sz="1400" b="0">
-                <a:solidFill>
-                  <a:srgbClr val="666E7A"/>
-                </a:solidFill>
-                <a:latin typeface="Malgun Gothic"/>
-                <a:ea typeface="Malgun Gothic"/>
-                <a:cs typeface="Malgun Gothic"/>
-              </a:rPr>
-              <a:t>같은 게시판 시스템을 쓰는 곳이면
-주소만 추가해 넓힐 수 있습니다.</a:t>
-            </a:r>
-          </a:p>
-        </p:txBody>
-      </p:sp>
-      <p:sp>
-        <p:nvSpPr>
-          <p:cNvPr id="17" name="TextBox 16"/>
+            <a:pPr algn="l"/>
+            <a:r>
+              <a:rPr sz="1450" b="1">
+                <a:solidFill>
+                  <a:srgbClr val="1F232B"/>
+                </a:solidFill>
+                <a:latin typeface="Malgun Gothic"/>
+                <a:ea typeface="Malgun Gothic"/>
+                <a:cs typeface="Malgun Gothic"/>
+              </a:rPr>
+              <a:t>첨부 속 표·이미지까지</a:t>
+            </a:r>
+          </a:p>
+        </p:txBody>
+      </p:sp>
+      <p:sp>
+        <p:nvSpPr>
+          <p:cNvPr id="22" name="TextBox 21"/>
           <p:cNvSpPr txBox="1"/>
           <p:nvPr/>
         </p:nvSpPr>
         <p:spPr>
           <a:xfrm>
-            <a:off x="594360" y="5257800"/>
-            <a:ext cx="10972800" cy="457200"/>
+            <a:off x="6263640" y="3246120"/>
+            <a:ext cx="5212080" cy="457200"/>
           </a:xfrm>
           <a:prstGeom prst="rect">
             <a:avLst/>
@@ -10495,9 +10595,92 @@
           </a:bodyPr>
           <a:lstStyle/>
           <a:p>
+            <a:pPr algn="l"/>
+            <a:r>
+              <a:rPr sz="1050" b="0">
+                <a:solidFill>
+                  <a:srgbClr val="666E7A"/>
+                </a:solidFill>
+                <a:latin typeface="Malgun Gothic"/>
+                <a:ea typeface="Malgun Gothic"/>
+                <a:cs typeface="Malgun Gothic"/>
+              </a:rPr>
+              <a:t>HWP·PDF 글자는 이미 읽음. 다음은 표 안의 날짜, 스캔 포스터 이미지(OCR)</a:t>
+            </a:r>
+          </a:p>
+        </p:txBody>
+      </p:sp>
+      <p:sp>
+        <p:nvSpPr>
+          <p:cNvPr id="23" name="Rounded Rectangle 22"/>
+          <p:cNvSpPr/>
+          <p:nvPr/>
+        </p:nvSpPr>
+        <p:spPr>
+          <a:xfrm>
+            <a:off x="5989320" y="3895344"/>
+            <a:ext cx="5623560" cy="914400"/>
+          </a:xfrm>
+          <a:prstGeom prst="roundRect">
+            <a:avLst>
+              <a:gd name="adj" fmla="val 10000"/>
+            </a:avLst>
+          </a:prstGeom>
+          <a:solidFill>
+            <a:srgbClr val="E6F6EE"/>
+          </a:solidFill>
+          <a:ln>
+            <a:noFill/>
+          </a:ln>
+          <a:effectLst/>
+        </p:spPr>
+        <p:style>
+          <a:lnRef idx="1">
+            <a:schemeClr val="accent1"/>
+          </a:lnRef>
+          <a:fillRef idx="3">
+            <a:schemeClr val="accent1"/>
+          </a:fillRef>
+          <a:effectRef idx="2">
+            <a:schemeClr val="accent1"/>
+          </a:effectRef>
+          <a:fontRef idx="minor">
+            <a:schemeClr val="lt1"/>
+          </a:fontRef>
+        </p:style>
+        <p:txBody>
+          <a:bodyPr rtlCol="0" anchor="ctr"/>
+          <a:lstStyle/>
+          <a:p>
             <a:pPr algn="ctr"/>
-            <a:r>
-              <a:rPr sz="1800" b="1">
+          </a:p>
+        </p:txBody>
+      </p:sp>
+      <p:sp>
+        <p:nvSpPr>
+          <p:cNvPr id="24" name="TextBox 23"/>
+          <p:cNvSpPr txBox="1"/>
+          <p:nvPr/>
+        </p:nvSpPr>
+        <p:spPr>
+          <a:xfrm>
+            <a:off x="6263640" y="3986783"/>
+            <a:ext cx="5212080" cy="347472"/>
+          </a:xfrm>
+          <a:prstGeom prst="rect">
+            <a:avLst/>
+          </a:prstGeom>
+          <a:noFill/>
+        </p:spPr>
+        <p:txBody>
+          <a:bodyPr wrap="square" lIns="0" rIns="0" tIns="0" bIns="0" anchor="t">
+            <a:spAutoFit/>
+          </a:bodyPr>
+          <a:lstStyle/>
+          <a:p>
+            <a:pPr algn="l"/>
+            <a:r>
+              <a:rPr sz="1450" b="1">
                 <a:solidFill>
                   <a:srgbClr val="1F232B"/>
                 </a:solidFill>
@@ -10505,14 +10688,219 @@
                 <a:ea typeface="Malgun Gothic"/>
                 <a:cs typeface="Malgun Gothic"/>
               </a:rPr>
-              <a:t>학교 사이트를 바꿀 필요 없이, 이미 있는 게시판을 그대로 읽습니다.</a:t>
-            </a:r>
-          </a:p>
-        </p:txBody>
-      </p:sp>
-      <p:sp>
-        <p:nvSpPr>
-          <p:cNvPr id="18" name="TextBox 17"/>
+              <a:t>하루 체크리스트</a:t>
+            </a:r>
+          </a:p>
+        </p:txBody>
+      </p:sp>
+      <p:sp>
+        <p:nvSpPr>
+          <p:cNvPr id="25" name="TextBox 24"/>
+          <p:cNvSpPr txBox="1"/>
+          <p:nvPr/>
+        </p:nvSpPr>
+        <p:spPr>
+          <a:xfrm>
+            <a:off x="6263640" y="4325112"/>
+            <a:ext cx="5212080" cy="457200"/>
+          </a:xfrm>
+          <a:prstGeom prst="rect">
+            <a:avLst/>
+          </a:prstGeom>
+          <a:noFill/>
+        </p:spPr>
+        <p:txBody>
+          <a:bodyPr wrap="square" lIns="0" rIns="0" tIns="0" bIns="0" anchor="t">
+            <a:spAutoFit/>
+          </a:bodyPr>
+          <a:lstStyle/>
+          <a:p>
+            <a:pPr algn="l"/>
+            <a:r>
+              <a:rPr sz="1050" b="0">
+                <a:solidFill>
+                  <a:srgbClr val="666E7A"/>
+                </a:solidFill>
+                <a:latin typeface="Malgun Gothic"/>
+                <a:ea typeface="Malgun Gothic"/>
+                <a:cs typeface="Malgun Gothic"/>
+              </a:rPr>
+              <a:t>시간표·전자출결과 연결해 공강 시간에 할 일 추천 (학교 협조 필요)</a:t>
+            </a:r>
+          </a:p>
+        </p:txBody>
+      </p:sp>
+      <p:sp>
+        <p:nvSpPr>
+          <p:cNvPr id="26" name="Rounded Rectangle 25"/>
+          <p:cNvSpPr/>
+          <p:nvPr/>
+        </p:nvSpPr>
+        <p:spPr>
+          <a:xfrm>
+            <a:off x="5989320" y="4974336"/>
+            <a:ext cx="5623560" cy="914400"/>
+          </a:xfrm>
+          <a:prstGeom prst="roundRect">
+            <a:avLst>
+              <a:gd name="adj" fmla="val 10000"/>
+            </a:avLst>
+          </a:prstGeom>
+          <a:solidFill>
+            <a:srgbClr val="E6F6EE"/>
+          </a:solidFill>
+          <a:ln>
+            <a:noFill/>
+          </a:ln>
+          <a:effectLst/>
+        </p:spPr>
+        <p:style>
+          <a:lnRef idx="1">
+            <a:schemeClr val="accent1"/>
+          </a:lnRef>
+          <a:fillRef idx="3">
+            <a:schemeClr val="accent1"/>
+          </a:fillRef>
+          <a:effectRef idx="2">
+            <a:schemeClr val="accent1"/>
+          </a:effectRef>
+          <a:fontRef idx="minor">
+            <a:schemeClr val="lt1"/>
+          </a:fontRef>
+        </p:style>
+        <p:txBody>
+          <a:bodyPr rtlCol="0" anchor="ctr"/>
+          <a:lstStyle/>
+          <a:p>
+            <a:pPr algn="ctr"/>
+          </a:p>
+        </p:txBody>
+      </p:sp>
+      <p:sp>
+        <p:nvSpPr>
+          <p:cNvPr id="27" name="TextBox 26"/>
+          <p:cNvSpPr txBox="1"/>
+          <p:nvPr/>
+        </p:nvSpPr>
+        <p:spPr>
+          <a:xfrm>
+            <a:off x="6263640" y="5065775"/>
+            <a:ext cx="5212080" cy="347472"/>
+          </a:xfrm>
+          <a:prstGeom prst="rect">
+            <a:avLst/>
+          </a:prstGeom>
+          <a:noFill/>
+        </p:spPr>
+        <p:txBody>
+          <a:bodyPr wrap="square" lIns="0" rIns="0" tIns="0" bIns="0" anchor="t">
+            <a:spAutoFit/>
+          </a:bodyPr>
+          <a:lstStyle/>
+          <a:p>
+            <a:pPr algn="l"/>
+            <a:r>
+              <a:rPr sz="1450" b="1">
+                <a:solidFill>
+                  <a:srgbClr val="1F232B"/>
+                </a:solidFill>
+                <a:latin typeface="Malgun Gothic"/>
+                <a:ea typeface="Malgun Gothic"/>
+                <a:cs typeface="Malgun Gothic"/>
+              </a:rPr>
+              <a:t>어학 시험·다른 대학</a:t>
+            </a:r>
+          </a:p>
+        </p:txBody>
+      </p:sp>
+      <p:sp>
+        <p:nvSpPr>
+          <p:cNvPr id="28" name="TextBox 27"/>
+          <p:cNvSpPr txBox="1"/>
+          <p:nvPr/>
+        </p:nvSpPr>
+        <p:spPr>
+          <a:xfrm>
+            <a:off x="6263640" y="5404103"/>
+            <a:ext cx="5212080" cy="457200"/>
+          </a:xfrm>
+          <a:prstGeom prst="rect">
+            <a:avLst/>
+          </a:prstGeom>
+          <a:noFill/>
+        </p:spPr>
+        <p:txBody>
+          <a:bodyPr wrap="square" lIns="0" rIns="0" tIns="0" bIns="0" anchor="t">
+            <a:spAutoFit/>
+          </a:bodyPr>
+          <a:lstStyle/>
+          <a:p>
+            <a:pPr algn="l"/>
+            <a:r>
+              <a:rPr sz="1050" b="0">
+                <a:solidFill>
+                  <a:srgbClr val="666E7A"/>
+                </a:solidFill>
+                <a:latin typeface="Malgun Gothic"/>
+                <a:ea typeface="Malgun Gothic"/>
+                <a:cs typeface="Malgun Gothic"/>
+              </a:rPr>
+              <a:t>토익 등은 공식 API가 없어 '직접 입력 일정'으로 대응 · 게시판 목록만 바꾸면 다른 대학에도</a:t>
+            </a:r>
+          </a:p>
+        </p:txBody>
+      </p:sp>
+      <p:sp>
+        <p:nvSpPr>
+          <p:cNvPr id="29" name="TextBox 28"/>
+          <p:cNvSpPr txBox="1"/>
+          <p:nvPr/>
+        </p:nvSpPr>
+        <p:spPr>
+          <a:xfrm>
+            <a:off x="594360" y="6144768"/>
+            <a:ext cx="10972800" cy="365760"/>
+          </a:xfrm>
+          <a:prstGeom prst="rect">
+            <a:avLst/>
+          </a:prstGeom>
+          <a:noFill/>
+        </p:spPr>
+        <p:txBody>
+          <a:bodyPr wrap="square" lIns="0" rIns="0" tIns="0" bIns="0" anchor="t">
+            <a:spAutoFit/>
+          </a:bodyPr>
+          <a:lstStyle/>
+          <a:p>
+            <a:pPr algn="ctr"/>
+            <a:r>
+              <a:rPr sz="1250" b="1">
+                <a:solidFill>
+                  <a:srgbClr val="1F232B"/>
+                </a:solidFill>
+                <a:latin typeface="Malgun Gothic"/>
+                <a:ea typeface="Malgun Gothic"/>
+                <a:cs typeface="Malgun Gothic"/>
+              </a:rPr>
+              <a:t>비즈니스 모델: </a:t>
+            </a:r>
+            <a:r>
+              <a:rPr sz="1250" b="0">
+                <a:solidFill>
+                  <a:srgbClr val="666E7A"/>
+                </a:solidFill>
+                <a:latin typeface="Malgun Gothic"/>
+                <a:ea typeface="Malgun Gothic"/>
+                <a:cs typeface="Malgun Gothic"/>
+              </a:rPr>
+              <a:t>운영비 0원 구조(무료 서버·무료 AI 모델) → 학생 무료 · 대학/학과 단위 공식 알리미로 도입</a:t>
+            </a:r>
+          </a:p>
+        </p:txBody>
+      </p:sp>
+      <p:sp>
+        <p:nvSpPr>
+          <p:cNvPr id="30" name="TextBox 29"/>
           <p:cNvSpPr txBox="1"/>
           <p:nvPr/>
         </p:nvSpPr>
@@ -10632,9 +11020,13 @@
           </a:bodyPr>
           <a:lstStyle/>
           <a:p>
-            <a:pPr algn="l"/>
-            <a:r>
-              <a:rPr sz="4600" b="1">
+            <a:pPr algn="l">
+              <a:spcAft>
+                <a:spcPts val="600"/>
+              </a:spcAft>
+            </a:pPr>
+            <a:r>
+              <a:rPr sz="4000" b="1">
                 <a:solidFill>
                   <a:srgbClr val="FFFFFF"/>
                 </a:solidFill>
@@ -10642,13 +11034,17 @@
                 <a:ea typeface="Malgun Gothic"/>
                 <a:cs typeface="Malgun Gothic"/>
               </a:rPr>
-              <a:t>휴대폰으로</a:t>
-            </a:r>
-          </a:p>
-          <a:p>
-            <a:pPr algn="l"/>
-            <a:r>
-              <a:rPr sz="4600" b="1">
+              <a:t>질문 받겠습니다</a:t>
+            </a:r>
+          </a:p>
+          <a:p>
+            <a:pPr algn="l">
+              <a:spcAft>
+                <a:spcPts val="600"/>
+              </a:spcAft>
+            </a:pPr>
+            <a:r>
+              <a:rPr sz="4000" b="1">
                 <a:solidFill>
                   <a:srgbClr val="FFFFFF"/>
                 </a:solidFill>
@@ -10656,7 +11052,7 @@
                 <a:ea typeface="Malgun Gothic"/>
                 <a:cs typeface="Malgun Gothic"/>
               </a:rPr>
-              <a:t>직접 써 보세요</a:t>
+              <a:t>휴대폰으로 직접 써 보세요</a:t>
             </a:r>
           </a:p>
         </p:txBody>
@@ -10669,7 +11065,7 @@
         </p:nvSpPr>
         <p:spPr>
           <a:xfrm>
-            <a:off x="749808" y="3429000"/>
+            <a:off x="749808" y="3520440"/>
             <a:ext cx="6858000" cy="822960"/>
           </a:xfrm>
           <a:prstGeom prst="rect">
@@ -10715,7 +11111,7 @@
                 <a:ea typeface="Malgun Gothic"/>
                 <a:cs typeface="Malgun Gothic"/>
               </a:rPr>
-              <a:t>학과를 고르면 30초 안에 나에게 맞는 공지가 보여요.</a:t>
+              <a:t>'홈 화면에 추가'하면 앱처럼 알림을 받아요.</a:t>
             </a:r>
           </a:p>
         </p:txBody>
@@ -10800,7 +11196,7 @@
                 <a:ea typeface="Malgun Gothic"/>
                 <a:cs typeface="Malgun Gothic"/>
               </a:rPr>
-              <a:t>▶  지금 시연해 볼게요</a:t>
+              <a:t>▶  지금 열어 보기</a:t>
             </a:r>
           </a:p>
         </p:txBody>
@@ -10813,7 +11209,7 @@
         </p:nvSpPr>
         <p:spPr>
           <a:xfrm>
-            <a:off x="749808" y="5577840"/>
+            <a:off x="749808" y="5486400"/>
             <a:ext cx="1097280" cy="274320"/>
           </a:xfrm>
           <a:prstGeom prst="rect">
@@ -10850,7 +11246,7 @@
         </p:nvSpPr>
         <p:spPr>
           <a:xfrm>
-            <a:off x="1828800" y="5577840"/>
+            <a:off x="1828800" y="5486400"/>
             <a:ext cx="5029200" cy="274320"/>
           </a:xfrm>
           <a:prstGeom prst="rect">
@@ -10887,7 +11283,7 @@
         </p:nvSpPr>
         <p:spPr>
           <a:xfrm>
-            <a:off x="749808" y="5943600"/>
+            <a:off x="749808" y="5852160"/>
             <a:ext cx="1097280" cy="274320"/>
           </a:xfrm>
           <a:prstGeom prst="rect">
@@ -10924,7 +11320,7 @@
         </p:nvSpPr>
         <p:spPr>
           <a:xfrm>
-            <a:off x="1828800" y="5943600"/>
+            <a:off x="1828800" y="5852160"/>
             <a:ext cx="5029200" cy="274320"/>
           </a:xfrm>
           <a:prstGeom prst="rect">
@@ -10955,7 +11351,81 @@
       </p:sp>
       <p:sp>
         <p:nvSpPr>
-          <p:cNvPr id="11" name="Rounded Rectangle 10"/>
+          <p:cNvPr id="11" name="TextBox 10"/>
+          <p:cNvSpPr txBox="1"/>
+          <p:nvPr/>
+        </p:nvSpPr>
+        <p:spPr>
+          <a:xfrm>
+            <a:off x="749808" y="6217920"/>
+            <a:ext cx="1097280" cy="274320"/>
+          </a:xfrm>
+          <a:prstGeom prst="rect">
+            <a:avLst/>
+          </a:prstGeom>
+          <a:noFill/>
+        </p:spPr>
+        <p:txBody>
+          <a:bodyPr wrap="square" lIns="0" rIns="0" tIns="0" bIns="0" anchor="t">
+            <a:spAutoFit/>
+          </a:bodyPr>
+          <a:lstStyle/>
+          <a:p>
+            <a:pPr algn="l"/>
+            <a:r>
+              <a:rPr sz="1200" b="1">
+                <a:solidFill>
+                  <a:srgbClr val="A9CBF2"/>
+                </a:solidFill>
+                <a:latin typeface="Malgun Gothic"/>
+                <a:ea typeface="Malgun Gothic"/>
+                <a:cs typeface="Malgun Gothic"/>
+              </a:rPr>
+              <a:t>연락처</a:t>
+            </a:r>
+          </a:p>
+        </p:txBody>
+      </p:sp>
+      <p:sp>
+        <p:nvSpPr>
+          <p:cNvPr id="12" name="TextBox 11"/>
+          <p:cNvSpPr txBox="1"/>
+          <p:nvPr/>
+        </p:nvSpPr>
+        <p:spPr>
+          <a:xfrm>
+            <a:off x="1828800" y="6217920"/>
+            <a:ext cx="5029200" cy="274320"/>
+          </a:xfrm>
+          <a:prstGeom prst="rect">
+            <a:avLst/>
+          </a:prstGeom>
+          <a:noFill/>
+        </p:spPr>
+        <p:txBody>
+          <a:bodyPr wrap="square" lIns="0" rIns="0" tIns="0" bIns="0" anchor="t">
+            <a:spAutoFit/>
+          </a:bodyPr>
+          <a:lstStyle/>
+          <a:p>
+            <a:pPr algn="l"/>
+            <a:r>
+              <a:rPr sz="1200" b="0">
+                <a:solidFill>
+                  <a:srgbClr val="FFFFFF"/>
+                </a:solidFill>
+                <a:latin typeface="Malgun Gothic"/>
+                <a:ea typeface="Malgun Gothic"/>
+                <a:cs typeface="Malgun Gothic"/>
+              </a:rPr>
+              <a:t>이휴단 · scnuhyudan@gmail.com</a:t>
+            </a:r>
+          </a:p>
+        </p:txBody>
+      </p:sp>
+      <p:sp>
+        <p:nvSpPr>
+          <p:cNvPr id="13" name="Rounded Rectangle 12"/>
           <p:cNvSpPr/>
           <p:nvPr/>
         </p:nvSpPr>
@@ -11001,7 +11471,7 @@
       </p:sp>
       <p:pic>
         <p:nvPicPr>
-          <p:cNvPr id="12" name="Picture 11" descr="qr-scnuaram.png">
+          <p:cNvPr id="14" name="Picture 13" descr="qr-scnuaram.png">
             <a:hlinkClick r:id="rId2"/>
           </p:cNvPr>
           <p:cNvPicPr>
@@ -11027,7 +11497,7 @@
       </p:pic>
       <p:sp>
         <p:nvSpPr>
-          <p:cNvPr id="13" name="TextBox 12"/>
+          <p:cNvPr id="15" name="TextBox 14"/>
           <p:cNvSpPr txBox="1"/>
           <p:nvPr/>
         </p:nvSpPr>

--- a/docs/SCNU-Lens-발표.pptx
+++ b/docs/SCNU-Lens-발표.pptx
@@ -508,7 +508,7 @@
           <a:lstStyle/>
           <a:p>
             <a:r>
-              <a:t>안녕하세요, SCNU Lens를 만든 이휴단입니다. SCNU Lens는 순천대 게시판 112곳과 교외 장학금·자격증·공모전 정보를 한 앱에 모아서, 나에게 맞는 것만 마감 전에 알려 주는 캠퍼스 알리미입니다. (팀 이름이 있으면 이름 옆에 적어 주세요)</a:t>
+              <a:t>안녕하세요, SCNU Lens를 만든 이휴단입니다. SCNU Lens는 여러 곳에 흩어진 순천대 공지와 교외 장학금·자격증·공모전 정보를 한 앱으로 통합하고, 나에게 맞는 것만 마감 전에 알려 주는 캠퍼스 알리미입니다. (팀 이름이 있으면 이름 옆에 적어 주세요)</a:t>
             </a:r>
           </a:p>
         </p:txBody>
@@ -578,7 +578,7 @@
           <a:lstStyle/>
           <a:p>
             <a:r>
-              <a:t>순천대 공지는 본부와 학과·부속기관 게시판 112곳에 흩어져 있고, 장학금·자격증 시험·공모전은 또 다른 사이트 네 곳에 있습니다. 실제로 모은 공지 159건 중 87건은 신청 기간이나 대상이 본문이 아니라 첨부 한글 파일 안에 있었고, 18건은 여러 게시판에 중복으로 올라왔습니다. 게다가 시험이나 장학은 '접수 기간'으로 적혀 있어서 지금 신청할 수 있는지 한눈에 안 보입니다. 결국 마감이 지나서야 알게 됩니다.</a:t>
+              <a:t>학생에게 필요한 정보는 많습니다. 다만 순천대 공지만 해도 본부와 학과·부속기관 게시판 112곳에 나뉘어 있고, 장학금·자격증 시험·공모전은 또 다른 사이트 네 곳에 있어서 한 번에 모아 볼 곳이 없습니다. 실제로 모은 공지 159건 중 87건은 신청 기간이나 대상이 본문이 아니라 첨부 한글 파일 안에 있었고, 18건은 여러 게시판에 중복으로 올라왔습니다. 게다가 시험이나 장학은 '접수 기간'으로 적혀 있어서 지금 신청할 수 있는지 한눈에 안 보입니다. 그래서 정보가 있어도 제때 못 봐서 기회를 놓칩니다.</a:t>
             </a:r>
           </a:p>
         </p:txBody>
@@ -648,7 +648,7 @@
           <a:lstStyle/>
           <a:p>
             <a:r>
-              <a:t>처음에 학과와 관심사를 30초 만에 고르면, 그다음부터는 사이트를 찾아다닐 필요가 없습니다. 나에게 맞는 공지를 이유와 함께 보여 주고, 접수 기간인 공지는 '10월 12일 접수 시작', '접수중 D-3'처럼 지금 상태를 표시합니다. 공지를 누르면 첨부파일까지 읽어서 대상·기간·신청방법을 표로 정리해 보여 주고, 마감 7·3·1일 전과 접수 시작 때 휴대폰으로 알려 줍니다.</a:t>
+              <a:t>SCNU Lens는 흩어진 정보를 한 앱으로 통합합니다. 처음에 학과와 관심사를 30초 만에 고르면, 그다음부터는 여러 사이트를 오갈 필요가 없습니다. 나에게 맞는 공지를 이유와 함께 보여 주고, 접수 기간인 공지는 '10월 12일 접수 시작', '접수중 D-3'처럼 지금 상태를 표시합니다. 공지를 누르면 첨부파일까지 읽어서 대상·기간·신청방법을 표로 정리해 보여 주고, 마감 7·3·1일 전과 접수 시작 때 휴대폰으로 알려 줍니다.</a:t>
             </a:r>
           </a:p>
         </p:txBody>
@@ -858,7 +858,7 @@
           <a:lstStyle/>
           <a:p>
             <a:r>
-              <a:t>기대 효과는 네 가지입니다. 사이트를 돌아다니는 시간이 줄고, 알림으로 마감을 덜 놓치고, 교외 장학·자격증까지 발견하고, 신입생도 선배 없이 같은 정보를 얻습니다. 앞으로는 첫째, 지금은 무료 서버라 대형 LLM을 못 올렸는데, LLM을 붙이면 대화로 알림 규칙을 만들 수 있습니다. 둘째, 첨부 HWP·PDF 글자는 이미 읽고 있어서, 다음 단계는 표 안의 날짜와 이미지 포스터 인식입니다. 셋째, 시간표·전자출결과 연결해 공강 시간에 할 일을 추천하는 하루 체크리스트로 넓힐 수 있습니다(학교 협조 필요). 넷째, 토익처럼 공식 API가 없는 시험은 직접 입력 일정으로 대응하고, 게시판 목록만 바꾸면 다른 대학에도 쓸 수 있습니다. 운영비가 0원이라 학생에게는 무료로, 대학·학과 단위 공식 알리미로 도입하는 모델을 생각하고 있습니다.</a:t>
+              <a:t>기대 효과는 네 가지입니다. 흩어진 정보를 한 곳에서 보니 확인 시간이 줄고, 알림으로 마감을 덜 놓치고, 교외 장학·자격증까지 발견하고, 신입생도 선배 없이 같은 정보를 얻습니다. 앞으로는 첫째, 지금은 무료 서버라 대형 LLM을 못 올렸는데, LLM을 붙이면 대화로 알림 규칙을 만들 수 있습니다. 둘째, 첨부 HWP·PDF 글자는 이미 읽고 있어서, 다음 단계는 표 안의 날짜와 이미지 포스터 인식입니다. 셋째, 시간표·전자출결과 연결해 공강 시간에 할 일을 추천하는 하루 체크리스트로 넓힐 수 있습니다(학교 협조 필요). 넷째, 토익처럼 공식 API가 없는 시험은 직접 입력 일정으로 대응하고, 게시판 목록만 바꾸면 다른 대학에도 쓸 수 있습니다. 운영비가 0원이라 학생에게는 무료로, 대학·학과 단위 공식 알리미로 도입하는 모델을 생각하고 있습니다.</a:t>
             </a:r>
           </a:p>
         </p:txBody>
@@ -4076,7 +4076,7 @@
                 <a:ea typeface="Malgun Gothic"/>
                 <a:cs typeface="Malgun Gothic"/>
               </a:rPr>
-              <a:t>게시판 112곳을 돌지 않아도,</a:t>
+              <a:t>흩어진 학교·교외 공지를 한곳에,</a:t>
             </a:r>
           </a:p>
           <a:p>
@@ -4094,7 +4094,7 @@
                 <a:ea typeface="Malgun Gothic"/>
                 <a:cs typeface="Malgun Gothic"/>
               </a:rPr>
-              <a:t>나에게 맞는 공지가 마감 전에 옵니다</a:t>
+              <a:t>나에게 맞는 것만 마감 전에</a:t>
             </a:r>
           </a:p>
         </p:txBody>
@@ -4311,7 +4311,7 @@
                 <a:ea typeface="Malgun Gothic"/>
                 <a:cs typeface="Malgun Gothic"/>
               </a:rPr>
-              <a:t>공지 하나 보려고, 사이트 100곳 넘게 돌아야 합니다</a:t>
+              <a:t>정보는 많은데, 여러 곳에 흩어져 있습니다</a:t>
             </a:r>
           </a:p>
         </p:txBody>
@@ -5113,7 +5113,7 @@
                 <a:ea typeface="Malgun Gothic"/>
                 <a:cs typeface="Malgun Gothic"/>
               </a:rPr>
-              <a:t>어디를 봐야 할지 모른다</a:t>
+              <a:t>한 번에 모아 볼 곳이 없다</a:t>
             </a:r>
           </a:p>
         </p:txBody>
@@ -5150,7 +5150,7 @@
                 <a:ea typeface="Malgun Gothic"/>
                 <a:cs typeface="Malgun Gothic"/>
               </a:rPr>
-              <a:t>학과·부속기관 게시판을 하나씩 들어가 봐야 하고, 장학·시험은 또 다른 사이트에 있다</a:t>
+              <a:t>학교 공지는 게시판마다, 장학·시험·공모전은 사이트마다 따로 있다</a:t>
             </a:r>
           </a:p>
         </p:txBody>
@@ -5316,7 +5316,7 @@
                 <a:ea typeface="Malgun Gothic"/>
                 <a:cs typeface="Malgun Gothic"/>
               </a:rPr>
-              <a:t>나에게 해당되는지, 언제까지인지 모른다</a:t>
+              <a:t>대상·마감일이 바로 안 보인다</a:t>
             </a:r>
           </a:p>
         </p:txBody>
@@ -5353,7 +5353,7 @@
                 <a:ea typeface="Malgun Gothic"/>
                 <a:cs typeface="Malgun Gothic"/>
               </a:rPr>
-              <a:t>대상·마감일은 긴 본문과 첨부 한글 파일 속에 있다</a:t>
+              <a:t>나에게 해당되는지, 언제까지인지는 긴 본문과 첨부 한글 파일 속에 있다</a:t>
             </a:r>
           </a:p>
         </p:txBody>
@@ -5720,7 +5720,7 @@
                 <a:ea typeface="Malgun Gothic"/>
                 <a:cs typeface="Malgun Gothic"/>
               </a:rPr>
-              <a:t>그래서 마감이 지나서야 안다</a:t>
+              <a:t>그래서 좋은 기회를 놓친다</a:t>
             </a:r>
           </a:p>
         </p:txBody>
@@ -5757,7 +5757,7 @@
                 <a:ea typeface="Malgun Gothic"/>
                 <a:cs typeface="Malgun Gothic"/>
               </a:rPr>
-              <a:t>장학금·공모전·자격증 기회를 놓친다</a:t>
+              <a:t>정보가 있어도 제때 못 보면 장학금·공모전·자격증 마감이 지나간다</a:t>
             </a:r>
           </a:p>
         </p:txBody>
@@ -5905,7 +5905,7 @@
                 <a:ea typeface="Malgun Gothic"/>
                 <a:cs typeface="Malgun Gothic"/>
               </a:rPr>
-              <a:t>사이트를 하나하나 들어가는 시간을 없앱니다. 알림으로 받고, 궁금하면 앱에서 자세히 찾아봅니다.</a:t>
+              <a:t>여러 곳의 정보를 한 앱으로 통합해 오가는 시간을 줄입니다. 알림으로 받고, 궁금하면 앱에서 자세히 찾아봅니다.</a:t>
             </a:r>
           </a:p>
         </p:txBody>
@@ -9962,7 +9962,7 @@
                 <a:ea typeface="Malgun Gothic"/>
                 <a:cs typeface="Malgun Gothic"/>
               </a:rPr>
-              <a:t>게시판 112곳 + 교외 4곳을 도는 대신 앱 한 곳</a:t>
+              <a:t>학교 게시판 112곳 + 교외 4곳의 정보를 앱 한 곳에서</a:t>
             </a:r>
           </a:p>
         </p:txBody>

--- a/docs/SCNU-Lens-발표.pptx
+++ b/docs/SCNU-Lens-발표.pptx
@@ -508,7 +508,12 @@
           <a:lstStyle/>
           <a:p>
             <a:r>
-              <a:t>안녕하세요, SCNU Lens를 만든 이휴단입니다. SCNU Lens는 여러 곳에 흩어진 순천대 공지와 교외 장학금·자격증·공모전 정보를 한 앱으로 통합하고, 나에게 맞는 것만 마감 전에 알려 주는 캠퍼스 알리미입니다. (팀 이름이 있으면 이름 옆에 적어 주세요)</a:t>
+              <a:t>[0:00-0:10 · 10초]</a:t>
+            </a:r>
+          </a:p>
+          <a:p>
+            <a:r>
+              <a:t>안녕하세요, SCNU Lens를 만든 이휴단입니다. SCNU Lens는 흩어진 학교 공지와 교외 장학·자격증 정보를 한곳에 모아, 나에게 맞는 것만 마감 전에 알려 주는 앱입니다.</a:t>
             </a:r>
           </a:p>
         </p:txBody>
@@ -578,7 +583,12 @@
           <a:lstStyle/>
           <a:p>
             <a:r>
-              <a:t>학생에게 필요한 정보는 많습니다. 다만 순천대 공지만 해도 본부와 학과·부속기관 게시판 112곳에 나뉘어 있고, 장학금·자격증 시험·공모전은 또 다른 사이트 네 곳에 있어서 한 번에 모아 볼 곳이 없습니다. 실제로 모은 공지 159건 중 87건은 신청 기간이나 대상이 본문이 아니라 첨부 한글 파일 안에 있었고, 18건은 여러 게시판에 중복으로 올라왔습니다. 게다가 시험이나 장학은 '접수 기간'으로 적혀 있어서 지금 신청할 수 있는지 한눈에 안 보입니다. 그래서 정보가 있어도 제때 못 봐서 기회를 놓칩니다.</a:t>
+              <a:t>[0:10-0:35 · 25초]</a:t>
+            </a:r>
+          </a:p>
+          <a:p>
+            <a:r>
+              <a:t>학생에게 필요한 정보는 많습니다. 그런데 순천대 공지만 해도 게시판 112곳에 나뉘어 있고, 장학금·자격증 시험·공모전은 또 다른 사이트 네 곳에 있습니다. 실제로 모은 공지의 절반 이상은 신청 기간과 대상이 첨부 한글 파일 안에 있었고, 시험처럼 '접수 기간'으로 적힌 건 지금 신청할 수 있는지 한눈에 안 보입니다. 그래서 정보가 있어도 제때 못 봐서 기회를 놓칩니다.</a:t>
             </a:r>
           </a:p>
         </p:txBody>
@@ -648,7 +658,12 @@
           <a:lstStyle/>
           <a:p>
             <a:r>
-              <a:t>SCNU Lens는 흩어진 정보를 한 앱으로 통합합니다. 처음에 학과와 관심사를 30초 만에 고르면, 그다음부터는 여러 사이트를 오갈 필요가 없습니다. 나에게 맞는 공지를 이유와 함께 보여 주고, 접수 기간인 공지는 '10월 12일 접수 시작', '접수중 D-3'처럼 지금 상태를 표시합니다. 공지를 누르면 첨부파일까지 읽어서 대상·기간·신청방법을 표로 정리해 보여 주고, 마감 7·3·1일 전과 접수 시작 때 휴대폰으로 알려 줍니다.</a:t>
+              <a:t>[0:35-0:55 · 20초]</a:t>
+            </a:r>
+          </a:p>
+          <a:p>
+            <a:r>
+              <a:t>SCNU Lens는 이 정보를 한 앱으로 통합합니다. 학과와 관심사를 한 번 고르면 나에게 맞는 공지를 이유와 함께 보여 주고, '10월 12일 접수 시작', '접수중 D-3'처럼 지금 상태를 표시합니다. 긴 공지는 표 한 장으로 정리하고, 마감 전에 휴대폰으로 알려 줍니다.</a:t>
             </a:r>
           </a:p>
         </p:txBody>
@@ -718,7 +733,12 @@
           <a:lstStyle/>
           <a:p>
             <a:r>
-              <a:t>구조는 네 단계입니다. 매시간 학교 게시판 112곳을 크롤링하고, 교외 정보는 공공데이터포털 공식 API 네 종류로 받습니다. 본문뿐 아니라 HWP·PDF 같은 첨부파일 글자까지 읽고, 여러 게시판에 올라온 같은 공지는 하나로 묶습니다. 그다음 서버 안에서 돌아가는 다국어 임베딩 모델로 분야를 나누고, 규칙으로 접수 시작일·마감일·시험일을 뽑고, 대상·기간·신청방법을 표로 만듭니다. 마지막으로 학과·관심사에 맞춰 이유와 함께 보여 주고 웹 푸시로 알립니다. 외부 AI API를 쓰지 않아 AI 비용은 0원이고, 자동 테스트 135개로 규칙을 지킵니다.</a:t>
+              <a:t>[0:55-1:15 · 20초]</a:t>
+            </a:r>
+          </a:p>
+          <a:p>
+            <a:r>
+              <a:t>구조는 네 단계입니다. 매시간 학교 게시판과 공공데이터 API에서 모으고, 첨부 HWP·PDF까지 읽고, 서버 안에서 돌아가는 AI 모델과 규칙으로 분류하고 날짜를 뽑아, 웹 푸시로 전달합니다. 외부 AI API를 쓰지 않아 AI 비용은 0원입니다.</a:t>
             </a:r>
           </a:p>
         </p:txBody>
@@ -788,7 +808,32 @@
           <a:lstStyle/>
           <a:p>
             <a:r>
-              <a:t>지금부터 시연하겠습니다. (1) 학과 입력에 '컴공'만 쳐도 컴퓨터공학전공이 나옵니다. (2) 알림은 녹화해 둔 영상으로 보여 드리겠습니다. (3) '나에게' 탭에서 내 학과 공지를 누르면 정리 카드가 열리고, 원문 버튼으로 학교 게시판에 바로 갑니다. (4) 교외 탭에서는 장학금·자격증을 '접수 예정', '접수중'으로 나눠 보고, 접수 시작순으로 정렬할 수 있습니다. (5) 캘린더에서 날짜를 누르면 그날 마감과 지금 접수중인 목록이 나옵니다. (오른쪽 위 '열기' 버튼 = 사이트)</a:t>
+              <a:t>[1:15-2:25 · 70초 · 휴대폰 화면으로 전환]</a:t>
+            </a:r>
+          </a:p>
+          <a:p>
+            <a:r>
+              <a:t>① (녹화 영상, 10초) 먼저 알림입니다. 내 학과 공지와 마감 알림이 이렇게 휴대폰에 옵니다.</a:t>
+            </a:r>
+          </a:p>
+          <a:p>
+            <a:r>
+              <a:t>② (마이페이지 → 테스트 알림 보내기) 지금 바로 한 번 보내 보겠습니다. … 이렇게 옵니다. 알림을 누르면 앱이 열립니다.</a:t>
+            </a:r>
+          </a:p>
+          <a:p>
+            <a:r>
+              <a:t>③ ('나에게' 탭 → 공지 하나) 내 학과 공지가 이유와 함께 모여 있고, 누르면 대상·기간·신청방법이 표로 정리돼 있습니다. 버튼 하나로 학교 원문으로 갑니다.</a:t>
+            </a:r>
+          </a:p>
+          <a:p>
+            <a:r>
+              <a:t>④ ('장학·공모·자격증' 탭 → '접수 예정' 칩 → 정렬 '접수 시작순') 교외 장학금과 자격증은 접수중·접수 예정으로 나눠 보고, 곧 열리는 순서로 볼 수 있습니다.</a:t>
+            </a:r>
+          </a:p>
+          <a:p>
+            <a:r>
+              <a:t>⑤ (캘린더 → 오늘) 오늘을 누르면 지금 신청할 수 있는 목록이 마감 가까운 순으로 나옵니다.</a:t>
             </a:r>
           </a:p>
         </p:txBody>
@@ -858,7 +903,12 @@
           <a:lstStyle/>
           <a:p>
             <a:r>
-              <a:t>기대 효과는 네 가지입니다. 흩어진 정보를 한 곳에서 보니 확인 시간이 줄고, 알림으로 마감을 덜 놓치고, 교외 장학·자격증까지 발견하고, 신입생도 선배 없이 같은 정보를 얻습니다. 앞으로는 첫째, 지금은 무료 서버라 대형 LLM을 못 올렸는데, LLM을 붙이면 대화로 알림 규칙을 만들 수 있습니다. 둘째, 첨부 HWP·PDF 글자는 이미 읽고 있어서, 다음 단계는 표 안의 날짜와 이미지 포스터 인식입니다. 셋째, 시간표·전자출결과 연결해 공강 시간에 할 일을 추천하는 하루 체크리스트로 넓힐 수 있습니다(학교 협조 필요). 넷째, 토익처럼 공식 API가 없는 시험은 직접 입력 일정으로 대응하고, 게시판 목록만 바꾸면 다른 대학에도 쓸 수 있습니다. 운영비가 0원이라 학생에게는 무료로, 대학·학과 단위 공식 알리미로 도입하는 모델을 생각하고 있습니다.</a:t>
+              <a:t>[2:25-2:50 · 25초 · 슬라이드로 복귀]</a:t>
+            </a:r>
+          </a:p>
+          <a:p>
+            <a:r>
+              <a:t>기대 효과는 흩어진 정보를 한 곳에서 보는 시간 단축, 마감 놓침 감소, 교외 기회 발견입니다. 앞으로는 LLM을 붙여 대화로 알림 규칙을 만들고, 첨부 속 표와 이미지 포스터까지 읽고, 시간표·출결과 연결한 하루 체크리스트로 넓히려 합니다.</a:t>
             </a:r>
           </a:p>
         </p:txBody>
@@ -928,7 +978,12 @@
           <a:lstStyle/>
           <a:p>
             <a:r>
-              <a:t>들어 주셔서 감사합니다. 화면의 QR로 바로 써 보실 수 있습니다. 질문 받겠습니다.</a:t>
+              <a:t>[2:50-3:00 · 10초]</a:t>
+            </a:r>
+          </a:p>
+          <a:p>
+            <a:r>
+              <a:t>화면의 QR로 지금 바로 써 보실 수 있습니다. 들어 주셔서 감사합니다.</a:t>
             </a:r>
           </a:p>
         </p:txBody>
